--- a/source/Instructor Progress Test 3 Grams/Instructor Progress Test 3 Grams.pptx
+++ b/source/Instructor Progress Test 3 Grams/Instructor Progress Test 3 Grams.pptx
@@ -3142,11 +3142,11 @@
       </p:sp>
       <p:sp>
         <p:nvSpPr>
-          <p:cNvPr id="3" name="Rounded Rectangle 2"/>
+          <p:cNvPr id="3" name="Rounded Rectangle 2">
+            <a:hlinkClick r:id="rId2"/>
+          </p:cNvPr>
           <p:cNvSpPr/>
-          <p:nvPr>
-            <a:hlinkClick r:id="rId2"/>
-          </p:nvPr>
+          <p:nvPr/>
         </p:nvSpPr>
         <p:spPr>
           <a:xfrm>
@@ -3228,11 +3228,11 @@
       </p:sp>
       <p:sp>
         <p:nvSpPr>
-          <p:cNvPr id="5" name="Rounded Rectangle 4"/>
+          <p:cNvPr id="5" name="Rounded Rectangle 4">
+            <a:hlinkClick r:id="rId4"/>
+          </p:cNvPr>
           <p:cNvSpPr/>
-          <p:nvPr>
-            <a:hlinkClick r:id="rId4"/>
-          </p:nvPr>
+          <p:nvPr/>
         </p:nvSpPr>
         <p:spPr>
           <a:xfrm>
@@ -3314,11 +3314,11 @@
       </p:sp>
       <p:sp>
         <p:nvSpPr>
-          <p:cNvPr id="7" name="Rounded Rectangle 6"/>
+          <p:cNvPr id="7" name="Rounded Rectangle 6">
+            <a:hlinkClick r:id="rId6"/>
+          </p:cNvPr>
           <p:cNvSpPr/>
-          <p:nvPr>
-            <a:hlinkClick r:id="rId6"/>
-          </p:nvPr>
+          <p:nvPr/>
         </p:nvSpPr>
         <p:spPr>
           <a:xfrm>
@@ -3416,11 +3416,11 @@
       </p:sp>
       <p:sp>
         <p:nvSpPr>
-          <p:cNvPr id="9" name="Rounded Rectangle 8"/>
+          <p:cNvPr id="9" name="Rounded Rectangle 8">
+            <a:hlinkClick r:id="rId10"/>
+          </p:cNvPr>
           <p:cNvSpPr/>
-          <p:nvPr>
-            <a:hlinkClick r:id="rId10"/>
-          </p:nvPr>
+          <p:nvPr/>
         </p:nvSpPr>
         <p:spPr>
           <a:xfrm>
@@ -3510,11 +3510,11 @@
       </p:sp>
       <p:sp>
         <p:nvSpPr>
-          <p:cNvPr id="11" name="Rounded Rectangle 10"/>
+          <p:cNvPr id="11" name="Rounded Rectangle 10">
+            <a:hlinkClick r:id="rId13"/>
+          </p:cNvPr>
           <p:cNvSpPr/>
-          <p:nvPr>
-            <a:hlinkClick r:id="rId13"/>
-          </p:nvPr>
+          <p:nvPr/>
         </p:nvSpPr>
         <p:spPr>
           <a:xfrm>
@@ -3604,11 +3604,11 @@
       </p:sp>
       <p:sp>
         <p:nvSpPr>
-          <p:cNvPr id="13" name="Rounded Rectangle 12"/>
+          <p:cNvPr id="13" name="Rounded Rectangle 12">
+            <a:hlinkClick r:id="rId16"/>
+          </p:cNvPr>
           <p:cNvSpPr/>
-          <p:nvPr>
-            <a:hlinkClick r:id="rId16"/>
-          </p:nvPr>
+          <p:nvPr/>
         </p:nvSpPr>
         <p:spPr>
           <a:xfrm>
@@ -3714,11 +3714,11 @@
       </p:sp>
       <p:sp>
         <p:nvSpPr>
-          <p:cNvPr id="15" name="Rounded Rectangle 14"/>
+          <p:cNvPr id="15" name="Rounded Rectangle 14">
+            <a:hlinkClick r:id="rId21"/>
+          </p:cNvPr>
           <p:cNvSpPr/>
-          <p:nvPr>
-            <a:hlinkClick r:id="rId21"/>
-          </p:nvPr>
+          <p:nvPr/>
         </p:nvSpPr>
         <p:spPr>
           <a:xfrm>
@@ -3816,11 +3816,11 @@
       </p:sp>
       <p:sp>
         <p:nvSpPr>
-          <p:cNvPr id="17" name="Rounded Rectangle 16"/>
+          <p:cNvPr id="17" name="Rounded Rectangle 16">
+            <a:hlinkClick r:id="rId25"/>
+          </p:cNvPr>
           <p:cNvSpPr/>
-          <p:nvPr>
-            <a:hlinkClick r:id="rId25"/>
-          </p:nvPr>
+          <p:nvPr/>
         </p:nvSpPr>
         <p:spPr>
           <a:xfrm>
@@ -3910,11 +3910,11 @@
       </p:sp>
       <p:sp>
         <p:nvSpPr>
-          <p:cNvPr id="19" name="Rounded Rectangle 18"/>
+          <p:cNvPr id="19" name="Rounded Rectangle 18">
+            <a:hlinkClick r:id="rId28"/>
+          </p:cNvPr>
           <p:cNvSpPr/>
-          <p:nvPr>
-            <a:hlinkClick r:id="rId28"/>
-          </p:nvPr>
+          <p:nvPr/>
         </p:nvSpPr>
         <p:spPr>
           <a:xfrm>
@@ -3996,11 +3996,11 @@
       </p:sp>
       <p:sp>
         <p:nvSpPr>
-          <p:cNvPr id="21" name="Rounded Rectangle 20"/>
+          <p:cNvPr id="21" name="Rounded Rectangle 20">
+            <a:hlinkClick r:id="rId30"/>
+          </p:cNvPr>
           <p:cNvSpPr/>
-          <p:nvPr>
-            <a:hlinkClick r:id="rId30"/>
-          </p:nvPr>
+          <p:nvPr/>
         </p:nvSpPr>
         <p:spPr>
           <a:xfrm>
@@ -4106,11 +4106,11 @@
       </p:sp>
       <p:sp>
         <p:nvSpPr>
-          <p:cNvPr id="23" name="Rounded Rectangle 22"/>
+          <p:cNvPr id="23" name="Rounded Rectangle 22">
+            <a:hlinkClick r:id="rId35"/>
+          </p:cNvPr>
           <p:cNvSpPr/>
-          <p:nvPr>
-            <a:hlinkClick r:id="rId35"/>
-          </p:nvPr>
+          <p:nvPr/>
         </p:nvSpPr>
         <p:spPr>
           <a:xfrm>
@@ -4192,11 +4192,11 @@
       </p:sp>
       <p:sp>
         <p:nvSpPr>
-          <p:cNvPr id="25" name="Rounded Rectangle 24"/>
+          <p:cNvPr id="25" name="Rounded Rectangle 24">
+            <a:hlinkClick r:id="rId37"/>
+          </p:cNvPr>
           <p:cNvSpPr/>
-          <p:nvPr>
-            <a:hlinkClick r:id="rId37"/>
-          </p:nvPr>
+          <p:nvPr/>
         </p:nvSpPr>
         <p:spPr>
           <a:xfrm>
@@ -4302,11 +4302,11 @@
       </p:sp>
       <p:sp>
         <p:nvSpPr>
-          <p:cNvPr id="27" name="Rounded Rectangle 26"/>
+          <p:cNvPr id="27" name="Rounded Rectangle 26">
+            <a:hlinkClick r:id="rId42"/>
+          </p:cNvPr>
           <p:cNvSpPr/>
-          <p:nvPr>
-            <a:hlinkClick r:id="rId42"/>
-          </p:nvPr>
+          <p:nvPr/>
         </p:nvSpPr>
         <p:spPr>
           <a:xfrm>
@@ -4412,11 +4412,11 @@
       </p:sp>
       <p:sp>
         <p:nvSpPr>
-          <p:cNvPr id="29" name="Rounded Rectangle 28"/>
+          <p:cNvPr id="29" name="Rounded Rectangle 28">
+            <a:hlinkClick r:id="rId47"/>
+          </p:cNvPr>
           <p:cNvSpPr/>
-          <p:nvPr>
-            <a:hlinkClick r:id="rId47"/>
-          </p:nvPr>
+          <p:nvPr/>
         </p:nvSpPr>
         <p:spPr>
           <a:xfrm>
@@ -4522,11 +4522,11 @@
       </p:sp>
       <p:sp>
         <p:nvSpPr>
-          <p:cNvPr id="31" name="Rounded Rectangle 30"/>
+          <p:cNvPr id="31" name="Rounded Rectangle 30">
+            <a:hlinkClick r:id="rId52"/>
+          </p:cNvPr>
           <p:cNvSpPr/>
-          <p:nvPr>
-            <a:hlinkClick r:id="rId52"/>
-          </p:nvPr>
+          <p:nvPr/>
         </p:nvSpPr>
         <p:spPr>
           <a:xfrm>
@@ -4685,11 +4685,11 @@
       </p:sp>
       <p:sp>
         <p:nvSpPr>
-          <p:cNvPr id="3" name="Rounded Rectangle 2"/>
+          <p:cNvPr id="3" name="Rounded Rectangle 2">
+            <a:hlinkClick r:id="rId2"/>
+          </p:cNvPr>
           <p:cNvSpPr/>
-          <p:nvPr>
-            <a:hlinkClick r:id="rId2"/>
-          </p:nvPr>
+          <p:nvPr/>
         </p:nvSpPr>
         <p:spPr>
           <a:xfrm>
@@ -4795,11 +4795,11 @@
       </p:sp>
       <p:sp>
         <p:nvSpPr>
-          <p:cNvPr id="5" name="Rounded Rectangle 4"/>
+          <p:cNvPr id="5" name="Rounded Rectangle 4">
+            <a:hlinkClick r:id="rId7"/>
+          </p:cNvPr>
           <p:cNvSpPr/>
-          <p:nvPr>
-            <a:hlinkClick r:id="rId7"/>
-          </p:nvPr>
+          <p:nvPr/>
         </p:nvSpPr>
         <p:spPr>
           <a:xfrm>
@@ -4889,11 +4889,11 @@
       </p:sp>
       <p:sp>
         <p:nvSpPr>
-          <p:cNvPr id="7" name="Rounded Rectangle 6"/>
+          <p:cNvPr id="7" name="Rounded Rectangle 6">
+            <a:hlinkClick r:id="rId10"/>
+          </p:cNvPr>
           <p:cNvSpPr/>
-          <p:nvPr>
-            <a:hlinkClick r:id="rId10"/>
-          </p:nvPr>
+          <p:nvPr/>
         </p:nvSpPr>
         <p:spPr>
           <a:xfrm>
@@ -4999,11 +4999,11 @@
       </p:sp>
       <p:sp>
         <p:nvSpPr>
-          <p:cNvPr id="9" name="Rounded Rectangle 8"/>
+          <p:cNvPr id="9" name="Rounded Rectangle 8">
+            <a:hlinkClick r:id="rId15"/>
+          </p:cNvPr>
           <p:cNvSpPr/>
-          <p:nvPr>
-            <a:hlinkClick r:id="rId15"/>
-          </p:nvPr>
+          <p:nvPr/>
         </p:nvSpPr>
         <p:spPr>
           <a:xfrm>
@@ -5085,11 +5085,11 @@
       </p:sp>
       <p:sp>
         <p:nvSpPr>
-          <p:cNvPr id="11" name="Rounded Rectangle 10"/>
+          <p:cNvPr id="11" name="Rounded Rectangle 10">
+            <a:hlinkClick r:id="rId17"/>
+          </p:cNvPr>
           <p:cNvSpPr/>
-          <p:nvPr>
-            <a:hlinkClick r:id="rId17"/>
-          </p:nvPr>
+          <p:nvPr/>
         </p:nvSpPr>
         <p:spPr>
           <a:xfrm>
@@ -5171,11 +5171,11 @@
       </p:sp>
       <p:sp>
         <p:nvSpPr>
-          <p:cNvPr id="13" name="Rounded Rectangle 12"/>
+          <p:cNvPr id="13" name="Rounded Rectangle 12">
+            <a:hlinkClick r:id="rId19"/>
+          </p:cNvPr>
           <p:cNvSpPr/>
-          <p:nvPr>
-            <a:hlinkClick r:id="rId19"/>
-          </p:nvPr>
+          <p:nvPr/>
         </p:nvSpPr>
         <p:spPr>
           <a:xfrm>
@@ -5281,11 +5281,11 @@
       </p:sp>
       <p:sp>
         <p:nvSpPr>
-          <p:cNvPr id="15" name="Rounded Rectangle 14"/>
+          <p:cNvPr id="15" name="Rounded Rectangle 14">
+            <a:hlinkClick r:id="rId24"/>
+          </p:cNvPr>
           <p:cNvSpPr/>
-          <p:nvPr>
-            <a:hlinkClick r:id="rId24"/>
-          </p:nvPr>
+          <p:nvPr/>
         </p:nvSpPr>
         <p:spPr>
           <a:xfrm>
@@ -5375,11 +5375,11 @@
       </p:sp>
       <p:sp>
         <p:nvSpPr>
-          <p:cNvPr id="17" name="Rounded Rectangle 16"/>
+          <p:cNvPr id="17" name="Rounded Rectangle 16">
+            <a:hlinkClick r:id="rId27"/>
+          </p:cNvPr>
           <p:cNvSpPr/>
-          <p:nvPr>
-            <a:hlinkClick r:id="rId27"/>
-          </p:nvPr>
+          <p:nvPr/>
         </p:nvSpPr>
         <p:spPr>
           <a:xfrm>
@@ -5469,11 +5469,11 @@
       </p:sp>
       <p:sp>
         <p:nvSpPr>
-          <p:cNvPr id="19" name="Rounded Rectangle 18"/>
+          <p:cNvPr id="19" name="Rounded Rectangle 18">
+            <a:hlinkClick r:id="rId30"/>
+          </p:cNvPr>
           <p:cNvSpPr/>
-          <p:nvPr>
-            <a:hlinkClick r:id="rId30"/>
-          </p:nvPr>
+          <p:nvPr/>
         </p:nvSpPr>
         <p:spPr>
           <a:xfrm>
@@ -5571,11 +5571,11 @@
       </p:sp>
       <p:sp>
         <p:nvSpPr>
-          <p:cNvPr id="21" name="Rounded Rectangle 20"/>
+          <p:cNvPr id="21" name="Rounded Rectangle 20">
+            <a:hlinkClick r:id="rId34"/>
+          </p:cNvPr>
           <p:cNvSpPr/>
-          <p:nvPr>
-            <a:hlinkClick r:id="rId34"/>
-          </p:nvPr>
+          <p:nvPr/>
         </p:nvSpPr>
         <p:spPr>
           <a:xfrm>
@@ -5681,11 +5681,11 @@
       </p:sp>
       <p:sp>
         <p:nvSpPr>
-          <p:cNvPr id="23" name="Rounded Rectangle 22"/>
+          <p:cNvPr id="23" name="Rounded Rectangle 22">
+            <a:hlinkClick r:id="rId39"/>
+          </p:cNvPr>
           <p:cNvSpPr/>
-          <p:nvPr>
-            <a:hlinkClick r:id="rId39"/>
-          </p:nvPr>
+          <p:nvPr/>
         </p:nvSpPr>
         <p:spPr>
           <a:xfrm>
@@ -5767,11 +5767,11 @@
       </p:sp>
       <p:sp>
         <p:nvSpPr>
-          <p:cNvPr id="25" name="Rounded Rectangle 24"/>
+          <p:cNvPr id="25" name="Rounded Rectangle 24">
+            <a:hlinkClick r:id="rId41"/>
+          </p:cNvPr>
           <p:cNvSpPr/>
-          <p:nvPr>
-            <a:hlinkClick r:id="rId41"/>
-          </p:nvPr>
+          <p:nvPr/>
         </p:nvSpPr>
         <p:spPr>
           <a:xfrm>
@@ -5853,11 +5853,11 @@
       </p:sp>
       <p:sp>
         <p:nvSpPr>
-          <p:cNvPr id="27" name="Rounded Rectangle 26"/>
+          <p:cNvPr id="27" name="Rounded Rectangle 26">
+            <a:hlinkClick r:id="rId43"/>
+          </p:cNvPr>
           <p:cNvSpPr/>
-          <p:nvPr>
-            <a:hlinkClick r:id="rId43"/>
-          </p:nvPr>
+          <p:nvPr/>
         </p:nvSpPr>
         <p:spPr>
           <a:xfrm>
@@ -5939,11 +5939,11 @@
       </p:sp>
       <p:sp>
         <p:nvSpPr>
-          <p:cNvPr id="29" name="Rounded Rectangle 28"/>
+          <p:cNvPr id="29" name="Rounded Rectangle 28">
+            <a:hlinkClick r:id="rId45"/>
+          </p:cNvPr>
           <p:cNvSpPr/>
-          <p:nvPr>
-            <a:hlinkClick r:id="rId45"/>
-          </p:nvPr>
+          <p:nvPr/>
         </p:nvSpPr>
         <p:spPr>
           <a:xfrm>
@@ -6049,11 +6049,11 @@
       </p:sp>
       <p:sp>
         <p:nvSpPr>
-          <p:cNvPr id="31" name="Rounded Rectangle 30"/>
+          <p:cNvPr id="31" name="Rounded Rectangle 30">
+            <a:hlinkClick r:id="rId50"/>
+          </p:cNvPr>
           <p:cNvSpPr/>
-          <p:nvPr>
-            <a:hlinkClick r:id="rId50"/>
-          </p:nvPr>
+          <p:nvPr/>
         </p:nvSpPr>
         <p:spPr>
           <a:xfrm>

--- a/source/Instructor Progress Test 3 Grams/Instructor Progress Test 3 Grams.pptx
+++ b/source/Instructor Progress Test 3 Grams/Instructor Progress Test 3 Grams.pptx
@@ -7,6 +7,8 @@
   <p:sldIdLst>
     <p:sldId id="256" r:id="rId7"/>
     <p:sldId id="257" r:id="rId8"/>
+    <p:sldId id="258" r:id="rId9"/>
+    <p:sldId id="259" r:id="rId10"/>
   </p:sldIdLst>
   <p:sldSz cx="12188952" cy="6858000" type="screen4x3"/>
   <p:notesSz cx="6858000" cy="9144000"/>
@@ -3091,120 +3093,48 @@
       <p:grpSpPr/>
       <p:sp>
         <p:nvSpPr>
-          <p:cNvPr id="2" name="Rectangle 1"/>
-          <p:cNvSpPr/>
+          <p:cNvPr id="2" name="TextBox 1"/>
+          <p:cNvSpPr txBox="1"/>
           <p:nvPr/>
         </p:nvSpPr>
         <p:spPr>
           <a:xfrm>
-            <a:off x="0" y="0"/>
-            <a:ext cx="12188952" cy="548640"/>
+            <a:off x="914400" y="2377440"/>
+            <a:ext cx="10360152" cy="1280160"/>
           </a:xfrm>
           <a:prstGeom prst="rect">
             <a:avLst/>
           </a:prstGeom>
-          <a:solidFill>
-            <a:srgbClr val="1F3A5F"/>
-          </a:solidFill>
-          <a:ln>
-            <a:noFill/>
-          </a:ln>
-        </p:spPr>
-        <p:style>
-          <a:lnRef idx="1">
-            <a:schemeClr val="accent1"/>
-          </a:lnRef>
-          <a:fillRef idx="3">
-            <a:schemeClr val="accent1"/>
-          </a:fillRef>
-          <a:effectRef idx="2">
-            <a:schemeClr val="accent1"/>
-          </a:effectRef>
-          <a:fontRef idx="minor">
-            <a:schemeClr val="lt1"/>
-          </a:fontRef>
-        </p:style>
-        <p:txBody>
-          <a:bodyPr rtlCol="0" anchor="ctr" lIns="182880" rIns="182880"/>
+          <a:noFill/>
+        </p:spPr>
+        <p:txBody>
+          <a:bodyPr wrap="square">
+            <a:spAutoFit/>
+          </a:bodyPr>
           <a:lstStyle/>
           <a:p>
             <a:pPr algn="ctr"/>
             <a:r>
-              <a:rPr sz="2000" b="1">
-                <a:solidFill>
-                  <a:srgbClr val="FFFFFF"/>
-                </a:solidFill>
-              </a:rPr>
-              <a:t>Instructor Progress Test 3 Grams — Page 1 of 2</a:t>
-            </a:r>
-          </a:p>
-        </p:txBody>
-      </p:sp>
-      <p:sp>
-        <p:nvSpPr>
-          <p:cNvPr id="3" name="Rounded Rectangle 2"/>
-          <p:cNvSpPr/>
-          <p:nvPr>
-            <a:hlinkClick r:id="rId2"/>
-          </p:nvPr>
-        </p:nvSpPr>
-        <p:spPr>
-          <a:xfrm>
-            <a:off x="365760" y="731520"/>
-            <a:ext cx="2200046" cy="365760"/>
-          </a:xfrm>
-          <a:prstGeom prst="roundRect">
-            <a:avLst/>
-          </a:prstGeom>
-          <a:solidFill>
-            <a:srgbClr val="E8EEF7"/>
-          </a:solidFill>
-          <a:ln>
-            <a:solidFill>
-              <a:srgbClr val="1F3A5F"/>
-            </a:solidFill>
-          </a:ln>
-        </p:spPr>
-        <p:style>
-          <a:lnRef idx="1">
-            <a:schemeClr val="accent1"/>
-          </a:lnRef>
-          <a:fillRef idx="3">
-            <a:schemeClr val="accent1"/>
-          </a:fillRef>
-          <a:effectRef idx="2">
-            <a:schemeClr val="accent1"/>
-          </a:effectRef>
-          <a:fontRef idx="minor">
-            <a:schemeClr val="lt1"/>
-          </a:fontRef>
-        </p:style>
-        <p:txBody>
-          <a:bodyPr rtlCol="0" anchor="ctr" lIns="45720" rIns="45720"/>
-          <a:lstStyle/>
-          <a:p>
-            <a:pPr algn="ctr"/>
-            <a:r>
-              <a:rPr sz="900">
+              <a:rPr sz="4000" b="1">
                 <a:solidFill>
                   <a:srgbClr val="1F3A5F"/>
                 </a:solidFill>
               </a:rPr>
-              <a:t>Gram 1: FR Millennium Falcon, Category 3, Mustafar</a:t>
-            </a:r>
-          </a:p>
-        </p:txBody>
-      </p:sp>
-      <p:sp>
-        <p:nvSpPr>
-          <p:cNvPr id="4" name="TextBox 3"/>
+              <a:t>Welcome to Instructor Progress Test 3 Grams</a:t>
+            </a:r>
+          </a:p>
+        </p:txBody>
+      </p:sp>
+      <p:sp>
+        <p:nvSpPr>
+          <p:cNvPr id="3" name="TextBox 2"/>
           <p:cNvSpPr txBox="1"/>
           <p:nvPr/>
         </p:nvSpPr>
         <p:spPr>
           <a:xfrm>
-            <a:off x="365760" y="1115568"/>
-            <a:ext cx="2200046" cy="1447800"/>
+            <a:off x="914400" y="3840480"/>
+            <a:ext cx="10360152" cy="731520"/>
           </a:xfrm>
           <a:prstGeom prst="rect">
             <a:avLst/>
@@ -3212,1404 +3142,19 @@
           <a:noFill/>
         </p:spPr>
         <p:txBody>
-          <a:bodyPr wrap="square">
+          <a:bodyPr wrap="none">
             <a:spAutoFit/>
           </a:bodyPr>
           <a:lstStyle/>
           <a:p>
-            <a:r>
-              <a:rPr sz="800">
-                <a:hlinkClick r:id="rId3"/>
-              </a:rPr>
-              <a:t>Lofar 1</a:t>
-            </a:r>
-          </a:p>
-        </p:txBody>
-      </p:sp>
-      <p:sp>
-        <p:nvSpPr>
-          <p:cNvPr id="5" name="Rounded Rectangle 4"/>
-          <p:cNvSpPr/>
-          <p:nvPr>
-            <a:hlinkClick r:id="rId4"/>
-          </p:nvPr>
-        </p:nvSpPr>
-        <p:spPr>
-          <a:xfrm>
-            <a:off x="2657246" y="731520"/>
-            <a:ext cx="2200046" cy="365760"/>
-          </a:xfrm>
-          <a:prstGeom prst="roundRect">
-            <a:avLst/>
-          </a:prstGeom>
-          <a:solidFill>
-            <a:srgbClr val="E8EEF7"/>
-          </a:solidFill>
-          <a:ln>
-            <a:solidFill>
-              <a:srgbClr val="1F3A5F"/>
-            </a:solidFill>
-          </a:ln>
-        </p:spPr>
-        <p:style>
-          <a:lnRef idx="1">
-            <a:schemeClr val="accent1"/>
-          </a:lnRef>
-          <a:fillRef idx="3">
-            <a:schemeClr val="accent1"/>
-          </a:fillRef>
-          <a:effectRef idx="2">
-            <a:schemeClr val="accent1"/>
-          </a:effectRef>
-          <a:fontRef idx="minor">
-            <a:schemeClr val="lt1"/>
-          </a:fontRef>
-        </p:style>
-        <p:txBody>
-          <a:bodyPr rtlCol="0" anchor="ctr" lIns="45720" rIns="45720"/>
-          <a:lstStyle/>
-          <a:p>
             <a:pPr algn="ctr"/>
             <a:r>
-              <a:rPr sz="900">
+              <a:rPr sz="2400">
                 <a:solidFill>
                   <a:srgbClr val="1F3A5F"/>
                 </a:solidFill>
               </a:rPr>
-              <a:t>Gram 2: X-wing contact bearing 140, codename Endor</a:t>
-            </a:r>
-          </a:p>
-        </p:txBody>
-      </p:sp>
-      <p:sp>
-        <p:nvSpPr>
-          <p:cNvPr id="6" name="TextBox 5"/>
-          <p:cNvSpPr txBox="1"/>
-          <p:nvPr/>
-        </p:nvSpPr>
-        <p:spPr>
-          <a:xfrm>
-            <a:off x="2657246" y="1115568"/>
-            <a:ext cx="2200046" cy="1447800"/>
-          </a:xfrm>
-          <a:prstGeom prst="rect">
-            <a:avLst/>
-          </a:prstGeom>
-          <a:noFill/>
-        </p:spPr>
-        <p:txBody>
-          <a:bodyPr wrap="square">
-            <a:spAutoFit/>
-          </a:bodyPr>
-          <a:lstStyle/>
-          <a:p>
-            <a:r>
-              <a:rPr sz="800">
-                <a:hlinkClick r:id="rId5"/>
-              </a:rPr>
-              <a:t>Lofar 1</a:t>
-            </a:r>
-          </a:p>
-        </p:txBody>
-      </p:sp>
-      <p:sp>
-        <p:nvSpPr>
-          <p:cNvPr id="7" name="Rounded Rectangle 6"/>
-          <p:cNvSpPr/>
-          <p:nvPr>
-            <a:hlinkClick r:id="rId6"/>
-          </p:nvPr>
-        </p:nvSpPr>
-        <p:spPr>
-          <a:xfrm>
-            <a:off x="4948732" y="731520"/>
-            <a:ext cx="2200046" cy="365760"/>
-          </a:xfrm>
-          <a:prstGeom prst="roundRect">
-            <a:avLst/>
-          </a:prstGeom>
-          <a:solidFill>
-            <a:srgbClr val="E8EEF7"/>
-          </a:solidFill>
-          <a:ln>
-            <a:solidFill>
-              <a:srgbClr val="1F3A5F"/>
-            </a:solidFill>
-          </a:ln>
-        </p:spPr>
-        <p:style>
-          <a:lnRef idx="1">
-            <a:schemeClr val="accent1"/>
-          </a:lnRef>
-          <a:fillRef idx="3">
-            <a:schemeClr val="accent1"/>
-          </a:fillRef>
-          <a:effectRef idx="2">
-            <a:schemeClr val="accent1"/>
-          </a:effectRef>
-          <a:fontRef idx="minor">
-            <a:schemeClr val="lt1"/>
-          </a:fontRef>
-        </p:style>
-        <p:txBody>
-          <a:bodyPr rtlCol="0" anchor="ctr" lIns="45720" rIns="45720"/>
-          <a:lstStyle/>
-          <a:p>
-            <a:pPr algn="ctr"/>
-            <a:r>
-              <a:rPr sz="900">
-                <a:solidFill>
-                  <a:srgbClr val="1F3A5F"/>
-                </a:solidFill>
-              </a:rPr>
-              <a:t>Gram 4: FR Rebel One, Category 2, Naboo</a:t>
-            </a:r>
-          </a:p>
-        </p:txBody>
-      </p:sp>
-      <p:sp>
-        <p:nvSpPr>
-          <p:cNvPr id="8" name="TextBox 7"/>
-          <p:cNvSpPr txBox="1"/>
-          <p:nvPr/>
-        </p:nvSpPr>
-        <p:spPr>
-          <a:xfrm>
-            <a:off x="4948732" y="1115568"/>
-            <a:ext cx="2200046" cy="1447800"/>
-          </a:xfrm>
-          <a:prstGeom prst="rect">
-            <a:avLst/>
-          </a:prstGeom>
-          <a:noFill/>
-        </p:spPr>
-        <p:txBody>
-          <a:bodyPr wrap="square">
-            <a:spAutoFit/>
-          </a:bodyPr>
-          <a:lstStyle/>
-          <a:p>
-            <a:r>
-              <a:rPr sz="800">
-                <a:hlinkClick r:id="rId7"/>
-              </a:rPr>
-              <a:t>Lofar 1</a:t>
-            </a:r>
-          </a:p>
-          <a:p>
-            <a:r>
-              <a:rPr sz="800">
-                <a:hlinkClick r:id="rId8"/>
-              </a:rPr>
-              <a:t>Lofar 2</a:t>
-            </a:r>
-          </a:p>
-          <a:p>
-            <a:r>
-              <a:rPr sz="800">
-                <a:hlinkClick r:id="rId9"/>
-              </a:rPr>
-              <a:t>Lofar 3</a:t>
-            </a:r>
-          </a:p>
-        </p:txBody>
-      </p:sp>
-      <p:sp>
-        <p:nvSpPr>
-          <p:cNvPr id="9" name="Rounded Rectangle 8"/>
-          <p:cNvSpPr/>
-          <p:nvPr>
-            <a:hlinkClick r:id="rId10"/>
-          </p:nvPr>
-        </p:nvSpPr>
-        <p:spPr>
-          <a:xfrm>
-            <a:off x="7240219" y="731520"/>
-            <a:ext cx="2200046" cy="365760"/>
-          </a:xfrm>
-          <a:prstGeom prst="roundRect">
-            <a:avLst/>
-          </a:prstGeom>
-          <a:solidFill>
-            <a:srgbClr val="E8EEF7"/>
-          </a:solidFill>
-          <a:ln>
-            <a:solidFill>
-              <a:srgbClr val="1F3A5F"/>
-            </a:solidFill>
-          </a:ln>
-        </p:spPr>
-        <p:style>
-          <a:lnRef idx="1">
-            <a:schemeClr val="accent1"/>
-          </a:lnRef>
-          <a:fillRef idx="3">
-            <a:schemeClr val="accent1"/>
-          </a:fillRef>
-          <a:effectRef idx="2">
-            <a:schemeClr val="accent1"/>
-          </a:effectRef>
-          <a:fontRef idx="minor">
-            <a:schemeClr val="lt1"/>
-          </a:fontRef>
-        </p:style>
-        <p:txBody>
-          <a:bodyPr rtlCol="0" anchor="ctr" lIns="45720" rIns="45720"/>
-          <a:lstStyle/>
-          <a:p>
-            <a:pPr algn="ctr"/>
-            <a:r>
-              <a:rPr sz="900">
-                <a:solidFill>
-                  <a:srgbClr val="1F3A5F"/>
-                </a:solidFill>
-              </a:rPr>
-              <a:t>Gram 6: FR Outrider, Category 3, Trill</a:t>
-            </a:r>
-          </a:p>
-        </p:txBody>
-      </p:sp>
-      <p:sp>
-        <p:nvSpPr>
-          <p:cNvPr id="10" name="TextBox 9"/>
-          <p:cNvSpPr txBox="1"/>
-          <p:nvPr/>
-        </p:nvSpPr>
-        <p:spPr>
-          <a:xfrm>
-            <a:off x="7240219" y="1115568"/>
-            <a:ext cx="2200046" cy="1447800"/>
-          </a:xfrm>
-          <a:prstGeom prst="rect">
-            <a:avLst/>
-          </a:prstGeom>
-          <a:noFill/>
-        </p:spPr>
-        <p:txBody>
-          <a:bodyPr wrap="square">
-            <a:spAutoFit/>
-          </a:bodyPr>
-          <a:lstStyle/>
-          <a:p>
-            <a:r>
-              <a:rPr sz="800">
-                <a:hlinkClick r:id="rId11"/>
-              </a:rPr>
-              <a:t>Lofar 1</a:t>
-            </a:r>
-          </a:p>
-          <a:p>
-            <a:r>
-              <a:rPr sz="800">
-                <a:hlinkClick r:id="rId12"/>
-              </a:rPr>
-              <a:t>Lofar 2</a:t>
-            </a:r>
-          </a:p>
-        </p:txBody>
-      </p:sp>
-      <p:sp>
-        <p:nvSpPr>
-          <p:cNvPr id="11" name="Rounded Rectangle 10"/>
-          <p:cNvSpPr/>
-          <p:nvPr>
-            <a:hlinkClick r:id="rId13"/>
-          </p:nvPr>
-        </p:nvSpPr>
-        <p:spPr>
-          <a:xfrm>
-            <a:off x="9531705" y="731520"/>
-            <a:ext cx="2200046" cy="365760"/>
-          </a:xfrm>
-          <a:prstGeom prst="roundRect">
-            <a:avLst/>
-          </a:prstGeom>
-          <a:solidFill>
-            <a:srgbClr val="E8EEF7"/>
-          </a:solidFill>
-          <a:ln>
-            <a:solidFill>
-              <a:srgbClr val="1F3A5F"/>
-            </a:solidFill>
-          </a:ln>
-        </p:spPr>
-        <p:style>
-          <a:lnRef idx="1">
-            <a:schemeClr val="accent1"/>
-          </a:lnRef>
-          <a:fillRef idx="3">
-            <a:schemeClr val="accent1"/>
-          </a:fillRef>
-          <a:effectRef idx="2">
-            <a:schemeClr val="accent1"/>
-          </a:effectRef>
-          <a:fontRef idx="minor">
-            <a:schemeClr val="lt1"/>
-          </a:fontRef>
-        </p:style>
-        <p:txBody>
-          <a:bodyPr rtlCol="0" anchor="ctr" lIns="45720" rIns="45720"/>
-          <a:lstStyle/>
-          <a:p>
-            <a:pPr algn="ctr"/>
-            <a:r>
-              <a:rPr sz="900">
-                <a:solidFill>
-                  <a:srgbClr val="1F3A5F"/>
-                </a:solidFill>
-              </a:rPr>
-              <a:t>Gram 7: Imperial-class contact bearing 172, codename Betazed</a:t>
-            </a:r>
-          </a:p>
-        </p:txBody>
-      </p:sp>
-      <p:sp>
-        <p:nvSpPr>
-          <p:cNvPr id="12" name="TextBox 11"/>
-          <p:cNvSpPr txBox="1"/>
-          <p:nvPr/>
-        </p:nvSpPr>
-        <p:spPr>
-          <a:xfrm>
-            <a:off x="9531705" y="1115568"/>
-            <a:ext cx="2200046" cy="1447800"/>
-          </a:xfrm>
-          <a:prstGeom prst="rect">
-            <a:avLst/>
-          </a:prstGeom>
-          <a:noFill/>
-        </p:spPr>
-        <p:txBody>
-          <a:bodyPr wrap="square">
-            <a:spAutoFit/>
-          </a:bodyPr>
-          <a:lstStyle/>
-          <a:p>
-            <a:r>
-              <a:rPr sz="800">
-                <a:hlinkClick r:id="rId14"/>
-              </a:rPr>
-              <a:t>Lofar 1</a:t>
-            </a:r>
-          </a:p>
-          <a:p>
-            <a:r>
-              <a:rPr sz="800">
-                <a:hlinkClick r:id="rId15"/>
-              </a:rPr>
-              <a:t>Lofar 2</a:t>
-            </a:r>
-          </a:p>
-        </p:txBody>
-      </p:sp>
-      <p:sp>
-        <p:nvSpPr>
-          <p:cNvPr id="13" name="Rounded Rectangle 12"/>
-          <p:cNvSpPr/>
-          <p:nvPr>
-            <a:hlinkClick r:id="rId16"/>
-          </p:nvPr>
-        </p:nvSpPr>
-        <p:spPr>
-          <a:xfrm>
-            <a:off x="365760" y="2682240"/>
-            <a:ext cx="2200046" cy="365760"/>
-          </a:xfrm>
-          <a:prstGeom prst="roundRect">
-            <a:avLst/>
-          </a:prstGeom>
-          <a:solidFill>
-            <a:srgbClr val="E8EEF7"/>
-          </a:solidFill>
-          <a:ln>
-            <a:solidFill>
-              <a:srgbClr val="1F3A5F"/>
-            </a:solidFill>
-          </a:ln>
-        </p:spPr>
-        <p:style>
-          <a:lnRef idx="1">
-            <a:schemeClr val="accent1"/>
-          </a:lnRef>
-          <a:fillRef idx="3">
-            <a:schemeClr val="accent1"/>
-          </a:fillRef>
-          <a:effectRef idx="2">
-            <a:schemeClr val="accent1"/>
-          </a:effectRef>
-          <a:fontRef idx="minor">
-            <a:schemeClr val="lt1"/>
-          </a:fontRef>
-        </p:style>
-        <p:txBody>
-          <a:bodyPr rtlCol="0" anchor="ctr" lIns="45720" rIns="45720"/>
-          <a:lstStyle/>
-          <a:p>
-            <a:pPr algn="ctr"/>
-            <a:r>
-              <a:rPr sz="900">
-                <a:solidFill>
-                  <a:srgbClr val="1F3A5F"/>
-                </a:solidFill>
-              </a:rPr>
-              <a:t>Gram 8: FR Outrider, Category 1, Romulus</a:t>
-            </a:r>
-          </a:p>
-        </p:txBody>
-      </p:sp>
-      <p:sp>
-        <p:nvSpPr>
-          <p:cNvPr id="14" name="TextBox 13"/>
-          <p:cNvSpPr txBox="1"/>
-          <p:nvPr/>
-        </p:nvSpPr>
-        <p:spPr>
-          <a:xfrm>
-            <a:off x="365760" y="3066288"/>
-            <a:ext cx="2200046" cy="1447800"/>
-          </a:xfrm>
-          <a:prstGeom prst="rect">
-            <a:avLst/>
-          </a:prstGeom>
-          <a:noFill/>
-        </p:spPr>
-        <p:txBody>
-          <a:bodyPr wrap="square">
-            <a:spAutoFit/>
-          </a:bodyPr>
-          <a:lstStyle/>
-          <a:p>
-            <a:r>
-              <a:rPr sz="800">
-                <a:hlinkClick r:id="rId17"/>
-              </a:rPr>
-              <a:t>Lofar 1</a:t>
-            </a:r>
-          </a:p>
-          <a:p>
-            <a:r>
-              <a:rPr sz="800">
-                <a:hlinkClick r:id="rId18"/>
-              </a:rPr>
-              <a:t>Lofar 2</a:t>
-            </a:r>
-          </a:p>
-          <a:p>
-            <a:r>
-              <a:rPr sz="800">
-                <a:hlinkClick r:id="rId19"/>
-              </a:rPr>
-              <a:t>Lofar 3</a:t>
-            </a:r>
-          </a:p>
-          <a:p>
-            <a:r>
-              <a:rPr sz="800">
-                <a:hlinkClick r:id="rId20"/>
-              </a:rPr>
-              <a:t>Lofar 4</a:t>
-            </a:r>
-          </a:p>
-        </p:txBody>
-      </p:sp>
-      <p:sp>
-        <p:nvSpPr>
-          <p:cNvPr id="15" name="Rounded Rectangle 14"/>
-          <p:cNvSpPr/>
-          <p:nvPr>
-            <a:hlinkClick r:id="rId21"/>
-          </p:nvPr>
-        </p:nvSpPr>
-        <p:spPr>
-          <a:xfrm>
-            <a:off x="2657246" y="2682240"/>
-            <a:ext cx="2200046" cy="365760"/>
-          </a:xfrm>
-          <a:prstGeom prst="roundRect">
-            <a:avLst/>
-          </a:prstGeom>
-          <a:solidFill>
-            <a:srgbClr val="E8EEF7"/>
-          </a:solidFill>
-          <a:ln>
-            <a:solidFill>
-              <a:srgbClr val="1F3A5F"/>
-            </a:solidFill>
-          </a:ln>
-        </p:spPr>
-        <p:style>
-          <a:lnRef idx="1">
-            <a:schemeClr val="accent1"/>
-          </a:lnRef>
-          <a:fillRef idx="3">
-            <a:schemeClr val="accent1"/>
-          </a:fillRef>
-          <a:effectRef idx="2">
-            <a:schemeClr val="accent1"/>
-          </a:effectRef>
-          <a:fontRef idx="minor">
-            <a:schemeClr val="lt1"/>
-          </a:fontRef>
-        </p:style>
-        <p:txBody>
-          <a:bodyPr rtlCol="0" anchor="ctr" lIns="45720" rIns="45720"/>
-          <a:lstStyle/>
-          <a:p>
-            <a:pPr algn="ctr"/>
-            <a:r>
-              <a:rPr sz="900">
-                <a:solidFill>
-                  <a:srgbClr val="1F3A5F"/>
-                </a:solidFill>
-              </a:rPr>
-              <a:t>Gram 9: FR A-wing, Category 3, Tatooine</a:t>
-            </a:r>
-          </a:p>
-        </p:txBody>
-      </p:sp>
-      <p:sp>
-        <p:nvSpPr>
-          <p:cNvPr id="16" name="TextBox 15"/>
-          <p:cNvSpPr txBox="1"/>
-          <p:nvPr/>
-        </p:nvSpPr>
-        <p:spPr>
-          <a:xfrm>
-            <a:off x="2657246" y="3066288"/>
-            <a:ext cx="2200046" cy="1447800"/>
-          </a:xfrm>
-          <a:prstGeom prst="rect">
-            <a:avLst/>
-          </a:prstGeom>
-          <a:noFill/>
-        </p:spPr>
-        <p:txBody>
-          <a:bodyPr wrap="square">
-            <a:spAutoFit/>
-          </a:bodyPr>
-          <a:lstStyle/>
-          <a:p>
-            <a:r>
-              <a:rPr sz="800">
-                <a:hlinkClick r:id="rId22"/>
-              </a:rPr>
-              <a:t>Lofar 1</a:t>
-            </a:r>
-          </a:p>
-          <a:p>
-            <a:r>
-              <a:rPr sz="800">
-                <a:hlinkClick r:id="rId23"/>
-              </a:rPr>
-              <a:t>Lofar 2</a:t>
-            </a:r>
-          </a:p>
-          <a:p>
-            <a:r>
-              <a:rPr sz="800">
-                <a:hlinkClick r:id="rId24"/>
-              </a:rPr>
-              <a:t>Lofar 3</a:t>
-            </a:r>
-          </a:p>
-        </p:txBody>
-      </p:sp>
-      <p:sp>
-        <p:nvSpPr>
-          <p:cNvPr id="17" name="Rounded Rectangle 16"/>
-          <p:cNvSpPr/>
-          <p:nvPr>
-            <a:hlinkClick r:id="rId25"/>
-          </p:nvPr>
-        </p:nvSpPr>
-        <p:spPr>
-          <a:xfrm>
-            <a:off x="4948732" y="2682240"/>
-            <a:ext cx="2200046" cy="365760"/>
-          </a:xfrm>
-          <a:prstGeom prst="roundRect">
-            <a:avLst/>
-          </a:prstGeom>
-          <a:solidFill>
-            <a:srgbClr val="E8EEF7"/>
-          </a:solidFill>
-          <a:ln>
-            <a:solidFill>
-              <a:srgbClr val="1F3A5F"/>
-            </a:solidFill>
-          </a:ln>
-        </p:spPr>
-        <p:style>
-          <a:lnRef idx="1">
-            <a:schemeClr val="accent1"/>
-          </a:lnRef>
-          <a:fillRef idx="3">
-            <a:schemeClr val="accent1"/>
-          </a:fillRef>
-          <a:effectRef idx="2">
-            <a:schemeClr val="accent1"/>
-          </a:effectRef>
-          <a:fontRef idx="minor">
-            <a:schemeClr val="lt1"/>
-          </a:fontRef>
-        </p:style>
-        <p:txBody>
-          <a:bodyPr rtlCol="0" anchor="ctr" lIns="45720" rIns="45720"/>
-          <a:lstStyle/>
-          <a:p>
-            <a:pPr algn="ctr"/>
-            <a:r>
-              <a:rPr sz="900">
-                <a:solidFill>
-                  <a:srgbClr val="1F3A5F"/>
-                </a:solidFill>
-              </a:rPr>
-              <a:t>Gram 10: FR Cerritos, Category 4, Gandalf</a:t>
-            </a:r>
-          </a:p>
-        </p:txBody>
-      </p:sp>
-      <p:sp>
-        <p:nvSpPr>
-          <p:cNvPr id="18" name="TextBox 17"/>
-          <p:cNvSpPr txBox="1"/>
-          <p:nvPr/>
-        </p:nvSpPr>
-        <p:spPr>
-          <a:xfrm>
-            <a:off x="4948732" y="3066288"/>
-            <a:ext cx="2200046" cy="1447800"/>
-          </a:xfrm>
-          <a:prstGeom prst="rect">
-            <a:avLst/>
-          </a:prstGeom>
-          <a:noFill/>
-        </p:spPr>
-        <p:txBody>
-          <a:bodyPr wrap="square">
-            <a:spAutoFit/>
-          </a:bodyPr>
-          <a:lstStyle/>
-          <a:p>
-            <a:r>
-              <a:rPr sz="800">
-                <a:hlinkClick r:id="rId26"/>
-              </a:rPr>
-              <a:t>Lofar 1</a:t>
-            </a:r>
-          </a:p>
-          <a:p>
-            <a:r>
-              <a:rPr sz="800">
-                <a:hlinkClick r:id="rId27"/>
-              </a:rPr>
-              <a:t>Lofar 2</a:t>
-            </a:r>
-          </a:p>
-        </p:txBody>
-      </p:sp>
-      <p:sp>
-        <p:nvSpPr>
-          <p:cNvPr id="19" name="Rounded Rectangle 18"/>
-          <p:cNvSpPr/>
-          <p:nvPr>
-            <a:hlinkClick r:id="rId28"/>
-          </p:nvPr>
-        </p:nvSpPr>
-        <p:spPr>
-          <a:xfrm>
-            <a:off x="7240219" y="2682240"/>
-            <a:ext cx="2200046" cy="365760"/>
-          </a:xfrm>
-          <a:prstGeom prst="roundRect">
-            <a:avLst/>
-          </a:prstGeom>
-          <a:solidFill>
-            <a:srgbClr val="E8EEF7"/>
-          </a:solidFill>
-          <a:ln>
-            <a:solidFill>
-              <a:srgbClr val="1F3A5F"/>
-            </a:solidFill>
-          </a:ln>
-        </p:spPr>
-        <p:style>
-          <a:lnRef idx="1">
-            <a:schemeClr val="accent1"/>
-          </a:lnRef>
-          <a:fillRef idx="3">
-            <a:schemeClr val="accent1"/>
-          </a:fillRef>
-          <a:effectRef idx="2">
-            <a:schemeClr val="accent1"/>
-          </a:effectRef>
-          <a:fontRef idx="minor">
-            <a:schemeClr val="lt1"/>
-          </a:fontRef>
-        </p:style>
-        <p:txBody>
-          <a:bodyPr rtlCol="0" anchor="ctr" lIns="45720" rIns="45720"/>
-          <a:lstStyle/>
-          <a:p>
-            <a:pPr algn="ctr"/>
-            <a:r>
-              <a:rPr sz="900">
-                <a:solidFill>
-                  <a:srgbClr val="1F3A5F"/>
-                </a:solidFill>
-              </a:rPr>
-              <a:t>Gram 13: Corellian Corvette contact bearing 190, codename Caprica</a:t>
-            </a:r>
-          </a:p>
-        </p:txBody>
-      </p:sp>
-      <p:sp>
-        <p:nvSpPr>
-          <p:cNvPr id="20" name="TextBox 19"/>
-          <p:cNvSpPr txBox="1"/>
-          <p:nvPr/>
-        </p:nvSpPr>
-        <p:spPr>
-          <a:xfrm>
-            <a:off x="7240219" y="3066288"/>
-            <a:ext cx="2200046" cy="1447800"/>
-          </a:xfrm>
-          <a:prstGeom prst="rect">
-            <a:avLst/>
-          </a:prstGeom>
-          <a:noFill/>
-        </p:spPr>
-        <p:txBody>
-          <a:bodyPr wrap="square">
-            <a:spAutoFit/>
-          </a:bodyPr>
-          <a:lstStyle/>
-          <a:p>
-            <a:r>
-              <a:rPr sz="800">
-                <a:hlinkClick r:id="rId29"/>
-              </a:rPr>
-              <a:t>Lofar 1</a:t>
-            </a:r>
-          </a:p>
-        </p:txBody>
-      </p:sp>
-      <p:sp>
-        <p:nvSpPr>
-          <p:cNvPr id="21" name="Rounded Rectangle 20"/>
-          <p:cNvSpPr/>
-          <p:nvPr>
-            <a:hlinkClick r:id="rId30"/>
-          </p:nvPr>
-        </p:nvSpPr>
-        <p:spPr>
-          <a:xfrm>
-            <a:off x="9531705" y="2682240"/>
-            <a:ext cx="2200046" cy="365760"/>
-          </a:xfrm>
-          <a:prstGeom prst="roundRect">
-            <a:avLst/>
-          </a:prstGeom>
-          <a:solidFill>
-            <a:srgbClr val="E8EEF7"/>
-          </a:solidFill>
-          <a:ln>
-            <a:solidFill>
-              <a:srgbClr val="1F3A5F"/>
-            </a:solidFill>
-          </a:ln>
-        </p:spPr>
-        <p:style>
-          <a:lnRef idx="1">
-            <a:schemeClr val="accent1"/>
-          </a:lnRef>
-          <a:fillRef idx="3">
-            <a:schemeClr val="accent1"/>
-          </a:fillRef>
-          <a:effectRef idx="2">
-            <a:schemeClr val="accent1"/>
-          </a:effectRef>
-          <a:fontRef idx="minor">
-            <a:schemeClr val="lt1"/>
-          </a:fontRef>
-        </p:style>
-        <p:txBody>
-          <a:bodyPr rtlCol="0" anchor="ctr" lIns="45720" rIns="45720"/>
-          <a:lstStyle/>
-          <a:p>
-            <a:pPr algn="ctr"/>
-            <a:r>
-              <a:rPr sz="900">
-                <a:solidFill>
-                  <a:srgbClr val="1F3A5F"/>
-                </a:solidFill>
-              </a:rPr>
-              <a:t>Gram 14: FR Corellian Corvette, Category 1, Naboo</a:t>
-            </a:r>
-          </a:p>
-        </p:txBody>
-      </p:sp>
-      <p:sp>
-        <p:nvSpPr>
-          <p:cNvPr id="22" name="TextBox 21"/>
-          <p:cNvSpPr txBox="1"/>
-          <p:nvPr/>
-        </p:nvSpPr>
-        <p:spPr>
-          <a:xfrm>
-            <a:off x="9531705" y="3066288"/>
-            <a:ext cx="2200046" cy="1447800"/>
-          </a:xfrm>
-          <a:prstGeom prst="rect">
-            <a:avLst/>
-          </a:prstGeom>
-          <a:noFill/>
-        </p:spPr>
-        <p:txBody>
-          <a:bodyPr wrap="square">
-            <a:spAutoFit/>
-          </a:bodyPr>
-          <a:lstStyle/>
-          <a:p>
-            <a:r>
-              <a:rPr sz="800">
-                <a:hlinkClick r:id="rId31"/>
-              </a:rPr>
-              <a:t>Lofar 1</a:t>
-            </a:r>
-          </a:p>
-          <a:p>
-            <a:r>
-              <a:rPr sz="800">
-                <a:hlinkClick r:id="rId32"/>
-              </a:rPr>
-              <a:t>Lofar 2</a:t>
-            </a:r>
-          </a:p>
-          <a:p>
-            <a:r>
-              <a:rPr sz="800">
-                <a:hlinkClick r:id="rId33"/>
-              </a:rPr>
-              <a:t>Lofar 3</a:t>
-            </a:r>
-          </a:p>
-          <a:p>
-            <a:r>
-              <a:rPr sz="800">
-                <a:hlinkClick r:id="rId34"/>
-              </a:rPr>
-              <a:t>Lofar 4</a:t>
-            </a:r>
-          </a:p>
-        </p:txBody>
-      </p:sp>
-      <p:sp>
-        <p:nvSpPr>
-          <p:cNvPr id="23" name="Rounded Rectangle 22"/>
-          <p:cNvSpPr/>
-          <p:nvPr>
-            <a:hlinkClick r:id="rId35"/>
-          </p:nvPr>
-        </p:nvSpPr>
-        <p:spPr>
-          <a:xfrm>
-            <a:off x="365760" y="4632960"/>
-            <a:ext cx="2200046" cy="365760"/>
-          </a:xfrm>
-          <a:prstGeom prst="roundRect">
-            <a:avLst/>
-          </a:prstGeom>
-          <a:solidFill>
-            <a:srgbClr val="E8EEF7"/>
-          </a:solidFill>
-          <a:ln>
-            <a:solidFill>
-              <a:srgbClr val="1F3A5F"/>
-            </a:solidFill>
-          </a:ln>
-        </p:spPr>
-        <p:style>
-          <a:lnRef idx="1">
-            <a:schemeClr val="accent1"/>
-          </a:lnRef>
-          <a:fillRef idx="3">
-            <a:schemeClr val="accent1"/>
-          </a:fillRef>
-          <a:effectRef idx="2">
-            <a:schemeClr val="accent1"/>
-          </a:effectRef>
-          <a:fontRef idx="minor">
-            <a:schemeClr val="lt1"/>
-          </a:fontRef>
-        </p:style>
-        <p:txBody>
-          <a:bodyPr rtlCol="0" anchor="ctr" lIns="45720" rIns="45720"/>
-          <a:lstStyle/>
-          <a:p>
-            <a:pPr algn="ctr"/>
-            <a:r>
-              <a:rPr sz="900">
-                <a:solidFill>
-                  <a:srgbClr val="1F3A5F"/>
-                </a:solidFill>
-              </a:rPr>
-              <a:t>Gram 15: FR TIE Fighter, Category 1, Bajor</a:t>
-            </a:r>
-          </a:p>
-        </p:txBody>
-      </p:sp>
-      <p:sp>
-        <p:nvSpPr>
-          <p:cNvPr id="24" name="TextBox 23"/>
-          <p:cNvSpPr txBox="1"/>
-          <p:nvPr/>
-        </p:nvSpPr>
-        <p:spPr>
-          <a:xfrm>
-            <a:off x="365760" y="5017008"/>
-            <a:ext cx="2200046" cy="1447800"/>
-          </a:xfrm>
-          <a:prstGeom prst="rect">
-            <a:avLst/>
-          </a:prstGeom>
-          <a:noFill/>
-        </p:spPr>
-        <p:txBody>
-          <a:bodyPr wrap="square">
-            <a:spAutoFit/>
-          </a:bodyPr>
-          <a:lstStyle/>
-          <a:p>
-            <a:r>
-              <a:rPr sz="800">
-                <a:hlinkClick r:id="rId36"/>
-              </a:rPr>
-              <a:t>Lofar 1</a:t>
-            </a:r>
-          </a:p>
-        </p:txBody>
-      </p:sp>
-      <p:sp>
-        <p:nvSpPr>
-          <p:cNvPr id="25" name="Rounded Rectangle 24"/>
-          <p:cNvSpPr/>
-          <p:nvPr>
-            <a:hlinkClick r:id="rId37"/>
-          </p:nvPr>
-        </p:nvSpPr>
-        <p:spPr>
-          <a:xfrm>
-            <a:off x="2657246" y="4632960"/>
-            <a:ext cx="2200046" cy="365760"/>
-          </a:xfrm>
-          <a:prstGeom prst="roundRect">
-            <a:avLst/>
-          </a:prstGeom>
-          <a:solidFill>
-            <a:srgbClr val="E8EEF7"/>
-          </a:solidFill>
-          <a:ln>
-            <a:solidFill>
-              <a:srgbClr val="1F3A5F"/>
-            </a:solidFill>
-          </a:ln>
-        </p:spPr>
-        <p:style>
-          <a:lnRef idx="1">
-            <a:schemeClr val="accent1"/>
-          </a:lnRef>
-          <a:fillRef idx="3">
-            <a:schemeClr val="accent1"/>
-          </a:fillRef>
-          <a:effectRef idx="2">
-            <a:schemeClr val="accent1"/>
-          </a:effectRef>
-          <a:fontRef idx="minor">
-            <a:schemeClr val="lt1"/>
-          </a:fontRef>
-        </p:style>
-        <p:txBody>
-          <a:bodyPr rtlCol="0" anchor="ctr" lIns="45720" rIns="45720"/>
-          <a:lstStyle/>
-          <a:p>
-            <a:pPr algn="ctr"/>
-            <a:r>
-              <a:rPr sz="900">
-                <a:solidFill>
-                  <a:srgbClr val="1F3A5F"/>
-                </a:solidFill>
-              </a:rPr>
-              <a:t>Gram 17: Sovereign-class contact bearing 335, codename Yavin</a:t>
-            </a:r>
-          </a:p>
-        </p:txBody>
-      </p:sp>
-      <p:sp>
-        <p:nvSpPr>
-          <p:cNvPr id="26" name="TextBox 25"/>
-          <p:cNvSpPr txBox="1"/>
-          <p:nvPr/>
-        </p:nvSpPr>
-        <p:spPr>
-          <a:xfrm>
-            <a:off x="2657246" y="5017008"/>
-            <a:ext cx="2200046" cy="1447800"/>
-          </a:xfrm>
-          <a:prstGeom prst="rect">
-            <a:avLst/>
-          </a:prstGeom>
-          <a:noFill/>
-        </p:spPr>
-        <p:txBody>
-          <a:bodyPr wrap="square">
-            <a:spAutoFit/>
-          </a:bodyPr>
-          <a:lstStyle/>
-          <a:p>
-            <a:r>
-              <a:rPr sz="800">
-                <a:hlinkClick r:id="rId38"/>
-              </a:rPr>
-              <a:t>Lofar 1</a:t>
-            </a:r>
-          </a:p>
-          <a:p>
-            <a:r>
-              <a:rPr sz="800">
-                <a:hlinkClick r:id="rId39"/>
-              </a:rPr>
-              <a:t>Lofar 2</a:t>
-            </a:r>
-          </a:p>
-          <a:p>
-            <a:r>
-              <a:rPr sz="800">
-                <a:hlinkClick r:id="rId40"/>
-              </a:rPr>
-              <a:t>Lofar 3</a:t>
-            </a:r>
-          </a:p>
-          <a:p>
-            <a:r>
-              <a:rPr sz="800">
-                <a:hlinkClick r:id="rId41"/>
-              </a:rPr>
-              <a:t>Lofar 4</a:t>
-            </a:r>
-          </a:p>
-        </p:txBody>
-      </p:sp>
-      <p:sp>
-        <p:nvSpPr>
-          <p:cNvPr id="27" name="Rounded Rectangle 26"/>
-          <p:cNvSpPr/>
-          <p:nvPr>
-            <a:hlinkClick r:id="rId42"/>
-          </p:nvPr>
-        </p:nvSpPr>
-        <p:spPr>
-          <a:xfrm>
-            <a:off x="4948732" y="4632960"/>
-            <a:ext cx="2200046" cy="365760"/>
-          </a:xfrm>
-          <a:prstGeom prst="roundRect">
-            <a:avLst/>
-          </a:prstGeom>
-          <a:solidFill>
-            <a:srgbClr val="E8EEF7"/>
-          </a:solidFill>
-          <a:ln>
-            <a:solidFill>
-              <a:srgbClr val="1F3A5F"/>
-            </a:solidFill>
-          </a:ln>
-        </p:spPr>
-        <p:style>
-          <a:lnRef idx="1">
-            <a:schemeClr val="accent1"/>
-          </a:lnRef>
-          <a:fillRef idx="3">
-            <a:schemeClr val="accent1"/>
-          </a:fillRef>
-          <a:effectRef idx="2">
-            <a:schemeClr val="accent1"/>
-          </a:effectRef>
-          <a:fontRef idx="minor">
-            <a:schemeClr val="lt1"/>
-          </a:fontRef>
-        </p:style>
-        <p:txBody>
-          <a:bodyPr rtlCol="0" anchor="ctr" lIns="45720" rIns="45720"/>
-          <a:lstStyle/>
-          <a:p>
-            <a:pPr algn="ctr"/>
-            <a:r>
-              <a:rPr sz="900">
-                <a:solidFill>
-                  <a:srgbClr val="1F3A5F"/>
-                </a:solidFill>
-              </a:rPr>
-              <a:t>Gram 19: Lambda Shuttle contact bearing 244, codename Tatooine</a:t>
-            </a:r>
-          </a:p>
-        </p:txBody>
-      </p:sp>
-      <p:sp>
-        <p:nvSpPr>
-          <p:cNvPr id="28" name="TextBox 27"/>
-          <p:cNvSpPr txBox="1"/>
-          <p:nvPr/>
-        </p:nvSpPr>
-        <p:spPr>
-          <a:xfrm>
-            <a:off x="4948732" y="5017008"/>
-            <a:ext cx="2200046" cy="1447800"/>
-          </a:xfrm>
-          <a:prstGeom prst="rect">
-            <a:avLst/>
-          </a:prstGeom>
-          <a:noFill/>
-        </p:spPr>
-        <p:txBody>
-          <a:bodyPr wrap="square">
-            <a:spAutoFit/>
-          </a:bodyPr>
-          <a:lstStyle/>
-          <a:p>
-            <a:r>
-              <a:rPr sz="800">
-                <a:hlinkClick r:id="rId43"/>
-              </a:rPr>
-              <a:t>Lofar 1</a:t>
-            </a:r>
-          </a:p>
-          <a:p>
-            <a:r>
-              <a:rPr sz="800">
-                <a:hlinkClick r:id="rId44"/>
-              </a:rPr>
-              <a:t>Lofar 2</a:t>
-            </a:r>
-          </a:p>
-          <a:p>
-            <a:r>
-              <a:rPr sz="800">
-                <a:hlinkClick r:id="rId45"/>
-              </a:rPr>
-              <a:t>Lofar 3</a:t>
-            </a:r>
-          </a:p>
-          <a:p>
-            <a:r>
-              <a:rPr sz="800">
-                <a:hlinkClick r:id="rId46"/>
-              </a:rPr>
-              <a:t>Lofar 4</a:t>
-            </a:r>
-          </a:p>
-        </p:txBody>
-      </p:sp>
-      <p:sp>
-        <p:nvSpPr>
-          <p:cNvPr id="29" name="Rounded Rectangle 28"/>
-          <p:cNvSpPr/>
-          <p:nvPr>
-            <a:hlinkClick r:id="rId47"/>
-          </p:nvPr>
-        </p:nvSpPr>
-        <p:spPr>
-          <a:xfrm>
-            <a:off x="7240219" y="4632960"/>
-            <a:ext cx="2200046" cy="365760"/>
-          </a:xfrm>
-          <a:prstGeom prst="roundRect">
-            <a:avLst/>
-          </a:prstGeom>
-          <a:solidFill>
-            <a:srgbClr val="E8EEF7"/>
-          </a:solidFill>
-          <a:ln>
-            <a:solidFill>
-              <a:srgbClr val="1F3A5F"/>
-            </a:solidFill>
-          </a:ln>
-        </p:spPr>
-        <p:style>
-          <a:lnRef idx="1">
-            <a:schemeClr val="accent1"/>
-          </a:lnRef>
-          <a:fillRef idx="3">
-            <a:schemeClr val="accent1"/>
-          </a:fillRef>
-          <a:effectRef idx="2">
-            <a:schemeClr val="accent1"/>
-          </a:effectRef>
-          <a:fontRef idx="minor">
-            <a:schemeClr val="lt1"/>
-          </a:fontRef>
-        </p:style>
-        <p:txBody>
-          <a:bodyPr rtlCol="0" anchor="ctr" lIns="45720" rIns="45720"/>
-          <a:lstStyle/>
-          <a:p>
-            <a:pPr algn="ctr"/>
-            <a:r>
-              <a:rPr sz="900">
-                <a:solidFill>
-                  <a:srgbClr val="1F3A5F"/>
-                </a:solidFill>
-              </a:rPr>
-              <a:t>Gram 20: FR Equinox, Category 4, Bespin</a:t>
-            </a:r>
-          </a:p>
-        </p:txBody>
-      </p:sp>
-      <p:sp>
-        <p:nvSpPr>
-          <p:cNvPr id="30" name="TextBox 29"/>
-          <p:cNvSpPr txBox="1"/>
-          <p:nvPr/>
-        </p:nvSpPr>
-        <p:spPr>
-          <a:xfrm>
-            <a:off x="7240219" y="5017008"/>
-            <a:ext cx="2200046" cy="1447800"/>
-          </a:xfrm>
-          <a:prstGeom prst="rect">
-            <a:avLst/>
-          </a:prstGeom>
-          <a:noFill/>
-        </p:spPr>
-        <p:txBody>
-          <a:bodyPr wrap="square">
-            <a:spAutoFit/>
-          </a:bodyPr>
-          <a:lstStyle/>
-          <a:p>
-            <a:r>
-              <a:rPr sz="800">
-                <a:hlinkClick r:id="rId48"/>
-              </a:rPr>
-              <a:t>Lofar 1</a:t>
-            </a:r>
-          </a:p>
-          <a:p>
-            <a:r>
-              <a:rPr sz="800">
-                <a:hlinkClick r:id="rId49"/>
-              </a:rPr>
-              <a:t>Lofar 2</a:t>
-            </a:r>
-          </a:p>
-          <a:p>
-            <a:r>
-              <a:rPr sz="800">
-                <a:hlinkClick r:id="rId50"/>
-              </a:rPr>
-              <a:t>Lofar 3</a:t>
-            </a:r>
-          </a:p>
-          <a:p>
-            <a:r>
-              <a:rPr sz="800">
-                <a:hlinkClick r:id="rId51"/>
-              </a:rPr>
-              <a:t>Lofar 4</a:t>
-            </a:r>
-          </a:p>
-        </p:txBody>
-      </p:sp>
-      <p:sp>
-        <p:nvSpPr>
-          <p:cNvPr id="31" name="Rounded Rectangle 30"/>
-          <p:cNvSpPr/>
-          <p:nvPr>
-            <a:hlinkClick r:id="rId52"/>
-          </p:nvPr>
-        </p:nvSpPr>
-        <p:spPr>
-          <a:xfrm>
-            <a:off x="9531705" y="4632960"/>
-            <a:ext cx="2200046" cy="365760"/>
-          </a:xfrm>
-          <a:prstGeom prst="roundRect">
-            <a:avLst/>
-          </a:prstGeom>
-          <a:solidFill>
-            <a:srgbClr val="E8EEF7"/>
-          </a:solidFill>
-          <a:ln>
-            <a:solidFill>
-              <a:srgbClr val="1F3A5F"/>
-            </a:solidFill>
-          </a:ln>
-        </p:spPr>
-        <p:style>
-          <a:lnRef idx="1">
-            <a:schemeClr val="accent1"/>
-          </a:lnRef>
-          <a:fillRef idx="3">
-            <a:schemeClr val="accent1"/>
-          </a:fillRef>
-          <a:effectRef idx="2">
-            <a:schemeClr val="accent1"/>
-          </a:effectRef>
-          <a:fontRef idx="minor">
-            <a:schemeClr val="lt1"/>
-          </a:fontRef>
-        </p:style>
-        <p:txBody>
-          <a:bodyPr rtlCol="0" anchor="ctr" lIns="45720" rIns="45720"/>
-          <a:lstStyle/>
-          <a:p>
-            <a:pPr algn="ctr"/>
-            <a:r>
-              <a:rPr sz="900">
-                <a:solidFill>
-                  <a:srgbClr val="1F3A5F"/>
-                </a:solidFill>
-              </a:rPr>
-              <a:t>Gram 21: FR Equinox, Category 1, Endor</a:t>
-            </a:r>
-          </a:p>
-        </p:txBody>
-      </p:sp>
-      <p:sp>
-        <p:nvSpPr>
-          <p:cNvPr id="32" name="TextBox 31"/>
-          <p:cNvSpPr txBox="1"/>
-          <p:nvPr/>
-        </p:nvSpPr>
-        <p:spPr>
-          <a:xfrm>
-            <a:off x="9531705" y="5017008"/>
-            <a:ext cx="2200046" cy="1447800"/>
-          </a:xfrm>
-          <a:prstGeom prst="rect">
-            <a:avLst/>
-          </a:prstGeom>
-          <a:noFill/>
-        </p:spPr>
-        <p:txBody>
-          <a:bodyPr wrap="square">
-            <a:spAutoFit/>
-          </a:bodyPr>
-          <a:lstStyle/>
-          <a:p>
-            <a:r>
-              <a:rPr sz="800">
-                <a:hlinkClick r:id="rId53"/>
-              </a:rPr>
-              <a:t>Lofar 1</a:t>
-            </a:r>
-          </a:p>
-          <a:p>
-            <a:r>
-              <a:rPr sz="800">
-                <a:hlinkClick r:id="rId54"/>
-              </a:rPr>
-              <a:t>Lofar 2</a:t>
+              <a:t>Instructor Version</a:t>
             </a:r>
           </a:p>
         </p:txBody>
@@ -4678,7 +3223,7 @@
                   <a:srgbClr val="FFFFFF"/>
                 </a:solidFill>
               </a:rPr>
-              <a:t>Instructor Progress Test 3 Grams — Page 2 of 2</a:t>
+              <a:t>Instructor Progress Test 3 Grams — Page 1 of 2</a:t>
             </a:r>
           </a:p>
         </p:txBody>
@@ -4733,7 +3278,7 @@
                   <a:srgbClr val="1F3A5F"/>
                 </a:solidFill>
               </a:rPr>
-              <a:t>Gram 22: Mon Calamari Cruiser contact bearing 043, codename Vulcan</a:t>
+              <a:t>Gram 1: FR Millennium Falcon, Category 3, Mustafar</a:t>
             </a:r>
           </a:p>
         </p:txBody>
@@ -4767,30 +3312,6 @@
               <a:t>Lofar 1</a:t>
             </a:r>
           </a:p>
-          <a:p>
-            <a:r>
-              <a:rPr sz="800">
-                <a:hlinkClick r:id="rId4"/>
-              </a:rPr>
-              <a:t>Lofar 2</a:t>
-            </a:r>
-          </a:p>
-          <a:p>
-            <a:r>
-              <a:rPr sz="800">
-                <a:hlinkClick r:id="rId5"/>
-              </a:rPr>
-              <a:t>Lofar 3</a:t>
-            </a:r>
-          </a:p>
-          <a:p>
-            <a:r>
-              <a:rPr sz="800">
-                <a:hlinkClick r:id="rId6"/>
-              </a:rPr>
-              <a:t>Lofar 4</a:t>
-            </a:r>
-          </a:p>
         </p:txBody>
       </p:sp>
       <p:sp>
@@ -4798,7 +3319,7 @@
           <p:cNvPr id="5" name="Rounded Rectangle 4"/>
           <p:cNvSpPr/>
           <p:nvPr>
-            <a:hlinkClick r:id="rId7"/>
+            <a:hlinkClick r:id="rId4"/>
           </p:nvPr>
         </p:nvSpPr>
         <p:spPr>
@@ -4843,7 +3364,7 @@
                   <a:srgbClr val="1F3A5F"/>
                 </a:solidFill>
               </a:rPr>
-              <a:t>Gram 23: X-wing contact bearing 303, codename Dank</a:t>
+              <a:t>Gram 2: X-wing contact bearing 140, codename Endor</a:t>
             </a:r>
           </a:p>
         </p:txBody>
@@ -4872,17 +3393,9 @@
           <a:p>
             <a:r>
               <a:rPr sz="800">
-                <a:hlinkClick r:id="rId8"/>
+                <a:hlinkClick r:id="rId5"/>
               </a:rPr>
               <a:t>Lofar 1</a:t>
-            </a:r>
-          </a:p>
-          <a:p>
-            <a:r>
-              <a:rPr sz="800">
-                <a:hlinkClick r:id="rId9"/>
-              </a:rPr>
-              <a:t>Lofar 2</a:t>
             </a:r>
           </a:p>
         </p:txBody>
@@ -4892,7 +3405,7 @@
           <p:cNvPr id="7" name="Rounded Rectangle 6"/>
           <p:cNvSpPr/>
           <p:nvPr>
-            <a:hlinkClick r:id="rId10"/>
+            <a:hlinkClick r:id="rId6"/>
           </p:nvPr>
         </p:nvSpPr>
         <p:spPr>
@@ -4937,7 +3450,7 @@
                   <a:srgbClr val="1F3A5F"/>
                 </a:solidFill>
               </a:rPr>
-              <a:t>Gram 24: FR Star Destroyer, Category 1, Dagobah</a:t>
+              <a:t>Gram 4: FR Rebel One, Category 2, Naboo</a:t>
             </a:r>
           </a:p>
         </p:txBody>
@@ -4966,7 +3479,7 @@
           <a:p>
             <a:r>
               <a:rPr sz="800">
-                <a:hlinkClick r:id="rId11"/>
+                <a:hlinkClick r:id="rId7"/>
               </a:rPr>
               <a:t>Lofar 1</a:t>
             </a:r>
@@ -4974,7 +3487,7 @@
           <a:p>
             <a:r>
               <a:rPr sz="800">
-                <a:hlinkClick r:id="rId12"/>
+                <a:hlinkClick r:id="rId8"/>
               </a:rPr>
               <a:t>Lofar 2</a:t>
             </a:r>
@@ -4982,17 +3495,9 @@
           <a:p>
             <a:r>
               <a:rPr sz="800">
-                <a:hlinkClick r:id="rId13"/>
+                <a:hlinkClick r:id="rId9"/>
               </a:rPr>
               <a:t>Lofar 3</a:t>
-            </a:r>
-          </a:p>
-          <a:p>
-            <a:r>
-              <a:rPr sz="800">
-                <a:hlinkClick r:id="rId14"/>
-              </a:rPr>
-              <a:t>Lofar 4</a:t>
             </a:r>
           </a:p>
         </p:txBody>
@@ -5002,7 +3507,7 @@
           <p:cNvPr id="9" name="Rounded Rectangle 8"/>
           <p:cNvSpPr/>
           <p:nvPr>
-            <a:hlinkClick r:id="rId15"/>
+            <a:hlinkClick r:id="rId10"/>
           </p:nvPr>
         </p:nvSpPr>
         <p:spPr>
@@ -5047,7 +3552,7 @@
                   <a:srgbClr val="1F3A5F"/>
                 </a:solidFill>
               </a:rPr>
-              <a:t>Gram 25: FR Razor Crest, Category 4, Trill</a:t>
+              <a:t>Gram 6: FR Outrider, Category 3, Trill</a:t>
             </a:r>
           </a:p>
         </p:txBody>
@@ -5076,9 +3581,17 @@
           <a:p>
             <a:r>
               <a:rPr sz="800">
-                <a:hlinkClick r:id="rId16"/>
+                <a:hlinkClick r:id="rId11"/>
               </a:rPr>
               <a:t>Lofar 1</a:t>
+            </a:r>
+          </a:p>
+          <a:p>
+            <a:r>
+              <a:rPr sz="800">
+                <a:hlinkClick r:id="rId12"/>
+              </a:rPr>
+              <a:t>Lofar 2</a:t>
             </a:r>
           </a:p>
         </p:txBody>
@@ -5088,7 +3601,7 @@
           <p:cNvPr id="11" name="Rounded Rectangle 10"/>
           <p:cNvSpPr/>
           <p:nvPr>
-            <a:hlinkClick r:id="rId17"/>
+            <a:hlinkClick r:id="rId13"/>
           </p:nvPr>
         </p:nvSpPr>
         <p:spPr>
@@ -5133,7 +3646,7 @@
                   <a:srgbClr val="1F3A5F"/>
                 </a:solidFill>
               </a:rPr>
-              <a:t>Gram 26: Voyager contact bearing 256, codename Coruscant</a:t>
+              <a:t>Gram 7: Imperial-class contact bearing 172, codename Betazed</a:t>
             </a:r>
           </a:p>
         </p:txBody>
@@ -5162,9 +3675,17 @@
           <a:p>
             <a:r>
               <a:rPr sz="800">
-                <a:hlinkClick r:id="rId18"/>
+                <a:hlinkClick r:id="rId14"/>
               </a:rPr>
               <a:t>Lofar 1</a:t>
+            </a:r>
+          </a:p>
+          <a:p>
+            <a:r>
+              <a:rPr sz="800">
+                <a:hlinkClick r:id="rId15"/>
+              </a:rPr>
+              <a:t>Lofar 2</a:t>
             </a:r>
           </a:p>
         </p:txBody>
@@ -5174,7 +3695,7 @@
           <p:cNvPr id="13" name="Rounded Rectangle 12"/>
           <p:cNvSpPr/>
           <p:nvPr>
-            <a:hlinkClick r:id="rId19"/>
+            <a:hlinkClick r:id="rId16"/>
           </p:nvPr>
         </p:nvSpPr>
         <p:spPr>
@@ -5219,7 +3740,7 @@
                   <a:srgbClr val="1F3A5F"/>
                 </a:solidFill>
               </a:rPr>
-              <a:t>Gram 27: FR Millennium Falcon, Category 2, Kobol</a:t>
+              <a:t>Gram 8: FR Outrider, Category 1, Romulus</a:t>
             </a:r>
           </a:p>
         </p:txBody>
@@ -5248,31 +3769,31 @@
           <a:p>
             <a:r>
               <a:rPr sz="800">
+                <a:hlinkClick r:id="rId17"/>
+              </a:rPr>
+              <a:t>Lofar 1</a:t>
+            </a:r>
+          </a:p>
+          <a:p>
+            <a:r>
+              <a:rPr sz="800">
+                <a:hlinkClick r:id="rId18"/>
+              </a:rPr>
+              <a:t>Lofar 2</a:t>
+            </a:r>
+          </a:p>
+          <a:p>
+            <a:r>
+              <a:rPr sz="800">
+                <a:hlinkClick r:id="rId19"/>
+              </a:rPr>
+              <a:t>Lofar 3</a:t>
+            </a:r>
+          </a:p>
+          <a:p>
+            <a:r>
+              <a:rPr sz="800">
                 <a:hlinkClick r:id="rId20"/>
-              </a:rPr>
-              <a:t>Lofar 1</a:t>
-            </a:r>
-          </a:p>
-          <a:p>
-            <a:r>
-              <a:rPr sz="800">
-                <a:hlinkClick r:id="rId21"/>
-              </a:rPr>
-              <a:t>Lofar 2</a:t>
-            </a:r>
-          </a:p>
-          <a:p>
-            <a:r>
-              <a:rPr sz="800">
-                <a:hlinkClick r:id="rId22"/>
-              </a:rPr>
-              <a:t>Lofar 3</a:t>
-            </a:r>
-          </a:p>
-          <a:p>
-            <a:r>
-              <a:rPr sz="800">
-                <a:hlinkClick r:id="rId23"/>
               </a:rPr>
               <a:t>Lofar 4</a:t>
             </a:r>
@@ -5284,7 +3805,7 @@
           <p:cNvPr id="15" name="Rounded Rectangle 14"/>
           <p:cNvSpPr/>
           <p:nvPr>
-            <a:hlinkClick r:id="rId24"/>
+            <a:hlinkClick r:id="rId21"/>
           </p:nvPr>
         </p:nvSpPr>
         <p:spPr>
@@ -5329,7 +3850,7 @@
                   <a:srgbClr val="1F3A5F"/>
                 </a:solidFill>
               </a:rPr>
-              <a:t>Gram 28: FR Reliant, Category 2, Coruscant</a:t>
+              <a:t>Gram 9: FR A-wing, Category 3, Tatooine</a:t>
             </a:r>
           </a:p>
         </p:txBody>
@@ -5358,7 +3879,7 @@
           <a:p>
             <a:r>
               <a:rPr sz="800">
-                <a:hlinkClick r:id="rId25"/>
+                <a:hlinkClick r:id="rId22"/>
               </a:rPr>
               <a:t>Lofar 1</a:t>
             </a:r>
@@ -5366,9 +3887,17 @@
           <a:p>
             <a:r>
               <a:rPr sz="800">
-                <a:hlinkClick r:id="rId26"/>
+                <a:hlinkClick r:id="rId23"/>
               </a:rPr>
               <a:t>Lofar 2</a:t>
+            </a:r>
+          </a:p>
+          <a:p>
+            <a:r>
+              <a:rPr sz="800">
+                <a:hlinkClick r:id="rId24"/>
+              </a:rPr>
+              <a:t>Lofar 3</a:t>
             </a:r>
           </a:p>
         </p:txBody>
@@ -5378,7 +3907,7 @@
           <p:cNvPr id="17" name="Rounded Rectangle 16"/>
           <p:cNvSpPr/>
           <p:nvPr>
-            <a:hlinkClick r:id="rId27"/>
+            <a:hlinkClick r:id="rId25"/>
           </p:nvPr>
         </p:nvSpPr>
         <p:spPr>
@@ -5423,7 +3952,7 @@
                   <a:srgbClr val="1F3A5F"/>
                 </a:solidFill>
               </a:rPr>
-              <a:t>Gram 29: Miranda-class contact bearing 190, codename Defiant</a:t>
+              <a:t>Gram 10: FR Cerritos, Category 4, Gandalf</a:t>
             </a:r>
           </a:p>
         </p:txBody>
@@ -5452,7 +3981,7 @@
           <a:p>
             <a:r>
               <a:rPr sz="800">
-                <a:hlinkClick r:id="rId28"/>
+                <a:hlinkClick r:id="rId26"/>
               </a:rPr>
               <a:t>Lofar 1</a:t>
             </a:r>
@@ -5460,7 +3989,7 @@
           <a:p>
             <a:r>
               <a:rPr sz="800">
-                <a:hlinkClick r:id="rId29"/>
+                <a:hlinkClick r:id="rId27"/>
               </a:rPr>
               <a:t>Lofar 2</a:t>
             </a:r>
@@ -5472,7 +4001,7 @@
           <p:cNvPr id="19" name="Rounded Rectangle 18"/>
           <p:cNvSpPr/>
           <p:nvPr>
-            <a:hlinkClick r:id="rId30"/>
+            <a:hlinkClick r:id="rId28"/>
           </p:nvPr>
         </p:nvSpPr>
         <p:spPr>
@@ -5517,7 +4046,7 @@
                   <a:srgbClr val="1F3A5F"/>
                 </a:solidFill>
               </a:rPr>
-              <a:t>Gram 30: Ghost contact bearing 075, codename Yavin</a:t>
+              <a:t>Gram 13: Corellian Corvette contact bearing 190, codename Caprica</a:t>
             </a:r>
           </a:p>
         </p:txBody>
@@ -5546,25 +4075,9 @@
           <a:p>
             <a:r>
               <a:rPr sz="800">
-                <a:hlinkClick r:id="rId31"/>
+                <a:hlinkClick r:id="rId29"/>
               </a:rPr>
               <a:t>Lofar 1</a:t>
-            </a:r>
-          </a:p>
-          <a:p>
-            <a:r>
-              <a:rPr sz="800">
-                <a:hlinkClick r:id="rId32"/>
-              </a:rPr>
-              <a:t>Lofar 2</a:t>
-            </a:r>
-          </a:p>
-          <a:p>
-            <a:r>
-              <a:rPr sz="800">
-                <a:hlinkClick r:id="rId33"/>
-              </a:rPr>
-              <a:t>Lofar 3</a:t>
             </a:r>
           </a:p>
         </p:txBody>
@@ -5574,7 +4087,7 @@
           <p:cNvPr id="21" name="Rounded Rectangle 20"/>
           <p:cNvSpPr/>
           <p:nvPr>
-            <a:hlinkClick r:id="rId34"/>
+            <a:hlinkClick r:id="rId30"/>
           </p:nvPr>
         </p:nvSpPr>
         <p:spPr>
@@ -5619,7 +4132,7 @@
                   <a:srgbClr val="1F3A5F"/>
                 </a:solidFill>
               </a:rPr>
-              <a:t>Gram 31: Nebula-class contact bearing 338, codename Vulcan</a:t>
+              <a:t>Gram 14: FR Corellian Corvette, Category 1, Naboo</a:t>
             </a:r>
           </a:p>
         </p:txBody>
@@ -5648,7 +4161,7 @@
           <a:p>
             <a:r>
               <a:rPr sz="800">
-                <a:hlinkClick r:id="rId35"/>
+                <a:hlinkClick r:id="rId31"/>
               </a:rPr>
               <a:t>Lofar 1</a:t>
             </a:r>
@@ -5656,7 +4169,7 @@
           <a:p>
             <a:r>
               <a:rPr sz="800">
-                <a:hlinkClick r:id="rId36"/>
+                <a:hlinkClick r:id="rId32"/>
               </a:rPr>
               <a:t>Lofar 2</a:t>
             </a:r>
@@ -5664,7 +4177,7 @@
           <a:p>
             <a:r>
               <a:rPr sz="800">
-                <a:hlinkClick r:id="rId37"/>
+                <a:hlinkClick r:id="rId33"/>
               </a:rPr>
               <a:t>Lofar 3</a:t>
             </a:r>
@@ -5672,7 +4185,7 @@
           <a:p>
             <a:r>
               <a:rPr sz="800">
-                <a:hlinkClick r:id="rId38"/>
+                <a:hlinkClick r:id="rId34"/>
               </a:rPr>
               <a:t>Lofar 4</a:t>
             </a:r>
@@ -5684,7 +4197,7 @@
           <p:cNvPr id="23" name="Rounded Rectangle 22"/>
           <p:cNvSpPr/>
           <p:nvPr>
-            <a:hlinkClick r:id="rId39"/>
+            <a:hlinkClick r:id="rId35"/>
           </p:nvPr>
         </p:nvSpPr>
         <p:spPr>
@@ -5729,7 +4242,7 @@
                   <a:srgbClr val="1F3A5F"/>
                 </a:solidFill>
               </a:rPr>
-              <a:t>Gram 32: FR Rebel One, Category 2, Mustafar</a:t>
+              <a:t>Gram 15: FR TIE Fighter, Category 1, Bajor</a:t>
             </a:r>
           </a:p>
         </p:txBody>
@@ -5758,7 +4271,7 @@
           <a:p>
             <a:r>
               <a:rPr sz="800">
-                <a:hlinkClick r:id="rId40"/>
+                <a:hlinkClick r:id="rId36"/>
               </a:rPr>
               <a:t>Lofar 1</a:t>
             </a:r>
@@ -5770,7 +4283,7 @@
           <p:cNvPr id="25" name="Rounded Rectangle 24"/>
           <p:cNvSpPr/>
           <p:nvPr>
-            <a:hlinkClick r:id="rId41"/>
+            <a:hlinkClick r:id="rId37"/>
           </p:nvPr>
         </p:nvSpPr>
         <p:spPr>
@@ -5815,7 +4328,7 @@
                   <a:srgbClr val="1F3A5F"/>
                 </a:solidFill>
               </a:rPr>
-              <a:t>Gram 33: FR Voyager, Category 4, Hoth</a:t>
+              <a:t>Gram 17: Sovereign-class contact bearing 335, codename Yavin</a:t>
             </a:r>
           </a:p>
         </p:txBody>
@@ -5844,9 +4357,33 @@
           <a:p>
             <a:r>
               <a:rPr sz="800">
-                <a:hlinkClick r:id="rId42"/>
+                <a:hlinkClick r:id="rId38"/>
               </a:rPr>
               <a:t>Lofar 1</a:t>
+            </a:r>
+          </a:p>
+          <a:p>
+            <a:r>
+              <a:rPr sz="800">
+                <a:hlinkClick r:id="rId39"/>
+              </a:rPr>
+              <a:t>Lofar 2</a:t>
+            </a:r>
+          </a:p>
+          <a:p>
+            <a:r>
+              <a:rPr sz="800">
+                <a:hlinkClick r:id="rId40"/>
+              </a:rPr>
+              <a:t>Lofar 3</a:t>
+            </a:r>
+          </a:p>
+          <a:p>
+            <a:r>
+              <a:rPr sz="800">
+                <a:hlinkClick r:id="rId41"/>
+              </a:rPr>
+              <a:t>Lofar 4</a:t>
             </a:r>
           </a:p>
         </p:txBody>
@@ -5856,7 +4393,7 @@
           <p:cNvPr id="27" name="Rounded Rectangle 26"/>
           <p:cNvSpPr/>
           <p:nvPr>
-            <a:hlinkClick r:id="rId43"/>
+            <a:hlinkClick r:id="rId42"/>
           </p:nvPr>
         </p:nvSpPr>
         <p:spPr>
@@ -5901,7 +4438,7 @@
                   <a:srgbClr val="1F3A5F"/>
                 </a:solidFill>
               </a:rPr>
-              <a:t>Gram 34: FR Rebel One, Category 4, Bajor</a:t>
+              <a:t>Gram 19: Lambda Shuttle contact bearing 244, codename Tatooine</a:t>
             </a:r>
           </a:p>
         </p:txBody>
@@ -5930,9 +4467,33 @@
           <a:p>
             <a:r>
               <a:rPr sz="800">
+                <a:hlinkClick r:id="rId43"/>
+              </a:rPr>
+              <a:t>Lofar 1</a:t>
+            </a:r>
+          </a:p>
+          <a:p>
+            <a:r>
+              <a:rPr sz="800">
                 <a:hlinkClick r:id="rId44"/>
               </a:rPr>
-              <a:t>Lofar 1</a:t>
+              <a:t>Lofar 2</a:t>
+            </a:r>
+          </a:p>
+          <a:p>
+            <a:r>
+              <a:rPr sz="800">
+                <a:hlinkClick r:id="rId45"/>
+              </a:rPr>
+              <a:t>Lofar 3</a:t>
+            </a:r>
+          </a:p>
+          <a:p>
+            <a:r>
+              <a:rPr sz="800">
+                <a:hlinkClick r:id="rId46"/>
+              </a:rPr>
+              <a:t>Lofar 4</a:t>
             </a:r>
           </a:p>
         </p:txBody>
@@ -5942,7 +4503,7 @@
           <p:cNvPr id="29" name="Rounded Rectangle 28"/>
           <p:cNvSpPr/>
           <p:nvPr>
-            <a:hlinkClick r:id="rId45"/>
+            <a:hlinkClick r:id="rId47"/>
           </p:nvPr>
         </p:nvSpPr>
         <p:spPr>
@@ -5987,7 +4548,7 @@
                   <a:srgbClr val="1F3A5F"/>
                 </a:solidFill>
               </a:rPr>
-              <a:t>Gram 35: FR Tantive IV, Category 4, Romulus</a:t>
+              <a:t>Gram 20: FR Equinox, Category 4, Bespin</a:t>
             </a:r>
           </a:p>
         </p:txBody>
@@ -6016,7 +4577,7 @@
           <a:p>
             <a:r>
               <a:rPr sz="800">
-                <a:hlinkClick r:id="rId46"/>
+                <a:hlinkClick r:id="rId48"/>
               </a:rPr>
               <a:t>Lofar 1</a:t>
             </a:r>
@@ -6024,7 +4585,7 @@
           <a:p>
             <a:r>
               <a:rPr sz="800">
-                <a:hlinkClick r:id="rId47"/>
+                <a:hlinkClick r:id="rId49"/>
               </a:rPr>
               <a:t>Lofar 2</a:t>
             </a:r>
@@ -6032,7 +4593,7 @@
           <a:p>
             <a:r>
               <a:rPr sz="800">
-                <a:hlinkClick r:id="rId48"/>
+                <a:hlinkClick r:id="rId50"/>
               </a:rPr>
               <a:t>Lofar 3</a:t>
             </a:r>
@@ -6040,7 +4601,7 @@
           <a:p>
             <a:r>
               <a:rPr sz="800">
-                <a:hlinkClick r:id="rId49"/>
+                <a:hlinkClick r:id="rId51"/>
               </a:rPr>
               <a:t>Lofar 4</a:t>
             </a:r>
@@ -6052,7 +4613,7 @@
           <p:cNvPr id="31" name="Rounded Rectangle 30"/>
           <p:cNvSpPr/>
           <p:nvPr>
-            <a:hlinkClick r:id="rId50"/>
+            <a:hlinkClick r:id="rId52"/>
           </p:nvPr>
         </p:nvSpPr>
         <p:spPr>
@@ -6097,7 +4658,7 @@
                   <a:srgbClr val="1F3A5F"/>
                 </a:solidFill>
               </a:rPr>
-              <a:t>Gram 36: Equinox contact bearing 209, codename Kobol</a:t>
+              <a:t>Gram 21: FR Equinox, Category 1, Endor</a:t>
             </a:r>
           </a:p>
         </p:txBody>
@@ -6126,6 +4687,1533 @@
           <a:p>
             <a:r>
               <a:rPr sz="800">
+                <a:hlinkClick r:id="rId53"/>
+              </a:rPr>
+              <a:t>Lofar 1</a:t>
+            </a:r>
+          </a:p>
+          <a:p>
+            <a:r>
+              <a:rPr sz="800">
+                <a:hlinkClick r:id="rId54"/>
+              </a:rPr>
+              <a:t>Lofar 2</a:t>
+            </a:r>
+          </a:p>
+        </p:txBody>
+      </p:sp>
+    </p:spTree>
+  </p:cSld>
+  <p:clrMapOvr>
+    <a:masterClrMapping/>
+  </p:clrMapOvr>
+</p:sld>
+</file>
+
+<file path=ppt/slides/slide3.xml><?xml version="1.0" encoding="utf-8"?>
+<p:sld xmlns:a="http://schemas.openxmlformats.org/drawingml/2006/main" xmlns:p="http://schemas.openxmlformats.org/presentationml/2006/main" xmlns:r="http://schemas.openxmlformats.org/officeDocument/2006/relationships">
+  <p:cSld>
+    <p:spTree>
+      <p:nvGrpSpPr>
+        <p:cNvPr id="1" name=""/>
+        <p:cNvGrpSpPr/>
+        <p:nvPr/>
+      </p:nvGrpSpPr>
+      <p:grpSpPr/>
+      <p:sp>
+        <p:nvSpPr>
+          <p:cNvPr id="2" name="Rectangle 1"/>
+          <p:cNvSpPr/>
+          <p:nvPr/>
+        </p:nvSpPr>
+        <p:spPr>
+          <a:xfrm>
+            <a:off x="0" y="0"/>
+            <a:ext cx="12188952" cy="548640"/>
+          </a:xfrm>
+          <a:prstGeom prst="rect">
+            <a:avLst/>
+          </a:prstGeom>
+          <a:solidFill>
+            <a:srgbClr val="1F3A5F"/>
+          </a:solidFill>
+          <a:ln>
+            <a:noFill/>
+          </a:ln>
+        </p:spPr>
+        <p:style>
+          <a:lnRef idx="1">
+            <a:schemeClr val="accent1"/>
+          </a:lnRef>
+          <a:fillRef idx="3">
+            <a:schemeClr val="accent1"/>
+          </a:fillRef>
+          <a:effectRef idx="2">
+            <a:schemeClr val="accent1"/>
+          </a:effectRef>
+          <a:fontRef idx="minor">
+            <a:schemeClr val="lt1"/>
+          </a:fontRef>
+        </p:style>
+        <p:txBody>
+          <a:bodyPr rtlCol="0" anchor="ctr" lIns="182880" rIns="182880"/>
+          <a:lstStyle/>
+          <a:p>
+            <a:pPr algn="ctr"/>
+            <a:r>
+              <a:rPr sz="2000" b="1">
+                <a:solidFill>
+                  <a:srgbClr val="FFFFFF"/>
+                </a:solidFill>
+              </a:rPr>
+              <a:t>Instructor Progress Test 3 Grams — Page 2 of 2</a:t>
+            </a:r>
+          </a:p>
+        </p:txBody>
+      </p:sp>
+      <p:sp>
+        <p:nvSpPr>
+          <p:cNvPr id="3" name="Rounded Rectangle 2"/>
+          <p:cNvSpPr/>
+          <p:nvPr>
+            <a:hlinkClick r:id="rId2"/>
+          </p:nvPr>
+        </p:nvSpPr>
+        <p:spPr>
+          <a:xfrm>
+            <a:off x="365760" y="731520"/>
+            <a:ext cx="2200046" cy="365760"/>
+          </a:xfrm>
+          <a:prstGeom prst="roundRect">
+            <a:avLst/>
+          </a:prstGeom>
+          <a:solidFill>
+            <a:srgbClr val="E8EEF7"/>
+          </a:solidFill>
+          <a:ln>
+            <a:solidFill>
+              <a:srgbClr val="1F3A5F"/>
+            </a:solidFill>
+          </a:ln>
+        </p:spPr>
+        <p:style>
+          <a:lnRef idx="1">
+            <a:schemeClr val="accent1"/>
+          </a:lnRef>
+          <a:fillRef idx="3">
+            <a:schemeClr val="accent1"/>
+          </a:fillRef>
+          <a:effectRef idx="2">
+            <a:schemeClr val="accent1"/>
+          </a:effectRef>
+          <a:fontRef idx="minor">
+            <a:schemeClr val="lt1"/>
+          </a:fontRef>
+        </p:style>
+        <p:txBody>
+          <a:bodyPr rtlCol="0" anchor="ctr" lIns="45720" rIns="45720"/>
+          <a:lstStyle/>
+          <a:p>
+            <a:pPr algn="ctr"/>
+            <a:r>
+              <a:rPr sz="900">
+                <a:solidFill>
+                  <a:srgbClr val="1F3A5F"/>
+                </a:solidFill>
+              </a:rPr>
+              <a:t>Gram 22: Mon Calamari Cruiser contact bearing 043, codename Vulcan</a:t>
+            </a:r>
+          </a:p>
+        </p:txBody>
+      </p:sp>
+      <p:sp>
+        <p:nvSpPr>
+          <p:cNvPr id="4" name="TextBox 3"/>
+          <p:cNvSpPr txBox="1"/>
+          <p:nvPr/>
+        </p:nvSpPr>
+        <p:spPr>
+          <a:xfrm>
+            <a:off x="365760" y="1115568"/>
+            <a:ext cx="2200046" cy="1447800"/>
+          </a:xfrm>
+          <a:prstGeom prst="rect">
+            <a:avLst/>
+          </a:prstGeom>
+          <a:noFill/>
+        </p:spPr>
+        <p:txBody>
+          <a:bodyPr wrap="square">
+            <a:spAutoFit/>
+          </a:bodyPr>
+          <a:lstStyle/>
+          <a:p>
+            <a:r>
+              <a:rPr sz="800">
+                <a:hlinkClick r:id="rId3"/>
+              </a:rPr>
+              <a:t>Lofar 1</a:t>
+            </a:r>
+          </a:p>
+          <a:p>
+            <a:r>
+              <a:rPr sz="800">
+                <a:hlinkClick r:id="rId4"/>
+              </a:rPr>
+              <a:t>Lofar 2</a:t>
+            </a:r>
+          </a:p>
+          <a:p>
+            <a:r>
+              <a:rPr sz="800">
+                <a:hlinkClick r:id="rId5"/>
+              </a:rPr>
+              <a:t>Lofar 3</a:t>
+            </a:r>
+          </a:p>
+          <a:p>
+            <a:r>
+              <a:rPr sz="800">
+                <a:hlinkClick r:id="rId6"/>
+              </a:rPr>
+              <a:t>Lofar 4</a:t>
+            </a:r>
+          </a:p>
+        </p:txBody>
+      </p:sp>
+      <p:sp>
+        <p:nvSpPr>
+          <p:cNvPr id="5" name="Rounded Rectangle 4"/>
+          <p:cNvSpPr/>
+          <p:nvPr>
+            <a:hlinkClick r:id="rId7"/>
+          </p:nvPr>
+        </p:nvSpPr>
+        <p:spPr>
+          <a:xfrm>
+            <a:off x="2657246" y="731520"/>
+            <a:ext cx="2200046" cy="365760"/>
+          </a:xfrm>
+          <a:prstGeom prst="roundRect">
+            <a:avLst/>
+          </a:prstGeom>
+          <a:solidFill>
+            <a:srgbClr val="E8EEF7"/>
+          </a:solidFill>
+          <a:ln>
+            <a:solidFill>
+              <a:srgbClr val="1F3A5F"/>
+            </a:solidFill>
+          </a:ln>
+        </p:spPr>
+        <p:style>
+          <a:lnRef idx="1">
+            <a:schemeClr val="accent1"/>
+          </a:lnRef>
+          <a:fillRef idx="3">
+            <a:schemeClr val="accent1"/>
+          </a:fillRef>
+          <a:effectRef idx="2">
+            <a:schemeClr val="accent1"/>
+          </a:effectRef>
+          <a:fontRef idx="minor">
+            <a:schemeClr val="lt1"/>
+          </a:fontRef>
+        </p:style>
+        <p:txBody>
+          <a:bodyPr rtlCol="0" anchor="ctr" lIns="45720" rIns="45720"/>
+          <a:lstStyle/>
+          <a:p>
+            <a:pPr algn="ctr"/>
+            <a:r>
+              <a:rPr sz="900">
+                <a:solidFill>
+                  <a:srgbClr val="1F3A5F"/>
+                </a:solidFill>
+              </a:rPr>
+              <a:t>Gram 23: X-wing contact bearing 303, codename Dank</a:t>
+            </a:r>
+          </a:p>
+        </p:txBody>
+      </p:sp>
+      <p:sp>
+        <p:nvSpPr>
+          <p:cNvPr id="6" name="TextBox 5"/>
+          <p:cNvSpPr txBox="1"/>
+          <p:nvPr/>
+        </p:nvSpPr>
+        <p:spPr>
+          <a:xfrm>
+            <a:off x="2657246" y="1115568"/>
+            <a:ext cx="2200046" cy="1447800"/>
+          </a:xfrm>
+          <a:prstGeom prst="rect">
+            <a:avLst/>
+          </a:prstGeom>
+          <a:noFill/>
+        </p:spPr>
+        <p:txBody>
+          <a:bodyPr wrap="square">
+            <a:spAutoFit/>
+          </a:bodyPr>
+          <a:lstStyle/>
+          <a:p>
+            <a:r>
+              <a:rPr sz="800">
+                <a:hlinkClick r:id="rId8"/>
+              </a:rPr>
+              <a:t>Lofar 1</a:t>
+            </a:r>
+          </a:p>
+          <a:p>
+            <a:r>
+              <a:rPr sz="800">
+                <a:hlinkClick r:id="rId9"/>
+              </a:rPr>
+              <a:t>Lofar 2</a:t>
+            </a:r>
+          </a:p>
+        </p:txBody>
+      </p:sp>
+      <p:sp>
+        <p:nvSpPr>
+          <p:cNvPr id="7" name="Rounded Rectangle 6"/>
+          <p:cNvSpPr/>
+          <p:nvPr>
+            <a:hlinkClick r:id="rId10"/>
+          </p:nvPr>
+        </p:nvSpPr>
+        <p:spPr>
+          <a:xfrm>
+            <a:off x="4948732" y="731520"/>
+            <a:ext cx="2200046" cy="365760"/>
+          </a:xfrm>
+          <a:prstGeom prst="roundRect">
+            <a:avLst/>
+          </a:prstGeom>
+          <a:solidFill>
+            <a:srgbClr val="E8EEF7"/>
+          </a:solidFill>
+          <a:ln>
+            <a:solidFill>
+              <a:srgbClr val="1F3A5F"/>
+            </a:solidFill>
+          </a:ln>
+        </p:spPr>
+        <p:style>
+          <a:lnRef idx="1">
+            <a:schemeClr val="accent1"/>
+          </a:lnRef>
+          <a:fillRef idx="3">
+            <a:schemeClr val="accent1"/>
+          </a:fillRef>
+          <a:effectRef idx="2">
+            <a:schemeClr val="accent1"/>
+          </a:effectRef>
+          <a:fontRef idx="minor">
+            <a:schemeClr val="lt1"/>
+          </a:fontRef>
+        </p:style>
+        <p:txBody>
+          <a:bodyPr rtlCol="0" anchor="ctr" lIns="45720" rIns="45720"/>
+          <a:lstStyle/>
+          <a:p>
+            <a:pPr algn="ctr"/>
+            <a:r>
+              <a:rPr sz="900">
+                <a:solidFill>
+                  <a:srgbClr val="1F3A5F"/>
+                </a:solidFill>
+              </a:rPr>
+              <a:t>Gram 24: FR Star Destroyer, Category 1, Dagobah</a:t>
+            </a:r>
+          </a:p>
+        </p:txBody>
+      </p:sp>
+      <p:sp>
+        <p:nvSpPr>
+          <p:cNvPr id="8" name="TextBox 7"/>
+          <p:cNvSpPr txBox="1"/>
+          <p:nvPr/>
+        </p:nvSpPr>
+        <p:spPr>
+          <a:xfrm>
+            <a:off x="4948732" y="1115568"/>
+            <a:ext cx="2200046" cy="1447800"/>
+          </a:xfrm>
+          <a:prstGeom prst="rect">
+            <a:avLst/>
+          </a:prstGeom>
+          <a:noFill/>
+        </p:spPr>
+        <p:txBody>
+          <a:bodyPr wrap="square">
+            <a:spAutoFit/>
+          </a:bodyPr>
+          <a:lstStyle/>
+          <a:p>
+            <a:r>
+              <a:rPr sz="800">
+                <a:hlinkClick r:id="rId11"/>
+              </a:rPr>
+              <a:t>Lofar 1</a:t>
+            </a:r>
+          </a:p>
+          <a:p>
+            <a:r>
+              <a:rPr sz="800">
+                <a:hlinkClick r:id="rId12"/>
+              </a:rPr>
+              <a:t>Lofar 2</a:t>
+            </a:r>
+          </a:p>
+          <a:p>
+            <a:r>
+              <a:rPr sz="800">
+                <a:hlinkClick r:id="rId13"/>
+              </a:rPr>
+              <a:t>Lofar 3</a:t>
+            </a:r>
+          </a:p>
+          <a:p>
+            <a:r>
+              <a:rPr sz="800">
+                <a:hlinkClick r:id="rId14"/>
+              </a:rPr>
+              <a:t>Lofar 4</a:t>
+            </a:r>
+          </a:p>
+        </p:txBody>
+      </p:sp>
+      <p:sp>
+        <p:nvSpPr>
+          <p:cNvPr id="9" name="Rounded Rectangle 8"/>
+          <p:cNvSpPr/>
+          <p:nvPr>
+            <a:hlinkClick r:id="rId15"/>
+          </p:nvPr>
+        </p:nvSpPr>
+        <p:spPr>
+          <a:xfrm>
+            <a:off x="7240219" y="731520"/>
+            <a:ext cx="2200046" cy="365760"/>
+          </a:xfrm>
+          <a:prstGeom prst="roundRect">
+            <a:avLst/>
+          </a:prstGeom>
+          <a:solidFill>
+            <a:srgbClr val="E8EEF7"/>
+          </a:solidFill>
+          <a:ln>
+            <a:solidFill>
+              <a:srgbClr val="1F3A5F"/>
+            </a:solidFill>
+          </a:ln>
+        </p:spPr>
+        <p:style>
+          <a:lnRef idx="1">
+            <a:schemeClr val="accent1"/>
+          </a:lnRef>
+          <a:fillRef idx="3">
+            <a:schemeClr val="accent1"/>
+          </a:fillRef>
+          <a:effectRef idx="2">
+            <a:schemeClr val="accent1"/>
+          </a:effectRef>
+          <a:fontRef idx="minor">
+            <a:schemeClr val="lt1"/>
+          </a:fontRef>
+        </p:style>
+        <p:txBody>
+          <a:bodyPr rtlCol="0" anchor="ctr" lIns="45720" rIns="45720"/>
+          <a:lstStyle/>
+          <a:p>
+            <a:pPr algn="ctr"/>
+            <a:r>
+              <a:rPr sz="900">
+                <a:solidFill>
+                  <a:srgbClr val="1F3A5F"/>
+                </a:solidFill>
+              </a:rPr>
+              <a:t>Gram 25: FR Razor Crest, Category 4, Trill</a:t>
+            </a:r>
+          </a:p>
+        </p:txBody>
+      </p:sp>
+      <p:sp>
+        <p:nvSpPr>
+          <p:cNvPr id="10" name="TextBox 9"/>
+          <p:cNvSpPr txBox="1"/>
+          <p:nvPr/>
+        </p:nvSpPr>
+        <p:spPr>
+          <a:xfrm>
+            <a:off x="7240219" y="1115568"/>
+            <a:ext cx="2200046" cy="1447800"/>
+          </a:xfrm>
+          <a:prstGeom prst="rect">
+            <a:avLst/>
+          </a:prstGeom>
+          <a:noFill/>
+        </p:spPr>
+        <p:txBody>
+          <a:bodyPr wrap="square">
+            <a:spAutoFit/>
+          </a:bodyPr>
+          <a:lstStyle/>
+          <a:p>
+            <a:r>
+              <a:rPr sz="800">
+                <a:hlinkClick r:id="rId16"/>
+              </a:rPr>
+              <a:t>Lofar 1</a:t>
+            </a:r>
+          </a:p>
+        </p:txBody>
+      </p:sp>
+      <p:sp>
+        <p:nvSpPr>
+          <p:cNvPr id="11" name="Rounded Rectangle 10"/>
+          <p:cNvSpPr/>
+          <p:nvPr>
+            <a:hlinkClick r:id="rId17"/>
+          </p:nvPr>
+        </p:nvSpPr>
+        <p:spPr>
+          <a:xfrm>
+            <a:off x="9531705" y="731520"/>
+            <a:ext cx="2200046" cy="365760"/>
+          </a:xfrm>
+          <a:prstGeom prst="roundRect">
+            <a:avLst/>
+          </a:prstGeom>
+          <a:solidFill>
+            <a:srgbClr val="E8EEF7"/>
+          </a:solidFill>
+          <a:ln>
+            <a:solidFill>
+              <a:srgbClr val="1F3A5F"/>
+            </a:solidFill>
+          </a:ln>
+        </p:spPr>
+        <p:style>
+          <a:lnRef idx="1">
+            <a:schemeClr val="accent1"/>
+          </a:lnRef>
+          <a:fillRef idx="3">
+            <a:schemeClr val="accent1"/>
+          </a:fillRef>
+          <a:effectRef idx="2">
+            <a:schemeClr val="accent1"/>
+          </a:effectRef>
+          <a:fontRef idx="minor">
+            <a:schemeClr val="lt1"/>
+          </a:fontRef>
+        </p:style>
+        <p:txBody>
+          <a:bodyPr rtlCol="0" anchor="ctr" lIns="45720" rIns="45720"/>
+          <a:lstStyle/>
+          <a:p>
+            <a:pPr algn="ctr"/>
+            <a:r>
+              <a:rPr sz="900">
+                <a:solidFill>
+                  <a:srgbClr val="1F3A5F"/>
+                </a:solidFill>
+              </a:rPr>
+              <a:t>Gram 26: Voyager contact bearing 256, codename Coruscant</a:t>
+            </a:r>
+          </a:p>
+        </p:txBody>
+      </p:sp>
+      <p:sp>
+        <p:nvSpPr>
+          <p:cNvPr id="12" name="TextBox 11"/>
+          <p:cNvSpPr txBox="1"/>
+          <p:nvPr/>
+        </p:nvSpPr>
+        <p:spPr>
+          <a:xfrm>
+            <a:off x="9531705" y="1115568"/>
+            <a:ext cx="2200046" cy="1447800"/>
+          </a:xfrm>
+          <a:prstGeom prst="rect">
+            <a:avLst/>
+          </a:prstGeom>
+          <a:noFill/>
+        </p:spPr>
+        <p:txBody>
+          <a:bodyPr wrap="square">
+            <a:spAutoFit/>
+          </a:bodyPr>
+          <a:lstStyle/>
+          <a:p>
+            <a:r>
+              <a:rPr sz="800">
+                <a:hlinkClick r:id="rId18"/>
+              </a:rPr>
+              <a:t>Lofar 1</a:t>
+            </a:r>
+          </a:p>
+        </p:txBody>
+      </p:sp>
+      <p:sp>
+        <p:nvSpPr>
+          <p:cNvPr id="13" name="Rounded Rectangle 12"/>
+          <p:cNvSpPr/>
+          <p:nvPr>
+            <a:hlinkClick r:id="rId19"/>
+          </p:nvPr>
+        </p:nvSpPr>
+        <p:spPr>
+          <a:xfrm>
+            <a:off x="365760" y="2682240"/>
+            <a:ext cx="2200046" cy="365760"/>
+          </a:xfrm>
+          <a:prstGeom prst="roundRect">
+            <a:avLst/>
+          </a:prstGeom>
+          <a:solidFill>
+            <a:srgbClr val="E8EEF7"/>
+          </a:solidFill>
+          <a:ln>
+            <a:solidFill>
+              <a:srgbClr val="1F3A5F"/>
+            </a:solidFill>
+          </a:ln>
+        </p:spPr>
+        <p:style>
+          <a:lnRef idx="1">
+            <a:schemeClr val="accent1"/>
+          </a:lnRef>
+          <a:fillRef idx="3">
+            <a:schemeClr val="accent1"/>
+          </a:fillRef>
+          <a:effectRef idx="2">
+            <a:schemeClr val="accent1"/>
+          </a:effectRef>
+          <a:fontRef idx="minor">
+            <a:schemeClr val="lt1"/>
+          </a:fontRef>
+        </p:style>
+        <p:txBody>
+          <a:bodyPr rtlCol="0" anchor="ctr" lIns="45720" rIns="45720"/>
+          <a:lstStyle/>
+          <a:p>
+            <a:pPr algn="ctr"/>
+            <a:r>
+              <a:rPr sz="900">
+                <a:solidFill>
+                  <a:srgbClr val="1F3A5F"/>
+                </a:solidFill>
+              </a:rPr>
+              <a:t>Gram 27: FR Millennium Falcon, Category 2, Kobol</a:t>
+            </a:r>
+          </a:p>
+        </p:txBody>
+      </p:sp>
+      <p:sp>
+        <p:nvSpPr>
+          <p:cNvPr id="14" name="TextBox 13"/>
+          <p:cNvSpPr txBox="1"/>
+          <p:nvPr/>
+        </p:nvSpPr>
+        <p:spPr>
+          <a:xfrm>
+            <a:off x="365760" y="3066288"/>
+            <a:ext cx="2200046" cy="1447800"/>
+          </a:xfrm>
+          <a:prstGeom prst="rect">
+            <a:avLst/>
+          </a:prstGeom>
+          <a:noFill/>
+        </p:spPr>
+        <p:txBody>
+          <a:bodyPr wrap="square">
+            <a:spAutoFit/>
+          </a:bodyPr>
+          <a:lstStyle/>
+          <a:p>
+            <a:r>
+              <a:rPr sz="800">
+                <a:hlinkClick r:id="rId20"/>
+              </a:rPr>
+              <a:t>Lofar 1</a:t>
+            </a:r>
+          </a:p>
+          <a:p>
+            <a:r>
+              <a:rPr sz="800">
+                <a:hlinkClick r:id="rId21"/>
+              </a:rPr>
+              <a:t>Lofar 2</a:t>
+            </a:r>
+          </a:p>
+          <a:p>
+            <a:r>
+              <a:rPr sz="800">
+                <a:hlinkClick r:id="rId22"/>
+              </a:rPr>
+              <a:t>Lofar 3</a:t>
+            </a:r>
+          </a:p>
+          <a:p>
+            <a:r>
+              <a:rPr sz="800">
+                <a:hlinkClick r:id="rId23"/>
+              </a:rPr>
+              <a:t>Lofar 4</a:t>
+            </a:r>
+          </a:p>
+        </p:txBody>
+      </p:sp>
+      <p:sp>
+        <p:nvSpPr>
+          <p:cNvPr id="15" name="Rounded Rectangle 14"/>
+          <p:cNvSpPr/>
+          <p:nvPr>
+            <a:hlinkClick r:id="rId24"/>
+          </p:nvPr>
+        </p:nvSpPr>
+        <p:spPr>
+          <a:xfrm>
+            <a:off x="2657246" y="2682240"/>
+            <a:ext cx="2200046" cy="365760"/>
+          </a:xfrm>
+          <a:prstGeom prst="roundRect">
+            <a:avLst/>
+          </a:prstGeom>
+          <a:solidFill>
+            <a:srgbClr val="E8EEF7"/>
+          </a:solidFill>
+          <a:ln>
+            <a:solidFill>
+              <a:srgbClr val="1F3A5F"/>
+            </a:solidFill>
+          </a:ln>
+        </p:spPr>
+        <p:style>
+          <a:lnRef idx="1">
+            <a:schemeClr val="accent1"/>
+          </a:lnRef>
+          <a:fillRef idx="3">
+            <a:schemeClr val="accent1"/>
+          </a:fillRef>
+          <a:effectRef idx="2">
+            <a:schemeClr val="accent1"/>
+          </a:effectRef>
+          <a:fontRef idx="minor">
+            <a:schemeClr val="lt1"/>
+          </a:fontRef>
+        </p:style>
+        <p:txBody>
+          <a:bodyPr rtlCol="0" anchor="ctr" lIns="45720" rIns="45720"/>
+          <a:lstStyle/>
+          <a:p>
+            <a:pPr algn="ctr"/>
+            <a:r>
+              <a:rPr sz="900">
+                <a:solidFill>
+                  <a:srgbClr val="1F3A5F"/>
+                </a:solidFill>
+              </a:rPr>
+              <a:t>Gram 28: FR Reliant, Category 2, Coruscant</a:t>
+            </a:r>
+          </a:p>
+        </p:txBody>
+      </p:sp>
+      <p:sp>
+        <p:nvSpPr>
+          <p:cNvPr id="16" name="TextBox 15"/>
+          <p:cNvSpPr txBox="1"/>
+          <p:nvPr/>
+        </p:nvSpPr>
+        <p:spPr>
+          <a:xfrm>
+            <a:off x="2657246" y="3066288"/>
+            <a:ext cx="2200046" cy="1447800"/>
+          </a:xfrm>
+          <a:prstGeom prst="rect">
+            <a:avLst/>
+          </a:prstGeom>
+          <a:noFill/>
+        </p:spPr>
+        <p:txBody>
+          <a:bodyPr wrap="square">
+            <a:spAutoFit/>
+          </a:bodyPr>
+          <a:lstStyle/>
+          <a:p>
+            <a:r>
+              <a:rPr sz="800">
+                <a:hlinkClick r:id="rId25"/>
+              </a:rPr>
+              <a:t>Lofar 1</a:t>
+            </a:r>
+          </a:p>
+          <a:p>
+            <a:r>
+              <a:rPr sz="800">
+                <a:hlinkClick r:id="rId26"/>
+              </a:rPr>
+              <a:t>Lofar 2</a:t>
+            </a:r>
+          </a:p>
+        </p:txBody>
+      </p:sp>
+      <p:sp>
+        <p:nvSpPr>
+          <p:cNvPr id="17" name="Rounded Rectangle 16"/>
+          <p:cNvSpPr/>
+          <p:nvPr>
+            <a:hlinkClick r:id="rId27"/>
+          </p:nvPr>
+        </p:nvSpPr>
+        <p:spPr>
+          <a:xfrm>
+            <a:off x="4948732" y="2682240"/>
+            <a:ext cx="2200046" cy="365760"/>
+          </a:xfrm>
+          <a:prstGeom prst="roundRect">
+            <a:avLst/>
+          </a:prstGeom>
+          <a:solidFill>
+            <a:srgbClr val="E8EEF7"/>
+          </a:solidFill>
+          <a:ln>
+            <a:solidFill>
+              <a:srgbClr val="1F3A5F"/>
+            </a:solidFill>
+          </a:ln>
+        </p:spPr>
+        <p:style>
+          <a:lnRef idx="1">
+            <a:schemeClr val="accent1"/>
+          </a:lnRef>
+          <a:fillRef idx="3">
+            <a:schemeClr val="accent1"/>
+          </a:fillRef>
+          <a:effectRef idx="2">
+            <a:schemeClr val="accent1"/>
+          </a:effectRef>
+          <a:fontRef idx="minor">
+            <a:schemeClr val="lt1"/>
+          </a:fontRef>
+        </p:style>
+        <p:txBody>
+          <a:bodyPr rtlCol="0" anchor="ctr" lIns="45720" rIns="45720"/>
+          <a:lstStyle/>
+          <a:p>
+            <a:pPr algn="ctr"/>
+            <a:r>
+              <a:rPr sz="900">
+                <a:solidFill>
+                  <a:srgbClr val="1F3A5F"/>
+                </a:solidFill>
+              </a:rPr>
+              <a:t>Gram 29: Miranda-class contact bearing 190, codename Defiant</a:t>
+            </a:r>
+          </a:p>
+        </p:txBody>
+      </p:sp>
+      <p:sp>
+        <p:nvSpPr>
+          <p:cNvPr id="18" name="TextBox 17"/>
+          <p:cNvSpPr txBox="1"/>
+          <p:nvPr/>
+        </p:nvSpPr>
+        <p:spPr>
+          <a:xfrm>
+            <a:off x="4948732" y="3066288"/>
+            <a:ext cx="2200046" cy="1447800"/>
+          </a:xfrm>
+          <a:prstGeom prst="rect">
+            <a:avLst/>
+          </a:prstGeom>
+          <a:noFill/>
+        </p:spPr>
+        <p:txBody>
+          <a:bodyPr wrap="square">
+            <a:spAutoFit/>
+          </a:bodyPr>
+          <a:lstStyle/>
+          <a:p>
+            <a:r>
+              <a:rPr sz="800">
+                <a:hlinkClick r:id="rId28"/>
+              </a:rPr>
+              <a:t>Lofar 1</a:t>
+            </a:r>
+          </a:p>
+          <a:p>
+            <a:r>
+              <a:rPr sz="800">
+                <a:hlinkClick r:id="rId29"/>
+              </a:rPr>
+              <a:t>Lofar 2</a:t>
+            </a:r>
+          </a:p>
+        </p:txBody>
+      </p:sp>
+      <p:sp>
+        <p:nvSpPr>
+          <p:cNvPr id="19" name="Rounded Rectangle 18"/>
+          <p:cNvSpPr/>
+          <p:nvPr>
+            <a:hlinkClick r:id="rId30"/>
+          </p:nvPr>
+        </p:nvSpPr>
+        <p:spPr>
+          <a:xfrm>
+            <a:off x="7240219" y="2682240"/>
+            <a:ext cx="2200046" cy="365760"/>
+          </a:xfrm>
+          <a:prstGeom prst="roundRect">
+            <a:avLst/>
+          </a:prstGeom>
+          <a:solidFill>
+            <a:srgbClr val="E8EEF7"/>
+          </a:solidFill>
+          <a:ln>
+            <a:solidFill>
+              <a:srgbClr val="1F3A5F"/>
+            </a:solidFill>
+          </a:ln>
+        </p:spPr>
+        <p:style>
+          <a:lnRef idx="1">
+            <a:schemeClr val="accent1"/>
+          </a:lnRef>
+          <a:fillRef idx="3">
+            <a:schemeClr val="accent1"/>
+          </a:fillRef>
+          <a:effectRef idx="2">
+            <a:schemeClr val="accent1"/>
+          </a:effectRef>
+          <a:fontRef idx="minor">
+            <a:schemeClr val="lt1"/>
+          </a:fontRef>
+        </p:style>
+        <p:txBody>
+          <a:bodyPr rtlCol="0" anchor="ctr" lIns="45720" rIns="45720"/>
+          <a:lstStyle/>
+          <a:p>
+            <a:pPr algn="ctr"/>
+            <a:r>
+              <a:rPr sz="900">
+                <a:solidFill>
+                  <a:srgbClr val="1F3A5F"/>
+                </a:solidFill>
+              </a:rPr>
+              <a:t>Gram 30: Ghost contact bearing 075, codename Yavin</a:t>
+            </a:r>
+          </a:p>
+        </p:txBody>
+      </p:sp>
+      <p:sp>
+        <p:nvSpPr>
+          <p:cNvPr id="20" name="TextBox 19"/>
+          <p:cNvSpPr txBox="1"/>
+          <p:nvPr/>
+        </p:nvSpPr>
+        <p:spPr>
+          <a:xfrm>
+            <a:off x="7240219" y="3066288"/>
+            <a:ext cx="2200046" cy="1447800"/>
+          </a:xfrm>
+          <a:prstGeom prst="rect">
+            <a:avLst/>
+          </a:prstGeom>
+          <a:noFill/>
+        </p:spPr>
+        <p:txBody>
+          <a:bodyPr wrap="square">
+            <a:spAutoFit/>
+          </a:bodyPr>
+          <a:lstStyle/>
+          <a:p>
+            <a:r>
+              <a:rPr sz="800">
+                <a:hlinkClick r:id="rId31"/>
+              </a:rPr>
+              <a:t>Lofar 1</a:t>
+            </a:r>
+          </a:p>
+          <a:p>
+            <a:r>
+              <a:rPr sz="800">
+                <a:hlinkClick r:id="rId32"/>
+              </a:rPr>
+              <a:t>Lofar 2</a:t>
+            </a:r>
+          </a:p>
+          <a:p>
+            <a:r>
+              <a:rPr sz="800">
+                <a:hlinkClick r:id="rId33"/>
+              </a:rPr>
+              <a:t>Lofar 3</a:t>
+            </a:r>
+          </a:p>
+        </p:txBody>
+      </p:sp>
+      <p:sp>
+        <p:nvSpPr>
+          <p:cNvPr id="21" name="Rounded Rectangle 20"/>
+          <p:cNvSpPr/>
+          <p:nvPr>
+            <a:hlinkClick r:id="rId34"/>
+          </p:nvPr>
+        </p:nvSpPr>
+        <p:spPr>
+          <a:xfrm>
+            <a:off x="9531705" y="2682240"/>
+            <a:ext cx="2200046" cy="365760"/>
+          </a:xfrm>
+          <a:prstGeom prst="roundRect">
+            <a:avLst/>
+          </a:prstGeom>
+          <a:solidFill>
+            <a:srgbClr val="E8EEF7"/>
+          </a:solidFill>
+          <a:ln>
+            <a:solidFill>
+              <a:srgbClr val="1F3A5F"/>
+            </a:solidFill>
+          </a:ln>
+        </p:spPr>
+        <p:style>
+          <a:lnRef idx="1">
+            <a:schemeClr val="accent1"/>
+          </a:lnRef>
+          <a:fillRef idx="3">
+            <a:schemeClr val="accent1"/>
+          </a:fillRef>
+          <a:effectRef idx="2">
+            <a:schemeClr val="accent1"/>
+          </a:effectRef>
+          <a:fontRef idx="minor">
+            <a:schemeClr val="lt1"/>
+          </a:fontRef>
+        </p:style>
+        <p:txBody>
+          <a:bodyPr rtlCol="0" anchor="ctr" lIns="45720" rIns="45720"/>
+          <a:lstStyle/>
+          <a:p>
+            <a:pPr algn="ctr"/>
+            <a:r>
+              <a:rPr sz="900">
+                <a:solidFill>
+                  <a:srgbClr val="1F3A5F"/>
+                </a:solidFill>
+              </a:rPr>
+              <a:t>Gram 31: Nebula-class contact bearing 338, codename Vulcan</a:t>
+            </a:r>
+          </a:p>
+        </p:txBody>
+      </p:sp>
+      <p:sp>
+        <p:nvSpPr>
+          <p:cNvPr id="22" name="TextBox 21"/>
+          <p:cNvSpPr txBox="1"/>
+          <p:nvPr/>
+        </p:nvSpPr>
+        <p:spPr>
+          <a:xfrm>
+            <a:off x="9531705" y="3066288"/>
+            <a:ext cx="2200046" cy="1447800"/>
+          </a:xfrm>
+          <a:prstGeom prst="rect">
+            <a:avLst/>
+          </a:prstGeom>
+          <a:noFill/>
+        </p:spPr>
+        <p:txBody>
+          <a:bodyPr wrap="square">
+            <a:spAutoFit/>
+          </a:bodyPr>
+          <a:lstStyle/>
+          <a:p>
+            <a:r>
+              <a:rPr sz="800">
+                <a:hlinkClick r:id="rId35"/>
+              </a:rPr>
+              <a:t>Lofar 1</a:t>
+            </a:r>
+          </a:p>
+          <a:p>
+            <a:r>
+              <a:rPr sz="800">
+                <a:hlinkClick r:id="rId36"/>
+              </a:rPr>
+              <a:t>Lofar 2</a:t>
+            </a:r>
+          </a:p>
+          <a:p>
+            <a:r>
+              <a:rPr sz="800">
+                <a:hlinkClick r:id="rId37"/>
+              </a:rPr>
+              <a:t>Lofar 3</a:t>
+            </a:r>
+          </a:p>
+          <a:p>
+            <a:r>
+              <a:rPr sz="800">
+                <a:hlinkClick r:id="rId38"/>
+              </a:rPr>
+              <a:t>Lofar 4</a:t>
+            </a:r>
+          </a:p>
+        </p:txBody>
+      </p:sp>
+      <p:sp>
+        <p:nvSpPr>
+          <p:cNvPr id="23" name="Rounded Rectangle 22"/>
+          <p:cNvSpPr/>
+          <p:nvPr>
+            <a:hlinkClick r:id="rId39"/>
+          </p:nvPr>
+        </p:nvSpPr>
+        <p:spPr>
+          <a:xfrm>
+            <a:off x="365760" y="4632960"/>
+            <a:ext cx="2200046" cy="365760"/>
+          </a:xfrm>
+          <a:prstGeom prst="roundRect">
+            <a:avLst/>
+          </a:prstGeom>
+          <a:solidFill>
+            <a:srgbClr val="E8EEF7"/>
+          </a:solidFill>
+          <a:ln>
+            <a:solidFill>
+              <a:srgbClr val="1F3A5F"/>
+            </a:solidFill>
+          </a:ln>
+        </p:spPr>
+        <p:style>
+          <a:lnRef idx="1">
+            <a:schemeClr val="accent1"/>
+          </a:lnRef>
+          <a:fillRef idx="3">
+            <a:schemeClr val="accent1"/>
+          </a:fillRef>
+          <a:effectRef idx="2">
+            <a:schemeClr val="accent1"/>
+          </a:effectRef>
+          <a:fontRef idx="minor">
+            <a:schemeClr val="lt1"/>
+          </a:fontRef>
+        </p:style>
+        <p:txBody>
+          <a:bodyPr rtlCol="0" anchor="ctr" lIns="45720" rIns="45720"/>
+          <a:lstStyle/>
+          <a:p>
+            <a:pPr algn="ctr"/>
+            <a:r>
+              <a:rPr sz="900">
+                <a:solidFill>
+                  <a:srgbClr val="1F3A5F"/>
+                </a:solidFill>
+              </a:rPr>
+              <a:t>Gram 32: FR Rebel One, Category 2, Mustafar</a:t>
+            </a:r>
+          </a:p>
+        </p:txBody>
+      </p:sp>
+      <p:sp>
+        <p:nvSpPr>
+          <p:cNvPr id="24" name="TextBox 23"/>
+          <p:cNvSpPr txBox="1"/>
+          <p:nvPr/>
+        </p:nvSpPr>
+        <p:spPr>
+          <a:xfrm>
+            <a:off x="365760" y="5017008"/>
+            <a:ext cx="2200046" cy="1447800"/>
+          </a:xfrm>
+          <a:prstGeom prst="rect">
+            <a:avLst/>
+          </a:prstGeom>
+          <a:noFill/>
+        </p:spPr>
+        <p:txBody>
+          <a:bodyPr wrap="square">
+            <a:spAutoFit/>
+          </a:bodyPr>
+          <a:lstStyle/>
+          <a:p>
+            <a:r>
+              <a:rPr sz="800">
+                <a:hlinkClick r:id="rId40"/>
+              </a:rPr>
+              <a:t>Lofar 1</a:t>
+            </a:r>
+          </a:p>
+        </p:txBody>
+      </p:sp>
+      <p:sp>
+        <p:nvSpPr>
+          <p:cNvPr id="25" name="Rounded Rectangle 24"/>
+          <p:cNvSpPr/>
+          <p:nvPr>
+            <a:hlinkClick r:id="rId41"/>
+          </p:nvPr>
+        </p:nvSpPr>
+        <p:spPr>
+          <a:xfrm>
+            <a:off x="2657246" y="4632960"/>
+            <a:ext cx="2200046" cy="365760"/>
+          </a:xfrm>
+          <a:prstGeom prst="roundRect">
+            <a:avLst/>
+          </a:prstGeom>
+          <a:solidFill>
+            <a:srgbClr val="E8EEF7"/>
+          </a:solidFill>
+          <a:ln>
+            <a:solidFill>
+              <a:srgbClr val="1F3A5F"/>
+            </a:solidFill>
+          </a:ln>
+        </p:spPr>
+        <p:style>
+          <a:lnRef idx="1">
+            <a:schemeClr val="accent1"/>
+          </a:lnRef>
+          <a:fillRef idx="3">
+            <a:schemeClr val="accent1"/>
+          </a:fillRef>
+          <a:effectRef idx="2">
+            <a:schemeClr val="accent1"/>
+          </a:effectRef>
+          <a:fontRef idx="minor">
+            <a:schemeClr val="lt1"/>
+          </a:fontRef>
+        </p:style>
+        <p:txBody>
+          <a:bodyPr rtlCol="0" anchor="ctr" lIns="45720" rIns="45720"/>
+          <a:lstStyle/>
+          <a:p>
+            <a:pPr algn="ctr"/>
+            <a:r>
+              <a:rPr sz="900">
+                <a:solidFill>
+                  <a:srgbClr val="1F3A5F"/>
+                </a:solidFill>
+              </a:rPr>
+              <a:t>Gram 33: FR Voyager, Category 4, Hoth</a:t>
+            </a:r>
+          </a:p>
+        </p:txBody>
+      </p:sp>
+      <p:sp>
+        <p:nvSpPr>
+          <p:cNvPr id="26" name="TextBox 25"/>
+          <p:cNvSpPr txBox="1"/>
+          <p:nvPr/>
+        </p:nvSpPr>
+        <p:spPr>
+          <a:xfrm>
+            <a:off x="2657246" y="5017008"/>
+            <a:ext cx="2200046" cy="1447800"/>
+          </a:xfrm>
+          <a:prstGeom prst="rect">
+            <a:avLst/>
+          </a:prstGeom>
+          <a:noFill/>
+        </p:spPr>
+        <p:txBody>
+          <a:bodyPr wrap="square">
+            <a:spAutoFit/>
+          </a:bodyPr>
+          <a:lstStyle/>
+          <a:p>
+            <a:r>
+              <a:rPr sz="800">
+                <a:hlinkClick r:id="rId42"/>
+              </a:rPr>
+              <a:t>Lofar 1</a:t>
+            </a:r>
+          </a:p>
+        </p:txBody>
+      </p:sp>
+      <p:sp>
+        <p:nvSpPr>
+          <p:cNvPr id="27" name="Rounded Rectangle 26"/>
+          <p:cNvSpPr/>
+          <p:nvPr>
+            <a:hlinkClick r:id="rId43"/>
+          </p:nvPr>
+        </p:nvSpPr>
+        <p:spPr>
+          <a:xfrm>
+            <a:off x="4948732" y="4632960"/>
+            <a:ext cx="2200046" cy="365760"/>
+          </a:xfrm>
+          <a:prstGeom prst="roundRect">
+            <a:avLst/>
+          </a:prstGeom>
+          <a:solidFill>
+            <a:srgbClr val="E8EEF7"/>
+          </a:solidFill>
+          <a:ln>
+            <a:solidFill>
+              <a:srgbClr val="1F3A5F"/>
+            </a:solidFill>
+          </a:ln>
+        </p:spPr>
+        <p:style>
+          <a:lnRef idx="1">
+            <a:schemeClr val="accent1"/>
+          </a:lnRef>
+          <a:fillRef idx="3">
+            <a:schemeClr val="accent1"/>
+          </a:fillRef>
+          <a:effectRef idx="2">
+            <a:schemeClr val="accent1"/>
+          </a:effectRef>
+          <a:fontRef idx="minor">
+            <a:schemeClr val="lt1"/>
+          </a:fontRef>
+        </p:style>
+        <p:txBody>
+          <a:bodyPr rtlCol="0" anchor="ctr" lIns="45720" rIns="45720"/>
+          <a:lstStyle/>
+          <a:p>
+            <a:pPr algn="ctr"/>
+            <a:r>
+              <a:rPr sz="900">
+                <a:solidFill>
+                  <a:srgbClr val="1F3A5F"/>
+                </a:solidFill>
+              </a:rPr>
+              <a:t>Gram 34: FR Rebel One, Category 4, Bajor</a:t>
+            </a:r>
+          </a:p>
+        </p:txBody>
+      </p:sp>
+      <p:sp>
+        <p:nvSpPr>
+          <p:cNvPr id="28" name="TextBox 27"/>
+          <p:cNvSpPr txBox="1"/>
+          <p:nvPr/>
+        </p:nvSpPr>
+        <p:spPr>
+          <a:xfrm>
+            <a:off x="4948732" y="5017008"/>
+            <a:ext cx="2200046" cy="1447800"/>
+          </a:xfrm>
+          <a:prstGeom prst="rect">
+            <a:avLst/>
+          </a:prstGeom>
+          <a:noFill/>
+        </p:spPr>
+        <p:txBody>
+          <a:bodyPr wrap="square">
+            <a:spAutoFit/>
+          </a:bodyPr>
+          <a:lstStyle/>
+          <a:p>
+            <a:r>
+              <a:rPr sz="800">
+                <a:hlinkClick r:id="rId44"/>
+              </a:rPr>
+              <a:t>Lofar 1</a:t>
+            </a:r>
+          </a:p>
+        </p:txBody>
+      </p:sp>
+      <p:sp>
+        <p:nvSpPr>
+          <p:cNvPr id="29" name="Rounded Rectangle 28"/>
+          <p:cNvSpPr/>
+          <p:nvPr>
+            <a:hlinkClick r:id="rId45"/>
+          </p:nvPr>
+        </p:nvSpPr>
+        <p:spPr>
+          <a:xfrm>
+            <a:off x="7240219" y="4632960"/>
+            <a:ext cx="2200046" cy="365760"/>
+          </a:xfrm>
+          <a:prstGeom prst="roundRect">
+            <a:avLst/>
+          </a:prstGeom>
+          <a:solidFill>
+            <a:srgbClr val="E8EEF7"/>
+          </a:solidFill>
+          <a:ln>
+            <a:solidFill>
+              <a:srgbClr val="1F3A5F"/>
+            </a:solidFill>
+          </a:ln>
+        </p:spPr>
+        <p:style>
+          <a:lnRef idx="1">
+            <a:schemeClr val="accent1"/>
+          </a:lnRef>
+          <a:fillRef idx="3">
+            <a:schemeClr val="accent1"/>
+          </a:fillRef>
+          <a:effectRef idx="2">
+            <a:schemeClr val="accent1"/>
+          </a:effectRef>
+          <a:fontRef idx="minor">
+            <a:schemeClr val="lt1"/>
+          </a:fontRef>
+        </p:style>
+        <p:txBody>
+          <a:bodyPr rtlCol="0" anchor="ctr" lIns="45720" rIns="45720"/>
+          <a:lstStyle/>
+          <a:p>
+            <a:pPr algn="ctr"/>
+            <a:r>
+              <a:rPr sz="900">
+                <a:solidFill>
+                  <a:srgbClr val="1F3A5F"/>
+                </a:solidFill>
+              </a:rPr>
+              <a:t>Gram 35: FR Tantive IV, Category 4, Romulus</a:t>
+            </a:r>
+          </a:p>
+        </p:txBody>
+      </p:sp>
+      <p:sp>
+        <p:nvSpPr>
+          <p:cNvPr id="30" name="TextBox 29"/>
+          <p:cNvSpPr txBox="1"/>
+          <p:nvPr/>
+        </p:nvSpPr>
+        <p:spPr>
+          <a:xfrm>
+            <a:off x="7240219" y="5017008"/>
+            <a:ext cx="2200046" cy="1447800"/>
+          </a:xfrm>
+          <a:prstGeom prst="rect">
+            <a:avLst/>
+          </a:prstGeom>
+          <a:noFill/>
+        </p:spPr>
+        <p:txBody>
+          <a:bodyPr wrap="square">
+            <a:spAutoFit/>
+          </a:bodyPr>
+          <a:lstStyle/>
+          <a:p>
+            <a:r>
+              <a:rPr sz="800">
+                <a:hlinkClick r:id="rId46"/>
+              </a:rPr>
+              <a:t>Lofar 1</a:t>
+            </a:r>
+          </a:p>
+          <a:p>
+            <a:r>
+              <a:rPr sz="800">
+                <a:hlinkClick r:id="rId47"/>
+              </a:rPr>
+              <a:t>Lofar 2</a:t>
+            </a:r>
+          </a:p>
+          <a:p>
+            <a:r>
+              <a:rPr sz="800">
+                <a:hlinkClick r:id="rId48"/>
+              </a:rPr>
+              <a:t>Lofar 3</a:t>
+            </a:r>
+          </a:p>
+          <a:p>
+            <a:r>
+              <a:rPr sz="800">
+                <a:hlinkClick r:id="rId49"/>
+              </a:rPr>
+              <a:t>Lofar 4</a:t>
+            </a:r>
+          </a:p>
+        </p:txBody>
+      </p:sp>
+      <p:sp>
+        <p:nvSpPr>
+          <p:cNvPr id="31" name="Rounded Rectangle 30"/>
+          <p:cNvSpPr/>
+          <p:nvPr>
+            <a:hlinkClick r:id="rId50"/>
+          </p:nvPr>
+        </p:nvSpPr>
+        <p:spPr>
+          <a:xfrm>
+            <a:off x="9531705" y="4632960"/>
+            <a:ext cx="2200046" cy="365760"/>
+          </a:xfrm>
+          <a:prstGeom prst="roundRect">
+            <a:avLst/>
+          </a:prstGeom>
+          <a:solidFill>
+            <a:srgbClr val="E8EEF7"/>
+          </a:solidFill>
+          <a:ln>
+            <a:solidFill>
+              <a:srgbClr val="1F3A5F"/>
+            </a:solidFill>
+          </a:ln>
+        </p:spPr>
+        <p:style>
+          <a:lnRef idx="1">
+            <a:schemeClr val="accent1"/>
+          </a:lnRef>
+          <a:fillRef idx="3">
+            <a:schemeClr val="accent1"/>
+          </a:fillRef>
+          <a:effectRef idx="2">
+            <a:schemeClr val="accent1"/>
+          </a:effectRef>
+          <a:fontRef idx="minor">
+            <a:schemeClr val="lt1"/>
+          </a:fontRef>
+        </p:style>
+        <p:txBody>
+          <a:bodyPr rtlCol="0" anchor="ctr" lIns="45720" rIns="45720"/>
+          <a:lstStyle/>
+          <a:p>
+            <a:pPr algn="ctr"/>
+            <a:r>
+              <a:rPr sz="900">
+                <a:solidFill>
+                  <a:srgbClr val="1F3A5F"/>
+                </a:solidFill>
+              </a:rPr>
+              <a:t>Gram 36: Equinox contact bearing 209, codename Kobol</a:t>
+            </a:r>
+          </a:p>
+        </p:txBody>
+      </p:sp>
+      <p:sp>
+        <p:nvSpPr>
+          <p:cNvPr id="32" name="TextBox 31"/>
+          <p:cNvSpPr txBox="1"/>
+          <p:nvPr/>
+        </p:nvSpPr>
+        <p:spPr>
+          <a:xfrm>
+            <a:off x="9531705" y="5017008"/>
+            <a:ext cx="2200046" cy="1447800"/>
+          </a:xfrm>
+          <a:prstGeom prst="rect">
+            <a:avLst/>
+          </a:prstGeom>
+          <a:noFill/>
+        </p:spPr>
+        <p:txBody>
+          <a:bodyPr wrap="square">
+            <a:spAutoFit/>
+          </a:bodyPr>
+          <a:lstStyle/>
+          <a:p>
+            <a:r>
+              <a:rPr sz="800">
                 <a:hlinkClick r:id="rId51"/>
               </a:rPr>
               <a:t>Lofar 1</a:t>
@@ -6145,6 +6233,92 @@
                 <a:hlinkClick r:id="rId53"/>
               </a:rPr>
               <a:t>Lofar 3</a:t>
+            </a:r>
+          </a:p>
+        </p:txBody>
+      </p:sp>
+    </p:spTree>
+  </p:cSld>
+  <p:clrMapOvr>
+    <a:masterClrMapping/>
+  </p:clrMapOvr>
+</p:sld>
+</file>
+
+<file path=ppt/slides/slide4.xml><?xml version="1.0" encoding="utf-8"?>
+<p:sld xmlns:a="http://schemas.openxmlformats.org/drawingml/2006/main" xmlns:p="http://schemas.openxmlformats.org/presentationml/2006/main" xmlns:r="http://schemas.openxmlformats.org/officeDocument/2006/relationships">
+  <p:cSld>
+    <p:spTree>
+      <p:nvGrpSpPr>
+        <p:cNvPr id="1" name=""/>
+        <p:cNvGrpSpPr/>
+        <p:nvPr/>
+      </p:nvGrpSpPr>
+      <p:grpSpPr/>
+      <p:sp>
+        <p:nvSpPr>
+          <p:cNvPr id="2" name="TextBox 1"/>
+          <p:cNvSpPr txBox="1"/>
+          <p:nvPr/>
+        </p:nvSpPr>
+        <p:spPr>
+          <a:xfrm>
+            <a:off x="914400" y="2377440"/>
+            <a:ext cx="10360152" cy="1280160"/>
+          </a:xfrm>
+          <a:prstGeom prst="rect">
+            <a:avLst/>
+          </a:prstGeom>
+          <a:noFill/>
+        </p:spPr>
+        <p:txBody>
+          <a:bodyPr wrap="square">
+            <a:spAutoFit/>
+          </a:bodyPr>
+          <a:lstStyle/>
+          <a:p>
+            <a:pPr algn="ctr"/>
+            <a:r>
+              <a:rPr sz="4000" b="1">
+                <a:solidFill>
+                  <a:srgbClr val="1F3A5F"/>
+                </a:solidFill>
+              </a:rPr>
+              <a:t>End of Instructor Progress Test 3 Grams</a:t>
+            </a:r>
+          </a:p>
+        </p:txBody>
+      </p:sp>
+      <p:sp>
+        <p:nvSpPr>
+          <p:cNvPr id="3" name="TextBox 2"/>
+          <p:cNvSpPr txBox="1"/>
+          <p:nvPr/>
+        </p:nvSpPr>
+        <p:spPr>
+          <a:xfrm>
+            <a:off x="914400" y="3840480"/>
+            <a:ext cx="10360152" cy="731520"/>
+          </a:xfrm>
+          <a:prstGeom prst="rect">
+            <a:avLst/>
+          </a:prstGeom>
+          <a:noFill/>
+        </p:spPr>
+        <p:txBody>
+          <a:bodyPr wrap="none">
+            <a:spAutoFit/>
+          </a:bodyPr>
+          <a:lstStyle/>
+          <a:p>
+            <a:pPr algn="ctr"/>
+            <a:r>
+              <a:rPr sz="2400">
+                <a:solidFill>
+                  <a:srgbClr val="1F3A5F"/>
+                </a:solidFill>
+              </a:rPr>
+              <a:t>Instructor Version</a:t>
             </a:r>
           </a:p>
         </p:txBody>

--- a/source/Instructor Progress Test 3 Grams/Instructor Progress Test 3 Grams.pptx
+++ b/source/Instructor Progress Test 3 Grams/Instructor Progress Test 3 Grams.pptx
@@ -7,8 +7,6 @@
   <p:sldIdLst>
     <p:sldId id="256" r:id="rId7"/>
     <p:sldId id="257" r:id="rId8"/>
-    <p:sldId id="258" r:id="rId9"/>
-    <p:sldId id="259" r:id="rId10"/>
   </p:sldIdLst>
   <p:sldSz cx="12188952" cy="6858000" type="screen4x3"/>
   <p:notesSz cx="6858000" cy="9144000"/>
@@ -3093,14 +3091,120 @@
       <p:grpSpPr/>
       <p:sp>
         <p:nvSpPr>
-          <p:cNvPr id="2" name="TextBox 1"/>
+          <p:cNvPr id="2" name="Rectangle 1"/>
+          <p:cNvSpPr/>
+          <p:nvPr/>
+        </p:nvSpPr>
+        <p:spPr>
+          <a:xfrm>
+            <a:off x="0" y="0"/>
+            <a:ext cx="12188952" cy="548640"/>
+          </a:xfrm>
+          <a:prstGeom prst="rect">
+            <a:avLst/>
+          </a:prstGeom>
+          <a:solidFill>
+            <a:srgbClr val="1F3A5F"/>
+          </a:solidFill>
+          <a:ln>
+            <a:noFill/>
+          </a:ln>
+        </p:spPr>
+        <p:style>
+          <a:lnRef idx="1">
+            <a:schemeClr val="accent1"/>
+          </a:lnRef>
+          <a:fillRef idx="3">
+            <a:schemeClr val="accent1"/>
+          </a:fillRef>
+          <a:effectRef idx="2">
+            <a:schemeClr val="accent1"/>
+          </a:effectRef>
+          <a:fontRef idx="minor">
+            <a:schemeClr val="lt1"/>
+          </a:fontRef>
+        </p:style>
+        <p:txBody>
+          <a:bodyPr rtlCol="0" anchor="ctr" lIns="182880" rIns="182880"/>
+          <a:lstStyle/>
+          <a:p>
+            <a:pPr algn="ctr"/>
+            <a:r>
+              <a:rPr sz="2000" b="1">
+                <a:solidFill>
+                  <a:srgbClr val="FFFFFF"/>
+                </a:solidFill>
+              </a:rPr>
+              <a:t>Instructor Progress Test 3 Grams — Page 1 of 2</a:t>
+            </a:r>
+          </a:p>
+        </p:txBody>
+      </p:sp>
+      <p:sp>
+        <p:nvSpPr>
+          <p:cNvPr id="3" name="Rounded Rectangle 2">
+            <a:hlinkClick r:id="rId2"/>
+          </p:cNvPr>
+          <p:cNvSpPr/>
+          <p:nvPr/>
+        </p:nvSpPr>
+        <p:spPr>
+          <a:xfrm>
+            <a:off x="365760" y="731520"/>
+            <a:ext cx="2200046" cy="365760"/>
+          </a:xfrm>
+          <a:prstGeom prst="roundRect">
+            <a:avLst/>
+          </a:prstGeom>
+          <a:solidFill>
+            <a:srgbClr val="E8EEF7"/>
+          </a:solidFill>
+          <a:ln>
+            <a:solidFill>
+              <a:srgbClr val="1F3A5F"/>
+            </a:solidFill>
+          </a:ln>
+        </p:spPr>
+        <p:style>
+          <a:lnRef idx="1">
+            <a:schemeClr val="accent1"/>
+          </a:lnRef>
+          <a:fillRef idx="3">
+            <a:schemeClr val="accent1"/>
+          </a:fillRef>
+          <a:effectRef idx="2">
+            <a:schemeClr val="accent1"/>
+          </a:effectRef>
+          <a:fontRef idx="minor">
+            <a:schemeClr val="lt1"/>
+          </a:fontRef>
+        </p:style>
+        <p:txBody>
+          <a:bodyPr rtlCol="0" anchor="ctr" lIns="45720" rIns="45720"/>
+          <a:lstStyle/>
+          <a:p>
+            <a:pPr algn="ctr"/>
+            <a:r>
+              <a:rPr sz="900">
+                <a:solidFill>
+                  <a:srgbClr val="1F3A5F"/>
+                </a:solidFill>
+              </a:rPr>
+              <a:t>Gram 1: FR Millennium Falcon, Category 3, Mustafar</a:t>
+            </a:r>
+          </a:p>
+        </p:txBody>
+      </p:sp>
+      <p:sp>
+        <p:nvSpPr>
+          <p:cNvPr id="4" name="TextBox 3"/>
           <p:cNvSpPr txBox="1"/>
           <p:nvPr/>
         </p:nvSpPr>
         <p:spPr>
           <a:xfrm>
-            <a:off x="914400" y="2377440"/>
-            <a:ext cx="10360152" cy="1280160"/>
+            <a:off x="365760" y="1115568"/>
+            <a:ext cx="2200046" cy="1447800"/>
           </a:xfrm>
           <a:prstGeom prst="rect">
             <a:avLst/>
@@ -3113,28 +3217,80 @@
           </a:bodyPr>
           <a:lstStyle/>
           <a:p>
+            <a:r>
+              <a:rPr sz="800">
+                <a:hlinkClick r:id="rId3"/>
+              </a:rPr>
+              <a:t>Lofar 1</a:t>
+            </a:r>
+          </a:p>
+        </p:txBody>
+      </p:sp>
+      <p:sp>
+        <p:nvSpPr>
+          <p:cNvPr id="5" name="Rounded Rectangle 4">
+            <a:hlinkClick r:id="rId4"/>
+          </p:cNvPr>
+          <p:cNvSpPr/>
+          <p:nvPr/>
+        </p:nvSpPr>
+        <p:spPr>
+          <a:xfrm>
+            <a:off x="2657246" y="731520"/>
+            <a:ext cx="2200046" cy="365760"/>
+          </a:xfrm>
+          <a:prstGeom prst="roundRect">
+            <a:avLst/>
+          </a:prstGeom>
+          <a:solidFill>
+            <a:srgbClr val="E8EEF7"/>
+          </a:solidFill>
+          <a:ln>
+            <a:solidFill>
+              <a:srgbClr val="1F3A5F"/>
+            </a:solidFill>
+          </a:ln>
+        </p:spPr>
+        <p:style>
+          <a:lnRef idx="1">
+            <a:schemeClr val="accent1"/>
+          </a:lnRef>
+          <a:fillRef idx="3">
+            <a:schemeClr val="accent1"/>
+          </a:fillRef>
+          <a:effectRef idx="2">
+            <a:schemeClr val="accent1"/>
+          </a:effectRef>
+          <a:fontRef idx="minor">
+            <a:schemeClr val="lt1"/>
+          </a:fontRef>
+        </p:style>
+        <p:txBody>
+          <a:bodyPr rtlCol="0" anchor="ctr" lIns="45720" rIns="45720"/>
+          <a:lstStyle/>
+          <a:p>
             <a:pPr algn="ctr"/>
             <a:r>
-              <a:rPr sz="4000" b="1">
+              <a:rPr sz="900">
                 <a:solidFill>
                   <a:srgbClr val="1F3A5F"/>
                 </a:solidFill>
               </a:rPr>
-              <a:t>Welcome to Instructor Progress Test 3 Grams</a:t>
-            </a:r>
-          </a:p>
-        </p:txBody>
-      </p:sp>
-      <p:sp>
-        <p:nvSpPr>
-          <p:cNvPr id="3" name="TextBox 2"/>
+              <a:t>Gram 2: X-wing contact bearing 140, codename Endor</a:t>
+            </a:r>
+          </a:p>
+        </p:txBody>
+      </p:sp>
+      <p:sp>
+        <p:nvSpPr>
+          <p:cNvPr id="6" name="TextBox 5"/>
           <p:cNvSpPr txBox="1"/>
           <p:nvPr/>
         </p:nvSpPr>
         <p:spPr>
           <a:xfrm>
-            <a:off x="914400" y="3840480"/>
-            <a:ext cx="10360152" cy="731520"/>
+            <a:off x="2657246" y="1115568"/>
+            <a:ext cx="2200046" cy="1447800"/>
           </a:xfrm>
           <a:prstGeom prst="rect">
             <a:avLst/>
@@ -3142,19 +3298,1318 @@
           <a:noFill/>
         </p:spPr>
         <p:txBody>
-          <a:bodyPr wrap="none">
+          <a:bodyPr wrap="square">
             <a:spAutoFit/>
           </a:bodyPr>
           <a:lstStyle/>
           <a:p>
+            <a:r>
+              <a:rPr sz="800">
+                <a:hlinkClick r:id="rId5"/>
+              </a:rPr>
+              <a:t>Lofar 1</a:t>
+            </a:r>
+          </a:p>
+        </p:txBody>
+      </p:sp>
+      <p:sp>
+        <p:nvSpPr>
+          <p:cNvPr id="7" name="Rounded Rectangle 6">
+            <a:hlinkClick r:id="rId6"/>
+          </p:cNvPr>
+          <p:cNvSpPr/>
+          <p:nvPr/>
+        </p:nvSpPr>
+        <p:spPr>
+          <a:xfrm>
+            <a:off x="4948732" y="731520"/>
+            <a:ext cx="2200046" cy="365760"/>
+          </a:xfrm>
+          <a:prstGeom prst="roundRect">
+            <a:avLst/>
+          </a:prstGeom>
+          <a:solidFill>
+            <a:srgbClr val="E8EEF7"/>
+          </a:solidFill>
+          <a:ln>
+            <a:solidFill>
+              <a:srgbClr val="1F3A5F"/>
+            </a:solidFill>
+          </a:ln>
+        </p:spPr>
+        <p:style>
+          <a:lnRef idx="1">
+            <a:schemeClr val="accent1"/>
+          </a:lnRef>
+          <a:fillRef idx="3">
+            <a:schemeClr val="accent1"/>
+          </a:fillRef>
+          <a:effectRef idx="2">
+            <a:schemeClr val="accent1"/>
+          </a:effectRef>
+          <a:fontRef idx="minor">
+            <a:schemeClr val="lt1"/>
+          </a:fontRef>
+        </p:style>
+        <p:txBody>
+          <a:bodyPr rtlCol="0" anchor="ctr" lIns="45720" rIns="45720"/>
+          <a:lstStyle/>
+          <a:p>
             <a:pPr algn="ctr"/>
             <a:r>
-              <a:rPr sz="2400">
+              <a:rPr sz="900">
                 <a:solidFill>
                   <a:srgbClr val="1F3A5F"/>
                 </a:solidFill>
               </a:rPr>
-              <a:t>Instructor Version</a:t>
+              <a:t>Gram 4: FR Rebel One, Category 2, Naboo</a:t>
+            </a:r>
+          </a:p>
+        </p:txBody>
+      </p:sp>
+      <p:sp>
+        <p:nvSpPr>
+          <p:cNvPr id="8" name="TextBox 7"/>
+          <p:cNvSpPr txBox="1"/>
+          <p:nvPr/>
+        </p:nvSpPr>
+        <p:spPr>
+          <a:xfrm>
+            <a:off x="4948732" y="1115568"/>
+            <a:ext cx="2200046" cy="1447800"/>
+          </a:xfrm>
+          <a:prstGeom prst="rect">
+            <a:avLst/>
+          </a:prstGeom>
+          <a:noFill/>
+        </p:spPr>
+        <p:txBody>
+          <a:bodyPr wrap="square">
+            <a:spAutoFit/>
+          </a:bodyPr>
+          <a:lstStyle/>
+          <a:p>
+            <a:r>
+              <a:rPr sz="800">
+                <a:hlinkClick r:id="rId7"/>
+              </a:rPr>
+              <a:t>Lofar 1</a:t>
+            </a:r>
+          </a:p>
+          <a:p>
+            <a:r>
+              <a:rPr sz="800">
+                <a:hlinkClick r:id="rId8"/>
+              </a:rPr>
+              <a:t>Lofar 2</a:t>
+            </a:r>
+          </a:p>
+          <a:p>
+            <a:r>
+              <a:rPr sz="800">
+                <a:hlinkClick r:id="rId9"/>
+              </a:rPr>
+              <a:t>Lofar 3</a:t>
+            </a:r>
+          </a:p>
+        </p:txBody>
+      </p:sp>
+      <p:sp>
+        <p:nvSpPr>
+          <p:cNvPr id="9" name="Rounded Rectangle 8">
+            <a:hlinkClick r:id="rId10"/>
+          </p:cNvPr>
+          <p:cNvSpPr/>
+          <p:nvPr/>
+        </p:nvSpPr>
+        <p:spPr>
+          <a:xfrm>
+            <a:off x="7240219" y="731520"/>
+            <a:ext cx="2200046" cy="365760"/>
+          </a:xfrm>
+          <a:prstGeom prst="roundRect">
+            <a:avLst/>
+          </a:prstGeom>
+          <a:solidFill>
+            <a:srgbClr val="E8EEF7"/>
+          </a:solidFill>
+          <a:ln>
+            <a:solidFill>
+              <a:srgbClr val="1F3A5F"/>
+            </a:solidFill>
+          </a:ln>
+        </p:spPr>
+        <p:style>
+          <a:lnRef idx="1">
+            <a:schemeClr val="accent1"/>
+          </a:lnRef>
+          <a:fillRef idx="3">
+            <a:schemeClr val="accent1"/>
+          </a:fillRef>
+          <a:effectRef idx="2">
+            <a:schemeClr val="accent1"/>
+          </a:effectRef>
+          <a:fontRef idx="minor">
+            <a:schemeClr val="lt1"/>
+          </a:fontRef>
+        </p:style>
+        <p:txBody>
+          <a:bodyPr rtlCol="0" anchor="ctr" lIns="45720" rIns="45720"/>
+          <a:lstStyle/>
+          <a:p>
+            <a:pPr algn="ctr"/>
+            <a:r>
+              <a:rPr sz="900">
+                <a:solidFill>
+                  <a:srgbClr val="1F3A5F"/>
+                </a:solidFill>
+              </a:rPr>
+              <a:t>Gram 6: FR Outrider, Category 3, Trill</a:t>
+            </a:r>
+          </a:p>
+        </p:txBody>
+      </p:sp>
+      <p:sp>
+        <p:nvSpPr>
+          <p:cNvPr id="10" name="TextBox 9"/>
+          <p:cNvSpPr txBox="1"/>
+          <p:nvPr/>
+        </p:nvSpPr>
+        <p:spPr>
+          <a:xfrm>
+            <a:off x="7240219" y="1115568"/>
+            <a:ext cx="2200046" cy="1447800"/>
+          </a:xfrm>
+          <a:prstGeom prst="rect">
+            <a:avLst/>
+          </a:prstGeom>
+          <a:noFill/>
+        </p:spPr>
+        <p:txBody>
+          <a:bodyPr wrap="square">
+            <a:spAutoFit/>
+          </a:bodyPr>
+          <a:lstStyle/>
+          <a:p>
+            <a:r>
+              <a:rPr sz="800">
+                <a:hlinkClick r:id="rId11"/>
+              </a:rPr>
+              <a:t>Lofar 1</a:t>
+            </a:r>
+          </a:p>
+          <a:p>
+            <a:r>
+              <a:rPr sz="800">
+                <a:hlinkClick r:id="rId12"/>
+              </a:rPr>
+              <a:t>Lofar 2</a:t>
+            </a:r>
+          </a:p>
+        </p:txBody>
+      </p:sp>
+      <p:sp>
+        <p:nvSpPr>
+          <p:cNvPr id="11" name="Rounded Rectangle 10">
+            <a:hlinkClick r:id="rId13"/>
+          </p:cNvPr>
+          <p:cNvSpPr/>
+          <p:nvPr/>
+        </p:nvSpPr>
+        <p:spPr>
+          <a:xfrm>
+            <a:off x="9531705" y="731520"/>
+            <a:ext cx="2200046" cy="365760"/>
+          </a:xfrm>
+          <a:prstGeom prst="roundRect">
+            <a:avLst/>
+          </a:prstGeom>
+          <a:solidFill>
+            <a:srgbClr val="E8EEF7"/>
+          </a:solidFill>
+          <a:ln>
+            <a:solidFill>
+              <a:srgbClr val="1F3A5F"/>
+            </a:solidFill>
+          </a:ln>
+        </p:spPr>
+        <p:style>
+          <a:lnRef idx="1">
+            <a:schemeClr val="accent1"/>
+          </a:lnRef>
+          <a:fillRef idx="3">
+            <a:schemeClr val="accent1"/>
+          </a:fillRef>
+          <a:effectRef idx="2">
+            <a:schemeClr val="accent1"/>
+          </a:effectRef>
+          <a:fontRef idx="minor">
+            <a:schemeClr val="lt1"/>
+          </a:fontRef>
+        </p:style>
+        <p:txBody>
+          <a:bodyPr rtlCol="0" anchor="ctr" lIns="45720" rIns="45720"/>
+          <a:lstStyle/>
+          <a:p>
+            <a:pPr algn="ctr"/>
+            <a:r>
+              <a:rPr sz="900">
+                <a:solidFill>
+                  <a:srgbClr val="1F3A5F"/>
+                </a:solidFill>
+              </a:rPr>
+              <a:t>Gram 7: Imperial-class contact bearing 172, codename Betazed</a:t>
+            </a:r>
+          </a:p>
+        </p:txBody>
+      </p:sp>
+      <p:sp>
+        <p:nvSpPr>
+          <p:cNvPr id="12" name="TextBox 11"/>
+          <p:cNvSpPr txBox="1"/>
+          <p:nvPr/>
+        </p:nvSpPr>
+        <p:spPr>
+          <a:xfrm>
+            <a:off x="9531705" y="1115568"/>
+            <a:ext cx="2200046" cy="1447800"/>
+          </a:xfrm>
+          <a:prstGeom prst="rect">
+            <a:avLst/>
+          </a:prstGeom>
+          <a:noFill/>
+        </p:spPr>
+        <p:txBody>
+          <a:bodyPr wrap="square">
+            <a:spAutoFit/>
+          </a:bodyPr>
+          <a:lstStyle/>
+          <a:p>
+            <a:r>
+              <a:rPr sz="800">
+                <a:hlinkClick r:id="rId14"/>
+              </a:rPr>
+              <a:t>Lofar 1</a:t>
+            </a:r>
+          </a:p>
+          <a:p>
+            <a:r>
+              <a:rPr sz="800">
+                <a:hlinkClick r:id="rId15"/>
+              </a:rPr>
+              <a:t>Lofar 2</a:t>
+            </a:r>
+          </a:p>
+        </p:txBody>
+      </p:sp>
+      <p:sp>
+        <p:nvSpPr>
+          <p:cNvPr id="13" name="Rounded Rectangle 12">
+            <a:hlinkClick r:id="rId16"/>
+          </p:cNvPr>
+          <p:cNvSpPr/>
+          <p:nvPr/>
+        </p:nvSpPr>
+        <p:spPr>
+          <a:xfrm>
+            <a:off x="365760" y="2682240"/>
+            <a:ext cx="2200046" cy="365760"/>
+          </a:xfrm>
+          <a:prstGeom prst="roundRect">
+            <a:avLst/>
+          </a:prstGeom>
+          <a:solidFill>
+            <a:srgbClr val="E8EEF7"/>
+          </a:solidFill>
+          <a:ln>
+            <a:solidFill>
+              <a:srgbClr val="1F3A5F"/>
+            </a:solidFill>
+          </a:ln>
+        </p:spPr>
+        <p:style>
+          <a:lnRef idx="1">
+            <a:schemeClr val="accent1"/>
+          </a:lnRef>
+          <a:fillRef idx="3">
+            <a:schemeClr val="accent1"/>
+          </a:fillRef>
+          <a:effectRef idx="2">
+            <a:schemeClr val="accent1"/>
+          </a:effectRef>
+          <a:fontRef idx="minor">
+            <a:schemeClr val="lt1"/>
+          </a:fontRef>
+        </p:style>
+        <p:txBody>
+          <a:bodyPr rtlCol="0" anchor="ctr" lIns="45720" rIns="45720"/>
+          <a:lstStyle/>
+          <a:p>
+            <a:pPr algn="ctr"/>
+            <a:r>
+              <a:rPr sz="900">
+                <a:solidFill>
+                  <a:srgbClr val="1F3A5F"/>
+                </a:solidFill>
+              </a:rPr>
+              <a:t>Gram 8: FR Outrider, Category 1, Romulus</a:t>
+            </a:r>
+          </a:p>
+        </p:txBody>
+      </p:sp>
+      <p:sp>
+        <p:nvSpPr>
+          <p:cNvPr id="14" name="TextBox 13"/>
+          <p:cNvSpPr txBox="1"/>
+          <p:nvPr/>
+        </p:nvSpPr>
+        <p:spPr>
+          <a:xfrm>
+            <a:off x="365760" y="3066288"/>
+            <a:ext cx="2200046" cy="1447800"/>
+          </a:xfrm>
+          <a:prstGeom prst="rect">
+            <a:avLst/>
+          </a:prstGeom>
+          <a:noFill/>
+        </p:spPr>
+        <p:txBody>
+          <a:bodyPr wrap="square">
+            <a:spAutoFit/>
+          </a:bodyPr>
+          <a:lstStyle/>
+          <a:p>
+            <a:r>
+              <a:rPr sz="800">
+                <a:hlinkClick r:id="rId17"/>
+              </a:rPr>
+              <a:t>Lofar 1</a:t>
+            </a:r>
+          </a:p>
+          <a:p>
+            <a:r>
+              <a:rPr sz="800">
+                <a:hlinkClick r:id="rId18"/>
+              </a:rPr>
+              <a:t>Lofar 2</a:t>
+            </a:r>
+          </a:p>
+          <a:p>
+            <a:r>
+              <a:rPr sz="800">
+                <a:hlinkClick r:id="rId19"/>
+              </a:rPr>
+              <a:t>Lofar 3</a:t>
+            </a:r>
+          </a:p>
+          <a:p>
+            <a:r>
+              <a:rPr sz="800">
+                <a:hlinkClick r:id="rId20"/>
+              </a:rPr>
+              <a:t>Lofar 4</a:t>
+            </a:r>
+          </a:p>
+        </p:txBody>
+      </p:sp>
+      <p:sp>
+        <p:nvSpPr>
+          <p:cNvPr id="15" name="Rounded Rectangle 14">
+            <a:hlinkClick r:id="rId21"/>
+          </p:cNvPr>
+          <p:cNvSpPr/>
+          <p:nvPr/>
+        </p:nvSpPr>
+        <p:spPr>
+          <a:xfrm>
+            <a:off x="2657246" y="2682240"/>
+            <a:ext cx="2200046" cy="365760"/>
+          </a:xfrm>
+          <a:prstGeom prst="roundRect">
+            <a:avLst/>
+          </a:prstGeom>
+          <a:solidFill>
+            <a:srgbClr val="E8EEF7"/>
+          </a:solidFill>
+          <a:ln>
+            <a:solidFill>
+              <a:srgbClr val="1F3A5F"/>
+            </a:solidFill>
+          </a:ln>
+        </p:spPr>
+        <p:style>
+          <a:lnRef idx="1">
+            <a:schemeClr val="accent1"/>
+          </a:lnRef>
+          <a:fillRef idx="3">
+            <a:schemeClr val="accent1"/>
+          </a:fillRef>
+          <a:effectRef idx="2">
+            <a:schemeClr val="accent1"/>
+          </a:effectRef>
+          <a:fontRef idx="minor">
+            <a:schemeClr val="lt1"/>
+          </a:fontRef>
+        </p:style>
+        <p:txBody>
+          <a:bodyPr rtlCol="0" anchor="ctr" lIns="45720" rIns="45720"/>
+          <a:lstStyle/>
+          <a:p>
+            <a:pPr algn="ctr"/>
+            <a:r>
+              <a:rPr sz="900">
+                <a:solidFill>
+                  <a:srgbClr val="1F3A5F"/>
+                </a:solidFill>
+              </a:rPr>
+              <a:t>Gram 9: FR A-wing, Category 3, Tatooine</a:t>
+            </a:r>
+          </a:p>
+        </p:txBody>
+      </p:sp>
+      <p:sp>
+        <p:nvSpPr>
+          <p:cNvPr id="16" name="TextBox 15"/>
+          <p:cNvSpPr txBox="1"/>
+          <p:nvPr/>
+        </p:nvSpPr>
+        <p:spPr>
+          <a:xfrm>
+            <a:off x="2657246" y="3066288"/>
+            <a:ext cx="2200046" cy="1447800"/>
+          </a:xfrm>
+          <a:prstGeom prst="rect">
+            <a:avLst/>
+          </a:prstGeom>
+          <a:noFill/>
+        </p:spPr>
+        <p:txBody>
+          <a:bodyPr wrap="square">
+            <a:spAutoFit/>
+          </a:bodyPr>
+          <a:lstStyle/>
+          <a:p>
+            <a:r>
+              <a:rPr sz="800">
+                <a:hlinkClick r:id="rId22"/>
+              </a:rPr>
+              <a:t>Lofar 1</a:t>
+            </a:r>
+          </a:p>
+          <a:p>
+            <a:r>
+              <a:rPr sz="800">
+                <a:hlinkClick r:id="rId23"/>
+              </a:rPr>
+              <a:t>Lofar 2</a:t>
+            </a:r>
+          </a:p>
+          <a:p>
+            <a:r>
+              <a:rPr sz="800">
+                <a:hlinkClick r:id="rId24"/>
+              </a:rPr>
+              <a:t>Lofar 3</a:t>
+            </a:r>
+          </a:p>
+        </p:txBody>
+      </p:sp>
+      <p:sp>
+        <p:nvSpPr>
+          <p:cNvPr id="17" name="Rounded Rectangle 16">
+            <a:hlinkClick r:id="rId25"/>
+          </p:cNvPr>
+          <p:cNvSpPr/>
+          <p:nvPr/>
+        </p:nvSpPr>
+        <p:spPr>
+          <a:xfrm>
+            <a:off x="4948732" y="2682240"/>
+            <a:ext cx="2200046" cy="365760"/>
+          </a:xfrm>
+          <a:prstGeom prst="roundRect">
+            <a:avLst/>
+          </a:prstGeom>
+          <a:solidFill>
+            <a:srgbClr val="E8EEF7"/>
+          </a:solidFill>
+          <a:ln>
+            <a:solidFill>
+              <a:srgbClr val="1F3A5F"/>
+            </a:solidFill>
+          </a:ln>
+        </p:spPr>
+        <p:style>
+          <a:lnRef idx="1">
+            <a:schemeClr val="accent1"/>
+          </a:lnRef>
+          <a:fillRef idx="3">
+            <a:schemeClr val="accent1"/>
+          </a:fillRef>
+          <a:effectRef idx="2">
+            <a:schemeClr val="accent1"/>
+          </a:effectRef>
+          <a:fontRef idx="minor">
+            <a:schemeClr val="lt1"/>
+          </a:fontRef>
+        </p:style>
+        <p:txBody>
+          <a:bodyPr rtlCol="0" anchor="ctr" lIns="45720" rIns="45720"/>
+          <a:lstStyle/>
+          <a:p>
+            <a:pPr algn="ctr"/>
+            <a:r>
+              <a:rPr sz="900">
+                <a:solidFill>
+                  <a:srgbClr val="1F3A5F"/>
+                </a:solidFill>
+              </a:rPr>
+              <a:t>Gram 10: FR Cerritos, Category 4, Gandalf</a:t>
+            </a:r>
+          </a:p>
+        </p:txBody>
+      </p:sp>
+      <p:sp>
+        <p:nvSpPr>
+          <p:cNvPr id="18" name="TextBox 17"/>
+          <p:cNvSpPr txBox="1"/>
+          <p:nvPr/>
+        </p:nvSpPr>
+        <p:spPr>
+          <a:xfrm>
+            <a:off x="4948732" y="3066288"/>
+            <a:ext cx="2200046" cy="1447800"/>
+          </a:xfrm>
+          <a:prstGeom prst="rect">
+            <a:avLst/>
+          </a:prstGeom>
+          <a:noFill/>
+        </p:spPr>
+        <p:txBody>
+          <a:bodyPr wrap="square">
+            <a:spAutoFit/>
+          </a:bodyPr>
+          <a:lstStyle/>
+          <a:p>
+            <a:r>
+              <a:rPr sz="800">
+                <a:hlinkClick r:id="rId26"/>
+              </a:rPr>
+              <a:t>Lofar 1</a:t>
+            </a:r>
+          </a:p>
+          <a:p>
+            <a:r>
+              <a:rPr sz="800">
+                <a:hlinkClick r:id="rId27"/>
+              </a:rPr>
+              <a:t>Lofar 2</a:t>
+            </a:r>
+          </a:p>
+        </p:txBody>
+      </p:sp>
+      <p:sp>
+        <p:nvSpPr>
+          <p:cNvPr id="19" name="Rounded Rectangle 18">
+            <a:hlinkClick r:id="rId28"/>
+          </p:cNvPr>
+          <p:cNvSpPr/>
+          <p:nvPr/>
+        </p:nvSpPr>
+        <p:spPr>
+          <a:xfrm>
+            <a:off x="7240219" y="2682240"/>
+            <a:ext cx="2200046" cy="365760"/>
+          </a:xfrm>
+          <a:prstGeom prst="roundRect">
+            <a:avLst/>
+          </a:prstGeom>
+          <a:solidFill>
+            <a:srgbClr val="E8EEF7"/>
+          </a:solidFill>
+          <a:ln>
+            <a:solidFill>
+              <a:srgbClr val="1F3A5F"/>
+            </a:solidFill>
+          </a:ln>
+        </p:spPr>
+        <p:style>
+          <a:lnRef idx="1">
+            <a:schemeClr val="accent1"/>
+          </a:lnRef>
+          <a:fillRef idx="3">
+            <a:schemeClr val="accent1"/>
+          </a:fillRef>
+          <a:effectRef idx="2">
+            <a:schemeClr val="accent1"/>
+          </a:effectRef>
+          <a:fontRef idx="minor">
+            <a:schemeClr val="lt1"/>
+          </a:fontRef>
+        </p:style>
+        <p:txBody>
+          <a:bodyPr rtlCol="0" anchor="ctr" lIns="45720" rIns="45720"/>
+          <a:lstStyle/>
+          <a:p>
+            <a:pPr algn="ctr"/>
+            <a:r>
+              <a:rPr sz="900">
+                <a:solidFill>
+                  <a:srgbClr val="1F3A5F"/>
+                </a:solidFill>
+              </a:rPr>
+              <a:t>Gram 13: Corellian Corvette contact bearing 190, codename Caprica</a:t>
+            </a:r>
+          </a:p>
+        </p:txBody>
+      </p:sp>
+      <p:sp>
+        <p:nvSpPr>
+          <p:cNvPr id="20" name="TextBox 19"/>
+          <p:cNvSpPr txBox="1"/>
+          <p:nvPr/>
+        </p:nvSpPr>
+        <p:spPr>
+          <a:xfrm>
+            <a:off x="7240219" y="3066288"/>
+            <a:ext cx="2200046" cy="1447800"/>
+          </a:xfrm>
+          <a:prstGeom prst="rect">
+            <a:avLst/>
+          </a:prstGeom>
+          <a:noFill/>
+        </p:spPr>
+        <p:txBody>
+          <a:bodyPr wrap="square">
+            <a:spAutoFit/>
+          </a:bodyPr>
+          <a:lstStyle/>
+          <a:p>
+            <a:r>
+              <a:rPr sz="800">
+                <a:hlinkClick r:id="rId29"/>
+              </a:rPr>
+              <a:t>Lofar 1</a:t>
+            </a:r>
+          </a:p>
+        </p:txBody>
+      </p:sp>
+      <p:sp>
+        <p:nvSpPr>
+          <p:cNvPr id="21" name="Rounded Rectangle 20">
+            <a:hlinkClick r:id="rId30"/>
+          </p:cNvPr>
+          <p:cNvSpPr/>
+          <p:nvPr/>
+        </p:nvSpPr>
+        <p:spPr>
+          <a:xfrm>
+            <a:off x="9531705" y="2682240"/>
+            <a:ext cx="2200046" cy="365760"/>
+          </a:xfrm>
+          <a:prstGeom prst="roundRect">
+            <a:avLst/>
+          </a:prstGeom>
+          <a:solidFill>
+            <a:srgbClr val="E8EEF7"/>
+          </a:solidFill>
+          <a:ln>
+            <a:solidFill>
+              <a:srgbClr val="1F3A5F"/>
+            </a:solidFill>
+          </a:ln>
+        </p:spPr>
+        <p:style>
+          <a:lnRef idx="1">
+            <a:schemeClr val="accent1"/>
+          </a:lnRef>
+          <a:fillRef idx="3">
+            <a:schemeClr val="accent1"/>
+          </a:fillRef>
+          <a:effectRef idx="2">
+            <a:schemeClr val="accent1"/>
+          </a:effectRef>
+          <a:fontRef idx="minor">
+            <a:schemeClr val="lt1"/>
+          </a:fontRef>
+        </p:style>
+        <p:txBody>
+          <a:bodyPr rtlCol="0" anchor="ctr" lIns="45720" rIns="45720"/>
+          <a:lstStyle/>
+          <a:p>
+            <a:pPr algn="ctr"/>
+            <a:r>
+              <a:rPr sz="900">
+                <a:solidFill>
+                  <a:srgbClr val="1F3A5F"/>
+                </a:solidFill>
+              </a:rPr>
+              <a:t>Gram 14: FR Corellian Corvette, Category 1, Naboo</a:t>
+            </a:r>
+          </a:p>
+        </p:txBody>
+      </p:sp>
+      <p:sp>
+        <p:nvSpPr>
+          <p:cNvPr id="22" name="TextBox 21"/>
+          <p:cNvSpPr txBox="1"/>
+          <p:nvPr/>
+        </p:nvSpPr>
+        <p:spPr>
+          <a:xfrm>
+            <a:off x="9531705" y="3066288"/>
+            <a:ext cx="2200046" cy="1447800"/>
+          </a:xfrm>
+          <a:prstGeom prst="rect">
+            <a:avLst/>
+          </a:prstGeom>
+          <a:noFill/>
+        </p:spPr>
+        <p:txBody>
+          <a:bodyPr wrap="square">
+            <a:spAutoFit/>
+          </a:bodyPr>
+          <a:lstStyle/>
+          <a:p>
+            <a:r>
+              <a:rPr sz="800">
+                <a:hlinkClick r:id="rId31"/>
+              </a:rPr>
+              <a:t>Lofar 1</a:t>
+            </a:r>
+          </a:p>
+          <a:p>
+            <a:r>
+              <a:rPr sz="800">
+                <a:hlinkClick r:id="rId32"/>
+              </a:rPr>
+              <a:t>Lofar 2</a:t>
+            </a:r>
+          </a:p>
+          <a:p>
+            <a:r>
+              <a:rPr sz="800">
+                <a:hlinkClick r:id="rId33"/>
+              </a:rPr>
+              <a:t>Lofar 3</a:t>
+            </a:r>
+          </a:p>
+          <a:p>
+            <a:r>
+              <a:rPr sz="800">
+                <a:hlinkClick r:id="rId34"/>
+              </a:rPr>
+              <a:t>Lofar 4</a:t>
+            </a:r>
+          </a:p>
+        </p:txBody>
+      </p:sp>
+      <p:sp>
+        <p:nvSpPr>
+          <p:cNvPr id="23" name="Rounded Rectangle 22">
+            <a:hlinkClick r:id="rId35"/>
+          </p:cNvPr>
+          <p:cNvSpPr/>
+          <p:nvPr/>
+        </p:nvSpPr>
+        <p:spPr>
+          <a:xfrm>
+            <a:off x="365760" y="4632960"/>
+            <a:ext cx="2200046" cy="365760"/>
+          </a:xfrm>
+          <a:prstGeom prst="roundRect">
+            <a:avLst/>
+          </a:prstGeom>
+          <a:solidFill>
+            <a:srgbClr val="E8EEF7"/>
+          </a:solidFill>
+          <a:ln>
+            <a:solidFill>
+              <a:srgbClr val="1F3A5F"/>
+            </a:solidFill>
+          </a:ln>
+        </p:spPr>
+        <p:style>
+          <a:lnRef idx="1">
+            <a:schemeClr val="accent1"/>
+          </a:lnRef>
+          <a:fillRef idx="3">
+            <a:schemeClr val="accent1"/>
+          </a:fillRef>
+          <a:effectRef idx="2">
+            <a:schemeClr val="accent1"/>
+          </a:effectRef>
+          <a:fontRef idx="minor">
+            <a:schemeClr val="lt1"/>
+          </a:fontRef>
+        </p:style>
+        <p:txBody>
+          <a:bodyPr rtlCol="0" anchor="ctr" lIns="45720" rIns="45720"/>
+          <a:lstStyle/>
+          <a:p>
+            <a:pPr algn="ctr"/>
+            <a:r>
+              <a:rPr sz="900">
+                <a:solidFill>
+                  <a:srgbClr val="1F3A5F"/>
+                </a:solidFill>
+              </a:rPr>
+              <a:t>Gram 15: FR TIE Fighter, Category 1, Bajor</a:t>
+            </a:r>
+          </a:p>
+        </p:txBody>
+      </p:sp>
+      <p:sp>
+        <p:nvSpPr>
+          <p:cNvPr id="24" name="TextBox 23"/>
+          <p:cNvSpPr txBox="1"/>
+          <p:nvPr/>
+        </p:nvSpPr>
+        <p:spPr>
+          <a:xfrm>
+            <a:off x="365760" y="5017008"/>
+            <a:ext cx="2200046" cy="1447800"/>
+          </a:xfrm>
+          <a:prstGeom prst="rect">
+            <a:avLst/>
+          </a:prstGeom>
+          <a:noFill/>
+        </p:spPr>
+        <p:txBody>
+          <a:bodyPr wrap="square">
+            <a:spAutoFit/>
+          </a:bodyPr>
+          <a:lstStyle/>
+          <a:p>
+            <a:r>
+              <a:rPr sz="800">
+                <a:hlinkClick r:id="rId36"/>
+              </a:rPr>
+              <a:t>Lofar 1</a:t>
+            </a:r>
+          </a:p>
+        </p:txBody>
+      </p:sp>
+      <p:sp>
+        <p:nvSpPr>
+          <p:cNvPr id="25" name="Rounded Rectangle 24">
+            <a:hlinkClick r:id="rId37"/>
+          </p:cNvPr>
+          <p:cNvSpPr/>
+          <p:nvPr/>
+        </p:nvSpPr>
+        <p:spPr>
+          <a:xfrm>
+            <a:off x="2657246" y="4632960"/>
+            <a:ext cx="2200046" cy="365760"/>
+          </a:xfrm>
+          <a:prstGeom prst="roundRect">
+            <a:avLst/>
+          </a:prstGeom>
+          <a:solidFill>
+            <a:srgbClr val="E8EEF7"/>
+          </a:solidFill>
+          <a:ln>
+            <a:solidFill>
+              <a:srgbClr val="1F3A5F"/>
+            </a:solidFill>
+          </a:ln>
+        </p:spPr>
+        <p:style>
+          <a:lnRef idx="1">
+            <a:schemeClr val="accent1"/>
+          </a:lnRef>
+          <a:fillRef idx="3">
+            <a:schemeClr val="accent1"/>
+          </a:fillRef>
+          <a:effectRef idx="2">
+            <a:schemeClr val="accent1"/>
+          </a:effectRef>
+          <a:fontRef idx="minor">
+            <a:schemeClr val="lt1"/>
+          </a:fontRef>
+        </p:style>
+        <p:txBody>
+          <a:bodyPr rtlCol="0" anchor="ctr" lIns="45720" rIns="45720"/>
+          <a:lstStyle/>
+          <a:p>
+            <a:pPr algn="ctr"/>
+            <a:r>
+              <a:rPr sz="900">
+                <a:solidFill>
+                  <a:srgbClr val="1F3A5F"/>
+                </a:solidFill>
+              </a:rPr>
+              <a:t>Gram 17: Sovereign-class contact bearing 335, codename Yavin</a:t>
+            </a:r>
+          </a:p>
+        </p:txBody>
+      </p:sp>
+      <p:sp>
+        <p:nvSpPr>
+          <p:cNvPr id="26" name="TextBox 25"/>
+          <p:cNvSpPr txBox="1"/>
+          <p:nvPr/>
+        </p:nvSpPr>
+        <p:spPr>
+          <a:xfrm>
+            <a:off x="2657246" y="5017008"/>
+            <a:ext cx="2200046" cy="1447800"/>
+          </a:xfrm>
+          <a:prstGeom prst="rect">
+            <a:avLst/>
+          </a:prstGeom>
+          <a:noFill/>
+        </p:spPr>
+        <p:txBody>
+          <a:bodyPr wrap="square">
+            <a:spAutoFit/>
+          </a:bodyPr>
+          <a:lstStyle/>
+          <a:p>
+            <a:r>
+              <a:rPr sz="800">
+                <a:hlinkClick r:id="rId38"/>
+              </a:rPr>
+              <a:t>Lofar 1</a:t>
+            </a:r>
+          </a:p>
+          <a:p>
+            <a:r>
+              <a:rPr sz="800">
+                <a:hlinkClick r:id="rId39"/>
+              </a:rPr>
+              <a:t>Lofar 2</a:t>
+            </a:r>
+          </a:p>
+          <a:p>
+            <a:r>
+              <a:rPr sz="800">
+                <a:hlinkClick r:id="rId40"/>
+              </a:rPr>
+              <a:t>Lofar 3</a:t>
+            </a:r>
+          </a:p>
+          <a:p>
+            <a:r>
+              <a:rPr sz="800">
+                <a:hlinkClick r:id="rId41"/>
+              </a:rPr>
+              <a:t>Lofar 4</a:t>
+            </a:r>
+          </a:p>
+        </p:txBody>
+      </p:sp>
+      <p:sp>
+        <p:nvSpPr>
+          <p:cNvPr id="27" name="Rounded Rectangle 26">
+            <a:hlinkClick r:id="rId42"/>
+          </p:cNvPr>
+          <p:cNvSpPr/>
+          <p:nvPr/>
+        </p:nvSpPr>
+        <p:spPr>
+          <a:xfrm>
+            <a:off x="4948732" y="4632960"/>
+            <a:ext cx="2200046" cy="365760"/>
+          </a:xfrm>
+          <a:prstGeom prst="roundRect">
+            <a:avLst/>
+          </a:prstGeom>
+          <a:solidFill>
+            <a:srgbClr val="E8EEF7"/>
+          </a:solidFill>
+          <a:ln>
+            <a:solidFill>
+              <a:srgbClr val="1F3A5F"/>
+            </a:solidFill>
+          </a:ln>
+        </p:spPr>
+        <p:style>
+          <a:lnRef idx="1">
+            <a:schemeClr val="accent1"/>
+          </a:lnRef>
+          <a:fillRef idx="3">
+            <a:schemeClr val="accent1"/>
+          </a:fillRef>
+          <a:effectRef idx="2">
+            <a:schemeClr val="accent1"/>
+          </a:effectRef>
+          <a:fontRef idx="minor">
+            <a:schemeClr val="lt1"/>
+          </a:fontRef>
+        </p:style>
+        <p:txBody>
+          <a:bodyPr rtlCol="0" anchor="ctr" lIns="45720" rIns="45720"/>
+          <a:lstStyle/>
+          <a:p>
+            <a:pPr algn="ctr"/>
+            <a:r>
+              <a:rPr sz="900">
+                <a:solidFill>
+                  <a:srgbClr val="1F3A5F"/>
+                </a:solidFill>
+              </a:rPr>
+              <a:t>Gram 19: Lambda Shuttle contact bearing 244, codename Tatooine</a:t>
+            </a:r>
+          </a:p>
+        </p:txBody>
+      </p:sp>
+      <p:sp>
+        <p:nvSpPr>
+          <p:cNvPr id="28" name="TextBox 27"/>
+          <p:cNvSpPr txBox="1"/>
+          <p:nvPr/>
+        </p:nvSpPr>
+        <p:spPr>
+          <a:xfrm>
+            <a:off x="4948732" y="5017008"/>
+            <a:ext cx="2200046" cy="1447800"/>
+          </a:xfrm>
+          <a:prstGeom prst="rect">
+            <a:avLst/>
+          </a:prstGeom>
+          <a:noFill/>
+        </p:spPr>
+        <p:txBody>
+          <a:bodyPr wrap="square">
+            <a:spAutoFit/>
+          </a:bodyPr>
+          <a:lstStyle/>
+          <a:p>
+            <a:r>
+              <a:rPr sz="800">
+                <a:hlinkClick r:id="rId43"/>
+              </a:rPr>
+              <a:t>Lofar 1</a:t>
+            </a:r>
+          </a:p>
+          <a:p>
+            <a:r>
+              <a:rPr sz="800">
+                <a:hlinkClick r:id="rId44"/>
+              </a:rPr>
+              <a:t>Lofar 2</a:t>
+            </a:r>
+          </a:p>
+          <a:p>
+            <a:r>
+              <a:rPr sz="800">
+                <a:hlinkClick r:id="rId45"/>
+              </a:rPr>
+              <a:t>Lofar 3</a:t>
+            </a:r>
+          </a:p>
+          <a:p>
+            <a:r>
+              <a:rPr sz="800">
+                <a:hlinkClick r:id="rId46"/>
+              </a:rPr>
+              <a:t>Lofar 4</a:t>
+            </a:r>
+          </a:p>
+        </p:txBody>
+      </p:sp>
+      <p:sp>
+        <p:nvSpPr>
+          <p:cNvPr id="29" name="Rounded Rectangle 28">
+            <a:hlinkClick r:id="rId47"/>
+          </p:cNvPr>
+          <p:cNvSpPr/>
+          <p:nvPr/>
+        </p:nvSpPr>
+        <p:spPr>
+          <a:xfrm>
+            <a:off x="7240219" y="4632960"/>
+            <a:ext cx="2200046" cy="365760"/>
+          </a:xfrm>
+          <a:prstGeom prst="roundRect">
+            <a:avLst/>
+          </a:prstGeom>
+          <a:solidFill>
+            <a:srgbClr val="E8EEF7"/>
+          </a:solidFill>
+          <a:ln>
+            <a:solidFill>
+              <a:srgbClr val="1F3A5F"/>
+            </a:solidFill>
+          </a:ln>
+        </p:spPr>
+        <p:style>
+          <a:lnRef idx="1">
+            <a:schemeClr val="accent1"/>
+          </a:lnRef>
+          <a:fillRef idx="3">
+            <a:schemeClr val="accent1"/>
+          </a:fillRef>
+          <a:effectRef idx="2">
+            <a:schemeClr val="accent1"/>
+          </a:effectRef>
+          <a:fontRef idx="minor">
+            <a:schemeClr val="lt1"/>
+          </a:fontRef>
+        </p:style>
+        <p:txBody>
+          <a:bodyPr rtlCol="0" anchor="ctr" lIns="45720" rIns="45720"/>
+          <a:lstStyle/>
+          <a:p>
+            <a:pPr algn="ctr"/>
+            <a:r>
+              <a:rPr sz="900">
+                <a:solidFill>
+                  <a:srgbClr val="1F3A5F"/>
+                </a:solidFill>
+              </a:rPr>
+              <a:t>Gram 20: FR Equinox, Category 4, Bespin</a:t>
+            </a:r>
+          </a:p>
+        </p:txBody>
+      </p:sp>
+      <p:sp>
+        <p:nvSpPr>
+          <p:cNvPr id="30" name="TextBox 29"/>
+          <p:cNvSpPr txBox="1"/>
+          <p:nvPr/>
+        </p:nvSpPr>
+        <p:spPr>
+          <a:xfrm>
+            <a:off x="7240219" y="5017008"/>
+            <a:ext cx="2200046" cy="1447800"/>
+          </a:xfrm>
+          <a:prstGeom prst="rect">
+            <a:avLst/>
+          </a:prstGeom>
+          <a:noFill/>
+        </p:spPr>
+        <p:txBody>
+          <a:bodyPr wrap="square">
+            <a:spAutoFit/>
+          </a:bodyPr>
+          <a:lstStyle/>
+          <a:p>
+            <a:r>
+              <a:rPr sz="800">
+                <a:hlinkClick r:id="rId48"/>
+              </a:rPr>
+              <a:t>Lofar 1</a:t>
+            </a:r>
+          </a:p>
+          <a:p>
+            <a:r>
+              <a:rPr sz="800">
+                <a:hlinkClick r:id="rId49"/>
+              </a:rPr>
+              <a:t>Lofar 2</a:t>
+            </a:r>
+          </a:p>
+          <a:p>
+            <a:r>
+              <a:rPr sz="800">
+                <a:hlinkClick r:id="rId50"/>
+              </a:rPr>
+              <a:t>Lofar 3</a:t>
+            </a:r>
+          </a:p>
+          <a:p>
+            <a:r>
+              <a:rPr sz="800">
+                <a:hlinkClick r:id="rId51"/>
+              </a:rPr>
+              <a:t>Lofar 4</a:t>
+            </a:r>
+          </a:p>
+        </p:txBody>
+      </p:sp>
+      <p:sp>
+        <p:nvSpPr>
+          <p:cNvPr id="31" name="Rounded Rectangle 30">
+            <a:hlinkClick r:id="rId52"/>
+          </p:cNvPr>
+          <p:cNvSpPr/>
+          <p:nvPr/>
+        </p:nvSpPr>
+        <p:spPr>
+          <a:xfrm>
+            <a:off x="9531705" y="4632960"/>
+            <a:ext cx="2200046" cy="365760"/>
+          </a:xfrm>
+          <a:prstGeom prst="roundRect">
+            <a:avLst/>
+          </a:prstGeom>
+          <a:solidFill>
+            <a:srgbClr val="E8EEF7"/>
+          </a:solidFill>
+          <a:ln>
+            <a:solidFill>
+              <a:srgbClr val="1F3A5F"/>
+            </a:solidFill>
+          </a:ln>
+        </p:spPr>
+        <p:style>
+          <a:lnRef idx="1">
+            <a:schemeClr val="accent1"/>
+          </a:lnRef>
+          <a:fillRef idx="3">
+            <a:schemeClr val="accent1"/>
+          </a:fillRef>
+          <a:effectRef idx="2">
+            <a:schemeClr val="accent1"/>
+          </a:effectRef>
+          <a:fontRef idx="minor">
+            <a:schemeClr val="lt1"/>
+          </a:fontRef>
+        </p:style>
+        <p:txBody>
+          <a:bodyPr rtlCol="0" anchor="ctr" lIns="45720" rIns="45720"/>
+          <a:lstStyle/>
+          <a:p>
+            <a:pPr algn="ctr"/>
+            <a:r>
+              <a:rPr sz="900">
+                <a:solidFill>
+                  <a:srgbClr val="1F3A5F"/>
+                </a:solidFill>
+              </a:rPr>
+              <a:t>Gram 21: FR Equinox, Category 1, Endor</a:t>
+            </a:r>
+          </a:p>
+        </p:txBody>
+      </p:sp>
+      <p:sp>
+        <p:nvSpPr>
+          <p:cNvPr id="32" name="TextBox 31"/>
+          <p:cNvSpPr txBox="1"/>
+          <p:nvPr/>
+        </p:nvSpPr>
+        <p:spPr>
+          <a:xfrm>
+            <a:off x="9531705" y="5017008"/>
+            <a:ext cx="2200046" cy="1447800"/>
+          </a:xfrm>
+          <a:prstGeom prst="rect">
+            <a:avLst/>
+          </a:prstGeom>
+          <a:noFill/>
+        </p:spPr>
+        <p:txBody>
+          <a:bodyPr wrap="square">
+            <a:spAutoFit/>
+          </a:bodyPr>
+          <a:lstStyle/>
+          <a:p>
+            <a:r>
+              <a:rPr sz="800">
+                <a:hlinkClick r:id="rId53"/>
+              </a:rPr>
+              <a:t>Lofar 1</a:t>
+            </a:r>
+          </a:p>
+          <a:p>
+            <a:r>
+              <a:rPr sz="800">
+                <a:hlinkClick r:id="rId54"/>
+              </a:rPr>
+              <a:t>Lofar 2</a:t>
             </a:r>
           </a:p>
         </p:txBody>
@@ -3223,18 +4678,18 @@
                   <a:srgbClr val="FFFFFF"/>
                 </a:solidFill>
               </a:rPr>
-              <a:t>Instructor Progress Test 3 Grams — Page 1 of 2</a:t>
-            </a:r>
-          </a:p>
-        </p:txBody>
-      </p:sp>
-      <p:sp>
-        <p:nvSpPr>
-          <p:cNvPr id="3" name="Rounded Rectangle 2"/>
+              <a:t>Instructor Progress Test 3 Grams — Page 2 of 2</a:t>
+            </a:r>
+          </a:p>
+        </p:txBody>
+      </p:sp>
+      <p:sp>
+        <p:nvSpPr>
+          <p:cNvPr id="3" name="Rounded Rectangle 2">
+            <a:hlinkClick r:id="rId2"/>
+          </p:cNvPr>
           <p:cNvSpPr/>
-          <p:nvPr>
-            <a:hlinkClick r:id="rId2"/>
-          </p:nvPr>
+          <p:nvPr/>
         </p:nvSpPr>
         <p:spPr>
           <a:xfrm>
@@ -3278,7 +4733,7 @@
                   <a:srgbClr val="1F3A5F"/>
                 </a:solidFill>
               </a:rPr>
-              <a:t>Gram 1: FR Millennium Falcon, Category 3, Mustafar</a:t>
+              <a:t>Gram 22: Mon Calamari Cruiser contact bearing 043, codename Vulcan</a:t>
             </a:r>
           </a:p>
         </p:txBody>
@@ -3312,15 +4767,39 @@
               <a:t>Lofar 1</a:t>
             </a:r>
           </a:p>
-        </p:txBody>
-      </p:sp>
-      <p:sp>
-        <p:nvSpPr>
-          <p:cNvPr id="5" name="Rounded Rectangle 4"/>
+          <a:p>
+            <a:r>
+              <a:rPr sz="800">
+                <a:hlinkClick r:id="rId4"/>
+              </a:rPr>
+              <a:t>Lofar 2</a:t>
+            </a:r>
+          </a:p>
+          <a:p>
+            <a:r>
+              <a:rPr sz="800">
+                <a:hlinkClick r:id="rId5"/>
+              </a:rPr>
+              <a:t>Lofar 3</a:t>
+            </a:r>
+          </a:p>
+          <a:p>
+            <a:r>
+              <a:rPr sz="800">
+                <a:hlinkClick r:id="rId6"/>
+              </a:rPr>
+              <a:t>Lofar 4</a:t>
+            </a:r>
+          </a:p>
+        </p:txBody>
+      </p:sp>
+      <p:sp>
+        <p:nvSpPr>
+          <p:cNvPr id="5" name="Rounded Rectangle 4">
+            <a:hlinkClick r:id="rId7"/>
+          </p:cNvPr>
           <p:cNvSpPr/>
-          <p:nvPr>
-            <a:hlinkClick r:id="rId4"/>
-          </p:nvPr>
+          <p:nvPr/>
         </p:nvSpPr>
         <p:spPr>
           <a:xfrm>
@@ -3364,7 +4843,7 @@
                   <a:srgbClr val="1F3A5F"/>
                 </a:solidFill>
               </a:rPr>
-              <a:t>Gram 2: X-wing contact bearing 140, codename Endor</a:t>
+              <a:t>Gram 23: X-wing contact bearing 303, codename Dank</a:t>
             </a:r>
           </a:p>
         </p:txBody>
@@ -3393,20 +4872,28 @@
           <a:p>
             <a:r>
               <a:rPr sz="800">
-                <a:hlinkClick r:id="rId5"/>
+                <a:hlinkClick r:id="rId8"/>
               </a:rPr>
               <a:t>Lofar 1</a:t>
             </a:r>
           </a:p>
-        </p:txBody>
-      </p:sp>
-      <p:sp>
-        <p:nvSpPr>
-          <p:cNvPr id="7" name="Rounded Rectangle 6"/>
+          <a:p>
+            <a:r>
+              <a:rPr sz="800">
+                <a:hlinkClick r:id="rId9"/>
+              </a:rPr>
+              <a:t>Lofar 2</a:t>
+            </a:r>
+          </a:p>
+        </p:txBody>
+      </p:sp>
+      <p:sp>
+        <p:nvSpPr>
+          <p:cNvPr id="7" name="Rounded Rectangle 6">
+            <a:hlinkClick r:id="rId10"/>
+          </p:cNvPr>
           <p:cNvSpPr/>
-          <p:nvPr>
-            <a:hlinkClick r:id="rId6"/>
-          </p:nvPr>
+          <p:nvPr/>
         </p:nvSpPr>
         <p:spPr>
           <a:xfrm>
@@ -3450,7 +4937,7 @@
                   <a:srgbClr val="1F3A5F"/>
                 </a:solidFill>
               </a:rPr>
-              <a:t>Gram 4: FR Rebel One, Category 2, Naboo</a:t>
+              <a:t>Gram 24: FR Star Destroyer, Category 1, Dagobah</a:t>
             </a:r>
           </a:p>
         </p:txBody>
@@ -3479,7 +4966,7 @@
           <a:p>
             <a:r>
               <a:rPr sz="800">
-                <a:hlinkClick r:id="rId7"/>
+                <a:hlinkClick r:id="rId11"/>
               </a:rPr>
               <a:t>Lofar 1</a:t>
             </a:r>
@@ -3487,7 +4974,7 @@
           <a:p>
             <a:r>
               <a:rPr sz="800">
-                <a:hlinkClick r:id="rId8"/>
+                <a:hlinkClick r:id="rId12"/>
               </a:rPr>
               <a:t>Lofar 2</a:t>
             </a:r>
@@ -3495,20 +4982,28 @@
           <a:p>
             <a:r>
               <a:rPr sz="800">
-                <a:hlinkClick r:id="rId9"/>
+                <a:hlinkClick r:id="rId13"/>
               </a:rPr>
               <a:t>Lofar 3</a:t>
             </a:r>
           </a:p>
-        </p:txBody>
-      </p:sp>
-      <p:sp>
-        <p:nvSpPr>
-          <p:cNvPr id="9" name="Rounded Rectangle 8"/>
+          <a:p>
+            <a:r>
+              <a:rPr sz="800">
+                <a:hlinkClick r:id="rId14"/>
+              </a:rPr>
+              <a:t>Lofar 4</a:t>
+            </a:r>
+          </a:p>
+        </p:txBody>
+      </p:sp>
+      <p:sp>
+        <p:nvSpPr>
+          <p:cNvPr id="9" name="Rounded Rectangle 8">
+            <a:hlinkClick r:id="rId15"/>
+          </p:cNvPr>
           <p:cNvSpPr/>
-          <p:nvPr>
-            <a:hlinkClick r:id="rId10"/>
-          </p:nvPr>
+          <p:nvPr/>
         </p:nvSpPr>
         <p:spPr>
           <a:xfrm>
@@ -3552,7 +5047,7 @@
                   <a:srgbClr val="1F3A5F"/>
                 </a:solidFill>
               </a:rPr>
-              <a:t>Gram 6: FR Outrider, Category 3, Trill</a:t>
+              <a:t>Gram 25: FR Razor Crest, Category 4, Trill</a:t>
             </a:r>
           </a:p>
         </p:txBody>
@@ -3581,28 +5076,20 @@
           <a:p>
             <a:r>
               <a:rPr sz="800">
-                <a:hlinkClick r:id="rId11"/>
+                <a:hlinkClick r:id="rId16"/>
               </a:rPr>
               <a:t>Lofar 1</a:t>
             </a:r>
           </a:p>
-          <a:p>
-            <a:r>
-              <a:rPr sz="800">
-                <a:hlinkClick r:id="rId12"/>
-              </a:rPr>
-              <a:t>Lofar 2</a:t>
-            </a:r>
-          </a:p>
-        </p:txBody>
-      </p:sp>
-      <p:sp>
-        <p:nvSpPr>
-          <p:cNvPr id="11" name="Rounded Rectangle 10"/>
+        </p:txBody>
+      </p:sp>
+      <p:sp>
+        <p:nvSpPr>
+          <p:cNvPr id="11" name="Rounded Rectangle 10">
+            <a:hlinkClick r:id="rId17"/>
+          </p:cNvPr>
           <p:cNvSpPr/>
-          <p:nvPr>
-            <a:hlinkClick r:id="rId13"/>
-          </p:nvPr>
+          <p:nvPr/>
         </p:nvSpPr>
         <p:spPr>
           <a:xfrm>
@@ -3646,7 +5133,7 @@
                   <a:srgbClr val="1F3A5F"/>
                 </a:solidFill>
               </a:rPr>
-              <a:t>Gram 7: Imperial-class contact bearing 172, codename Betazed</a:t>
+              <a:t>Gram 26: Voyager contact bearing 256, codename Coruscant</a:t>
             </a:r>
           </a:p>
         </p:txBody>
@@ -3675,28 +5162,20 @@
           <a:p>
             <a:r>
               <a:rPr sz="800">
-                <a:hlinkClick r:id="rId14"/>
+                <a:hlinkClick r:id="rId18"/>
               </a:rPr>
               <a:t>Lofar 1</a:t>
             </a:r>
           </a:p>
-          <a:p>
-            <a:r>
-              <a:rPr sz="800">
-                <a:hlinkClick r:id="rId15"/>
-              </a:rPr>
-              <a:t>Lofar 2</a:t>
-            </a:r>
-          </a:p>
-        </p:txBody>
-      </p:sp>
-      <p:sp>
-        <p:nvSpPr>
-          <p:cNvPr id="13" name="Rounded Rectangle 12"/>
+        </p:txBody>
+      </p:sp>
+      <p:sp>
+        <p:nvSpPr>
+          <p:cNvPr id="13" name="Rounded Rectangle 12">
+            <a:hlinkClick r:id="rId19"/>
+          </p:cNvPr>
           <p:cNvSpPr/>
-          <p:nvPr>
-            <a:hlinkClick r:id="rId16"/>
-          </p:nvPr>
+          <p:nvPr/>
         </p:nvSpPr>
         <p:spPr>
           <a:xfrm>
@@ -3740,7 +5219,7 @@
                   <a:srgbClr val="1F3A5F"/>
                 </a:solidFill>
               </a:rPr>
-              <a:t>Gram 8: FR Outrider, Category 1, Romulus</a:t>
+              <a:t>Gram 27: FR Millennium Falcon, Category 2, Kobol</a:t>
             </a:r>
           </a:p>
         </p:txBody>
@@ -3769,7 +5248,7 @@
           <a:p>
             <a:r>
               <a:rPr sz="800">
-                <a:hlinkClick r:id="rId17"/>
+                <a:hlinkClick r:id="rId20"/>
               </a:rPr>
               <a:t>Lofar 1</a:t>
             </a:r>
@@ -3777,7 +5256,7 @@
           <a:p>
             <a:r>
               <a:rPr sz="800">
-                <a:hlinkClick r:id="rId18"/>
+                <a:hlinkClick r:id="rId21"/>
               </a:rPr>
               <a:t>Lofar 2</a:t>
             </a:r>
@@ -3785,7 +5264,7 @@
           <a:p>
             <a:r>
               <a:rPr sz="800">
-                <a:hlinkClick r:id="rId19"/>
+                <a:hlinkClick r:id="rId22"/>
               </a:rPr>
               <a:t>Lofar 3</a:t>
             </a:r>
@@ -3793,7 +5272,7 @@
           <a:p>
             <a:r>
               <a:rPr sz="800">
-                <a:hlinkClick r:id="rId20"/>
+                <a:hlinkClick r:id="rId23"/>
               </a:rPr>
               <a:t>Lofar 4</a:t>
             </a:r>
@@ -3802,11 +5281,11 @@
       </p:sp>
       <p:sp>
         <p:nvSpPr>
-          <p:cNvPr id="15" name="Rounded Rectangle 14"/>
+          <p:cNvPr id="15" name="Rounded Rectangle 14">
+            <a:hlinkClick r:id="rId24"/>
+          </p:cNvPr>
           <p:cNvSpPr/>
-          <p:nvPr>
-            <a:hlinkClick r:id="rId21"/>
-          </p:nvPr>
+          <p:nvPr/>
         </p:nvSpPr>
         <p:spPr>
           <a:xfrm>
@@ -3850,7 +5329,7 @@
                   <a:srgbClr val="1F3A5F"/>
                 </a:solidFill>
               </a:rPr>
-              <a:t>Gram 9: FR A-wing, Category 3, Tatooine</a:t>
+              <a:t>Gram 28: FR Reliant, Category 2, Coruscant</a:t>
             </a:r>
           </a:p>
         </p:txBody>
@@ -3879,7 +5358,7 @@
           <a:p>
             <a:r>
               <a:rPr sz="800">
-                <a:hlinkClick r:id="rId22"/>
+                <a:hlinkClick r:id="rId25"/>
               </a:rPr>
               <a:t>Lofar 1</a:t>
             </a:r>
@@ -3887,28 +5366,20 @@
           <a:p>
             <a:r>
               <a:rPr sz="800">
-                <a:hlinkClick r:id="rId23"/>
+                <a:hlinkClick r:id="rId26"/>
               </a:rPr>
               <a:t>Lofar 2</a:t>
             </a:r>
           </a:p>
-          <a:p>
-            <a:r>
-              <a:rPr sz="800">
-                <a:hlinkClick r:id="rId24"/>
-              </a:rPr>
-              <a:t>Lofar 3</a:t>
-            </a:r>
-          </a:p>
-        </p:txBody>
-      </p:sp>
-      <p:sp>
-        <p:nvSpPr>
-          <p:cNvPr id="17" name="Rounded Rectangle 16"/>
+        </p:txBody>
+      </p:sp>
+      <p:sp>
+        <p:nvSpPr>
+          <p:cNvPr id="17" name="Rounded Rectangle 16">
+            <a:hlinkClick r:id="rId27"/>
+          </p:cNvPr>
           <p:cNvSpPr/>
-          <p:nvPr>
-            <a:hlinkClick r:id="rId25"/>
-          </p:nvPr>
+          <p:nvPr/>
         </p:nvSpPr>
         <p:spPr>
           <a:xfrm>
@@ -3952,7 +5423,7 @@
                   <a:srgbClr val="1F3A5F"/>
                 </a:solidFill>
               </a:rPr>
-              <a:t>Gram 10: FR Cerritos, Category 4, Gandalf</a:t>
+              <a:t>Gram 29: Miranda-class contact bearing 190, codename Defiant</a:t>
             </a:r>
           </a:p>
         </p:txBody>
@@ -3981,7 +5452,7 @@
           <a:p>
             <a:r>
               <a:rPr sz="800">
-                <a:hlinkClick r:id="rId26"/>
+                <a:hlinkClick r:id="rId28"/>
               </a:rPr>
               <a:t>Lofar 1</a:t>
             </a:r>
@@ -3989,7 +5460,7 @@
           <a:p>
             <a:r>
               <a:rPr sz="800">
-                <a:hlinkClick r:id="rId27"/>
+                <a:hlinkClick r:id="rId29"/>
               </a:rPr>
               <a:t>Lofar 2</a:t>
             </a:r>
@@ -3998,11 +5469,11 @@
       </p:sp>
       <p:sp>
         <p:nvSpPr>
-          <p:cNvPr id="19" name="Rounded Rectangle 18"/>
+          <p:cNvPr id="19" name="Rounded Rectangle 18">
+            <a:hlinkClick r:id="rId30"/>
+          </p:cNvPr>
           <p:cNvSpPr/>
-          <p:nvPr>
-            <a:hlinkClick r:id="rId28"/>
-          </p:nvPr>
+          <p:nvPr/>
         </p:nvSpPr>
         <p:spPr>
           <a:xfrm>
@@ -4046,7 +5517,7 @@
                   <a:srgbClr val="1F3A5F"/>
                 </a:solidFill>
               </a:rPr>
-              <a:t>Gram 13: Corellian Corvette contact bearing 190, codename Caprica</a:t>
+              <a:t>Gram 30: Ghost contact bearing 075, codename Yavin</a:t>
             </a:r>
           </a:p>
         </p:txBody>
@@ -4075,20 +5546,36 @@
           <a:p>
             <a:r>
               <a:rPr sz="800">
-                <a:hlinkClick r:id="rId29"/>
+                <a:hlinkClick r:id="rId31"/>
               </a:rPr>
               <a:t>Lofar 1</a:t>
             </a:r>
           </a:p>
-        </p:txBody>
-      </p:sp>
-      <p:sp>
-        <p:nvSpPr>
-          <p:cNvPr id="21" name="Rounded Rectangle 20"/>
+          <a:p>
+            <a:r>
+              <a:rPr sz="800">
+                <a:hlinkClick r:id="rId32"/>
+              </a:rPr>
+              <a:t>Lofar 2</a:t>
+            </a:r>
+          </a:p>
+          <a:p>
+            <a:r>
+              <a:rPr sz="800">
+                <a:hlinkClick r:id="rId33"/>
+              </a:rPr>
+              <a:t>Lofar 3</a:t>
+            </a:r>
+          </a:p>
+        </p:txBody>
+      </p:sp>
+      <p:sp>
+        <p:nvSpPr>
+          <p:cNvPr id="21" name="Rounded Rectangle 20">
+            <a:hlinkClick r:id="rId34"/>
+          </p:cNvPr>
           <p:cNvSpPr/>
-          <p:nvPr>
-            <a:hlinkClick r:id="rId30"/>
-          </p:nvPr>
+          <p:nvPr/>
         </p:nvSpPr>
         <p:spPr>
           <a:xfrm>
@@ -4132,7 +5619,7 @@
                   <a:srgbClr val="1F3A5F"/>
                 </a:solidFill>
               </a:rPr>
-              <a:t>Gram 14: FR Corellian Corvette, Category 1, Naboo</a:t>
+              <a:t>Gram 31: Nebula-class contact bearing 338, codename Vulcan</a:t>
             </a:r>
           </a:p>
         </p:txBody>
@@ -4161,7 +5648,7 @@
           <a:p>
             <a:r>
               <a:rPr sz="800">
-                <a:hlinkClick r:id="rId31"/>
+                <a:hlinkClick r:id="rId35"/>
               </a:rPr>
               <a:t>Lofar 1</a:t>
             </a:r>
@@ -4169,7 +5656,7 @@
           <a:p>
             <a:r>
               <a:rPr sz="800">
-                <a:hlinkClick r:id="rId32"/>
+                <a:hlinkClick r:id="rId36"/>
               </a:rPr>
               <a:t>Lofar 2</a:t>
             </a:r>
@@ -4177,7 +5664,7 @@
           <a:p>
             <a:r>
               <a:rPr sz="800">
-                <a:hlinkClick r:id="rId33"/>
+                <a:hlinkClick r:id="rId37"/>
               </a:rPr>
               <a:t>Lofar 3</a:t>
             </a:r>
@@ -4185,7 +5672,7 @@
           <a:p>
             <a:r>
               <a:rPr sz="800">
-                <a:hlinkClick r:id="rId34"/>
+                <a:hlinkClick r:id="rId38"/>
               </a:rPr>
               <a:t>Lofar 4</a:t>
             </a:r>
@@ -4194,11 +5681,11 @@
       </p:sp>
       <p:sp>
         <p:nvSpPr>
-          <p:cNvPr id="23" name="Rounded Rectangle 22"/>
+          <p:cNvPr id="23" name="Rounded Rectangle 22">
+            <a:hlinkClick r:id="rId39"/>
+          </p:cNvPr>
           <p:cNvSpPr/>
-          <p:nvPr>
-            <a:hlinkClick r:id="rId35"/>
-          </p:nvPr>
+          <p:nvPr/>
         </p:nvSpPr>
         <p:spPr>
           <a:xfrm>
@@ -4242,7 +5729,7 @@
                   <a:srgbClr val="1F3A5F"/>
                 </a:solidFill>
               </a:rPr>
-              <a:t>Gram 15: FR TIE Fighter, Category 1, Bajor</a:t>
+              <a:t>Gram 32: FR Rebel One, Category 2, Mustafar</a:t>
             </a:r>
           </a:p>
         </p:txBody>
@@ -4271,7 +5758,7 @@
           <a:p>
             <a:r>
               <a:rPr sz="800">
-                <a:hlinkClick r:id="rId36"/>
+                <a:hlinkClick r:id="rId40"/>
               </a:rPr>
               <a:t>Lofar 1</a:t>
             </a:r>
@@ -4280,11 +5767,11 @@
       </p:sp>
       <p:sp>
         <p:nvSpPr>
-          <p:cNvPr id="25" name="Rounded Rectangle 24"/>
+          <p:cNvPr id="25" name="Rounded Rectangle 24">
+            <a:hlinkClick r:id="rId41"/>
+          </p:cNvPr>
           <p:cNvSpPr/>
-          <p:nvPr>
-            <a:hlinkClick r:id="rId37"/>
-          </p:nvPr>
+          <p:nvPr/>
         </p:nvSpPr>
         <p:spPr>
           <a:xfrm>
@@ -4328,7 +5815,7 @@
                   <a:srgbClr val="1F3A5F"/>
                 </a:solidFill>
               </a:rPr>
-              <a:t>Gram 17: Sovereign-class contact bearing 335, codename Yavin</a:t>
+              <a:t>Gram 33: FR Voyager, Category 4, Hoth</a:t>
             </a:r>
           </a:p>
         </p:txBody>
@@ -4357,44 +5844,20 @@
           <a:p>
             <a:r>
               <a:rPr sz="800">
-                <a:hlinkClick r:id="rId38"/>
+                <a:hlinkClick r:id="rId42"/>
               </a:rPr>
               <a:t>Lofar 1</a:t>
             </a:r>
           </a:p>
-          <a:p>
-            <a:r>
-              <a:rPr sz="800">
-                <a:hlinkClick r:id="rId39"/>
-              </a:rPr>
-              <a:t>Lofar 2</a:t>
-            </a:r>
-          </a:p>
-          <a:p>
-            <a:r>
-              <a:rPr sz="800">
-                <a:hlinkClick r:id="rId40"/>
-              </a:rPr>
-              <a:t>Lofar 3</a:t>
-            </a:r>
-          </a:p>
-          <a:p>
-            <a:r>
-              <a:rPr sz="800">
-                <a:hlinkClick r:id="rId41"/>
-              </a:rPr>
-              <a:t>Lofar 4</a:t>
-            </a:r>
-          </a:p>
-        </p:txBody>
-      </p:sp>
-      <p:sp>
-        <p:nvSpPr>
-          <p:cNvPr id="27" name="Rounded Rectangle 26"/>
+        </p:txBody>
+      </p:sp>
+      <p:sp>
+        <p:nvSpPr>
+          <p:cNvPr id="27" name="Rounded Rectangle 26">
+            <a:hlinkClick r:id="rId43"/>
+          </p:cNvPr>
           <p:cNvSpPr/>
-          <p:nvPr>
-            <a:hlinkClick r:id="rId42"/>
-          </p:nvPr>
+          <p:nvPr/>
         </p:nvSpPr>
         <p:spPr>
           <a:xfrm>
@@ -4438,7 +5901,7 @@
                   <a:srgbClr val="1F3A5F"/>
                 </a:solidFill>
               </a:rPr>
-              <a:t>Gram 19: Lambda Shuttle contact bearing 244, codename Tatooine</a:t>
+              <a:t>Gram 34: FR Rebel One, Category 4, Bajor</a:t>
             </a:r>
           </a:p>
         </p:txBody>
@@ -4467,44 +5930,20 @@
           <a:p>
             <a:r>
               <a:rPr sz="800">
-                <a:hlinkClick r:id="rId43"/>
+                <a:hlinkClick r:id="rId44"/>
               </a:rPr>
               <a:t>Lofar 1</a:t>
             </a:r>
           </a:p>
-          <a:p>
-            <a:r>
-              <a:rPr sz="800">
-                <a:hlinkClick r:id="rId44"/>
-              </a:rPr>
-              <a:t>Lofar 2</a:t>
-            </a:r>
-          </a:p>
-          <a:p>
-            <a:r>
-              <a:rPr sz="800">
-                <a:hlinkClick r:id="rId45"/>
-              </a:rPr>
-              <a:t>Lofar 3</a:t>
-            </a:r>
-          </a:p>
-          <a:p>
-            <a:r>
-              <a:rPr sz="800">
-                <a:hlinkClick r:id="rId46"/>
-              </a:rPr>
-              <a:t>Lofar 4</a:t>
-            </a:r>
-          </a:p>
-        </p:txBody>
-      </p:sp>
-      <p:sp>
-        <p:nvSpPr>
-          <p:cNvPr id="29" name="Rounded Rectangle 28"/>
+        </p:txBody>
+      </p:sp>
+      <p:sp>
+        <p:nvSpPr>
+          <p:cNvPr id="29" name="Rounded Rectangle 28">
+            <a:hlinkClick r:id="rId45"/>
+          </p:cNvPr>
           <p:cNvSpPr/>
-          <p:nvPr>
-            <a:hlinkClick r:id="rId47"/>
-          </p:nvPr>
+          <p:nvPr/>
         </p:nvSpPr>
         <p:spPr>
           <a:xfrm>
@@ -4548,7 +5987,7 @@
                   <a:srgbClr val="1F3A5F"/>
                 </a:solidFill>
               </a:rPr>
-              <a:t>Gram 20: FR Equinox, Category 4, Bespin</a:t>
+              <a:t>Gram 35: FR Tantive IV, Category 4, Romulus</a:t>
             </a:r>
           </a:p>
         </p:txBody>
@@ -4577,9 +6016,25 @@
           <a:p>
             <a:r>
               <a:rPr sz="800">
+                <a:hlinkClick r:id="rId46"/>
+              </a:rPr>
+              <a:t>Lofar 1</a:t>
+            </a:r>
+          </a:p>
+          <a:p>
+            <a:r>
+              <a:rPr sz="800">
+                <a:hlinkClick r:id="rId47"/>
+              </a:rPr>
+              <a:t>Lofar 2</a:t>
+            </a:r>
+          </a:p>
+          <a:p>
+            <a:r>
+              <a:rPr sz="800">
                 <a:hlinkClick r:id="rId48"/>
               </a:rPr>
-              <a:t>Lofar 1</a:t>
+              <a:t>Lofar 3</a:t>
             </a:r>
           </a:p>
           <a:p>
@@ -4587,22 +6042,6 @@
               <a:rPr sz="800">
                 <a:hlinkClick r:id="rId49"/>
               </a:rPr>
-              <a:t>Lofar 2</a:t>
-            </a:r>
-          </a:p>
-          <a:p>
-            <a:r>
-              <a:rPr sz="800">
-                <a:hlinkClick r:id="rId50"/>
-              </a:rPr>
-              <a:t>Lofar 3</a:t>
-            </a:r>
-          </a:p>
-          <a:p>
-            <a:r>
-              <a:rPr sz="800">
-                <a:hlinkClick r:id="rId51"/>
-              </a:rPr>
               <a:t>Lofar 4</a:t>
             </a:r>
           </a:p>
@@ -4610,11 +6049,11 @@
       </p:sp>
       <p:sp>
         <p:nvSpPr>
-          <p:cNvPr id="31" name="Rounded Rectangle 30"/>
+          <p:cNvPr id="31" name="Rounded Rectangle 30">
+            <a:hlinkClick r:id="rId50"/>
+          </p:cNvPr>
           <p:cNvSpPr/>
-          <p:nvPr>
-            <a:hlinkClick r:id="rId52"/>
-          </p:nvPr>
+          <p:nvPr/>
         </p:nvSpPr>
         <p:spPr>
           <a:xfrm>
@@ -4658,7 +6097,7 @@
                   <a:srgbClr val="1F3A5F"/>
                 </a:solidFill>
               </a:rPr>
-              <a:t>Gram 21: FR Equinox, Category 1, Endor</a:t>
+              <a:t>Gram 36: Equinox contact bearing 209, codename Kobol</a:t>
             </a:r>
           </a:p>
         </p:txBody>
@@ -4687,1638 +6126,25 @@
           <a:p>
             <a:r>
               <a:rPr sz="800">
+                <a:hlinkClick r:id="rId51"/>
+              </a:rPr>
+              <a:t>Lofar 1</a:t>
+            </a:r>
+          </a:p>
+          <a:p>
+            <a:r>
+              <a:rPr sz="800">
+                <a:hlinkClick r:id="rId52"/>
+              </a:rPr>
+              <a:t>Lofar 2</a:t>
+            </a:r>
+          </a:p>
+          <a:p>
+            <a:r>
+              <a:rPr sz="800">
                 <a:hlinkClick r:id="rId53"/>
               </a:rPr>
-              <a:t>Lofar 1</a:t>
-            </a:r>
-          </a:p>
-          <a:p>
-            <a:r>
-              <a:rPr sz="800">
-                <a:hlinkClick r:id="rId54"/>
-              </a:rPr>
-              <a:t>Lofar 2</a:t>
-            </a:r>
-          </a:p>
-        </p:txBody>
-      </p:sp>
-    </p:spTree>
-  </p:cSld>
-  <p:clrMapOvr>
-    <a:masterClrMapping/>
-  </p:clrMapOvr>
-</p:sld>
-</file>
-
-<file path=ppt/slides/slide3.xml><?xml version="1.0" encoding="utf-8"?>
-<p:sld xmlns:a="http://schemas.openxmlformats.org/drawingml/2006/main" xmlns:p="http://schemas.openxmlformats.org/presentationml/2006/main" xmlns:r="http://schemas.openxmlformats.org/officeDocument/2006/relationships">
-  <p:cSld>
-    <p:spTree>
-      <p:nvGrpSpPr>
-        <p:cNvPr id="1" name=""/>
-        <p:cNvGrpSpPr/>
-        <p:nvPr/>
-      </p:nvGrpSpPr>
-      <p:grpSpPr/>
-      <p:sp>
-        <p:nvSpPr>
-          <p:cNvPr id="2" name="Rectangle 1"/>
-          <p:cNvSpPr/>
-          <p:nvPr/>
-        </p:nvSpPr>
-        <p:spPr>
-          <a:xfrm>
-            <a:off x="0" y="0"/>
-            <a:ext cx="12188952" cy="548640"/>
-          </a:xfrm>
-          <a:prstGeom prst="rect">
-            <a:avLst/>
-          </a:prstGeom>
-          <a:solidFill>
-            <a:srgbClr val="1F3A5F"/>
-          </a:solidFill>
-          <a:ln>
-            <a:noFill/>
-          </a:ln>
-        </p:spPr>
-        <p:style>
-          <a:lnRef idx="1">
-            <a:schemeClr val="accent1"/>
-          </a:lnRef>
-          <a:fillRef idx="3">
-            <a:schemeClr val="accent1"/>
-          </a:fillRef>
-          <a:effectRef idx="2">
-            <a:schemeClr val="accent1"/>
-          </a:effectRef>
-          <a:fontRef idx="minor">
-            <a:schemeClr val="lt1"/>
-          </a:fontRef>
-        </p:style>
-        <p:txBody>
-          <a:bodyPr rtlCol="0" anchor="ctr" lIns="182880" rIns="182880"/>
-          <a:lstStyle/>
-          <a:p>
-            <a:pPr algn="ctr"/>
-            <a:r>
-              <a:rPr sz="2000" b="1">
-                <a:solidFill>
-                  <a:srgbClr val="FFFFFF"/>
-                </a:solidFill>
-              </a:rPr>
-              <a:t>Instructor Progress Test 3 Grams — Page 2 of 2</a:t>
-            </a:r>
-          </a:p>
-        </p:txBody>
-      </p:sp>
-      <p:sp>
-        <p:nvSpPr>
-          <p:cNvPr id="3" name="Rounded Rectangle 2"/>
-          <p:cNvSpPr/>
-          <p:nvPr>
-            <a:hlinkClick r:id="rId2"/>
-          </p:nvPr>
-        </p:nvSpPr>
-        <p:spPr>
-          <a:xfrm>
-            <a:off x="365760" y="731520"/>
-            <a:ext cx="2200046" cy="365760"/>
-          </a:xfrm>
-          <a:prstGeom prst="roundRect">
-            <a:avLst/>
-          </a:prstGeom>
-          <a:solidFill>
-            <a:srgbClr val="E8EEF7"/>
-          </a:solidFill>
-          <a:ln>
-            <a:solidFill>
-              <a:srgbClr val="1F3A5F"/>
-            </a:solidFill>
-          </a:ln>
-        </p:spPr>
-        <p:style>
-          <a:lnRef idx="1">
-            <a:schemeClr val="accent1"/>
-          </a:lnRef>
-          <a:fillRef idx="3">
-            <a:schemeClr val="accent1"/>
-          </a:fillRef>
-          <a:effectRef idx="2">
-            <a:schemeClr val="accent1"/>
-          </a:effectRef>
-          <a:fontRef idx="minor">
-            <a:schemeClr val="lt1"/>
-          </a:fontRef>
-        </p:style>
-        <p:txBody>
-          <a:bodyPr rtlCol="0" anchor="ctr" lIns="45720" rIns="45720"/>
-          <a:lstStyle/>
-          <a:p>
-            <a:pPr algn="ctr"/>
-            <a:r>
-              <a:rPr sz="900">
-                <a:solidFill>
-                  <a:srgbClr val="1F3A5F"/>
-                </a:solidFill>
-              </a:rPr>
-              <a:t>Gram 22: Mon Calamari Cruiser contact bearing 043, codename Vulcan</a:t>
-            </a:r>
-          </a:p>
-        </p:txBody>
-      </p:sp>
-      <p:sp>
-        <p:nvSpPr>
-          <p:cNvPr id="4" name="TextBox 3"/>
-          <p:cNvSpPr txBox="1"/>
-          <p:nvPr/>
-        </p:nvSpPr>
-        <p:spPr>
-          <a:xfrm>
-            <a:off x="365760" y="1115568"/>
-            <a:ext cx="2200046" cy="1447800"/>
-          </a:xfrm>
-          <a:prstGeom prst="rect">
-            <a:avLst/>
-          </a:prstGeom>
-          <a:noFill/>
-        </p:spPr>
-        <p:txBody>
-          <a:bodyPr wrap="square">
-            <a:spAutoFit/>
-          </a:bodyPr>
-          <a:lstStyle/>
-          <a:p>
-            <a:r>
-              <a:rPr sz="800">
-                <a:hlinkClick r:id="rId3"/>
-              </a:rPr>
-              <a:t>Lofar 1</a:t>
-            </a:r>
-          </a:p>
-          <a:p>
-            <a:r>
-              <a:rPr sz="800">
-                <a:hlinkClick r:id="rId4"/>
-              </a:rPr>
-              <a:t>Lofar 2</a:t>
-            </a:r>
-          </a:p>
-          <a:p>
-            <a:r>
-              <a:rPr sz="800">
-                <a:hlinkClick r:id="rId5"/>
-              </a:rPr>
               <a:t>Lofar 3</a:t>
-            </a:r>
-          </a:p>
-          <a:p>
-            <a:r>
-              <a:rPr sz="800">
-                <a:hlinkClick r:id="rId6"/>
-              </a:rPr>
-              <a:t>Lofar 4</a:t>
-            </a:r>
-          </a:p>
-        </p:txBody>
-      </p:sp>
-      <p:sp>
-        <p:nvSpPr>
-          <p:cNvPr id="5" name="Rounded Rectangle 4"/>
-          <p:cNvSpPr/>
-          <p:nvPr>
-            <a:hlinkClick r:id="rId7"/>
-          </p:nvPr>
-        </p:nvSpPr>
-        <p:spPr>
-          <a:xfrm>
-            <a:off x="2657246" y="731520"/>
-            <a:ext cx="2200046" cy="365760"/>
-          </a:xfrm>
-          <a:prstGeom prst="roundRect">
-            <a:avLst/>
-          </a:prstGeom>
-          <a:solidFill>
-            <a:srgbClr val="E8EEF7"/>
-          </a:solidFill>
-          <a:ln>
-            <a:solidFill>
-              <a:srgbClr val="1F3A5F"/>
-            </a:solidFill>
-          </a:ln>
-        </p:spPr>
-        <p:style>
-          <a:lnRef idx="1">
-            <a:schemeClr val="accent1"/>
-          </a:lnRef>
-          <a:fillRef idx="3">
-            <a:schemeClr val="accent1"/>
-          </a:fillRef>
-          <a:effectRef idx="2">
-            <a:schemeClr val="accent1"/>
-          </a:effectRef>
-          <a:fontRef idx="minor">
-            <a:schemeClr val="lt1"/>
-          </a:fontRef>
-        </p:style>
-        <p:txBody>
-          <a:bodyPr rtlCol="0" anchor="ctr" lIns="45720" rIns="45720"/>
-          <a:lstStyle/>
-          <a:p>
-            <a:pPr algn="ctr"/>
-            <a:r>
-              <a:rPr sz="900">
-                <a:solidFill>
-                  <a:srgbClr val="1F3A5F"/>
-                </a:solidFill>
-              </a:rPr>
-              <a:t>Gram 23: X-wing contact bearing 303, codename Dank</a:t>
-            </a:r>
-          </a:p>
-        </p:txBody>
-      </p:sp>
-      <p:sp>
-        <p:nvSpPr>
-          <p:cNvPr id="6" name="TextBox 5"/>
-          <p:cNvSpPr txBox="1"/>
-          <p:nvPr/>
-        </p:nvSpPr>
-        <p:spPr>
-          <a:xfrm>
-            <a:off x="2657246" y="1115568"/>
-            <a:ext cx="2200046" cy="1447800"/>
-          </a:xfrm>
-          <a:prstGeom prst="rect">
-            <a:avLst/>
-          </a:prstGeom>
-          <a:noFill/>
-        </p:spPr>
-        <p:txBody>
-          <a:bodyPr wrap="square">
-            <a:spAutoFit/>
-          </a:bodyPr>
-          <a:lstStyle/>
-          <a:p>
-            <a:r>
-              <a:rPr sz="800">
-                <a:hlinkClick r:id="rId8"/>
-              </a:rPr>
-              <a:t>Lofar 1</a:t>
-            </a:r>
-          </a:p>
-          <a:p>
-            <a:r>
-              <a:rPr sz="800">
-                <a:hlinkClick r:id="rId9"/>
-              </a:rPr>
-              <a:t>Lofar 2</a:t>
-            </a:r>
-          </a:p>
-        </p:txBody>
-      </p:sp>
-      <p:sp>
-        <p:nvSpPr>
-          <p:cNvPr id="7" name="Rounded Rectangle 6"/>
-          <p:cNvSpPr/>
-          <p:nvPr>
-            <a:hlinkClick r:id="rId10"/>
-          </p:nvPr>
-        </p:nvSpPr>
-        <p:spPr>
-          <a:xfrm>
-            <a:off x="4948732" y="731520"/>
-            <a:ext cx="2200046" cy="365760"/>
-          </a:xfrm>
-          <a:prstGeom prst="roundRect">
-            <a:avLst/>
-          </a:prstGeom>
-          <a:solidFill>
-            <a:srgbClr val="E8EEF7"/>
-          </a:solidFill>
-          <a:ln>
-            <a:solidFill>
-              <a:srgbClr val="1F3A5F"/>
-            </a:solidFill>
-          </a:ln>
-        </p:spPr>
-        <p:style>
-          <a:lnRef idx="1">
-            <a:schemeClr val="accent1"/>
-          </a:lnRef>
-          <a:fillRef idx="3">
-            <a:schemeClr val="accent1"/>
-          </a:fillRef>
-          <a:effectRef idx="2">
-            <a:schemeClr val="accent1"/>
-          </a:effectRef>
-          <a:fontRef idx="minor">
-            <a:schemeClr val="lt1"/>
-          </a:fontRef>
-        </p:style>
-        <p:txBody>
-          <a:bodyPr rtlCol="0" anchor="ctr" lIns="45720" rIns="45720"/>
-          <a:lstStyle/>
-          <a:p>
-            <a:pPr algn="ctr"/>
-            <a:r>
-              <a:rPr sz="900">
-                <a:solidFill>
-                  <a:srgbClr val="1F3A5F"/>
-                </a:solidFill>
-              </a:rPr>
-              <a:t>Gram 24: FR Star Destroyer, Category 1, Dagobah</a:t>
-            </a:r>
-          </a:p>
-        </p:txBody>
-      </p:sp>
-      <p:sp>
-        <p:nvSpPr>
-          <p:cNvPr id="8" name="TextBox 7"/>
-          <p:cNvSpPr txBox="1"/>
-          <p:nvPr/>
-        </p:nvSpPr>
-        <p:spPr>
-          <a:xfrm>
-            <a:off x="4948732" y="1115568"/>
-            <a:ext cx="2200046" cy="1447800"/>
-          </a:xfrm>
-          <a:prstGeom prst="rect">
-            <a:avLst/>
-          </a:prstGeom>
-          <a:noFill/>
-        </p:spPr>
-        <p:txBody>
-          <a:bodyPr wrap="square">
-            <a:spAutoFit/>
-          </a:bodyPr>
-          <a:lstStyle/>
-          <a:p>
-            <a:r>
-              <a:rPr sz="800">
-                <a:hlinkClick r:id="rId11"/>
-              </a:rPr>
-              <a:t>Lofar 1</a:t>
-            </a:r>
-          </a:p>
-          <a:p>
-            <a:r>
-              <a:rPr sz="800">
-                <a:hlinkClick r:id="rId12"/>
-              </a:rPr>
-              <a:t>Lofar 2</a:t>
-            </a:r>
-          </a:p>
-          <a:p>
-            <a:r>
-              <a:rPr sz="800">
-                <a:hlinkClick r:id="rId13"/>
-              </a:rPr>
-              <a:t>Lofar 3</a:t>
-            </a:r>
-          </a:p>
-          <a:p>
-            <a:r>
-              <a:rPr sz="800">
-                <a:hlinkClick r:id="rId14"/>
-              </a:rPr>
-              <a:t>Lofar 4</a:t>
-            </a:r>
-          </a:p>
-        </p:txBody>
-      </p:sp>
-      <p:sp>
-        <p:nvSpPr>
-          <p:cNvPr id="9" name="Rounded Rectangle 8"/>
-          <p:cNvSpPr/>
-          <p:nvPr>
-            <a:hlinkClick r:id="rId15"/>
-          </p:nvPr>
-        </p:nvSpPr>
-        <p:spPr>
-          <a:xfrm>
-            <a:off x="7240219" y="731520"/>
-            <a:ext cx="2200046" cy="365760"/>
-          </a:xfrm>
-          <a:prstGeom prst="roundRect">
-            <a:avLst/>
-          </a:prstGeom>
-          <a:solidFill>
-            <a:srgbClr val="E8EEF7"/>
-          </a:solidFill>
-          <a:ln>
-            <a:solidFill>
-              <a:srgbClr val="1F3A5F"/>
-            </a:solidFill>
-          </a:ln>
-        </p:spPr>
-        <p:style>
-          <a:lnRef idx="1">
-            <a:schemeClr val="accent1"/>
-          </a:lnRef>
-          <a:fillRef idx="3">
-            <a:schemeClr val="accent1"/>
-          </a:fillRef>
-          <a:effectRef idx="2">
-            <a:schemeClr val="accent1"/>
-          </a:effectRef>
-          <a:fontRef idx="minor">
-            <a:schemeClr val="lt1"/>
-          </a:fontRef>
-        </p:style>
-        <p:txBody>
-          <a:bodyPr rtlCol="0" anchor="ctr" lIns="45720" rIns="45720"/>
-          <a:lstStyle/>
-          <a:p>
-            <a:pPr algn="ctr"/>
-            <a:r>
-              <a:rPr sz="900">
-                <a:solidFill>
-                  <a:srgbClr val="1F3A5F"/>
-                </a:solidFill>
-              </a:rPr>
-              <a:t>Gram 25: FR Razor Crest, Category 4, Trill</a:t>
-            </a:r>
-          </a:p>
-        </p:txBody>
-      </p:sp>
-      <p:sp>
-        <p:nvSpPr>
-          <p:cNvPr id="10" name="TextBox 9"/>
-          <p:cNvSpPr txBox="1"/>
-          <p:nvPr/>
-        </p:nvSpPr>
-        <p:spPr>
-          <a:xfrm>
-            <a:off x="7240219" y="1115568"/>
-            <a:ext cx="2200046" cy="1447800"/>
-          </a:xfrm>
-          <a:prstGeom prst="rect">
-            <a:avLst/>
-          </a:prstGeom>
-          <a:noFill/>
-        </p:spPr>
-        <p:txBody>
-          <a:bodyPr wrap="square">
-            <a:spAutoFit/>
-          </a:bodyPr>
-          <a:lstStyle/>
-          <a:p>
-            <a:r>
-              <a:rPr sz="800">
-                <a:hlinkClick r:id="rId16"/>
-              </a:rPr>
-              <a:t>Lofar 1</a:t>
-            </a:r>
-          </a:p>
-        </p:txBody>
-      </p:sp>
-      <p:sp>
-        <p:nvSpPr>
-          <p:cNvPr id="11" name="Rounded Rectangle 10"/>
-          <p:cNvSpPr/>
-          <p:nvPr>
-            <a:hlinkClick r:id="rId17"/>
-          </p:nvPr>
-        </p:nvSpPr>
-        <p:spPr>
-          <a:xfrm>
-            <a:off x="9531705" y="731520"/>
-            <a:ext cx="2200046" cy="365760"/>
-          </a:xfrm>
-          <a:prstGeom prst="roundRect">
-            <a:avLst/>
-          </a:prstGeom>
-          <a:solidFill>
-            <a:srgbClr val="E8EEF7"/>
-          </a:solidFill>
-          <a:ln>
-            <a:solidFill>
-              <a:srgbClr val="1F3A5F"/>
-            </a:solidFill>
-          </a:ln>
-        </p:spPr>
-        <p:style>
-          <a:lnRef idx="1">
-            <a:schemeClr val="accent1"/>
-          </a:lnRef>
-          <a:fillRef idx="3">
-            <a:schemeClr val="accent1"/>
-          </a:fillRef>
-          <a:effectRef idx="2">
-            <a:schemeClr val="accent1"/>
-          </a:effectRef>
-          <a:fontRef idx="minor">
-            <a:schemeClr val="lt1"/>
-          </a:fontRef>
-        </p:style>
-        <p:txBody>
-          <a:bodyPr rtlCol="0" anchor="ctr" lIns="45720" rIns="45720"/>
-          <a:lstStyle/>
-          <a:p>
-            <a:pPr algn="ctr"/>
-            <a:r>
-              <a:rPr sz="900">
-                <a:solidFill>
-                  <a:srgbClr val="1F3A5F"/>
-                </a:solidFill>
-              </a:rPr>
-              <a:t>Gram 26: Voyager contact bearing 256, codename Coruscant</a:t>
-            </a:r>
-          </a:p>
-        </p:txBody>
-      </p:sp>
-      <p:sp>
-        <p:nvSpPr>
-          <p:cNvPr id="12" name="TextBox 11"/>
-          <p:cNvSpPr txBox="1"/>
-          <p:nvPr/>
-        </p:nvSpPr>
-        <p:spPr>
-          <a:xfrm>
-            <a:off x="9531705" y="1115568"/>
-            <a:ext cx="2200046" cy="1447800"/>
-          </a:xfrm>
-          <a:prstGeom prst="rect">
-            <a:avLst/>
-          </a:prstGeom>
-          <a:noFill/>
-        </p:spPr>
-        <p:txBody>
-          <a:bodyPr wrap="square">
-            <a:spAutoFit/>
-          </a:bodyPr>
-          <a:lstStyle/>
-          <a:p>
-            <a:r>
-              <a:rPr sz="800">
-                <a:hlinkClick r:id="rId18"/>
-              </a:rPr>
-              <a:t>Lofar 1</a:t>
-            </a:r>
-          </a:p>
-        </p:txBody>
-      </p:sp>
-      <p:sp>
-        <p:nvSpPr>
-          <p:cNvPr id="13" name="Rounded Rectangle 12"/>
-          <p:cNvSpPr/>
-          <p:nvPr>
-            <a:hlinkClick r:id="rId19"/>
-          </p:nvPr>
-        </p:nvSpPr>
-        <p:spPr>
-          <a:xfrm>
-            <a:off x="365760" y="2682240"/>
-            <a:ext cx="2200046" cy="365760"/>
-          </a:xfrm>
-          <a:prstGeom prst="roundRect">
-            <a:avLst/>
-          </a:prstGeom>
-          <a:solidFill>
-            <a:srgbClr val="E8EEF7"/>
-          </a:solidFill>
-          <a:ln>
-            <a:solidFill>
-              <a:srgbClr val="1F3A5F"/>
-            </a:solidFill>
-          </a:ln>
-        </p:spPr>
-        <p:style>
-          <a:lnRef idx="1">
-            <a:schemeClr val="accent1"/>
-          </a:lnRef>
-          <a:fillRef idx="3">
-            <a:schemeClr val="accent1"/>
-          </a:fillRef>
-          <a:effectRef idx="2">
-            <a:schemeClr val="accent1"/>
-          </a:effectRef>
-          <a:fontRef idx="minor">
-            <a:schemeClr val="lt1"/>
-          </a:fontRef>
-        </p:style>
-        <p:txBody>
-          <a:bodyPr rtlCol="0" anchor="ctr" lIns="45720" rIns="45720"/>
-          <a:lstStyle/>
-          <a:p>
-            <a:pPr algn="ctr"/>
-            <a:r>
-              <a:rPr sz="900">
-                <a:solidFill>
-                  <a:srgbClr val="1F3A5F"/>
-                </a:solidFill>
-              </a:rPr>
-              <a:t>Gram 27: FR Millennium Falcon, Category 2, Kobol</a:t>
-            </a:r>
-          </a:p>
-        </p:txBody>
-      </p:sp>
-      <p:sp>
-        <p:nvSpPr>
-          <p:cNvPr id="14" name="TextBox 13"/>
-          <p:cNvSpPr txBox="1"/>
-          <p:nvPr/>
-        </p:nvSpPr>
-        <p:spPr>
-          <a:xfrm>
-            <a:off x="365760" y="3066288"/>
-            <a:ext cx="2200046" cy="1447800"/>
-          </a:xfrm>
-          <a:prstGeom prst="rect">
-            <a:avLst/>
-          </a:prstGeom>
-          <a:noFill/>
-        </p:spPr>
-        <p:txBody>
-          <a:bodyPr wrap="square">
-            <a:spAutoFit/>
-          </a:bodyPr>
-          <a:lstStyle/>
-          <a:p>
-            <a:r>
-              <a:rPr sz="800">
-                <a:hlinkClick r:id="rId20"/>
-              </a:rPr>
-              <a:t>Lofar 1</a:t>
-            </a:r>
-          </a:p>
-          <a:p>
-            <a:r>
-              <a:rPr sz="800">
-                <a:hlinkClick r:id="rId21"/>
-              </a:rPr>
-              <a:t>Lofar 2</a:t>
-            </a:r>
-          </a:p>
-          <a:p>
-            <a:r>
-              <a:rPr sz="800">
-                <a:hlinkClick r:id="rId22"/>
-              </a:rPr>
-              <a:t>Lofar 3</a:t>
-            </a:r>
-          </a:p>
-          <a:p>
-            <a:r>
-              <a:rPr sz="800">
-                <a:hlinkClick r:id="rId23"/>
-              </a:rPr>
-              <a:t>Lofar 4</a:t>
-            </a:r>
-          </a:p>
-        </p:txBody>
-      </p:sp>
-      <p:sp>
-        <p:nvSpPr>
-          <p:cNvPr id="15" name="Rounded Rectangle 14"/>
-          <p:cNvSpPr/>
-          <p:nvPr>
-            <a:hlinkClick r:id="rId24"/>
-          </p:nvPr>
-        </p:nvSpPr>
-        <p:spPr>
-          <a:xfrm>
-            <a:off x="2657246" y="2682240"/>
-            <a:ext cx="2200046" cy="365760"/>
-          </a:xfrm>
-          <a:prstGeom prst="roundRect">
-            <a:avLst/>
-          </a:prstGeom>
-          <a:solidFill>
-            <a:srgbClr val="E8EEF7"/>
-          </a:solidFill>
-          <a:ln>
-            <a:solidFill>
-              <a:srgbClr val="1F3A5F"/>
-            </a:solidFill>
-          </a:ln>
-        </p:spPr>
-        <p:style>
-          <a:lnRef idx="1">
-            <a:schemeClr val="accent1"/>
-          </a:lnRef>
-          <a:fillRef idx="3">
-            <a:schemeClr val="accent1"/>
-          </a:fillRef>
-          <a:effectRef idx="2">
-            <a:schemeClr val="accent1"/>
-          </a:effectRef>
-          <a:fontRef idx="minor">
-            <a:schemeClr val="lt1"/>
-          </a:fontRef>
-        </p:style>
-        <p:txBody>
-          <a:bodyPr rtlCol="0" anchor="ctr" lIns="45720" rIns="45720"/>
-          <a:lstStyle/>
-          <a:p>
-            <a:pPr algn="ctr"/>
-            <a:r>
-              <a:rPr sz="900">
-                <a:solidFill>
-                  <a:srgbClr val="1F3A5F"/>
-                </a:solidFill>
-              </a:rPr>
-              <a:t>Gram 28: FR Reliant, Category 2, Coruscant</a:t>
-            </a:r>
-          </a:p>
-        </p:txBody>
-      </p:sp>
-      <p:sp>
-        <p:nvSpPr>
-          <p:cNvPr id="16" name="TextBox 15"/>
-          <p:cNvSpPr txBox="1"/>
-          <p:nvPr/>
-        </p:nvSpPr>
-        <p:spPr>
-          <a:xfrm>
-            <a:off x="2657246" y="3066288"/>
-            <a:ext cx="2200046" cy="1447800"/>
-          </a:xfrm>
-          <a:prstGeom prst="rect">
-            <a:avLst/>
-          </a:prstGeom>
-          <a:noFill/>
-        </p:spPr>
-        <p:txBody>
-          <a:bodyPr wrap="square">
-            <a:spAutoFit/>
-          </a:bodyPr>
-          <a:lstStyle/>
-          <a:p>
-            <a:r>
-              <a:rPr sz="800">
-                <a:hlinkClick r:id="rId25"/>
-              </a:rPr>
-              <a:t>Lofar 1</a:t>
-            </a:r>
-          </a:p>
-          <a:p>
-            <a:r>
-              <a:rPr sz="800">
-                <a:hlinkClick r:id="rId26"/>
-              </a:rPr>
-              <a:t>Lofar 2</a:t>
-            </a:r>
-          </a:p>
-        </p:txBody>
-      </p:sp>
-      <p:sp>
-        <p:nvSpPr>
-          <p:cNvPr id="17" name="Rounded Rectangle 16"/>
-          <p:cNvSpPr/>
-          <p:nvPr>
-            <a:hlinkClick r:id="rId27"/>
-          </p:nvPr>
-        </p:nvSpPr>
-        <p:spPr>
-          <a:xfrm>
-            <a:off x="4948732" y="2682240"/>
-            <a:ext cx="2200046" cy="365760"/>
-          </a:xfrm>
-          <a:prstGeom prst="roundRect">
-            <a:avLst/>
-          </a:prstGeom>
-          <a:solidFill>
-            <a:srgbClr val="E8EEF7"/>
-          </a:solidFill>
-          <a:ln>
-            <a:solidFill>
-              <a:srgbClr val="1F3A5F"/>
-            </a:solidFill>
-          </a:ln>
-        </p:spPr>
-        <p:style>
-          <a:lnRef idx="1">
-            <a:schemeClr val="accent1"/>
-          </a:lnRef>
-          <a:fillRef idx="3">
-            <a:schemeClr val="accent1"/>
-          </a:fillRef>
-          <a:effectRef idx="2">
-            <a:schemeClr val="accent1"/>
-          </a:effectRef>
-          <a:fontRef idx="minor">
-            <a:schemeClr val="lt1"/>
-          </a:fontRef>
-        </p:style>
-        <p:txBody>
-          <a:bodyPr rtlCol="0" anchor="ctr" lIns="45720" rIns="45720"/>
-          <a:lstStyle/>
-          <a:p>
-            <a:pPr algn="ctr"/>
-            <a:r>
-              <a:rPr sz="900">
-                <a:solidFill>
-                  <a:srgbClr val="1F3A5F"/>
-                </a:solidFill>
-              </a:rPr>
-              <a:t>Gram 29: Miranda-class contact bearing 190, codename Defiant</a:t>
-            </a:r>
-          </a:p>
-        </p:txBody>
-      </p:sp>
-      <p:sp>
-        <p:nvSpPr>
-          <p:cNvPr id="18" name="TextBox 17"/>
-          <p:cNvSpPr txBox="1"/>
-          <p:nvPr/>
-        </p:nvSpPr>
-        <p:spPr>
-          <a:xfrm>
-            <a:off x="4948732" y="3066288"/>
-            <a:ext cx="2200046" cy="1447800"/>
-          </a:xfrm>
-          <a:prstGeom prst="rect">
-            <a:avLst/>
-          </a:prstGeom>
-          <a:noFill/>
-        </p:spPr>
-        <p:txBody>
-          <a:bodyPr wrap="square">
-            <a:spAutoFit/>
-          </a:bodyPr>
-          <a:lstStyle/>
-          <a:p>
-            <a:r>
-              <a:rPr sz="800">
-                <a:hlinkClick r:id="rId28"/>
-              </a:rPr>
-              <a:t>Lofar 1</a:t>
-            </a:r>
-          </a:p>
-          <a:p>
-            <a:r>
-              <a:rPr sz="800">
-                <a:hlinkClick r:id="rId29"/>
-              </a:rPr>
-              <a:t>Lofar 2</a:t>
-            </a:r>
-          </a:p>
-        </p:txBody>
-      </p:sp>
-      <p:sp>
-        <p:nvSpPr>
-          <p:cNvPr id="19" name="Rounded Rectangle 18"/>
-          <p:cNvSpPr/>
-          <p:nvPr>
-            <a:hlinkClick r:id="rId30"/>
-          </p:nvPr>
-        </p:nvSpPr>
-        <p:spPr>
-          <a:xfrm>
-            <a:off x="7240219" y="2682240"/>
-            <a:ext cx="2200046" cy="365760"/>
-          </a:xfrm>
-          <a:prstGeom prst="roundRect">
-            <a:avLst/>
-          </a:prstGeom>
-          <a:solidFill>
-            <a:srgbClr val="E8EEF7"/>
-          </a:solidFill>
-          <a:ln>
-            <a:solidFill>
-              <a:srgbClr val="1F3A5F"/>
-            </a:solidFill>
-          </a:ln>
-        </p:spPr>
-        <p:style>
-          <a:lnRef idx="1">
-            <a:schemeClr val="accent1"/>
-          </a:lnRef>
-          <a:fillRef idx="3">
-            <a:schemeClr val="accent1"/>
-          </a:fillRef>
-          <a:effectRef idx="2">
-            <a:schemeClr val="accent1"/>
-          </a:effectRef>
-          <a:fontRef idx="minor">
-            <a:schemeClr val="lt1"/>
-          </a:fontRef>
-        </p:style>
-        <p:txBody>
-          <a:bodyPr rtlCol="0" anchor="ctr" lIns="45720" rIns="45720"/>
-          <a:lstStyle/>
-          <a:p>
-            <a:pPr algn="ctr"/>
-            <a:r>
-              <a:rPr sz="900">
-                <a:solidFill>
-                  <a:srgbClr val="1F3A5F"/>
-                </a:solidFill>
-              </a:rPr>
-              <a:t>Gram 30: Ghost contact bearing 075, codename Yavin</a:t>
-            </a:r>
-          </a:p>
-        </p:txBody>
-      </p:sp>
-      <p:sp>
-        <p:nvSpPr>
-          <p:cNvPr id="20" name="TextBox 19"/>
-          <p:cNvSpPr txBox="1"/>
-          <p:nvPr/>
-        </p:nvSpPr>
-        <p:spPr>
-          <a:xfrm>
-            <a:off x="7240219" y="3066288"/>
-            <a:ext cx="2200046" cy="1447800"/>
-          </a:xfrm>
-          <a:prstGeom prst="rect">
-            <a:avLst/>
-          </a:prstGeom>
-          <a:noFill/>
-        </p:spPr>
-        <p:txBody>
-          <a:bodyPr wrap="square">
-            <a:spAutoFit/>
-          </a:bodyPr>
-          <a:lstStyle/>
-          <a:p>
-            <a:r>
-              <a:rPr sz="800">
-                <a:hlinkClick r:id="rId31"/>
-              </a:rPr>
-              <a:t>Lofar 1</a:t>
-            </a:r>
-          </a:p>
-          <a:p>
-            <a:r>
-              <a:rPr sz="800">
-                <a:hlinkClick r:id="rId32"/>
-              </a:rPr>
-              <a:t>Lofar 2</a:t>
-            </a:r>
-          </a:p>
-          <a:p>
-            <a:r>
-              <a:rPr sz="800">
-                <a:hlinkClick r:id="rId33"/>
-              </a:rPr>
-              <a:t>Lofar 3</a:t>
-            </a:r>
-          </a:p>
-        </p:txBody>
-      </p:sp>
-      <p:sp>
-        <p:nvSpPr>
-          <p:cNvPr id="21" name="Rounded Rectangle 20"/>
-          <p:cNvSpPr/>
-          <p:nvPr>
-            <a:hlinkClick r:id="rId34"/>
-          </p:nvPr>
-        </p:nvSpPr>
-        <p:spPr>
-          <a:xfrm>
-            <a:off x="9531705" y="2682240"/>
-            <a:ext cx="2200046" cy="365760"/>
-          </a:xfrm>
-          <a:prstGeom prst="roundRect">
-            <a:avLst/>
-          </a:prstGeom>
-          <a:solidFill>
-            <a:srgbClr val="E8EEF7"/>
-          </a:solidFill>
-          <a:ln>
-            <a:solidFill>
-              <a:srgbClr val="1F3A5F"/>
-            </a:solidFill>
-          </a:ln>
-        </p:spPr>
-        <p:style>
-          <a:lnRef idx="1">
-            <a:schemeClr val="accent1"/>
-          </a:lnRef>
-          <a:fillRef idx="3">
-            <a:schemeClr val="accent1"/>
-          </a:fillRef>
-          <a:effectRef idx="2">
-            <a:schemeClr val="accent1"/>
-          </a:effectRef>
-          <a:fontRef idx="minor">
-            <a:schemeClr val="lt1"/>
-          </a:fontRef>
-        </p:style>
-        <p:txBody>
-          <a:bodyPr rtlCol="0" anchor="ctr" lIns="45720" rIns="45720"/>
-          <a:lstStyle/>
-          <a:p>
-            <a:pPr algn="ctr"/>
-            <a:r>
-              <a:rPr sz="900">
-                <a:solidFill>
-                  <a:srgbClr val="1F3A5F"/>
-                </a:solidFill>
-              </a:rPr>
-              <a:t>Gram 31: Nebula-class contact bearing 338, codename Vulcan</a:t>
-            </a:r>
-          </a:p>
-        </p:txBody>
-      </p:sp>
-      <p:sp>
-        <p:nvSpPr>
-          <p:cNvPr id="22" name="TextBox 21"/>
-          <p:cNvSpPr txBox="1"/>
-          <p:nvPr/>
-        </p:nvSpPr>
-        <p:spPr>
-          <a:xfrm>
-            <a:off x="9531705" y="3066288"/>
-            <a:ext cx="2200046" cy="1447800"/>
-          </a:xfrm>
-          <a:prstGeom prst="rect">
-            <a:avLst/>
-          </a:prstGeom>
-          <a:noFill/>
-        </p:spPr>
-        <p:txBody>
-          <a:bodyPr wrap="square">
-            <a:spAutoFit/>
-          </a:bodyPr>
-          <a:lstStyle/>
-          <a:p>
-            <a:r>
-              <a:rPr sz="800">
-                <a:hlinkClick r:id="rId35"/>
-              </a:rPr>
-              <a:t>Lofar 1</a:t>
-            </a:r>
-          </a:p>
-          <a:p>
-            <a:r>
-              <a:rPr sz="800">
-                <a:hlinkClick r:id="rId36"/>
-              </a:rPr>
-              <a:t>Lofar 2</a:t>
-            </a:r>
-          </a:p>
-          <a:p>
-            <a:r>
-              <a:rPr sz="800">
-                <a:hlinkClick r:id="rId37"/>
-              </a:rPr>
-              <a:t>Lofar 3</a:t>
-            </a:r>
-          </a:p>
-          <a:p>
-            <a:r>
-              <a:rPr sz="800">
-                <a:hlinkClick r:id="rId38"/>
-              </a:rPr>
-              <a:t>Lofar 4</a:t>
-            </a:r>
-          </a:p>
-        </p:txBody>
-      </p:sp>
-      <p:sp>
-        <p:nvSpPr>
-          <p:cNvPr id="23" name="Rounded Rectangle 22"/>
-          <p:cNvSpPr/>
-          <p:nvPr>
-            <a:hlinkClick r:id="rId39"/>
-          </p:nvPr>
-        </p:nvSpPr>
-        <p:spPr>
-          <a:xfrm>
-            <a:off x="365760" y="4632960"/>
-            <a:ext cx="2200046" cy="365760"/>
-          </a:xfrm>
-          <a:prstGeom prst="roundRect">
-            <a:avLst/>
-          </a:prstGeom>
-          <a:solidFill>
-            <a:srgbClr val="E8EEF7"/>
-          </a:solidFill>
-          <a:ln>
-            <a:solidFill>
-              <a:srgbClr val="1F3A5F"/>
-            </a:solidFill>
-          </a:ln>
-        </p:spPr>
-        <p:style>
-          <a:lnRef idx="1">
-            <a:schemeClr val="accent1"/>
-          </a:lnRef>
-          <a:fillRef idx="3">
-            <a:schemeClr val="accent1"/>
-          </a:fillRef>
-          <a:effectRef idx="2">
-            <a:schemeClr val="accent1"/>
-          </a:effectRef>
-          <a:fontRef idx="minor">
-            <a:schemeClr val="lt1"/>
-          </a:fontRef>
-        </p:style>
-        <p:txBody>
-          <a:bodyPr rtlCol="0" anchor="ctr" lIns="45720" rIns="45720"/>
-          <a:lstStyle/>
-          <a:p>
-            <a:pPr algn="ctr"/>
-            <a:r>
-              <a:rPr sz="900">
-                <a:solidFill>
-                  <a:srgbClr val="1F3A5F"/>
-                </a:solidFill>
-              </a:rPr>
-              <a:t>Gram 32: FR Rebel One, Category 2, Mustafar</a:t>
-            </a:r>
-          </a:p>
-        </p:txBody>
-      </p:sp>
-      <p:sp>
-        <p:nvSpPr>
-          <p:cNvPr id="24" name="TextBox 23"/>
-          <p:cNvSpPr txBox="1"/>
-          <p:nvPr/>
-        </p:nvSpPr>
-        <p:spPr>
-          <a:xfrm>
-            <a:off x="365760" y="5017008"/>
-            <a:ext cx="2200046" cy="1447800"/>
-          </a:xfrm>
-          <a:prstGeom prst="rect">
-            <a:avLst/>
-          </a:prstGeom>
-          <a:noFill/>
-        </p:spPr>
-        <p:txBody>
-          <a:bodyPr wrap="square">
-            <a:spAutoFit/>
-          </a:bodyPr>
-          <a:lstStyle/>
-          <a:p>
-            <a:r>
-              <a:rPr sz="800">
-                <a:hlinkClick r:id="rId40"/>
-              </a:rPr>
-              <a:t>Lofar 1</a:t>
-            </a:r>
-          </a:p>
-        </p:txBody>
-      </p:sp>
-      <p:sp>
-        <p:nvSpPr>
-          <p:cNvPr id="25" name="Rounded Rectangle 24"/>
-          <p:cNvSpPr/>
-          <p:nvPr>
-            <a:hlinkClick r:id="rId41"/>
-          </p:nvPr>
-        </p:nvSpPr>
-        <p:spPr>
-          <a:xfrm>
-            <a:off x="2657246" y="4632960"/>
-            <a:ext cx="2200046" cy="365760"/>
-          </a:xfrm>
-          <a:prstGeom prst="roundRect">
-            <a:avLst/>
-          </a:prstGeom>
-          <a:solidFill>
-            <a:srgbClr val="E8EEF7"/>
-          </a:solidFill>
-          <a:ln>
-            <a:solidFill>
-              <a:srgbClr val="1F3A5F"/>
-            </a:solidFill>
-          </a:ln>
-        </p:spPr>
-        <p:style>
-          <a:lnRef idx="1">
-            <a:schemeClr val="accent1"/>
-          </a:lnRef>
-          <a:fillRef idx="3">
-            <a:schemeClr val="accent1"/>
-          </a:fillRef>
-          <a:effectRef idx="2">
-            <a:schemeClr val="accent1"/>
-          </a:effectRef>
-          <a:fontRef idx="minor">
-            <a:schemeClr val="lt1"/>
-          </a:fontRef>
-        </p:style>
-        <p:txBody>
-          <a:bodyPr rtlCol="0" anchor="ctr" lIns="45720" rIns="45720"/>
-          <a:lstStyle/>
-          <a:p>
-            <a:pPr algn="ctr"/>
-            <a:r>
-              <a:rPr sz="900">
-                <a:solidFill>
-                  <a:srgbClr val="1F3A5F"/>
-                </a:solidFill>
-              </a:rPr>
-              <a:t>Gram 33: FR Voyager, Category 4, Hoth</a:t>
-            </a:r>
-          </a:p>
-        </p:txBody>
-      </p:sp>
-      <p:sp>
-        <p:nvSpPr>
-          <p:cNvPr id="26" name="TextBox 25"/>
-          <p:cNvSpPr txBox="1"/>
-          <p:nvPr/>
-        </p:nvSpPr>
-        <p:spPr>
-          <a:xfrm>
-            <a:off x="2657246" y="5017008"/>
-            <a:ext cx="2200046" cy="1447800"/>
-          </a:xfrm>
-          <a:prstGeom prst="rect">
-            <a:avLst/>
-          </a:prstGeom>
-          <a:noFill/>
-        </p:spPr>
-        <p:txBody>
-          <a:bodyPr wrap="square">
-            <a:spAutoFit/>
-          </a:bodyPr>
-          <a:lstStyle/>
-          <a:p>
-            <a:r>
-              <a:rPr sz="800">
-                <a:hlinkClick r:id="rId42"/>
-              </a:rPr>
-              <a:t>Lofar 1</a:t>
-            </a:r>
-          </a:p>
-        </p:txBody>
-      </p:sp>
-      <p:sp>
-        <p:nvSpPr>
-          <p:cNvPr id="27" name="Rounded Rectangle 26"/>
-          <p:cNvSpPr/>
-          <p:nvPr>
-            <a:hlinkClick r:id="rId43"/>
-          </p:nvPr>
-        </p:nvSpPr>
-        <p:spPr>
-          <a:xfrm>
-            <a:off x="4948732" y="4632960"/>
-            <a:ext cx="2200046" cy="365760"/>
-          </a:xfrm>
-          <a:prstGeom prst="roundRect">
-            <a:avLst/>
-          </a:prstGeom>
-          <a:solidFill>
-            <a:srgbClr val="E8EEF7"/>
-          </a:solidFill>
-          <a:ln>
-            <a:solidFill>
-              <a:srgbClr val="1F3A5F"/>
-            </a:solidFill>
-          </a:ln>
-        </p:spPr>
-        <p:style>
-          <a:lnRef idx="1">
-            <a:schemeClr val="accent1"/>
-          </a:lnRef>
-          <a:fillRef idx="3">
-            <a:schemeClr val="accent1"/>
-          </a:fillRef>
-          <a:effectRef idx="2">
-            <a:schemeClr val="accent1"/>
-          </a:effectRef>
-          <a:fontRef idx="minor">
-            <a:schemeClr val="lt1"/>
-          </a:fontRef>
-        </p:style>
-        <p:txBody>
-          <a:bodyPr rtlCol="0" anchor="ctr" lIns="45720" rIns="45720"/>
-          <a:lstStyle/>
-          <a:p>
-            <a:pPr algn="ctr"/>
-            <a:r>
-              <a:rPr sz="900">
-                <a:solidFill>
-                  <a:srgbClr val="1F3A5F"/>
-                </a:solidFill>
-              </a:rPr>
-              <a:t>Gram 34: FR Rebel One, Category 4, Bajor</a:t>
-            </a:r>
-          </a:p>
-        </p:txBody>
-      </p:sp>
-      <p:sp>
-        <p:nvSpPr>
-          <p:cNvPr id="28" name="TextBox 27"/>
-          <p:cNvSpPr txBox="1"/>
-          <p:nvPr/>
-        </p:nvSpPr>
-        <p:spPr>
-          <a:xfrm>
-            <a:off x="4948732" y="5017008"/>
-            <a:ext cx="2200046" cy="1447800"/>
-          </a:xfrm>
-          <a:prstGeom prst="rect">
-            <a:avLst/>
-          </a:prstGeom>
-          <a:noFill/>
-        </p:spPr>
-        <p:txBody>
-          <a:bodyPr wrap="square">
-            <a:spAutoFit/>
-          </a:bodyPr>
-          <a:lstStyle/>
-          <a:p>
-            <a:r>
-              <a:rPr sz="800">
-                <a:hlinkClick r:id="rId44"/>
-              </a:rPr>
-              <a:t>Lofar 1</a:t>
-            </a:r>
-          </a:p>
-        </p:txBody>
-      </p:sp>
-      <p:sp>
-        <p:nvSpPr>
-          <p:cNvPr id="29" name="Rounded Rectangle 28"/>
-          <p:cNvSpPr/>
-          <p:nvPr>
-            <a:hlinkClick r:id="rId45"/>
-          </p:nvPr>
-        </p:nvSpPr>
-        <p:spPr>
-          <a:xfrm>
-            <a:off x="7240219" y="4632960"/>
-            <a:ext cx="2200046" cy="365760"/>
-          </a:xfrm>
-          <a:prstGeom prst="roundRect">
-            <a:avLst/>
-          </a:prstGeom>
-          <a:solidFill>
-            <a:srgbClr val="E8EEF7"/>
-          </a:solidFill>
-          <a:ln>
-            <a:solidFill>
-              <a:srgbClr val="1F3A5F"/>
-            </a:solidFill>
-          </a:ln>
-        </p:spPr>
-        <p:style>
-          <a:lnRef idx="1">
-            <a:schemeClr val="accent1"/>
-          </a:lnRef>
-          <a:fillRef idx="3">
-            <a:schemeClr val="accent1"/>
-          </a:fillRef>
-          <a:effectRef idx="2">
-            <a:schemeClr val="accent1"/>
-          </a:effectRef>
-          <a:fontRef idx="minor">
-            <a:schemeClr val="lt1"/>
-          </a:fontRef>
-        </p:style>
-        <p:txBody>
-          <a:bodyPr rtlCol="0" anchor="ctr" lIns="45720" rIns="45720"/>
-          <a:lstStyle/>
-          <a:p>
-            <a:pPr algn="ctr"/>
-            <a:r>
-              <a:rPr sz="900">
-                <a:solidFill>
-                  <a:srgbClr val="1F3A5F"/>
-                </a:solidFill>
-              </a:rPr>
-              <a:t>Gram 35: FR Tantive IV, Category 4, Romulus</a:t>
-            </a:r>
-          </a:p>
-        </p:txBody>
-      </p:sp>
-      <p:sp>
-        <p:nvSpPr>
-          <p:cNvPr id="30" name="TextBox 29"/>
-          <p:cNvSpPr txBox="1"/>
-          <p:nvPr/>
-        </p:nvSpPr>
-        <p:spPr>
-          <a:xfrm>
-            <a:off x="7240219" y="5017008"/>
-            <a:ext cx="2200046" cy="1447800"/>
-          </a:xfrm>
-          <a:prstGeom prst="rect">
-            <a:avLst/>
-          </a:prstGeom>
-          <a:noFill/>
-        </p:spPr>
-        <p:txBody>
-          <a:bodyPr wrap="square">
-            <a:spAutoFit/>
-          </a:bodyPr>
-          <a:lstStyle/>
-          <a:p>
-            <a:r>
-              <a:rPr sz="800">
-                <a:hlinkClick r:id="rId46"/>
-              </a:rPr>
-              <a:t>Lofar 1</a:t>
-            </a:r>
-          </a:p>
-          <a:p>
-            <a:r>
-              <a:rPr sz="800">
-                <a:hlinkClick r:id="rId47"/>
-              </a:rPr>
-              <a:t>Lofar 2</a:t>
-            </a:r>
-          </a:p>
-          <a:p>
-            <a:r>
-              <a:rPr sz="800">
-                <a:hlinkClick r:id="rId48"/>
-              </a:rPr>
-              <a:t>Lofar 3</a:t>
-            </a:r>
-          </a:p>
-          <a:p>
-            <a:r>
-              <a:rPr sz="800">
-                <a:hlinkClick r:id="rId49"/>
-              </a:rPr>
-              <a:t>Lofar 4</a:t>
-            </a:r>
-          </a:p>
-        </p:txBody>
-      </p:sp>
-      <p:sp>
-        <p:nvSpPr>
-          <p:cNvPr id="31" name="Rounded Rectangle 30"/>
-          <p:cNvSpPr/>
-          <p:nvPr>
-            <a:hlinkClick r:id="rId50"/>
-          </p:nvPr>
-        </p:nvSpPr>
-        <p:spPr>
-          <a:xfrm>
-            <a:off x="9531705" y="4632960"/>
-            <a:ext cx="2200046" cy="365760"/>
-          </a:xfrm>
-          <a:prstGeom prst="roundRect">
-            <a:avLst/>
-          </a:prstGeom>
-          <a:solidFill>
-            <a:srgbClr val="E8EEF7"/>
-          </a:solidFill>
-          <a:ln>
-            <a:solidFill>
-              <a:srgbClr val="1F3A5F"/>
-            </a:solidFill>
-          </a:ln>
-        </p:spPr>
-        <p:style>
-          <a:lnRef idx="1">
-            <a:schemeClr val="accent1"/>
-          </a:lnRef>
-          <a:fillRef idx="3">
-            <a:schemeClr val="accent1"/>
-          </a:fillRef>
-          <a:effectRef idx="2">
-            <a:schemeClr val="accent1"/>
-          </a:effectRef>
-          <a:fontRef idx="minor">
-            <a:schemeClr val="lt1"/>
-          </a:fontRef>
-        </p:style>
-        <p:txBody>
-          <a:bodyPr rtlCol="0" anchor="ctr" lIns="45720" rIns="45720"/>
-          <a:lstStyle/>
-          <a:p>
-            <a:pPr algn="ctr"/>
-            <a:r>
-              <a:rPr sz="900">
-                <a:solidFill>
-                  <a:srgbClr val="1F3A5F"/>
-                </a:solidFill>
-              </a:rPr>
-              <a:t>Gram 36: Equinox contact bearing 209, codename Kobol</a:t>
-            </a:r>
-          </a:p>
-        </p:txBody>
-      </p:sp>
-      <p:sp>
-        <p:nvSpPr>
-          <p:cNvPr id="32" name="TextBox 31"/>
-          <p:cNvSpPr txBox="1"/>
-          <p:nvPr/>
-        </p:nvSpPr>
-        <p:spPr>
-          <a:xfrm>
-            <a:off x="9531705" y="5017008"/>
-            <a:ext cx="2200046" cy="1447800"/>
-          </a:xfrm>
-          <a:prstGeom prst="rect">
-            <a:avLst/>
-          </a:prstGeom>
-          <a:noFill/>
-        </p:spPr>
-        <p:txBody>
-          <a:bodyPr wrap="square">
-            <a:spAutoFit/>
-          </a:bodyPr>
-          <a:lstStyle/>
-          <a:p>
-            <a:r>
-              <a:rPr sz="800">
-                <a:hlinkClick r:id="rId51"/>
-              </a:rPr>
-              <a:t>Lofar 1</a:t>
-            </a:r>
-          </a:p>
-          <a:p>
-            <a:r>
-              <a:rPr sz="800">
-                <a:hlinkClick r:id="rId52"/>
-              </a:rPr>
-              <a:t>Lofar 2</a:t>
-            </a:r>
-          </a:p>
-          <a:p>
-            <a:r>
-              <a:rPr sz="800">
-                <a:hlinkClick r:id="rId53"/>
-              </a:rPr>
-              <a:t>Lofar 3</a:t>
-            </a:r>
-          </a:p>
-        </p:txBody>
-      </p:sp>
-    </p:spTree>
-  </p:cSld>
-  <p:clrMapOvr>
-    <a:masterClrMapping/>
-  </p:clrMapOvr>
-</p:sld>
-</file>
-
-<file path=ppt/slides/slide4.xml><?xml version="1.0" encoding="utf-8"?>
-<p:sld xmlns:a="http://schemas.openxmlformats.org/drawingml/2006/main" xmlns:p="http://schemas.openxmlformats.org/presentationml/2006/main" xmlns:r="http://schemas.openxmlformats.org/officeDocument/2006/relationships">
-  <p:cSld>
-    <p:spTree>
-      <p:nvGrpSpPr>
-        <p:cNvPr id="1" name=""/>
-        <p:cNvGrpSpPr/>
-        <p:nvPr/>
-      </p:nvGrpSpPr>
-      <p:grpSpPr/>
-      <p:sp>
-        <p:nvSpPr>
-          <p:cNvPr id="2" name="TextBox 1"/>
-          <p:cNvSpPr txBox="1"/>
-          <p:nvPr/>
-        </p:nvSpPr>
-        <p:spPr>
-          <a:xfrm>
-            <a:off x="914400" y="2377440"/>
-            <a:ext cx="10360152" cy="1280160"/>
-          </a:xfrm>
-          <a:prstGeom prst="rect">
-            <a:avLst/>
-          </a:prstGeom>
-          <a:noFill/>
-        </p:spPr>
-        <p:txBody>
-          <a:bodyPr wrap="square">
-            <a:spAutoFit/>
-          </a:bodyPr>
-          <a:lstStyle/>
-          <a:p>
-            <a:pPr algn="ctr"/>
-            <a:r>
-              <a:rPr sz="4000" b="1">
-                <a:solidFill>
-                  <a:srgbClr val="1F3A5F"/>
-                </a:solidFill>
-              </a:rPr>
-              <a:t>End of Instructor Progress Test 3 Grams</a:t>
-            </a:r>
-          </a:p>
-        </p:txBody>
-      </p:sp>
-      <p:sp>
-        <p:nvSpPr>
-          <p:cNvPr id="3" name="TextBox 2"/>
-          <p:cNvSpPr txBox="1"/>
-          <p:nvPr/>
-        </p:nvSpPr>
-        <p:spPr>
-          <a:xfrm>
-            <a:off x="914400" y="3840480"/>
-            <a:ext cx="10360152" cy="731520"/>
-          </a:xfrm>
-          <a:prstGeom prst="rect">
-            <a:avLst/>
-          </a:prstGeom>
-          <a:noFill/>
-        </p:spPr>
-        <p:txBody>
-          <a:bodyPr wrap="none">
-            <a:spAutoFit/>
-          </a:bodyPr>
-          <a:lstStyle/>
-          <a:p>
-            <a:pPr algn="ctr"/>
-            <a:r>
-              <a:rPr sz="2400">
-                <a:solidFill>
-                  <a:srgbClr val="1F3A5F"/>
-                </a:solidFill>
-              </a:rPr>
-              <a:t>Instructor Version</a:t>
             </a:r>
           </a:p>
         </p:txBody>

--- a/source/Instructor Progress Test 3 Grams/Instructor Progress Test 3 Grams.pptx
+++ b/source/Instructor Progress Test 3 Grams/Instructor Progress Test 3 Grams.pptx
@@ -7,6 +7,8 @@
   <p:sldIdLst>
     <p:sldId id="256" r:id="rId7"/>
     <p:sldId id="257" r:id="rId8"/>
+    <p:sldId id="258" r:id="rId9"/>
+    <p:sldId id="259" r:id="rId10"/>
   </p:sldIdLst>
   <p:sldSz cx="12188952" cy="6858000" type="screen4x3"/>
   <p:notesSz cx="6858000" cy="9144000"/>
@@ -3091,120 +3093,48 @@
       <p:grpSpPr/>
       <p:sp>
         <p:nvSpPr>
-          <p:cNvPr id="2" name="Rectangle 1"/>
-          <p:cNvSpPr/>
+          <p:cNvPr id="2" name="TextBox 1"/>
+          <p:cNvSpPr txBox="1"/>
           <p:nvPr/>
         </p:nvSpPr>
         <p:spPr>
           <a:xfrm>
-            <a:off x="0" y="0"/>
-            <a:ext cx="12188952" cy="548640"/>
+            <a:off x="914400" y="2377440"/>
+            <a:ext cx="10360152" cy="1280160"/>
           </a:xfrm>
           <a:prstGeom prst="rect">
             <a:avLst/>
           </a:prstGeom>
-          <a:solidFill>
-            <a:srgbClr val="1F3A5F"/>
-          </a:solidFill>
-          <a:ln>
-            <a:noFill/>
-          </a:ln>
-        </p:spPr>
-        <p:style>
-          <a:lnRef idx="1">
-            <a:schemeClr val="accent1"/>
-          </a:lnRef>
-          <a:fillRef idx="3">
-            <a:schemeClr val="accent1"/>
-          </a:fillRef>
-          <a:effectRef idx="2">
-            <a:schemeClr val="accent1"/>
-          </a:effectRef>
-          <a:fontRef idx="minor">
-            <a:schemeClr val="lt1"/>
-          </a:fontRef>
-        </p:style>
-        <p:txBody>
-          <a:bodyPr rtlCol="0" anchor="ctr" lIns="182880" rIns="182880"/>
+          <a:noFill/>
+        </p:spPr>
+        <p:txBody>
+          <a:bodyPr wrap="square">
+            <a:spAutoFit/>
+          </a:bodyPr>
           <a:lstStyle/>
           <a:p>
             <a:pPr algn="ctr"/>
             <a:r>
-              <a:rPr sz="2000" b="1">
-                <a:solidFill>
-                  <a:srgbClr val="FFFFFF"/>
-                </a:solidFill>
-              </a:rPr>
-              <a:t>Instructor Progress Test 3 Grams — Page 1 of 2</a:t>
-            </a:r>
-          </a:p>
-        </p:txBody>
-      </p:sp>
-      <p:sp>
-        <p:nvSpPr>
-          <p:cNvPr id="3" name="Rounded Rectangle 2">
-            <a:hlinkClick r:id="rId2"/>
-          </p:cNvPr>
-          <p:cNvSpPr/>
-          <p:nvPr/>
-        </p:nvSpPr>
-        <p:spPr>
-          <a:xfrm>
-            <a:off x="365760" y="731520"/>
-            <a:ext cx="2200046" cy="365760"/>
-          </a:xfrm>
-          <a:prstGeom prst="roundRect">
-            <a:avLst/>
-          </a:prstGeom>
-          <a:solidFill>
-            <a:srgbClr val="E8EEF7"/>
-          </a:solidFill>
-          <a:ln>
-            <a:solidFill>
-              <a:srgbClr val="1F3A5F"/>
-            </a:solidFill>
-          </a:ln>
-        </p:spPr>
-        <p:style>
-          <a:lnRef idx="1">
-            <a:schemeClr val="accent1"/>
-          </a:lnRef>
-          <a:fillRef idx="3">
-            <a:schemeClr val="accent1"/>
-          </a:fillRef>
-          <a:effectRef idx="2">
-            <a:schemeClr val="accent1"/>
-          </a:effectRef>
-          <a:fontRef idx="minor">
-            <a:schemeClr val="lt1"/>
-          </a:fontRef>
-        </p:style>
-        <p:txBody>
-          <a:bodyPr rtlCol="0" anchor="ctr" lIns="45720" rIns="45720"/>
-          <a:lstStyle/>
-          <a:p>
-            <a:pPr algn="ctr"/>
-            <a:r>
-              <a:rPr sz="900">
+              <a:rPr sz="4000" b="1">
                 <a:solidFill>
                   <a:srgbClr val="1F3A5F"/>
                 </a:solidFill>
               </a:rPr>
-              <a:t>Gram 1: FR Millennium Falcon, Category 3, Mustafar</a:t>
-            </a:r>
-          </a:p>
-        </p:txBody>
-      </p:sp>
-      <p:sp>
-        <p:nvSpPr>
-          <p:cNvPr id="4" name="TextBox 3"/>
+              <a:t>Welcome to Instructor Progress Test 3 Grams</a:t>
+            </a:r>
+          </a:p>
+        </p:txBody>
+      </p:sp>
+      <p:sp>
+        <p:nvSpPr>
+          <p:cNvPr id="3" name="TextBox 2"/>
           <p:cNvSpPr txBox="1"/>
           <p:nvPr/>
         </p:nvSpPr>
         <p:spPr>
           <a:xfrm>
-            <a:off x="365760" y="1115568"/>
-            <a:ext cx="2200046" cy="1447800"/>
+            <a:off x="914400" y="3840480"/>
+            <a:ext cx="10360152" cy="731520"/>
           </a:xfrm>
           <a:prstGeom prst="rect">
             <a:avLst/>
@@ -3212,1404 +3142,19 @@
           <a:noFill/>
         </p:spPr>
         <p:txBody>
-          <a:bodyPr wrap="square">
+          <a:bodyPr wrap="none">
             <a:spAutoFit/>
           </a:bodyPr>
           <a:lstStyle/>
           <a:p>
-            <a:r>
-              <a:rPr sz="800">
-                <a:hlinkClick r:id="rId3"/>
-              </a:rPr>
-              <a:t>Lofar 1</a:t>
-            </a:r>
-          </a:p>
-        </p:txBody>
-      </p:sp>
-      <p:sp>
-        <p:nvSpPr>
-          <p:cNvPr id="5" name="Rounded Rectangle 4">
-            <a:hlinkClick r:id="rId4"/>
-          </p:cNvPr>
-          <p:cNvSpPr/>
-          <p:nvPr/>
-        </p:nvSpPr>
-        <p:spPr>
-          <a:xfrm>
-            <a:off x="2657246" y="731520"/>
-            <a:ext cx="2200046" cy="365760"/>
-          </a:xfrm>
-          <a:prstGeom prst="roundRect">
-            <a:avLst/>
-          </a:prstGeom>
-          <a:solidFill>
-            <a:srgbClr val="E8EEF7"/>
-          </a:solidFill>
-          <a:ln>
-            <a:solidFill>
-              <a:srgbClr val="1F3A5F"/>
-            </a:solidFill>
-          </a:ln>
-        </p:spPr>
-        <p:style>
-          <a:lnRef idx="1">
-            <a:schemeClr val="accent1"/>
-          </a:lnRef>
-          <a:fillRef idx="3">
-            <a:schemeClr val="accent1"/>
-          </a:fillRef>
-          <a:effectRef idx="2">
-            <a:schemeClr val="accent1"/>
-          </a:effectRef>
-          <a:fontRef idx="minor">
-            <a:schemeClr val="lt1"/>
-          </a:fontRef>
-        </p:style>
-        <p:txBody>
-          <a:bodyPr rtlCol="0" anchor="ctr" lIns="45720" rIns="45720"/>
-          <a:lstStyle/>
-          <a:p>
             <a:pPr algn="ctr"/>
             <a:r>
-              <a:rPr sz="900">
+              <a:rPr sz="2400">
                 <a:solidFill>
                   <a:srgbClr val="1F3A5F"/>
                 </a:solidFill>
               </a:rPr>
-              <a:t>Gram 2: X-wing contact bearing 140, codename Endor</a:t>
-            </a:r>
-          </a:p>
-        </p:txBody>
-      </p:sp>
-      <p:sp>
-        <p:nvSpPr>
-          <p:cNvPr id="6" name="TextBox 5"/>
-          <p:cNvSpPr txBox="1"/>
-          <p:nvPr/>
-        </p:nvSpPr>
-        <p:spPr>
-          <a:xfrm>
-            <a:off x="2657246" y="1115568"/>
-            <a:ext cx="2200046" cy="1447800"/>
-          </a:xfrm>
-          <a:prstGeom prst="rect">
-            <a:avLst/>
-          </a:prstGeom>
-          <a:noFill/>
-        </p:spPr>
-        <p:txBody>
-          <a:bodyPr wrap="square">
-            <a:spAutoFit/>
-          </a:bodyPr>
-          <a:lstStyle/>
-          <a:p>
-            <a:r>
-              <a:rPr sz="800">
-                <a:hlinkClick r:id="rId5"/>
-              </a:rPr>
-              <a:t>Lofar 1</a:t>
-            </a:r>
-          </a:p>
-        </p:txBody>
-      </p:sp>
-      <p:sp>
-        <p:nvSpPr>
-          <p:cNvPr id="7" name="Rounded Rectangle 6">
-            <a:hlinkClick r:id="rId6"/>
-          </p:cNvPr>
-          <p:cNvSpPr/>
-          <p:nvPr/>
-        </p:nvSpPr>
-        <p:spPr>
-          <a:xfrm>
-            <a:off x="4948732" y="731520"/>
-            <a:ext cx="2200046" cy="365760"/>
-          </a:xfrm>
-          <a:prstGeom prst="roundRect">
-            <a:avLst/>
-          </a:prstGeom>
-          <a:solidFill>
-            <a:srgbClr val="E8EEF7"/>
-          </a:solidFill>
-          <a:ln>
-            <a:solidFill>
-              <a:srgbClr val="1F3A5F"/>
-            </a:solidFill>
-          </a:ln>
-        </p:spPr>
-        <p:style>
-          <a:lnRef idx="1">
-            <a:schemeClr val="accent1"/>
-          </a:lnRef>
-          <a:fillRef idx="3">
-            <a:schemeClr val="accent1"/>
-          </a:fillRef>
-          <a:effectRef idx="2">
-            <a:schemeClr val="accent1"/>
-          </a:effectRef>
-          <a:fontRef idx="minor">
-            <a:schemeClr val="lt1"/>
-          </a:fontRef>
-        </p:style>
-        <p:txBody>
-          <a:bodyPr rtlCol="0" anchor="ctr" lIns="45720" rIns="45720"/>
-          <a:lstStyle/>
-          <a:p>
-            <a:pPr algn="ctr"/>
-            <a:r>
-              <a:rPr sz="900">
-                <a:solidFill>
-                  <a:srgbClr val="1F3A5F"/>
-                </a:solidFill>
-              </a:rPr>
-              <a:t>Gram 4: FR Rebel One, Category 2, Naboo</a:t>
-            </a:r>
-          </a:p>
-        </p:txBody>
-      </p:sp>
-      <p:sp>
-        <p:nvSpPr>
-          <p:cNvPr id="8" name="TextBox 7"/>
-          <p:cNvSpPr txBox="1"/>
-          <p:nvPr/>
-        </p:nvSpPr>
-        <p:spPr>
-          <a:xfrm>
-            <a:off x="4948732" y="1115568"/>
-            <a:ext cx="2200046" cy="1447800"/>
-          </a:xfrm>
-          <a:prstGeom prst="rect">
-            <a:avLst/>
-          </a:prstGeom>
-          <a:noFill/>
-        </p:spPr>
-        <p:txBody>
-          <a:bodyPr wrap="square">
-            <a:spAutoFit/>
-          </a:bodyPr>
-          <a:lstStyle/>
-          <a:p>
-            <a:r>
-              <a:rPr sz="800">
-                <a:hlinkClick r:id="rId7"/>
-              </a:rPr>
-              <a:t>Lofar 1</a:t>
-            </a:r>
-          </a:p>
-          <a:p>
-            <a:r>
-              <a:rPr sz="800">
-                <a:hlinkClick r:id="rId8"/>
-              </a:rPr>
-              <a:t>Lofar 2</a:t>
-            </a:r>
-          </a:p>
-          <a:p>
-            <a:r>
-              <a:rPr sz="800">
-                <a:hlinkClick r:id="rId9"/>
-              </a:rPr>
-              <a:t>Lofar 3</a:t>
-            </a:r>
-          </a:p>
-        </p:txBody>
-      </p:sp>
-      <p:sp>
-        <p:nvSpPr>
-          <p:cNvPr id="9" name="Rounded Rectangle 8">
-            <a:hlinkClick r:id="rId10"/>
-          </p:cNvPr>
-          <p:cNvSpPr/>
-          <p:nvPr/>
-        </p:nvSpPr>
-        <p:spPr>
-          <a:xfrm>
-            <a:off x="7240219" y="731520"/>
-            <a:ext cx="2200046" cy="365760"/>
-          </a:xfrm>
-          <a:prstGeom prst="roundRect">
-            <a:avLst/>
-          </a:prstGeom>
-          <a:solidFill>
-            <a:srgbClr val="E8EEF7"/>
-          </a:solidFill>
-          <a:ln>
-            <a:solidFill>
-              <a:srgbClr val="1F3A5F"/>
-            </a:solidFill>
-          </a:ln>
-        </p:spPr>
-        <p:style>
-          <a:lnRef idx="1">
-            <a:schemeClr val="accent1"/>
-          </a:lnRef>
-          <a:fillRef idx="3">
-            <a:schemeClr val="accent1"/>
-          </a:fillRef>
-          <a:effectRef idx="2">
-            <a:schemeClr val="accent1"/>
-          </a:effectRef>
-          <a:fontRef idx="minor">
-            <a:schemeClr val="lt1"/>
-          </a:fontRef>
-        </p:style>
-        <p:txBody>
-          <a:bodyPr rtlCol="0" anchor="ctr" lIns="45720" rIns="45720"/>
-          <a:lstStyle/>
-          <a:p>
-            <a:pPr algn="ctr"/>
-            <a:r>
-              <a:rPr sz="900">
-                <a:solidFill>
-                  <a:srgbClr val="1F3A5F"/>
-                </a:solidFill>
-              </a:rPr>
-              <a:t>Gram 6: FR Outrider, Category 3, Trill</a:t>
-            </a:r>
-          </a:p>
-        </p:txBody>
-      </p:sp>
-      <p:sp>
-        <p:nvSpPr>
-          <p:cNvPr id="10" name="TextBox 9"/>
-          <p:cNvSpPr txBox="1"/>
-          <p:nvPr/>
-        </p:nvSpPr>
-        <p:spPr>
-          <a:xfrm>
-            <a:off x="7240219" y="1115568"/>
-            <a:ext cx="2200046" cy="1447800"/>
-          </a:xfrm>
-          <a:prstGeom prst="rect">
-            <a:avLst/>
-          </a:prstGeom>
-          <a:noFill/>
-        </p:spPr>
-        <p:txBody>
-          <a:bodyPr wrap="square">
-            <a:spAutoFit/>
-          </a:bodyPr>
-          <a:lstStyle/>
-          <a:p>
-            <a:r>
-              <a:rPr sz="800">
-                <a:hlinkClick r:id="rId11"/>
-              </a:rPr>
-              <a:t>Lofar 1</a:t>
-            </a:r>
-          </a:p>
-          <a:p>
-            <a:r>
-              <a:rPr sz="800">
-                <a:hlinkClick r:id="rId12"/>
-              </a:rPr>
-              <a:t>Lofar 2</a:t>
-            </a:r>
-          </a:p>
-        </p:txBody>
-      </p:sp>
-      <p:sp>
-        <p:nvSpPr>
-          <p:cNvPr id="11" name="Rounded Rectangle 10">
-            <a:hlinkClick r:id="rId13"/>
-          </p:cNvPr>
-          <p:cNvSpPr/>
-          <p:nvPr/>
-        </p:nvSpPr>
-        <p:spPr>
-          <a:xfrm>
-            <a:off x="9531705" y="731520"/>
-            <a:ext cx="2200046" cy="365760"/>
-          </a:xfrm>
-          <a:prstGeom prst="roundRect">
-            <a:avLst/>
-          </a:prstGeom>
-          <a:solidFill>
-            <a:srgbClr val="E8EEF7"/>
-          </a:solidFill>
-          <a:ln>
-            <a:solidFill>
-              <a:srgbClr val="1F3A5F"/>
-            </a:solidFill>
-          </a:ln>
-        </p:spPr>
-        <p:style>
-          <a:lnRef idx="1">
-            <a:schemeClr val="accent1"/>
-          </a:lnRef>
-          <a:fillRef idx="3">
-            <a:schemeClr val="accent1"/>
-          </a:fillRef>
-          <a:effectRef idx="2">
-            <a:schemeClr val="accent1"/>
-          </a:effectRef>
-          <a:fontRef idx="minor">
-            <a:schemeClr val="lt1"/>
-          </a:fontRef>
-        </p:style>
-        <p:txBody>
-          <a:bodyPr rtlCol="0" anchor="ctr" lIns="45720" rIns="45720"/>
-          <a:lstStyle/>
-          <a:p>
-            <a:pPr algn="ctr"/>
-            <a:r>
-              <a:rPr sz="900">
-                <a:solidFill>
-                  <a:srgbClr val="1F3A5F"/>
-                </a:solidFill>
-              </a:rPr>
-              <a:t>Gram 7: Imperial-class contact bearing 172, codename Betazed</a:t>
-            </a:r>
-          </a:p>
-        </p:txBody>
-      </p:sp>
-      <p:sp>
-        <p:nvSpPr>
-          <p:cNvPr id="12" name="TextBox 11"/>
-          <p:cNvSpPr txBox="1"/>
-          <p:nvPr/>
-        </p:nvSpPr>
-        <p:spPr>
-          <a:xfrm>
-            <a:off x="9531705" y="1115568"/>
-            <a:ext cx="2200046" cy="1447800"/>
-          </a:xfrm>
-          <a:prstGeom prst="rect">
-            <a:avLst/>
-          </a:prstGeom>
-          <a:noFill/>
-        </p:spPr>
-        <p:txBody>
-          <a:bodyPr wrap="square">
-            <a:spAutoFit/>
-          </a:bodyPr>
-          <a:lstStyle/>
-          <a:p>
-            <a:r>
-              <a:rPr sz="800">
-                <a:hlinkClick r:id="rId14"/>
-              </a:rPr>
-              <a:t>Lofar 1</a:t>
-            </a:r>
-          </a:p>
-          <a:p>
-            <a:r>
-              <a:rPr sz="800">
-                <a:hlinkClick r:id="rId15"/>
-              </a:rPr>
-              <a:t>Lofar 2</a:t>
-            </a:r>
-          </a:p>
-        </p:txBody>
-      </p:sp>
-      <p:sp>
-        <p:nvSpPr>
-          <p:cNvPr id="13" name="Rounded Rectangle 12">
-            <a:hlinkClick r:id="rId16"/>
-          </p:cNvPr>
-          <p:cNvSpPr/>
-          <p:nvPr/>
-        </p:nvSpPr>
-        <p:spPr>
-          <a:xfrm>
-            <a:off x="365760" y="2682240"/>
-            <a:ext cx="2200046" cy="365760"/>
-          </a:xfrm>
-          <a:prstGeom prst="roundRect">
-            <a:avLst/>
-          </a:prstGeom>
-          <a:solidFill>
-            <a:srgbClr val="E8EEF7"/>
-          </a:solidFill>
-          <a:ln>
-            <a:solidFill>
-              <a:srgbClr val="1F3A5F"/>
-            </a:solidFill>
-          </a:ln>
-        </p:spPr>
-        <p:style>
-          <a:lnRef idx="1">
-            <a:schemeClr val="accent1"/>
-          </a:lnRef>
-          <a:fillRef idx="3">
-            <a:schemeClr val="accent1"/>
-          </a:fillRef>
-          <a:effectRef idx="2">
-            <a:schemeClr val="accent1"/>
-          </a:effectRef>
-          <a:fontRef idx="minor">
-            <a:schemeClr val="lt1"/>
-          </a:fontRef>
-        </p:style>
-        <p:txBody>
-          <a:bodyPr rtlCol="0" anchor="ctr" lIns="45720" rIns="45720"/>
-          <a:lstStyle/>
-          <a:p>
-            <a:pPr algn="ctr"/>
-            <a:r>
-              <a:rPr sz="900">
-                <a:solidFill>
-                  <a:srgbClr val="1F3A5F"/>
-                </a:solidFill>
-              </a:rPr>
-              <a:t>Gram 8: FR Outrider, Category 1, Romulus</a:t>
-            </a:r>
-          </a:p>
-        </p:txBody>
-      </p:sp>
-      <p:sp>
-        <p:nvSpPr>
-          <p:cNvPr id="14" name="TextBox 13"/>
-          <p:cNvSpPr txBox="1"/>
-          <p:nvPr/>
-        </p:nvSpPr>
-        <p:spPr>
-          <a:xfrm>
-            <a:off x="365760" y="3066288"/>
-            <a:ext cx="2200046" cy="1447800"/>
-          </a:xfrm>
-          <a:prstGeom prst="rect">
-            <a:avLst/>
-          </a:prstGeom>
-          <a:noFill/>
-        </p:spPr>
-        <p:txBody>
-          <a:bodyPr wrap="square">
-            <a:spAutoFit/>
-          </a:bodyPr>
-          <a:lstStyle/>
-          <a:p>
-            <a:r>
-              <a:rPr sz="800">
-                <a:hlinkClick r:id="rId17"/>
-              </a:rPr>
-              <a:t>Lofar 1</a:t>
-            </a:r>
-          </a:p>
-          <a:p>
-            <a:r>
-              <a:rPr sz="800">
-                <a:hlinkClick r:id="rId18"/>
-              </a:rPr>
-              <a:t>Lofar 2</a:t>
-            </a:r>
-          </a:p>
-          <a:p>
-            <a:r>
-              <a:rPr sz="800">
-                <a:hlinkClick r:id="rId19"/>
-              </a:rPr>
-              <a:t>Lofar 3</a:t>
-            </a:r>
-          </a:p>
-          <a:p>
-            <a:r>
-              <a:rPr sz="800">
-                <a:hlinkClick r:id="rId20"/>
-              </a:rPr>
-              <a:t>Lofar 4</a:t>
-            </a:r>
-          </a:p>
-        </p:txBody>
-      </p:sp>
-      <p:sp>
-        <p:nvSpPr>
-          <p:cNvPr id="15" name="Rounded Rectangle 14">
-            <a:hlinkClick r:id="rId21"/>
-          </p:cNvPr>
-          <p:cNvSpPr/>
-          <p:nvPr/>
-        </p:nvSpPr>
-        <p:spPr>
-          <a:xfrm>
-            <a:off x="2657246" y="2682240"/>
-            <a:ext cx="2200046" cy="365760"/>
-          </a:xfrm>
-          <a:prstGeom prst="roundRect">
-            <a:avLst/>
-          </a:prstGeom>
-          <a:solidFill>
-            <a:srgbClr val="E8EEF7"/>
-          </a:solidFill>
-          <a:ln>
-            <a:solidFill>
-              <a:srgbClr val="1F3A5F"/>
-            </a:solidFill>
-          </a:ln>
-        </p:spPr>
-        <p:style>
-          <a:lnRef idx="1">
-            <a:schemeClr val="accent1"/>
-          </a:lnRef>
-          <a:fillRef idx="3">
-            <a:schemeClr val="accent1"/>
-          </a:fillRef>
-          <a:effectRef idx="2">
-            <a:schemeClr val="accent1"/>
-          </a:effectRef>
-          <a:fontRef idx="minor">
-            <a:schemeClr val="lt1"/>
-          </a:fontRef>
-        </p:style>
-        <p:txBody>
-          <a:bodyPr rtlCol="0" anchor="ctr" lIns="45720" rIns="45720"/>
-          <a:lstStyle/>
-          <a:p>
-            <a:pPr algn="ctr"/>
-            <a:r>
-              <a:rPr sz="900">
-                <a:solidFill>
-                  <a:srgbClr val="1F3A5F"/>
-                </a:solidFill>
-              </a:rPr>
-              <a:t>Gram 9: FR A-wing, Category 3, Tatooine</a:t>
-            </a:r>
-          </a:p>
-        </p:txBody>
-      </p:sp>
-      <p:sp>
-        <p:nvSpPr>
-          <p:cNvPr id="16" name="TextBox 15"/>
-          <p:cNvSpPr txBox="1"/>
-          <p:nvPr/>
-        </p:nvSpPr>
-        <p:spPr>
-          <a:xfrm>
-            <a:off x="2657246" y="3066288"/>
-            <a:ext cx="2200046" cy="1447800"/>
-          </a:xfrm>
-          <a:prstGeom prst="rect">
-            <a:avLst/>
-          </a:prstGeom>
-          <a:noFill/>
-        </p:spPr>
-        <p:txBody>
-          <a:bodyPr wrap="square">
-            <a:spAutoFit/>
-          </a:bodyPr>
-          <a:lstStyle/>
-          <a:p>
-            <a:r>
-              <a:rPr sz="800">
-                <a:hlinkClick r:id="rId22"/>
-              </a:rPr>
-              <a:t>Lofar 1</a:t>
-            </a:r>
-          </a:p>
-          <a:p>
-            <a:r>
-              <a:rPr sz="800">
-                <a:hlinkClick r:id="rId23"/>
-              </a:rPr>
-              <a:t>Lofar 2</a:t>
-            </a:r>
-          </a:p>
-          <a:p>
-            <a:r>
-              <a:rPr sz="800">
-                <a:hlinkClick r:id="rId24"/>
-              </a:rPr>
-              <a:t>Lofar 3</a:t>
-            </a:r>
-          </a:p>
-        </p:txBody>
-      </p:sp>
-      <p:sp>
-        <p:nvSpPr>
-          <p:cNvPr id="17" name="Rounded Rectangle 16">
-            <a:hlinkClick r:id="rId25"/>
-          </p:cNvPr>
-          <p:cNvSpPr/>
-          <p:nvPr/>
-        </p:nvSpPr>
-        <p:spPr>
-          <a:xfrm>
-            <a:off x="4948732" y="2682240"/>
-            <a:ext cx="2200046" cy="365760"/>
-          </a:xfrm>
-          <a:prstGeom prst="roundRect">
-            <a:avLst/>
-          </a:prstGeom>
-          <a:solidFill>
-            <a:srgbClr val="E8EEF7"/>
-          </a:solidFill>
-          <a:ln>
-            <a:solidFill>
-              <a:srgbClr val="1F3A5F"/>
-            </a:solidFill>
-          </a:ln>
-        </p:spPr>
-        <p:style>
-          <a:lnRef idx="1">
-            <a:schemeClr val="accent1"/>
-          </a:lnRef>
-          <a:fillRef idx="3">
-            <a:schemeClr val="accent1"/>
-          </a:fillRef>
-          <a:effectRef idx="2">
-            <a:schemeClr val="accent1"/>
-          </a:effectRef>
-          <a:fontRef idx="minor">
-            <a:schemeClr val="lt1"/>
-          </a:fontRef>
-        </p:style>
-        <p:txBody>
-          <a:bodyPr rtlCol="0" anchor="ctr" lIns="45720" rIns="45720"/>
-          <a:lstStyle/>
-          <a:p>
-            <a:pPr algn="ctr"/>
-            <a:r>
-              <a:rPr sz="900">
-                <a:solidFill>
-                  <a:srgbClr val="1F3A5F"/>
-                </a:solidFill>
-              </a:rPr>
-              <a:t>Gram 10: FR Cerritos, Category 4, Gandalf</a:t>
-            </a:r>
-          </a:p>
-        </p:txBody>
-      </p:sp>
-      <p:sp>
-        <p:nvSpPr>
-          <p:cNvPr id="18" name="TextBox 17"/>
-          <p:cNvSpPr txBox="1"/>
-          <p:nvPr/>
-        </p:nvSpPr>
-        <p:spPr>
-          <a:xfrm>
-            <a:off x="4948732" y="3066288"/>
-            <a:ext cx="2200046" cy="1447800"/>
-          </a:xfrm>
-          <a:prstGeom prst="rect">
-            <a:avLst/>
-          </a:prstGeom>
-          <a:noFill/>
-        </p:spPr>
-        <p:txBody>
-          <a:bodyPr wrap="square">
-            <a:spAutoFit/>
-          </a:bodyPr>
-          <a:lstStyle/>
-          <a:p>
-            <a:r>
-              <a:rPr sz="800">
-                <a:hlinkClick r:id="rId26"/>
-              </a:rPr>
-              <a:t>Lofar 1</a:t>
-            </a:r>
-          </a:p>
-          <a:p>
-            <a:r>
-              <a:rPr sz="800">
-                <a:hlinkClick r:id="rId27"/>
-              </a:rPr>
-              <a:t>Lofar 2</a:t>
-            </a:r>
-          </a:p>
-        </p:txBody>
-      </p:sp>
-      <p:sp>
-        <p:nvSpPr>
-          <p:cNvPr id="19" name="Rounded Rectangle 18">
-            <a:hlinkClick r:id="rId28"/>
-          </p:cNvPr>
-          <p:cNvSpPr/>
-          <p:nvPr/>
-        </p:nvSpPr>
-        <p:spPr>
-          <a:xfrm>
-            <a:off x="7240219" y="2682240"/>
-            <a:ext cx="2200046" cy="365760"/>
-          </a:xfrm>
-          <a:prstGeom prst="roundRect">
-            <a:avLst/>
-          </a:prstGeom>
-          <a:solidFill>
-            <a:srgbClr val="E8EEF7"/>
-          </a:solidFill>
-          <a:ln>
-            <a:solidFill>
-              <a:srgbClr val="1F3A5F"/>
-            </a:solidFill>
-          </a:ln>
-        </p:spPr>
-        <p:style>
-          <a:lnRef idx="1">
-            <a:schemeClr val="accent1"/>
-          </a:lnRef>
-          <a:fillRef idx="3">
-            <a:schemeClr val="accent1"/>
-          </a:fillRef>
-          <a:effectRef idx="2">
-            <a:schemeClr val="accent1"/>
-          </a:effectRef>
-          <a:fontRef idx="minor">
-            <a:schemeClr val="lt1"/>
-          </a:fontRef>
-        </p:style>
-        <p:txBody>
-          <a:bodyPr rtlCol="0" anchor="ctr" lIns="45720" rIns="45720"/>
-          <a:lstStyle/>
-          <a:p>
-            <a:pPr algn="ctr"/>
-            <a:r>
-              <a:rPr sz="900">
-                <a:solidFill>
-                  <a:srgbClr val="1F3A5F"/>
-                </a:solidFill>
-              </a:rPr>
-              <a:t>Gram 13: Corellian Corvette contact bearing 190, codename Caprica</a:t>
-            </a:r>
-          </a:p>
-        </p:txBody>
-      </p:sp>
-      <p:sp>
-        <p:nvSpPr>
-          <p:cNvPr id="20" name="TextBox 19"/>
-          <p:cNvSpPr txBox="1"/>
-          <p:nvPr/>
-        </p:nvSpPr>
-        <p:spPr>
-          <a:xfrm>
-            <a:off x="7240219" y="3066288"/>
-            <a:ext cx="2200046" cy="1447800"/>
-          </a:xfrm>
-          <a:prstGeom prst="rect">
-            <a:avLst/>
-          </a:prstGeom>
-          <a:noFill/>
-        </p:spPr>
-        <p:txBody>
-          <a:bodyPr wrap="square">
-            <a:spAutoFit/>
-          </a:bodyPr>
-          <a:lstStyle/>
-          <a:p>
-            <a:r>
-              <a:rPr sz="800">
-                <a:hlinkClick r:id="rId29"/>
-              </a:rPr>
-              <a:t>Lofar 1</a:t>
-            </a:r>
-          </a:p>
-        </p:txBody>
-      </p:sp>
-      <p:sp>
-        <p:nvSpPr>
-          <p:cNvPr id="21" name="Rounded Rectangle 20">
-            <a:hlinkClick r:id="rId30"/>
-          </p:cNvPr>
-          <p:cNvSpPr/>
-          <p:nvPr/>
-        </p:nvSpPr>
-        <p:spPr>
-          <a:xfrm>
-            <a:off x="9531705" y="2682240"/>
-            <a:ext cx="2200046" cy="365760"/>
-          </a:xfrm>
-          <a:prstGeom prst="roundRect">
-            <a:avLst/>
-          </a:prstGeom>
-          <a:solidFill>
-            <a:srgbClr val="E8EEF7"/>
-          </a:solidFill>
-          <a:ln>
-            <a:solidFill>
-              <a:srgbClr val="1F3A5F"/>
-            </a:solidFill>
-          </a:ln>
-        </p:spPr>
-        <p:style>
-          <a:lnRef idx="1">
-            <a:schemeClr val="accent1"/>
-          </a:lnRef>
-          <a:fillRef idx="3">
-            <a:schemeClr val="accent1"/>
-          </a:fillRef>
-          <a:effectRef idx="2">
-            <a:schemeClr val="accent1"/>
-          </a:effectRef>
-          <a:fontRef idx="minor">
-            <a:schemeClr val="lt1"/>
-          </a:fontRef>
-        </p:style>
-        <p:txBody>
-          <a:bodyPr rtlCol="0" anchor="ctr" lIns="45720" rIns="45720"/>
-          <a:lstStyle/>
-          <a:p>
-            <a:pPr algn="ctr"/>
-            <a:r>
-              <a:rPr sz="900">
-                <a:solidFill>
-                  <a:srgbClr val="1F3A5F"/>
-                </a:solidFill>
-              </a:rPr>
-              <a:t>Gram 14: FR Corellian Corvette, Category 1, Naboo</a:t>
-            </a:r>
-          </a:p>
-        </p:txBody>
-      </p:sp>
-      <p:sp>
-        <p:nvSpPr>
-          <p:cNvPr id="22" name="TextBox 21"/>
-          <p:cNvSpPr txBox="1"/>
-          <p:nvPr/>
-        </p:nvSpPr>
-        <p:spPr>
-          <a:xfrm>
-            <a:off x="9531705" y="3066288"/>
-            <a:ext cx="2200046" cy="1447800"/>
-          </a:xfrm>
-          <a:prstGeom prst="rect">
-            <a:avLst/>
-          </a:prstGeom>
-          <a:noFill/>
-        </p:spPr>
-        <p:txBody>
-          <a:bodyPr wrap="square">
-            <a:spAutoFit/>
-          </a:bodyPr>
-          <a:lstStyle/>
-          <a:p>
-            <a:r>
-              <a:rPr sz="800">
-                <a:hlinkClick r:id="rId31"/>
-              </a:rPr>
-              <a:t>Lofar 1</a:t>
-            </a:r>
-          </a:p>
-          <a:p>
-            <a:r>
-              <a:rPr sz="800">
-                <a:hlinkClick r:id="rId32"/>
-              </a:rPr>
-              <a:t>Lofar 2</a:t>
-            </a:r>
-          </a:p>
-          <a:p>
-            <a:r>
-              <a:rPr sz="800">
-                <a:hlinkClick r:id="rId33"/>
-              </a:rPr>
-              <a:t>Lofar 3</a:t>
-            </a:r>
-          </a:p>
-          <a:p>
-            <a:r>
-              <a:rPr sz="800">
-                <a:hlinkClick r:id="rId34"/>
-              </a:rPr>
-              <a:t>Lofar 4</a:t>
-            </a:r>
-          </a:p>
-        </p:txBody>
-      </p:sp>
-      <p:sp>
-        <p:nvSpPr>
-          <p:cNvPr id="23" name="Rounded Rectangle 22">
-            <a:hlinkClick r:id="rId35"/>
-          </p:cNvPr>
-          <p:cNvSpPr/>
-          <p:nvPr/>
-        </p:nvSpPr>
-        <p:spPr>
-          <a:xfrm>
-            <a:off x="365760" y="4632960"/>
-            <a:ext cx="2200046" cy="365760"/>
-          </a:xfrm>
-          <a:prstGeom prst="roundRect">
-            <a:avLst/>
-          </a:prstGeom>
-          <a:solidFill>
-            <a:srgbClr val="E8EEF7"/>
-          </a:solidFill>
-          <a:ln>
-            <a:solidFill>
-              <a:srgbClr val="1F3A5F"/>
-            </a:solidFill>
-          </a:ln>
-        </p:spPr>
-        <p:style>
-          <a:lnRef idx="1">
-            <a:schemeClr val="accent1"/>
-          </a:lnRef>
-          <a:fillRef idx="3">
-            <a:schemeClr val="accent1"/>
-          </a:fillRef>
-          <a:effectRef idx="2">
-            <a:schemeClr val="accent1"/>
-          </a:effectRef>
-          <a:fontRef idx="minor">
-            <a:schemeClr val="lt1"/>
-          </a:fontRef>
-        </p:style>
-        <p:txBody>
-          <a:bodyPr rtlCol="0" anchor="ctr" lIns="45720" rIns="45720"/>
-          <a:lstStyle/>
-          <a:p>
-            <a:pPr algn="ctr"/>
-            <a:r>
-              <a:rPr sz="900">
-                <a:solidFill>
-                  <a:srgbClr val="1F3A5F"/>
-                </a:solidFill>
-              </a:rPr>
-              <a:t>Gram 15: FR TIE Fighter, Category 1, Bajor</a:t>
-            </a:r>
-          </a:p>
-        </p:txBody>
-      </p:sp>
-      <p:sp>
-        <p:nvSpPr>
-          <p:cNvPr id="24" name="TextBox 23"/>
-          <p:cNvSpPr txBox="1"/>
-          <p:nvPr/>
-        </p:nvSpPr>
-        <p:spPr>
-          <a:xfrm>
-            <a:off x="365760" y="5017008"/>
-            <a:ext cx="2200046" cy="1447800"/>
-          </a:xfrm>
-          <a:prstGeom prst="rect">
-            <a:avLst/>
-          </a:prstGeom>
-          <a:noFill/>
-        </p:spPr>
-        <p:txBody>
-          <a:bodyPr wrap="square">
-            <a:spAutoFit/>
-          </a:bodyPr>
-          <a:lstStyle/>
-          <a:p>
-            <a:r>
-              <a:rPr sz="800">
-                <a:hlinkClick r:id="rId36"/>
-              </a:rPr>
-              <a:t>Lofar 1</a:t>
-            </a:r>
-          </a:p>
-        </p:txBody>
-      </p:sp>
-      <p:sp>
-        <p:nvSpPr>
-          <p:cNvPr id="25" name="Rounded Rectangle 24">
-            <a:hlinkClick r:id="rId37"/>
-          </p:cNvPr>
-          <p:cNvSpPr/>
-          <p:nvPr/>
-        </p:nvSpPr>
-        <p:spPr>
-          <a:xfrm>
-            <a:off x="2657246" y="4632960"/>
-            <a:ext cx="2200046" cy="365760"/>
-          </a:xfrm>
-          <a:prstGeom prst="roundRect">
-            <a:avLst/>
-          </a:prstGeom>
-          <a:solidFill>
-            <a:srgbClr val="E8EEF7"/>
-          </a:solidFill>
-          <a:ln>
-            <a:solidFill>
-              <a:srgbClr val="1F3A5F"/>
-            </a:solidFill>
-          </a:ln>
-        </p:spPr>
-        <p:style>
-          <a:lnRef idx="1">
-            <a:schemeClr val="accent1"/>
-          </a:lnRef>
-          <a:fillRef idx="3">
-            <a:schemeClr val="accent1"/>
-          </a:fillRef>
-          <a:effectRef idx="2">
-            <a:schemeClr val="accent1"/>
-          </a:effectRef>
-          <a:fontRef idx="minor">
-            <a:schemeClr val="lt1"/>
-          </a:fontRef>
-        </p:style>
-        <p:txBody>
-          <a:bodyPr rtlCol="0" anchor="ctr" lIns="45720" rIns="45720"/>
-          <a:lstStyle/>
-          <a:p>
-            <a:pPr algn="ctr"/>
-            <a:r>
-              <a:rPr sz="900">
-                <a:solidFill>
-                  <a:srgbClr val="1F3A5F"/>
-                </a:solidFill>
-              </a:rPr>
-              <a:t>Gram 17: Sovereign-class contact bearing 335, codename Yavin</a:t>
-            </a:r>
-          </a:p>
-        </p:txBody>
-      </p:sp>
-      <p:sp>
-        <p:nvSpPr>
-          <p:cNvPr id="26" name="TextBox 25"/>
-          <p:cNvSpPr txBox="1"/>
-          <p:nvPr/>
-        </p:nvSpPr>
-        <p:spPr>
-          <a:xfrm>
-            <a:off x="2657246" y="5017008"/>
-            <a:ext cx="2200046" cy="1447800"/>
-          </a:xfrm>
-          <a:prstGeom prst="rect">
-            <a:avLst/>
-          </a:prstGeom>
-          <a:noFill/>
-        </p:spPr>
-        <p:txBody>
-          <a:bodyPr wrap="square">
-            <a:spAutoFit/>
-          </a:bodyPr>
-          <a:lstStyle/>
-          <a:p>
-            <a:r>
-              <a:rPr sz="800">
-                <a:hlinkClick r:id="rId38"/>
-              </a:rPr>
-              <a:t>Lofar 1</a:t>
-            </a:r>
-          </a:p>
-          <a:p>
-            <a:r>
-              <a:rPr sz="800">
-                <a:hlinkClick r:id="rId39"/>
-              </a:rPr>
-              <a:t>Lofar 2</a:t>
-            </a:r>
-          </a:p>
-          <a:p>
-            <a:r>
-              <a:rPr sz="800">
-                <a:hlinkClick r:id="rId40"/>
-              </a:rPr>
-              <a:t>Lofar 3</a:t>
-            </a:r>
-          </a:p>
-          <a:p>
-            <a:r>
-              <a:rPr sz="800">
-                <a:hlinkClick r:id="rId41"/>
-              </a:rPr>
-              <a:t>Lofar 4</a:t>
-            </a:r>
-          </a:p>
-        </p:txBody>
-      </p:sp>
-      <p:sp>
-        <p:nvSpPr>
-          <p:cNvPr id="27" name="Rounded Rectangle 26">
-            <a:hlinkClick r:id="rId42"/>
-          </p:cNvPr>
-          <p:cNvSpPr/>
-          <p:nvPr/>
-        </p:nvSpPr>
-        <p:spPr>
-          <a:xfrm>
-            <a:off x="4948732" y="4632960"/>
-            <a:ext cx="2200046" cy="365760"/>
-          </a:xfrm>
-          <a:prstGeom prst="roundRect">
-            <a:avLst/>
-          </a:prstGeom>
-          <a:solidFill>
-            <a:srgbClr val="E8EEF7"/>
-          </a:solidFill>
-          <a:ln>
-            <a:solidFill>
-              <a:srgbClr val="1F3A5F"/>
-            </a:solidFill>
-          </a:ln>
-        </p:spPr>
-        <p:style>
-          <a:lnRef idx="1">
-            <a:schemeClr val="accent1"/>
-          </a:lnRef>
-          <a:fillRef idx="3">
-            <a:schemeClr val="accent1"/>
-          </a:fillRef>
-          <a:effectRef idx="2">
-            <a:schemeClr val="accent1"/>
-          </a:effectRef>
-          <a:fontRef idx="minor">
-            <a:schemeClr val="lt1"/>
-          </a:fontRef>
-        </p:style>
-        <p:txBody>
-          <a:bodyPr rtlCol="0" anchor="ctr" lIns="45720" rIns="45720"/>
-          <a:lstStyle/>
-          <a:p>
-            <a:pPr algn="ctr"/>
-            <a:r>
-              <a:rPr sz="900">
-                <a:solidFill>
-                  <a:srgbClr val="1F3A5F"/>
-                </a:solidFill>
-              </a:rPr>
-              <a:t>Gram 19: Lambda Shuttle contact bearing 244, codename Tatooine</a:t>
-            </a:r>
-          </a:p>
-        </p:txBody>
-      </p:sp>
-      <p:sp>
-        <p:nvSpPr>
-          <p:cNvPr id="28" name="TextBox 27"/>
-          <p:cNvSpPr txBox="1"/>
-          <p:nvPr/>
-        </p:nvSpPr>
-        <p:spPr>
-          <a:xfrm>
-            <a:off x="4948732" y="5017008"/>
-            <a:ext cx="2200046" cy="1447800"/>
-          </a:xfrm>
-          <a:prstGeom prst="rect">
-            <a:avLst/>
-          </a:prstGeom>
-          <a:noFill/>
-        </p:spPr>
-        <p:txBody>
-          <a:bodyPr wrap="square">
-            <a:spAutoFit/>
-          </a:bodyPr>
-          <a:lstStyle/>
-          <a:p>
-            <a:r>
-              <a:rPr sz="800">
-                <a:hlinkClick r:id="rId43"/>
-              </a:rPr>
-              <a:t>Lofar 1</a:t>
-            </a:r>
-          </a:p>
-          <a:p>
-            <a:r>
-              <a:rPr sz="800">
-                <a:hlinkClick r:id="rId44"/>
-              </a:rPr>
-              <a:t>Lofar 2</a:t>
-            </a:r>
-          </a:p>
-          <a:p>
-            <a:r>
-              <a:rPr sz="800">
-                <a:hlinkClick r:id="rId45"/>
-              </a:rPr>
-              <a:t>Lofar 3</a:t>
-            </a:r>
-          </a:p>
-          <a:p>
-            <a:r>
-              <a:rPr sz="800">
-                <a:hlinkClick r:id="rId46"/>
-              </a:rPr>
-              <a:t>Lofar 4</a:t>
-            </a:r>
-          </a:p>
-        </p:txBody>
-      </p:sp>
-      <p:sp>
-        <p:nvSpPr>
-          <p:cNvPr id="29" name="Rounded Rectangle 28">
-            <a:hlinkClick r:id="rId47"/>
-          </p:cNvPr>
-          <p:cNvSpPr/>
-          <p:nvPr/>
-        </p:nvSpPr>
-        <p:spPr>
-          <a:xfrm>
-            <a:off x="7240219" y="4632960"/>
-            <a:ext cx="2200046" cy="365760"/>
-          </a:xfrm>
-          <a:prstGeom prst="roundRect">
-            <a:avLst/>
-          </a:prstGeom>
-          <a:solidFill>
-            <a:srgbClr val="E8EEF7"/>
-          </a:solidFill>
-          <a:ln>
-            <a:solidFill>
-              <a:srgbClr val="1F3A5F"/>
-            </a:solidFill>
-          </a:ln>
-        </p:spPr>
-        <p:style>
-          <a:lnRef idx="1">
-            <a:schemeClr val="accent1"/>
-          </a:lnRef>
-          <a:fillRef idx="3">
-            <a:schemeClr val="accent1"/>
-          </a:fillRef>
-          <a:effectRef idx="2">
-            <a:schemeClr val="accent1"/>
-          </a:effectRef>
-          <a:fontRef idx="minor">
-            <a:schemeClr val="lt1"/>
-          </a:fontRef>
-        </p:style>
-        <p:txBody>
-          <a:bodyPr rtlCol="0" anchor="ctr" lIns="45720" rIns="45720"/>
-          <a:lstStyle/>
-          <a:p>
-            <a:pPr algn="ctr"/>
-            <a:r>
-              <a:rPr sz="900">
-                <a:solidFill>
-                  <a:srgbClr val="1F3A5F"/>
-                </a:solidFill>
-              </a:rPr>
-              <a:t>Gram 20: FR Equinox, Category 4, Bespin</a:t>
-            </a:r>
-          </a:p>
-        </p:txBody>
-      </p:sp>
-      <p:sp>
-        <p:nvSpPr>
-          <p:cNvPr id="30" name="TextBox 29"/>
-          <p:cNvSpPr txBox="1"/>
-          <p:nvPr/>
-        </p:nvSpPr>
-        <p:spPr>
-          <a:xfrm>
-            <a:off x="7240219" y="5017008"/>
-            <a:ext cx="2200046" cy="1447800"/>
-          </a:xfrm>
-          <a:prstGeom prst="rect">
-            <a:avLst/>
-          </a:prstGeom>
-          <a:noFill/>
-        </p:spPr>
-        <p:txBody>
-          <a:bodyPr wrap="square">
-            <a:spAutoFit/>
-          </a:bodyPr>
-          <a:lstStyle/>
-          <a:p>
-            <a:r>
-              <a:rPr sz="800">
-                <a:hlinkClick r:id="rId48"/>
-              </a:rPr>
-              <a:t>Lofar 1</a:t>
-            </a:r>
-          </a:p>
-          <a:p>
-            <a:r>
-              <a:rPr sz="800">
-                <a:hlinkClick r:id="rId49"/>
-              </a:rPr>
-              <a:t>Lofar 2</a:t>
-            </a:r>
-          </a:p>
-          <a:p>
-            <a:r>
-              <a:rPr sz="800">
-                <a:hlinkClick r:id="rId50"/>
-              </a:rPr>
-              <a:t>Lofar 3</a:t>
-            </a:r>
-          </a:p>
-          <a:p>
-            <a:r>
-              <a:rPr sz="800">
-                <a:hlinkClick r:id="rId51"/>
-              </a:rPr>
-              <a:t>Lofar 4</a:t>
-            </a:r>
-          </a:p>
-        </p:txBody>
-      </p:sp>
-      <p:sp>
-        <p:nvSpPr>
-          <p:cNvPr id="31" name="Rounded Rectangle 30">
-            <a:hlinkClick r:id="rId52"/>
-          </p:cNvPr>
-          <p:cNvSpPr/>
-          <p:nvPr/>
-        </p:nvSpPr>
-        <p:spPr>
-          <a:xfrm>
-            <a:off x="9531705" y="4632960"/>
-            <a:ext cx="2200046" cy="365760"/>
-          </a:xfrm>
-          <a:prstGeom prst="roundRect">
-            <a:avLst/>
-          </a:prstGeom>
-          <a:solidFill>
-            <a:srgbClr val="E8EEF7"/>
-          </a:solidFill>
-          <a:ln>
-            <a:solidFill>
-              <a:srgbClr val="1F3A5F"/>
-            </a:solidFill>
-          </a:ln>
-        </p:spPr>
-        <p:style>
-          <a:lnRef idx="1">
-            <a:schemeClr val="accent1"/>
-          </a:lnRef>
-          <a:fillRef idx="3">
-            <a:schemeClr val="accent1"/>
-          </a:fillRef>
-          <a:effectRef idx="2">
-            <a:schemeClr val="accent1"/>
-          </a:effectRef>
-          <a:fontRef idx="minor">
-            <a:schemeClr val="lt1"/>
-          </a:fontRef>
-        </p:style>
-        <p:txBody>
-          <a:bodyPr rtlCol="0" anchor="ctr" lIns="45720" rIns="45720"/>
-          <a:lstStyle/>
-          <a:p>
-            <a:pPr algn="ctr"/>
-            <a:r>
-              <a:rPr sz="900">
-                <a:solidFill>
-                  <a:srgbClr val="1F3A5F"/>
-                </a:solidFill>
-              </a:rPr>
-              <a:t>Gram 21: FR Equinox, Category 1, Endor</a:t>
-            </a:r>
-          </a:p>
-        </p:txBody>
-      </p:sp>
-      <p:sp>
-        <p:nvSpPr>
-          <p:cNvPr id="32" name="TextBox 31"/>
-          <p:cNvSpPr txBox="1"/>
-          <p:nvPr/>
-        </p:nvSpPr>
-        <p:spPr>
-          <a:xfrm>
-            <a:off x="9531705" y="5017008"/>
-            <a:ext cx="2200046" cy="1447800"/>
-          </a:xfrm>
-          <a:prstGeom prst="rect">
-            <a:avLst/>
-          </a:prstGeom>
-          <a:noFill/>
-        </p:spPr>
-        <p:txBody>
-          <a:bodyPr wrap="square">
-            <a:spAutoFit/>
-          </a:bodyPr>
-          <a:lstStyle/>
-          <a:p>
-            <a:r>
-              <a:rPr sz="800">
-                <a:hlinkClick r:id="rId53"/>
-              </a:rPr>
-              <a:t>Lofar 1</a:t>
-            </a:r>
-          </a:p>
-          <a:p>
-            <a:r>
-              <a:rPr sz="800">
-                <a:hlinkClick r:id="rId54"/>
-              </a:rPr>
-              <a:t>Lofar 2</a:t>
+              <a:t>Instructor Version</a:t>
             </a:r>
           </a:p>
         </p:txBody>
@@ -4678,7 +3223,7 @@
                   <a:srgbClr val="FFFFFF"/>
                 </a:solidFill>
               </a:rPr>
-              <a:t>Instructor Progress Test 3 Grams — Page 2 of 2</a:t>
+              <a:t>Instructor Progress Test 3 Grams — Page 1 of 2</a:t>
             </a:r>
           </a:p>
         </p:txBody>
@@ -4733,7 +3278,7 @@
                   <a:srgbClr val="1F3A5F"/>
                 </a:solidFill>
               </a:rPr>
-              <a:t>Gram 22: Mon Calamari Cruiser contact bearing 043, codename Vulcan</a:t>
+              <a:t>Gram 1: FR Millennium Falcon, Category 3, Mustafar</a:t>
             </a:r>
           </a:p>
         </p:txBody>
@@ -4767,36 +3312,12 @@
               <a:t>Lofar 1</a:t>
             </a:r>
           </a:p>
-          <a:p>
-            <a:r>
-              <a:rPr sz="800">
-                <a:hlinkClick r:id="rId4"/>
-              </a:rPr>
-              <a:t>Lofar 2</a:t>
-            </a:r>
-          </a:p>
-          <a:p>
-            <a:r>
-              <a:rPr sz="800">
-                <a:hlinkClick r:id="rId5"/>
-              </a:rPr>
-              <a:t>Lofar 3</a:t>
-            </a:r>
-          </a:p>
-          <a:p>
-            <a:r>
-              <a:rPr sz="800">
-                <a:hlinkClick r:id="rId6"/>
-              </a:rPr>
-              <a:t>Lofar 4</a:t>
-            </a:r>
-          </a:p>
         </p:txBody>
       </p:sp>
       <p:sp>
         <p:nvSpPr>
           <p:cNvPr id="5" name="Rounded Rectangle 4">
-            <a:hlinkClick r:id="rId7"/>
+            <a:hlinkClick r:id="rId4"/>
           </p:cNvPr>
           <p:cNvSpPr/>
           <p:nvPr/>
@@ -4843,7 +3364,7 @@
                   <a:srgbClr val="1F3A5F"/>
                 </a:solidFill>
               </a:rPr>
-              <a:t>Gram 23: X-wing contact bearing 303, codename Dank</a:t>
+              <a:t>Gram 2: X-wing contact bearing 140, codename Endor</a:t>
             </a:r>
           </a:p>
         </p:txBody>
@@ -4872,25 +3393,17 @@
           <a:p>
             <a:r>
               <a:rPr sz="800">
-                <a:hlinkClick r:id="rId8"/>
+                <a:hlinkClick r:id="rId5"/>
               </a:rPr>
               <a:t>Lofar 1</a:t>
             </a:r>
           </a:p>
-          <a:p>
-            <a:r>
-              <a:rPr sz="800">
-                <a:hlinkClick r:id="rId9"/>
-              </a:rPr>
-              <a:t>Lofar 2</a:t>
-            </a:r>
-          </a:p>
         </p:txBody>
       </p:sp>
       <p:sp>
         <p:nvSpPr>
           <p:cNvPr id="7" name="Rounded Rectangle 6">
-            <a:hlinkClick r:id="rId10"/>
+            <a:hlinkClick r:id="rId6"/>
           </p:cNvPr>
           <p:cNvSpPr/>
           <p:nvPr/>
@@ -4937,7 +3450,7 @@
                   <a:srgbClr val="1F3A5F"/>
                 </a:solidFill>
               </a:rPr>
-              <a:t>Gram 24: FR Star Destroyer, Category 1, Dagobah</a:t>
+              <a:t>Gram 4: FR Rebel One, Category 2, Naboo</a:t>
             </a:r>
           </a:p>
         </p:txBody>
@@ -4966,7 +3479,7 @@
           <a:p>
             <a:r>
               <a:rPr sz="800">
-                <a:hlinkClick r:id="rId11"/>
+                <a:hlinkClick r:id="rId7"/>
               </a:rPr>
               <a:t>Lofar 1</a:t>
             </a:r>
@@ -4974,7 +3487,7 @@
           <a:p>
             <a:r>
               <a:rPr sz="800">
-                <a:hlinkClick r:id="rId12"/>
+                <a:hlinkClick r:id="rId8"/>
               </a:rPr>
               <a:t>Lofar 2</a:t>
             </a:r>
@@ -4982,25 +3495,17 @@
           <a:p>
             <a:r>
               <a:rPr sz="800">
-                <a:hlinkClick r:id="rId13"/>
+                <a:hlinkClick r:id="rId9"/>
               </a:rPr>
               <a:t>Lofar 3</a:t>
             </a:r>
           </a:p>
-          <a:p>
-            <a:r>
-              <a:rPr sz="800">
-                <a:hlinkClick r:id="rId14"/>
-              </a:rPr>
-              <a:t>Lofar 4</a:t>
-            </a:r>
-          </a:p>
         </p:txBody>
       </p:sp>
       <p:sp>
         <p:nvSpPr>
           <p:cNvPr id="9" name="Rounded Rectangle 8">
-            <a:hlinkClick r:id="rId15"/>
+            <a:hlinkClick r:id="rId10"/>
           </p:cNvPr>
           <p:cNvSpPr/>
           <p:nvPr/>
@@ -5047,7 +3552,7 @@
                   <a:srgbClr val="1F3A5F"/>
                 </a:solidFill>
               </a:rPr>
-              <a:t>Gram 25: FR Razor Crest, Category 4, Trill</a:t>
+              <a:t>Gram 6: FR Outrider, Category 3, Trill</a:t>
             </a:r>
           </a:p>
         </p:txBody>
@@ -5076,17 +3581,25 @@
           <a:p>
             <a:r>
               <a:rPr sz="800">
-                <a:hlinkClick r:id="rId16"/>
+                <a:hlinkClick r:id="rId11"/>
               </a:rPr>
               <a:t>Lofar 1</a:t>
             </a:r>
           </a:p>
+          <a:p>
+            <a:r>
+              <a:rPr sz="800">
+                <a:hlinkClick r:id="rId12"/>
+              </a:rPr>
+              <a:t>Lofar 2</a:t>
+            </a:r>
+          </a:p>
         </p:txBody>
       </p:sp>
       <p:sp>
         <p:nvSpPr>
           <p:cNvPr id="11" name="Rounded Rectangle 10">
-            <a:hlinkClick r:id="rId17"/>
+            <a:hlinkClick r:id="rId13"/>
           </p:cNvPr>
           <p:cNvSpPr/>
           <p:nvPr/>
@@ -5133,7 +3646,7 @@
                   <a:srgbClr val="1F3A5F"/>
                 </a:solidFill>
               </a:rPr>
-              <a:t>Gram 26: Voyager contact bearing 256, codename Coruscant</a:t>
+              <a:t>Gram 7: Imperial-class contact bearing 172, codename Betazed</a:t>
             </a:r>
           </a:p>
         </p:txBody>
@@ -5162,17 +3675,25 @@
           <a:p>
             <a:r>
               <a:rPr sz="800">
-                <a:hlinkClick r:id="rId18"/>
+                <a:hlinkClick r:id="rId14"/>
               </a:rPr>
               <a:t>Lofar 1</a:t>
             </a:r>
           </a:p>
+          <a:p>
+            <a:r>
+              <a:rPr sz="800">
+                <a:hlinkClick r:id="rId15"/>
+              </a:rPr>
+              <a:t>Lofar 2</a:t>
+            </a:r>
+          </a:p>
         </p:txBody>
       </p:sp>
       <p:sp>
         <p:nvSpPr>
           <p:cNvPr id="13" name="Rounded Rectangle 12">
-            <a:hlinkClick r:id="rId19"/>
+            <a:hlinkClick r:id="rId16"/>
           </p:cNvPr>
           <p:cNvSpPr/>
           <p:nvPr/>
@@ -5219,7 +3740,7 @@
                   <a:srgbClr val="1F3A5F"/>
                 </a:solidFill>
               </a:rPr>
-              <a:t>Gram 27: FR Millennium Falcon, Category 2, Kobol</a:t>
+              <a:t>Gram 8: FR Outrider, Category 1, Romulus</a:t>
             </a:r>
           </a:p>
         </p:txBody>
@@ -5248,32 +3769,32 @@
           <a:p>
             <a:r>
               <a:rPr sz="800">
+                <a:hlinkClick r:id="rId17"/>
+              </a:rPr>
+              <a:t>Lofar 1</a:t>
+            </a:r>
+          </a:p>
+          <a:p>
+            <a:r>
+              <a:rPr sz="800">
+                <a:hlinkClick r:id="rId18"/>
+              </a:rPr>
+              <a:t>Lofar 2</a:t>
+            </a:r>
+          </a:p>
+          <a:p>
+            <a:r>
+              <a:rPr sz="800">
+                <a:hlinkClick r:id="rId19"/>
+              </a:rPr>
+              <a:t>Lofar 3</a:t>
+            </a:r>
+          </a:p>
+          <a:p>
+            <a:r>
+              <a:rPr sz="800">
                 <a:hlinkClick r:id="rId20"/>
               </a:rPr>
-              <a:t>Lofar 1</a:t>
-            </a:r>
-          </a:p>
-          <a:p>
-            <a:r>
-              <a:rPr sz="800">
-                <a:hlinkClick r:id="rId21"/>
-              </a:rPr>
-              <a:t>Lofar 2</a:t>
-            </a:r>
-          </a:p>
-          <a:p>
-            <a:r>
-              <a:rPr sz="800">
-                <a:hlinkClick r:id="rId22"/>
-              </a:rPr>
-              <a:t>Lofar 3</a:t>
-            </a:r>
-          </a:p>
-          <a:p>
-            <a:r>
-              <a:rPr sz="800">
-                <a:hlinkClick r:id="rId23"/>
-              </a:rPr>
               <a:t>Lofar 4</a:t>
             </a:r>
           </a:p>
@@ -5282,7 +3803,7 @@
       <p:sp>
         <p:nvSpPr>
           <p:cNvPr id="15" name="Rounded Rectangle 14">
-            <a:hlinkClick r:id="rId24"/>
+            <a:hlinkClick r:id="rId21"/>
           </p:cNvPr>
           <p:cNvSpPr/>
           <p:nvPr/>
@@ -5329,7 +3850,7 @@
                   <a:srgbClr val="1F3A5F"/>
                 </a:solidFill>
               </a:rPr>
-              <a:t>Gram 28: FR Reliant, Category 2, Coruscant</a:t>
+              <a:t>Gram 9: FR A-wing, Category 3, Tatooine</a:t>
             </a:r>
           </a:p>
         </p:txBody>
@@ -5358,7 +3879,7 @@
           <a:p>
             <a:r>
               <a:rPr sz="800">
-                <a:hlinkClick r:id="rId25"/>
+                <a:hlinkClick r:id="rId22"/>
               </a:rPr>
               <a:t>Lofar 1</a:t>
             </a:r>
@@ -5366,17 +3887,25 @@
           <a:p>
             <a:r>
               <a:rPr sz="800">
-                <a:hlinkClick r:id="rId26"/>
+                <a:hlinkClick r:id="rId23"/>
               </a:rPr>
               <a:t>Lofar 2</a:t>
             </a:r>
           </a:p>
+          <a:p>
+            <a:r>
+              <a:rPr sz="800">
+                <a:hlinkClick r:id="rId24"/>
+              </a:rPr>
+              <a:t>Lofar 3</a:t>
+            </a:r>
+          </a:p>
         </p:txBody>
       </p:sp>
       <p:sp>
         <p:nvSpPr>
           <p:cNvPr id="17" name="Rounded Rectangle 16">
-            <a:hlinkClick r:id="rId27"/>
+            <a:hlinkClick r:id="rId25"/>
           </p:cNvPr>
           <p:cNvSpPr/>
           <p:nvPr/>
@@ -5423,7 +3952,7 @@
                   <a:srgbClr val="1F3A5F"/>
                 </a:solidFill>
               </a:rPr>
-              <a:t>Gram 29: Miranda-class contact bearing 190, codename Defiant</a:t>
+              <a:t>Gram 10: FR Cerritos, Category 4, Gandalf</a:t>
             </a:r>
           </a:p>
         </p:txBody>
@@ -5452,7 +3981,7 @@
           <a:p>
             <a:r>
               <a:rPr sz="800">
-                <a:hlinkClick r:id="rId28"/>
+                <a:hlinkClick r:id="rId26"/>
               </a:rPr>
               <a:t>Lofar 1</a:t>
             </a:r>
@@ -5460,7 +3989,7 @@
           <a:p>
             <a:r>
               <a:rPr sz="800">
-                <a:hlinkClick r:id="rId29"/>
+                <a:hlinkClick r:id="rId27"/>
               </a:rPr>
               <a:t>Lofar 2</a:t>
             </a:r>
@@ -5470,7 +3999,7 @@
       <p:sp>
         <p:nvSpPr>
           <p:cNvPr id="19" name="Rounded Rectangle 18">
-            <a:hlinkClick r:id="rId30"/>
+            <a:hlinkClick r:id="rId28"/>
           </p:cNvPr>
           <p:cNvSpPr/>
           <p:nvPr/>
@@ -5517,7 +4046,7 @@
                   <a:srgbClr val="1F3A5F"/>
                 </a:solidFill>
               </a:rPr>
-              <a:t>Gram 30: Ghost contact bearing 075, codename Yavin</a:t>
+              <a:t>Gram 13: Corellian Corvette contact bearing 190, codename Caprica</a:t>
             </a:r>
           </a:p>
         </p:txBody>
@@ -5546,33 +4075,17 @@
           <a:p>
             <a:r>
               <a:rPr sz="800">
-                <a:hlinkClick r:id="rId31"/>
+                <a:hlinkClick r:id="rId29"/>
               </a:rPr>
               <a:t>Lofar 1</a:t>
             </a:r>
           </a:p>
-          <a:p>
-            <a:r>
-              <a:rPr sz="800">
-                <a:hlinkClick r:id="rId32"/>
-              </a:rPr>
-              <a:t>Lofar 2</a:t>
-            </a:r>
-          </a:p>
-          <a:p>
-            <a:r>
-              <a:rPr sz="800">
-                <a:hlinkClick r:id="rId33"/>
-              </a:rPr>
-              <a:t>Lofar 3</a:t>
-            </a:r>
-          </a:p>
         </p:txBody>
       </p:sp>
       <p:sp>
         <p:nvSpPr>
           <p:cNvPr id="21" name="Rounded Rectangle 20">
-            <a:hlinkClick r:id="rId34"/>
+            <a:hlinkClick r:id="rId30"/>
           </p:cNvPr>
           <p:cNvSpPr/>
           <p:nvPr/>
@@ -5619,7 +4132,7 @@
                   <a:srgbClr val="1F3A5F"/>
                 </a:solidFill>
               </a:rPr>
-              <a:t>Gram 31: Nebula-class contact bearing 338, codename Vulcan</a:t>
+              <a:t>Gram 14: FR Corellian Corvette, Category 1, Naboo</a:t>
             </a:r>
           </a:p>
         </p:txBody>
@@ -5648,7 +4161,7 @@
           <a:p>
             <a:r>
               <a:rPr sz="800">
-                <a:hlinkClick r:id="rId35"/>
+                <a:hlinkClick r:id="rId31"/>
               </a:rPr>
               <a:t>Lofar 1</a:t>
             </a:r>
@@ -5656,7 +4169,7 @@
           <a:p>
             <a:r>
               <a:rPr sz="800">
-                <a:hlinkClick r:id="rId36"/>
+                <a:hlinkClick r:id="rId32"/>
               </a:rPr>
               <a:t>Lofar 2</a:t>
             </a:r>
@@ -5664,7 +4177,7 @@
           <a:p>
             <a:r>
               <a:rPr sz="800">
-                <a:hlinkClick r:id="rId37"/>
+                <a:hlinkClick r:id="rId33"/>
               </a:rPr>
               <a:t>Lofar 3</a:t>
             </a:r>
@@ -5672,7 +4185,7 @@
           <a:p>
             <a:r>
               <a:rPr sz="800">
-                <a:hlinkClick r:id="rId38"/>
+                <a:hlinkClick r:id="rId34"/>
               </a:rPr>
               <a:t>Lofar 4</a:t>
             </a:r>
@@ -5682,7 +4195,7 @@
       <p:sp>
         <p:nvSpPr>
           <p:cNvPr id="23" name="Rounded Rectangle 22">
-            <a:hlinkClick r:id="rId39"/>
+            <a:hlinkClick r:id="rId35"/>
           </p:cNvPr>
           <p:cNvSpPr/>
           <p:nvPr/>
@@ -5729,7 +4242,7 @@
                   <a:srgbClr val="1F3A5F"/>
                 </a:solidFill>
               </a:rPr>
-              <a:t>Gram 32: FR Rebel One, Category 2, Mustafar</a:t>
+              <a:t>Gram 15: FR TIE Fighter, Category 1, Bajor</a:t>
             </a:r>
           </a:p>
         </p:txBody>
@@ -5758,7 +4271,7 @@
           <a:p>
             <a:r>
               <a:rPr sz="800">
-                <a:hlinkClick r:id="rId40"/>
+                <a:hlinkClick r:id="rId36"/>
               </a:rPr>
               <a:t>Lofar 1</a:t>
             </a:r>
@@ -5768,7 +4281,7 @@
       <p:sp>
         <p:nvSpPr>
           <p:cNvPr id="25" name="Rounded Rectangle 24">
-            <a:hlinkClick r:id="rId41"/>
+            <a:hlinkClick r:id="rId37"/>
           </p:cNvPr>
           <p:cNvSpPr/>
           <p:nvPr/>
@@ -5815,7 +4328,7 @@
                   <a:srgbClr val="1F3A5F"/>
                 </a:solidFill>
               </a:rPr>
-              <a:t>Gram 33: FR Voyager, Category 4, Hoth</a:t>
+              <a:t>Gram 17: Sovereign-class contact bearing 335, codename Yavin</a:t>
             </a:r>
           </a:p>
         </p:txBody>
@@ -5844,17 +4357,41 @@
           <a:p>
             <a:r>
               <a:rPr sz="800">
-                <a:hlinkClick r:id="rId42"/>
+                <a:hlinkClick r:id="rId38"/>
               </a:rPr>
               <a:t>Lofar 1</a:t>
             </a:r>
           </a:p>
+          <a:p>
+            <a:r>
+              <a:rPr sz="800">
+                <a:hlinkClick r:id="rId39"/>
+              </a:rPr>
+              <a:t>Lofar 2</a:t>
+            </a:r>
+          </a:p>
+          <a:p>
+            <a:r>
+              <a:rPr sz="800">
+                <a:hlinkClick r:id="rId40"/>
+              </a:rPr>
+              <a:t>Lofar 3</a:t>
+            </a:r>
+          </a:p>
+          <a:p>
+            <a:r>
+              <a:rPr sz="800">
+                <a:hlinkClick r:id="rId41"/>
+              </a:rPr>
+              <a:t>Lofar 4</a:t>
+            </a:r>
+          </a:p>
         </p:txBody>
       </p:sp>
       <p:sp>
         <p:nvSpPr>
           <p:cNvPr id="27" name="Rounded Rectangle 26">
-            <a:hlinkClick r:id="rId43"/>
+            <a:hlinkClick r:id="rId42"/>
           </p:cNvPr>
           <p:cNvSpPr/>
           <p:nvPr/>
@@ -5901,7 +4438,7 @@
                   <a:srgbClr val="1F3A5F"/>
                 </a:solidFill>
               </a:rPr>
-              <a:t>Gram 34: FR Rebel One, Category 4, Bajor</a:t>
+              <a:t>Gram 19: Lambda Shuttle contact bearing 244, codename Tatooine</a:t>
             </a:r>
           </a:p>
         </p:txBody>
@@ -5930,9 +4467,33 @@
           <a:p>
             <a:r>
               <a:rPr sz="800">
+                <a:hlinkClick r:id="rId43"/>
+              </a:rPr>
+              <a:t>Lofar 1</a:t>
+            </a:r>
+          </a:p>
+          <a:p>
+            <a:r>
+              <a:rPr sz="800">
                 <a:hlinkClick r:id="rId44"/>
               </a:rPr>
-              <a:t>Lofar 1</a:t>
+              <a:t>Lofar 2</a:t>
+            </a:r>
+          </a:p>
+          <a:p>
+            <a:r>
+              <a:rPr sz="800">
+                <a:hlinkClick r:id="rId45"/>
+              </a:rPr>
+              <a:t>Lofar 3</a:t>
+            </a:r>
+          </a:p>
+          <a:p>
+            <a:r>
+              <a:rPr sz="800">
+                <a:hlinkClick r:id="rId46"/>
+              </a:rPr>
+              <a:t>Lofar 4</a:t>
             </a:r>
           </a:p>
         </p:txBody>
@@ -5940,7 +4501,7 @@
       <p:sp>
         <p:nvSpPr>
           <p:cNvPr id="29" name="Rounded Rectangle 28">
-            <a:hlinkClick r:id="rId45"/>
+            <a:hlinkClick r:id="rId47"/>
           </p:cNvPr>
           <p:cNvSpPr/>
           <p:nvPr/>
@@ -5987,7 +4548,7 @@
                   <a:srgbClr val="1F3A5F"/>
                 </a:solidFill>
               </a:rPr>
-              <a:t>Gram 35: FR Tantive IV, Category 4, Romulus</a:t>
+              <a:t>Gram 20: FR Equinox, Category 4, Bespin</a:t>
             </a:r>
           </a:p>
         </p:txBody>
@@ -6016,7 +4577,7 @@
           <a:p>
             <a:r>
               <a:rPr sz="800">
-                <a:hlinkClick r:id="rId46"/>
+                <a:hlinkClick r:id="rId48"/>
               </a:rPr>
               <a:t>Lofar 1</a:t>
             </a:r>
@@ -6024,7 +4585,7 @@
           <a:p>
             <a:r>
               <a:rPr sz="800">
-                <a:hlinkClick r:id="rId47"/>
+                <a:hlinkClick r:id="rId49"/>
               </a:rPr>
               <a:t>Lofar 2</a:t>
             </a:r>
@@ -6032,7 +4593,7 @@
           <a:p>
             <a:r>
               <a:rPr sz="800">
-                <a:hlinkClick r:id="rId48"/>
+                <a:hlinkClick r:id="rId50"/>
               </a:rPr>
               <a:t>Lofar 3</a:t>
             </a:r>
@@ -6040,7 +4601,7 @@
           <a:p>
             <a:r>
               <a:rPr sz="800">
-                <a:hlinkClick r:id="rId49"/>
+                <a:hlinkClick r:id="rId51"/>
               </a:rPr>
               <a:t>Lofar 4</a:t>
             </a:r>
@@ -6050,7 +4611,7 @@
       <p:sp>
         <p:nvSpPr>
           <p:cNvPr id="31" name="Rounded Rectangle 30">
-            <a:hlinkClick r:id="rId50"/>
+            <a:hlinkClick r:id="rId52"/>
           </p:cNvPr>
           <p:cNvSpPr/>
           <p:nvPr/>
@@ -6097,7 +4658,7 @@
                   <a:srgbClr val="1F3A5F"/>
                 </a:solidFill>
               </a:rPr>
-              <a:t>Gram 36: Equinox contact bearing 209, codename Kobol</a:t>
+              <a:t>Gram 21: FR Equinox, Category 1, Endor</a:t>
             </a:r>
           </a:p>
         </p:txBody>
@@ -6126,6 +4687,1533 @@
           <a:p>
             <a:r>
               <a:rPr sz="800">
+                <a:hlinkClick r:id="rId53"/>
+              </a:rPr>
+              <a:t>Lofar 1</a:t>
+            </a:r>
+          </a:p>
+          <a:p>
+            <a:r>
+              <a:rPr sz="800">
+                <a:hlinkClick r:id="rId54"/>
+              </a:rPr>
+              <a:t>Lofar 2</a:t>
+            </a:r>
+          </a:p>
+        </p:txBody>
+      </p:sp>
+    </p:spTree>
+  </p:cSld>
+  <p:clrMapOvr>
+    <a:masterClrMapping/>
+  </p:clrMapOvr>
+</p:sld>
+</file>
+
+<file path=ppt/slides/slide3.xml><?xml version="1.0" encoding="utf-8"?>
+<p:sld xmlns:a="http://schemas.openxmlformats.org/drawingml/2006/main" xmlns:p="http://schemas.openxmlformats.org/presentationml/2006/main" xmlns:r="http://schemas.openxmlformats.org/officeDocument/2006/relationships">
+  <p:cSld>
+    <p:spTree>
+      <p:nvGrpSpPr>
+        <p:cNvPr id="1" name=""/>
+        <p:cNvGrpSpPr/>
+        <p:nvPr/>
+      </p:nvGrpSpPr>
+      <p:grpSpPr/>
+      <p:sp>
+        <p:nvSpPr>
+          <p:cNvPr id="2" name="Rectangle 1"/>
+          <p:cNvSpPr/>
+          <p:nvPr/>
+        </p:nvSpPr>
+        <p:spPr>
+          <a:xfrm>
+            <a:off x="0" y="0"/>
+            <a:ext cx="12188952" cy="548640"/>
+          </a:xfrm>
+          <a:prstGeom prst="rect">
+            <a:avLst/>
+          </a:prstGeom>
+          <a:solidFill>
+            <a:srgbClr val="1F3A5F"/>
+          </a:solidFill>
+          <a:ln>
+            <a:noFill/>
+          </a:ln>
+        </p:spPr>
+        <p:style>
+          <a:lnRef idx="1">
+            <a:schemeClr val="accent1"/>
+          </a:lnRef>
+          <a:fillRef idx="3">
+            <a:schemeClr val="accent1"/>
+          </a:fillRef>
+          <a:effectRef idx="2">
+            <a:schemeClr val="accent1"/>
+          </a:effectRef>
+          <a:fontRef idx="minor">
+            <a:schemeClr val="lt1"/>
+          </a:fontRef>
+        </p:style>
+        <p:txBody>
+          <a:bodyPr rtlCol="0" anchor="ctr" lIns="182880" rIns="182880"/>
+          <a:lstStyle/>
+          <a:p>
+            <a:pPr algn="ctr"/>
+            <a:r>
+              <a:rPr sz="2000" b="1">
+                <a:solidFill>
+                  <a:srgbClr val="FFFFFF"/>
+                </a:solidFill>
+              </a:rPr>
+              <a:t>Instructor Progress Test 3 Grams — Page 2 of 2</a:t>
+            </a:r>
+          </a:p>
+        </p:txBody>
+      </p:sp>
+      <p:sp>
+        <p:nvSpPr>
+          <p:cNvPr id="3" name="Rounded Rectangle 2">
+            <a:hlinkClick r:id="rId2"/>
+          </p:cNvPr>
+          <p:cNvSpPr/>
+          <p:nvPr/>
+        </p:nvSpPr>
+        <p:spPr>
+          <a:xfrm>
+            <a:off x="365760" y="731520"/>
+            <a:ext cx="2200046" cy="365760"/>
+          </a:xfrm>
+          <a:prstGeom prst="roundRect">
+            <a:avLst/>
+          </a:prstGeom>
+          <a:solidFill>
+            <a:srgbClr val="E8EEF7"/>
+          </a:solidFill>
+          <a:ln>
+            <a:solidFill>
+              <a:srgbClr val="1F3A5F"/>
+            </a:solidFill>
+          </a:ln>
+        </p:spPr>
+        <p:style>
+          <a:lnRef idx="1">
+            <a:schemeClr val="accent1"/>
+          </a:lnRef>
+          <a:fillRef idx="3">
+            <a:schemeClr val="accent1"/>
+          </a:fillRef>
+          <a:effectRef idx="2">
+            <a:schemeClr val="accent1"/>
+          </a:effectRef>
+          <a:fontRef idx="minor">
+            <a:schemeClr val="lt1"/>
+          </a:fontRef>
+        </p:style>
+        <p:txBody>
+          <a:bodyPr rtlCol="0" anchor="ctr" lIns="45720" rIns="45720"/>
+          <a:lstStyle/>
+          <a:p>
+            <a:pPr algn="ctr"/>
+            <a:r>
+              <a:rPr sz="900">
+                <a:solidFill>
+                  <a:srgbClr val="1F3A5F"/>
+                </a:solidFill>
+              </a:rPr>
+              <a:t>Gram 22: Mon Calamari Cruiser contact bearing 043, codename Vulcan</a:t>
+            </a:r>
+          </a:p>
+        </p:txBody>
+      </p:sp>
+      <p:sp>
+        <p:nvSpPr>
+          <p:cNvPr id="4" name="TextBox 3"/>
+          <p:cNvSpPr txBox="1"/>
+          <p:nvPr/>
+        </p:nvSpPr>
+        <p:spPr>
+          <a:xfrm>
+            <a:off x="365760" y="1115568"/>
+            <a:ext cx="2200046" cy="1447800"/>
+          </a:xfrm>
+          <a:prstGeom prst="rect">
+            <a:avLst/>
+          </a:prstGeom>
+          <a:noFill/>
+        </p:spPr>
+        <p:txBody>
+          <a:bodyPr wrap="square">
+            <a:spAutoFit/>
+          </a:bodyPr>
+          <a:lstStyle/>
+          <a:p>
+            <a:r>
+              <a:rPr sz="800">
+                <a:hlinkClick r:id="rId3"/>
+              </a:rPr>
+              <a:t>Lofar 1</a:t>
+            </a:r>
+          </a:p>
+          <a:p>
+            <a:r>
+              <a:rPr sz="800">
+                <a:hlinkClick r:id="rId4"/>
+              </a:rPr>
+              <a:t>Lofar 2</a:t>
+            </a:r>
+          </a:p>
+          <a:p>
+            <a:r>
+              <a:rPr sz="800">
+                <a:hlinkClick r:id="rId5"/>
+              </a:rPr>
+              <a:t>Lofar 3</a:t>
+            </a:r>
+          </a:p>
+          <a:p>
+            <a:r>
+              <a:rPr sz="800">
+                <a:hlinkClick r:id="rId6"/>
+              </a:rPr>
+              <a:t>Lofar 4</a:t>
+            </a:r>
+          </a:p>
+        </p:txBody>
+      </p:sp>
+      <p:sp>
+        <p:nvSpPr>
+          <p:cNvPr id="5" name="Rounded Rectangle 4">
+            <a:hlinkClick r:id="rId7"/>
+          </p:cNvPr>
+          <p:cNvSpPr/>
+          <p:nvPr/>
+        </p:nvSpPr>
+        <p:spPr>
+          <a:xfrm>
+            <a:off x="2657246" y="731520"/>
+            <a:ext cx="2200046" cy="365760"/>
+          </a:xfrm>
+          <a:prstGeom prst="roundRect">
+            <a:avLst/>
+          </a:prstGeom>
+          <a:solidFill>
+            <a:srgbClr val="E8EEF7"/>
+          </a:solidFill>
+          <a:ln>
+            <a:solidFill>
+              <a:srgbClr val="1F3A5F"/>
+            </a:solidFill>
+          </a:ln>
+        </p:spPr>
+        <p:style>
+          <a:lnRef idx="1">
+            <a:schemeClr val="accent1"/>
+          </a:lnRef>
+          <a:fillRef idx="3">
+            <a:schemeClr val="accent1"/>
+          </a:fillRef>
+          <a:effectRef idx="2">
+            <a:schemeClr val="accent1"/>
+          </a:effectRef>
+          <a:fontRef idx="minor">
+            <a:schemeClr val="lt1"/>
+          </a:fontRef>
+        </p:style>
+        <p:txBody>
+          <a:bodyPr rtlCol="0" anchor="ctr" lIns="45720" rIns="45720"/>
+          <a:lstStyle/>
+          <a:p>
+            <a:pPr algn="ctr"/>
+            <a:r>
+              <a:rPr sz="900">
+                <a:solidFill>
+                  <a:srgbClr val="1F3A5F"/>
+                </a:solidFill>
+              </a:rPr>
+              <a:t>Gram 23: X-wing contact bearing 303, codename Dank</a:t>
+            </a:r>
+          </a:p>
+        </p:txBody>
+      </p:sp>
+      <p:sp>
+        <p:nvSpPr>
+          <p:cNvPr id="6" name="TextBox 5"/>
+          <p:cNvSpPr txBox="1"/>
+          <p:nvPr/>
+        </p:nvSpPr>
+        <p:spPr>
+          <a:xfrm>
+            <a:off x="2657246" y="1115568"/>
+            <a:ext cx="2200046" cy="1447800"/>
+          </a:xfrm>
+          <a:prstGeom prst="rect">
+            <a:avLst/>
+          </a:prstGeom>
+          <a:noFill/>
+        </p:spPr>
+        <p:txBody>
+          <a:bodyPr wrap="square">
+            <a:spAutoFit/>
+          </a:bodyPr>
+          <a:lstStyle/>
+          <a:p>
+            <a:r>
+              <a:rPr sz="800">
+                <a:hlinkClick r:id="rId8"/>
+              </a:rPr>
+              <a:t>Lofar 1</a:t>
+            </a:r>
+          </a:p>
+          <a:p>
+            <a:r>
+              <a:rPr sz="800">
+                <a:hlinkClick r:id="rId9"/>
+              </a:rPr>
+              <a:t>Lofar 2</a:t>
+            </a:r>
+          </a:p>
+        </p:txBody>
+      </p:sp>
+      <p:sp>
+        <p:nvSpPr>
+          <p:cNvPr id="7" name="Rounded Rectangle 6">
+            <a:hlinkClick r:id="rId10"/>
+          </p:cNvPr>
+          <p:cNvSpPr/>
+          <p:nvPr/>
+        </p:nvSpPr>
+        <p:spPr>
+          <a:xfrm>
+            <a:off x="4948732" y="731520"/>
+            <a:ext cx="2200046" cy="365760"/>
+          </a:xfrm>
+          <a:prstGeom prst="roundRect">
+            <a:avLst/>
+          </a:prstGeom>
+          <a:solidFill>
+            <a:srgbClr val="E8EEF7"/>
+          </a:solidFill>
+          <a:ln>
+            <a:solidFill>
+              <a:srgbClr val="1F3A5F"/>
+            </a:solidFill>
+          </a:ln>
+        </p:spPr>
+        <p:style>
+          <a:lnRef idx="1">
+            <a:schemeClr val="accent1"/>
+          </a:lnRef>
+          <a:fillRef idx="3">
+            <a:schemeClr val="accent1"/>
+          </a:fillRef>
+          <a:effectRef idx="2">
+            <a:schemeClr val="accent1"/>
+          </a:effectRef>
+          <a:fontRef idx="minor">
+            <a:schemeClr val="lt1"/>
+          </a:fontRef>
+        </p:style>
+        <p:txBody>
+          <a:bodyPr rtlCol="0" anchor="ctr" lIns="45720" rIns="45720"/>
+          <a:lstStyle/>
+          <a:p>
+            <a:pPr algn="ctr"/>
+            <a:r>
+              <a:rPr sz="900">
+                <a:solidFill>
+                  <a:srgbClr val="1F3A5F"/>
+                </a:solidFill>
+              </a:rPr>
+              <a:t>Gram 24: FR Star Destroyer, Category 1, Dagobah</a:t>
+            </a:r>
+          </a:p>
+        </p:txBody>
+      </p:sp>
+      <p:sp>
+        <p:nvSpPr>
+          <p:cNvPr id="8" name="TextBox 7"/>
+          <p:cNvSpPr txBox="1"/>
+          <p:nvPr/>
+        </p:nvSpPr>
+        <p:spPr>
+          <a:xfrm>
+            <a:off x="4948732" y="1115568"/>
+            <a:ext cx="2200046" cy="1447800"/>
+          </a:xfrm>
+          <a:prstGeom prst="rect">
+            <a:avLst/>
+          </a:prstGeom>
+          <a:noFill/>
+        </p:spPr>
+        <p:txBody>
+          <a:bodyPr wrap="square">
+            <a:spAutoFit/>
+          </a:bodyPr>
+          <a:lstStyle/>
+          <a:p>
+            <a:r>
+              <a:rPr sz="800">
+                <a:hlinkClick r:id="rId11"/>
+              </a:rPr>
+              <a:t>Lofar 1</a:t>
+            </a:r>
+          </a:p>
+          <a:p>
+            <a:r>
+              <a:rPr sz="800">
+                <a:hlinkClick r:id="rId12"/>
+              </a:rPr>
+              <a:t>Lofar 2</a:t>
+            </a:r>
+          </a:p>
+          <a:p>
+            <a:r>
+              <a:rPr sz="800">
+                <a:hlinkClick r:id="rId13"/>
+              </a:rPr>
+              <a:t>Lofar 3</a:t>
+            </a:r>
+          </a:p>
+          <a:p>
+            <a:r>
+              <a:rPr sz="800">
+                <a:hlinkClick r:id="rId14"/>
+              </a:rPr>
+              <a:t>Lofar 4</a:t>
+            </a:r>
+          </a:p>
+        </p:txBody>
+      </p:sp>
+      <p:sp>
+        <p:nvSpPr>
+          <p:cNvPr id="9" name="Rounded Rectangle 8">
+            <a:hlinkClick r:id="rId15"/>
+          </p:cNvPr>
+          <p:cNvSpPr/>
+          <p:nvPr/>
+        </p:nvSpPr>
+        <p:spPr>
+          <a:xfrm>
+            <a:off x="7240219" y="731520"/>
+            <a:ext cx="2200046" cy="365760"/>
+          </a:xfrm>
+          <a:prstGeom prst="roundRect">
+            <a:avLst/>
+          </a:prstGeom>
+          <a:solidFill>
+            <a:srgbClr val="E8EEF7"/>
+          </a:solidFill>
+          <a:ln>
+            <a:solidFill>
+              <a:srgbClr val="1F3A5F"/>
+            </a:solidFill>
+          </a:ln>
+        </p:spPr>
+        <p:style>
+          <a:lnRef idx="1">
+            <a:schemeClr val="accent1"/>
+          </a:lnRef>
+          <a:fillRef idx="3">
+            <a:schemeClr val="accent1"/>
+          </a:fillRef>
+          <a:effectRef idx="2">
+            <a:schemeClr val="accent1"/>
+          </a:effectRef>
+          <a:fontRef idx="minor">
+            <a:schemeClr val="lt1"/>
+          </a:fontRef>
+        </p:style>
+        <p:txBody>
+          <a:bodyPr rtlCol="0" anchor="ctr" lIns="45720" rIns="45720"/>
+          <a:lstStyle/>
+          <a:p>
+            <a:pPr algn="ctr"/>
+            <a:r>
+              <a:rPr sz="900">
+                <a:solidFill>
+                  <a:srgbClr val="1F3A5F"/>
+                </a:solidFill>
+              </a:rPr>
+              <a:t>Gram 25: FR Razor Crest, Category 4, Trill</a:t>
+            </a:r>
+          </a:p>
+        </p:txBody>
+      </p:sp>
+      <p:sp>
+        <p:nvSpPr>
+          <p:cNvPr id="10" name="TextBox 9"/>
+          <p:cNvSpPr txBox="1"/>
+          <p:nvPr/>
+        </p:nvSpPr>
+        <p:spPr>
+          <a:xfrm>
+            <a:off x="7240219" y="1115568"/>
+            <a:ext cx="2200046" cy="1447800"/>
+          </a:xfrm>
+          <a:prstGeom prst="rect">
+            <a:avLst/>
+          </a:prstGeom>
+          <a:noFill/>
+        </p:spPr>
+        <p:txBody>
+          <a:bodyPr wrap="square">
+            <a:spAutoFit/>
+          </a:bodyPr>
+          <a:lstStyle/>
+          <a:p>
+            <a:r>
+              <a:rPr sz="800">
+                <a:hlinkClick r:id="rId16"/>
+              </a:rPr>
+              <a:t>Lofar 1</a:t>
+            </a:r>
+          </a:p>
+        </p:txBody>
+      </p:sp>
+      <p:sp>
+        <p:nvSpPr>
+          <p:cNvPr id="11" name="Rounded Rectangle 10">
+            <a:hlinkClick r:id="rId17"/>
+          </p:cNvPr>
+          <p:cNvSpPr/>
+          <p:nvPr/>
+        </p:nvSpPr>
+        <p:spPr>
+          <a:xfrm>
+            <a:off x="9531705" y="731520"/>
+            <a:ext cx="2200046" cy="365760"/>
+          </a:xfrm>
+          <a:prstGeom prst="roundRect">
+            <a:avLst/>
+          </a:prstGeom>
+          <a:solidFill>
+            <a:srgbClr val="E8EEF7"/>
+          </a:solidFill>
+          <a:ln>
+            <a:solidFill>
+              <a:srgbClr val="1F3A5F"/>
+            </a:solidFill>
+          </a:ln>
+        </p:spPr>
+        <p:style>
+          <a:lnRef idx="1">
+            <a:schemeClr val="accent1"/>
+          </a:lnRef>
+          <a:fillRef idx="3">
+            <a:schemeClr val="accent1"/>
+          </a:fillRef>
+          <a:effectRef idx="2">
+            <a:schemeClr val="accent1"/>
+          </a:effectRef>
+          <a:fontRef idx="minor">
+            <a:schemeClr val="lt1"/>
+          </a:fontRef>
+        </p:style>
+        <p:txBody>
+          <a:bodyPr rtlCol="0" anchor="ctr" lIns="45720" rIns="45720"/>
+          <a:lstStyle/>
+          <a:p>
+            <a:pPr algn="ctr"/>
+            <a:r>
+              <a:rPr sz="900">
+                <a:solidFill>
+                  <a:srgbClr val="1F3A5F"/>
+                </a:solidFill>
+              </a:rPr>
+              <a:t>Gram 26: Voyager contact bearing 256, codename Coruscant</a:t>
+            </a:r>
+          </a:p>
+        </p:txBody>
+      </p:sp>
+      <p:sp>
+        <p:nvSpPr>
+          <p:cNvPr id="12" name="TextBox 11"/>
+          <p:cNvSpPr txBox="1"/>
+          <p:nvPr/>
+        </p:nvSpPr>
+        <p:spPr>
+          <a:xfrm>
+            <a:off x="9531705" y="1115568"/>
+            <a:ext cx="2200046" cy="1447800"/>
+          </a:xfrm>
+          <a:prstGeom prst="rect">
+            <a:avLst/>
+          </a:prstGeom>
+          <a:noFill/>
+        </p:spPr>
+        <p:txBody>
+          <a:bodyPr wrap="square">
+            <a:spAutoFit/>
+          </a:bodyPr>
+          <a:lstStyle/>
+          <a:p>
+            <a:r>
+              <a:rPr sz="800">
+                <a:hlinkClick r:id="rId18"/>
+              </a:rPr>
+              <a:t>Lofar 1</a:t>
+            </a:r>
+          </a:p>
+        </p:txBody>
+      </p:sp>
+      <p:sp>
+        <p:nvSpPr>
+          <p:cNvPr id="13" name="Rounded Rectangle 12">
+            <a:hlinkClick r:id="rId19"/>
+          </p:cNvPr>
+          <p:cNvSpPr/>
+          <p:nvPr/>
+        </p:nvSpPr>
+        <p:spPr>
+          <a:xfrm>
+            <a:off x="365760" y="2682240"/>
+            <a:ext cx="2200046" cy="365760"/>
+          </a:xfrm>
+          <a:prstGeom prst="roundRect">
+            <a:avLst/>
+          </a:prstGeom>
+          <a:solidFill>
+            <a:srgbClr val="E8EEF7"/>
+          </a:solidFill>
+          <a:ln>
+            <a:solidFill>
+              <a:srgbClr val="1F3A5F"/>
+            </a:solidFill>
+          </a:ln>
+        </p:spPr>
+        <p:style>
+          <a:lnRef idx="1">
+            <a:schemeClr val="accent1"/>
+          </a:lnRef>
+          <a:fillRef idx="3">
+            <a:schemeClr val="accent1"/>
+          </a:fillRef>
+          <a:effectRef idx="2">
+            <a:schemeClr val="accent1"/>
+          </a:effectRef>
+          <a:fontRef idx="minor">
+            <a:schemeClr val="lt1"/>
+          </a:fontRef>
+        </p:style>
+        <p:txBody>
+          <a:bodyPr rtlCol="0" anchor="ctr" lIns="45720" rIns="45720"/>
+          <a:lstStyle/>
+          <a:p>
+            <a:pPr algn="ctr"/>
+            <a:r>
+              <a:rPr sz="900">
+                <a:solidFill>
+                  <a:srgbClr val="1F3A5F"/>
+                </a:solidFill>
+              </a:rPr>
+              <a:t>Gram 27: FR Millennium Falcon, Category 2, Kobol</a:t>
+            </a:r>
+          </a:p>
+        </p:txBody>
+      </p:sp>
+      <p:sp>
+        <p:nvSpPr>
+          <p:cNvPr id="14" name="TextBox 13"/>
+          <p:cNvSpPr txBox="1"/>
+          <p:nvPr/>
+        </p:nvSpPr>
+        <p:spPr>
+          <a:xfrm>
+            <a:off x="365760" y="3066288"/>
+            <a:ext cx="2200046" cy="1447800"/>
+          </a:xfrm>
+          <a:prstGeom prst="rect">
+            <a:avLst/>
+          </a:prstGeom>
+          <a:noFill/>
+        </p:spPr>
+        <p:txBody>
+          <a:bodyPr wrap="square">
+            <a:spAutoFit/>
+          </a:bodyPr>
+          <a:lstStyle/>
+          <a:p>
+            <a:r>
+              <a:rPr sz="800">
+                <a:hlinkClick r:id="rId20"/>
+              </a:rPr>
+              <a:t>Lofar 1</a:t>
+            </a:r>
+          </a:p>
+          <a:p>
+            <a:r>
+              <a:rPr sz="800">
+                <a:hlinkClick r:id="rId21"/>
+              </a:rPr>
+              <a:t>Lofar 2</a:t>
+            </a:r>
+          </a:p>
+          <a:p>
+            <a:r>
+              <a:rPr sz="800">
+                <a:hlinkClick r:id="rId22"/>
+              </a:rPr>
+              <a:t>Lofar 3</a:t>
+            </a:r>
+          </a:p>
+          <a:p>
+            <a:r>
+              <a:rPr sz="800">
+                <a:hlinkClick r:id="rId23"/>
+              </a:rPr>
+              <a:t>Lofar 4</a:t>
+            </a:r>
+          </a:p>
+        </p:txBody>
+      </p:sp>
+      <p:sp>
+        <p:nvSpPr>
+          <p:cNvPr id="15" name="Rounded Rectangle 14">
+            <a:hlinkClick r:id="rId24"/>
+          </p:cNvPr>
+          <p:cNvSpPr/>
+          <p:nvPr/>
+        </p:nvSpPr>
+        <p:spPr>
+          <a:xfrm>
+            <a:off x="2657246" y="2682240"/>
+            <a:ext cx="2200046" cy="365760"/>
+          </a:xfrm>
+          <a:prstGeom prst="roundRect">
+            <a:avLst/>
+          </a:prstGeom>
+          <a:solidFill>
+            <a:srgbClr val="E8EEF7"/>
+          </a:solidFill>
+          <a:ln>
+            <a:solidFill>
+              <a:srgbClr val="1F3A5F"/>
+            </a:solidFill>
+          </a:ln>
+        </p:spPr>
+        <p:style>
+          <a:lnRef idx="1">
+            <a:schemeClr val="accent1"/>
+          </a:lnRef>
+          <a:fillRef idx="3">
+            <a:schemeClr val="accent1"/>
+          </a:fillRef>
+          <a:effectRef idx="2">
+            <a:schemeClr val="accent1"/>
+          </a:effectRef>
+          <a:fontRef idx="minor">
+            <a:schemeClr val="lt1"/>
+          </a:fontRef>
+        </p:style>
+        <p:txBody>
+          <a:bodyPr rtlCol="0" anchor="ctr" lIns="45720" rIns="45720"/>
+          <a:lstStyle/>
+          <a:p>
+            <a:pPr algn="ctr"/>
+            <a:r>
+              <a:rPr sz="900">
+                <a:solidFill>
+                  <a:srgbClr val="1F3A5F"/>
+                </a:solidFill>
+              </a:rPr>
+              <a:t>Gram 28: FR Reliant, Category 2, Coruscant</a:t>
+            </a:r>
+          </a:p>
+        </p:txBody>
+      </p:sp>
+      <p:sp>
+        <p:nvSpPr>
+          <p:cNvPr id="16" name="TextBox 15"/>
+          <p:cNvSpPr txBox="1"/>
+          <p:nvPr/>
+        </p:nvSpPr>
+        <p:spPr>
+          <a:xfrm>
+            <a:off x="2657246" y="3066288"/>
+            <a:ext cx="2200046" cy="1447800"/>
+          </a:xfrm>
+          <a:prstGeom prst="rect">
+            <a:avLst/>
+          </a:prstGeom>
+          <a:noFill/>
+        </p:spPr>
+        <p:txBody>
+          <a:bodyPr wrap="square">
+            <a:spAutoFit/>
+          </a:bodyPr>
+          <a:lstStyle/>
+          <a:p>
+            <a:r>
+              <a:rPr sz="800">
+                <a:hlinkClick r:id="rId25"/>
+              </a:rPr>
+              <a:t>Lofar 1</a:t>
+            </a:r>
+          </a:p>
+          <a:p>
+            <a:r>
+              <a:rPr sz="800">
+                <a:hlinkClick r:id="rId26"/>
+              </a:rPr>
+              <a:t>Lofar 2</a:t>
+            </a:r>
+          </a:p>
+        </p:txBody>
+      </p:sp>
+      <p:sp>
+        <p:nvSpPr>
+          <p:cNvPr id="17" name="Rounded Rectangle 16">
+            <a:hlinkClick r:id="rId27"/>
+          </p:cNvPr>
+          <p:cNvSpPr/>
+          <p:nvPr/>
+        </p:nvSpPr>
+        <p:spPr>
+          <a:xfrm>
+            <a:off x="4948732" y="2682240"/>
+            <a:ext cx="2200046" cy="365760"/>
+          </a:xfrm>
+          <a:prstGeom prst="roundRect">
+            <a:avLst/>
+          </a:prstGeom>
+          <a:solidFill>
+            <a:srgbClr val="E8EEF7"/>
+          </a:solidFill>
+          <a:ln>
+            <a:solidFill>
+              <a:srgbClr val="1F3A5F"/>
+            </a:solidFill>
+          </a:ln>
+        </p:spPr>
+        <p:style>
+          <a:lnRef idx="1">
+            <a:schemeClr val="accent1"/>
+          </a:lnRef>
+          <a:fillRef idx="3">
+            <a:schemeClr val="accent1"/>
+          </a:fillRef>
+          <a:effectRef idx="2">
+            <a:schemeClr val="accent1"/>
+          </a:effectRef>
+          <a:fontRef idx="minor">
+            <a:schemeClr val="lt1"/>
+          </a:fontRef>
+        </p:style>
+        <p:txBody>
+          <a:bodyPr rtlCol="0" anchor="ctr" lIns="45720" rIns="45720"/>
+          <a:lstStyle/>
+          <a:p>
+            <a:pPr algn="ctr"/>
+            <a:r>
+              <a:rPr sz="900">
+                <a:solidFill>
+                  <a:srgbClr val="1F3A5F"/>
+                </a:solidFill>
+              </a:rPr>
+              <a:t>Gram 29: Miranda-class contact bearing 190, codename Defiant</a:t>
+            </a:r>
+          </a:p>
+        </p:txBody>
+      </p:sp>
+      <p:sp>
+        <p:nvSpPr>
+          <p:cNvPr id="18" name="TextBox 17"/>
+          <p:cNvSpPr txBox="1"/>
+          <p:nvPr/>
+        </p:nvSpPr>
+        <p:spPr>
+          <a:xfrm>
+            <a:off x="4948732" y="3066288"/>
+            <a:ext cx="2200046" cy="1447800"/>
+          </a:xfrm>
+          <a:prstGeom prst="rect">
+            <a:avLst/>
+          </a:prstGeom>
+          <a:noFill/>
+        </p:spPr>
+        <p:txBody>
+          <a:bodyPr wrap="square">
+            <a:spAutoFit/>
+          </a:bodyPr>
+          <a:lstStyle/>
+          <a:p>
+            <a:r>
+              <a:rPr sz="800">
+                <a:hlinkClick r:id="rId28"/>
+              </a:rPr>
+              <a:t>Lofar 1</a:t>
+            </a:r>
+          </a:p>
+          <a:p>
+            <a:r>
+              <a:rPr sz="800">
+                <a:hlinkClick r:id="rId29"/>
+              </a:rPr>
+              <a:t>Lofar 2</a:t>
+            </a:r>
+          </a:p>
+        </p:txBody>
+      </p:sp>
+      <p:sp>
+        <p:nvSpPr>
+          <p:cNvPr id="19" name="Rounded Rectangle 18">
+            <a:hlinkClick r:id="rId30"/>
+          </p:cNvPr>
+          <p:cNvSpPr/>
+          <p:nvPr/>
+        </p:nvSpPr>
+        <p:spPr>
+          <a:xfrm>
+            <a:off x="7240219" y="2682240"/>
+            <a:ext cx="2200046" cy="365760"/>
+          </a:xfrm>
+          <a:prstGeom prst="roundRect">
+            <a:avLst/>
+          </a:prstGeom>
+          <a:solidFill>
+            <a:srgbClr val="E8EEF7"/>
+          </a:solidFill>
+          <a:ln>
+            <a:solidFill>
+              <a:srgbClr val="1F3A5F"/>
+            </a:solidFill>
+          </a:ln>
+        </p:spPr>
+        <p:style>
+          <a:lnRef idx="1">
+            <a:schemeClr val="accent1"/>
+          </a:lnRef>
+          <a:fillRef idx="3">
+            <a:schemeClr val="accent1"/>
+          </a:fillRef>
+          <a:effectRef idx="2">
+            <a:schemeClr val="accent1"/>
+          </a:effectRef>
+          <a:fontRef idx="minor">
+            <a:schemeClr val="lt1"/>
+          </a:fontRef>
+        </p:style>
+        <p:txBody>
+          <a:bodyPr rtlCol="0" anchor="ctr" lIns="45720" rIns="45720"/>
+          <a:lstStyle/>
+          <a:p>
+            <a:pPr algn="ctr"/>
+            <a:r>
+              <a:rPr sz="900">
+                <a:solidFill>
+                  <a:srgbClr val="1F3A5F"/>
+                </a:solidFill>
+              </a:rPr>
+              <a:t>Gram 30: Ghost contact bearing 075, codename Yavin</a:t>
+            </a:r>
+          </a:p>
+        </p:txBody>
+      </p:sp>
+      <p:sp>
+        <p:nvSpPr>
+          <p:cNvPr id="20" name="TextBox 19"/>
+          <p:cNvSpPr txBox="1"/>
+          <p:nvPr/>
+        </p:nvSpPr>
+        <p:spPr>
+          <a:xfrm>
+            <a:off x="7240219" y="3066288"/>
+            <a:ext cx="2200046" cy="1447800"/>
+          </a:xfrm>
+          <a:prstGeom prst="rect">
+            <a:avLst/>
+          </a:prstGeom>
+          <a:noFill/>
+        </p:spPr>
+        <p:txBody>
+          <a:bodyPr wrap="square">
+            <a:spAutoFit/>
+          </a:bodyPr>
+          <a:lstStyle/>
+          <a:p>
+            <a:r>
+              <a:rPr sz="800">
+                <a:hlinkClick r:id="rId31"/>
+              </a:rPr>
+              <a:t>Lofar 1</a:t>
+            </a:r>
+          </a:p>
+          <a:p>
+            <a:r>
+              <a:rPr sz="800">
+                <a:hlinkClick r:id="rId32"/>
+              </a:rPr>
+              <a:t>Lofar 2</a:t>
+            </a:r>
+          </a:p>
+          <a:p>
+            <a:r>
+              <a:rPr sz="800">
+                <a:hlinkClick r:id="rId33"/>
+              </a:rPr>
+              <a:t>Lofar 3</a:t>
+            </a:r>
+          </a:p>
+        </p:txBody>
+      </p:sp>
+      <p:sp>
+        <p:nvSpPr>
+          <p:cNvPr id="21" name="Rounded Rectangle 20">
+            <a:hlinkClick r:id="rId34"/>
+          </p:cNvPr>
+          <p:cNvSpPr/>
+          <p:nvPr/>
+        </p:nvSpPr>
+        <p:spPr>
+          <a:xfrm>
+            <a:off x="9531705" y="2682240"/>
+            <a:ext cx="2200046" cy="365760"/>
+          </a:xfrm>
+          <a:prstGeom prst="roundRect">
+            <a:avLst/>
+          </a:prstGeom>
+          <a:solidFill>
+            <a:srgbClr val="E8EEF7"/>
+          </a:solidFill>
+          <a:ln>
+            <a:solidFill>
+              <a:srgbClr val="1F3A5F"/>
+            </a:solidFill>
+          </a:ln>
+        </p:spPr>
+        <p:style>
+          <a:lnRef idx="1">
+            <a:schemeClr val="accent1"/>
+          </a:lnRef>
+          <a:fillRef idx="3">
+            <a:schemeClr val="accent1"/>
+          </a:fillRef>
+          <a:effectRef idx="2">
+            <a:schemeClr val="accent1"/>
+          </a:effectRef>
+          <a:fontRef idx="minor">
+            <a:schemeClr val="lt1"/>
+          </a:fontRef>
+        </p:style>
+        <p:txBody>
+          <a:bodyPr rtlCol="0" anchor="ctr" lIns="45720" rIns="45720"/>
+          <a:lstStyle/>
+          <a:p>
+            <a:pPr algn="ctr"/>
+            <a:r>
+              <a:rPr sz="900">
+                <a:solidFill>
+                  <a:srgbClr val="1F3A5F"/>
+                </a:solidFill>
+              </a:rPr>
+              <a:t>Gram 31: Nebula-class contact bearing 338, codename Vulcan</a:t>
+            </a:r>
+          </a:p>
+        </p:txBody>
+      </p:sp>
+      <p:sp>
+        <p:nvSpPr>
+          <p:cNvPr id="22" name="TextBox 21"/>
+          <p:cNvSpPr txBox="1"/>
+          <p:nvPr/>
+        </p:nvSpPr>
+        <p:spPr>
+          <a:xfrm>
+            <a:off x="9531705" y="3066288"/>
+            <a:ext cx="2200046" cy="1447800"/>
+          </a:xfrm>
+          <a:prstGeom prst="rect">
+            <a:avLst/>
+          </a:prstGeom>
+          <a:noFill/>
+        </p:spPr>
+        <p:txBody>
+          <a:bodyPr wrap="square">
+            <a:spAutoFit/>
+          </a:bodyPr>
+          <a:lstStyle/>
+          <a:p>
+            <a:r>
+              <a:rPr sz="800">
+                <a:hlinkClick r:id="rId35"/>
+              </a:rPr>
+              <a:t>Lofar 1</a:t>
+            </a:r>
+          </a:p>
+          <a:p>
+            <a:r>
+              <a:rPr sz="800">
+                <a:hlinkClick r:id="rId36"/>
+              </a:rPr>
+              <a:t>Lofar 2</a:t>
+            </a:r>
+          </a:p>
+          <a:p>
+            <a:r>
+              <a:rPr sz="800">
+                <a:hlinkClick r:id="rId37"/>
+              </a:rPr>
+              <a:t>Lofar 3</a:t>
+            </a:r>
+          </a:p>
+          <a:p>
+            <a:r>
+              <a:rPr sz="800">
+                <a:hlinkClick r:id="rId38"/>
+              </a:rPr>
+              <a:t>Lofar 4</a:t>
+            </a:r>
+          </a:p>
+        </p:txBody>
+      </p:sp>
+      <p:sp>
+        <p:nvSpPr>
+          <p:cNvPr id="23" name="Rounded Rectangle 22">
+            <a:hlinkClick r:id="rId39"/>
+          </p:cNvPr>
+          <p:cNvSpPr/>
+          <p:nvPr/>
+        </p:nvSpPr>
+        <p:spPr>
+          <a:xfrm>
+            <a:off x="365760" y="4632960"/>
+            <a:ext cx="2200046" cy="365760"/>
+          </a:xfrm>
+          <a:prstGeom prst="roundRect">
+            <a:avLst/>
+          </a:prstGeom>
+          <a:solidFill>
+            <a:srgbClr val="E8EEF7"/>
+          </a:solidFill>
+          <a:ln>
+            <a:solidFill>
+              <a:srgbClr val="1F3A5F"/>
+            </a:solidFill>
+          </a:ln>
+        </p:spPr>
+        <p:style>
+          <a:lnRef idx="1">
+            <a:schemeClr val="accent1"/>
+          </a:lnRef>
+          <a:fillRef idx="3">
+            <a:schemeClr val="accent1"/>
+          </a:fillRef>
+          <a:effectRef idx="2">
+            <a:schemeClr val="accent1"/>
+          </a:effectRef>
+          <a:fontRef idx="minor">
+            <a:schemeClr val="lt1"/>
+          </a:fontRef>
+        </p:style>
+        <p:txBody>
+          <a:bodyPr rtlCol="0" anchor="ctr" lIns="45720" rIns="45720"/>
+          <a:lstStyle/>
+          <a:p>
+            <a:pPr algn="ctr"/>
+            <a:r>
+              <a:rPr sz="900">
+                <a:solidFill>
+                  <a:srgbClr val="1F3A5F"/>
+                </a:solidFill>
+              </a:rPr>
+              <a:t>Gram 32: FR Rebel One, Category 2, Mustafar</a:t>
+            </a:r>
+          </a:p>
+        </p:txBody>
+      </p:sp>
+      <p:sp>
+        <p:nvSpPr>
+          <p:cNvPr id="24" name="TextBox 23"/>
+          <p:cNvSpPr txBox="1"/>
+          <p:nvPr/>
+        </p:nvSpPr>
+        <p:spPr>
+          <a:xfrm>
+            <a:off x="365760" y="5017008"/>
+            <a:ext cx="2200046" cy="1447800"/>
+          </a:xfrm>
+          <a:prstGeom prst="rect">
+            <a:avLst/>
+          </a:prstGeom>
+          <a:noFill/>
+        </p:spPr>
+        <p:txBody>
+          <a:bodyPr wrap="square">
+            <a:spAutoFit/>
+          </a:bodyPr>
+          <a:lstStyle/>
+          <a:p>
+            <a:r>
+              <a:rPr sz="800">
+                <a:hlinkClick r:id="rId40"/>
+              </a:rPr>
+              <a:t>Lofar 1</a:t>
+            </a:r>
+          </a:p>
+        </p:txBody>
+      </p:sp>
+      <p:sp>
+        <p:nvSpPr>
+          <p:cNvPr id="25" name="Rounded Rectangle 24">
+            <a:hlinkClick r:id="rId41"/>
+          </p:cNvPr>
+          <p:cNvSpPr/>
+          <p:nvPr/>
+        </p:nvSpPr>
+        <p:spPr>
+          <a:xfrm>
+            <a:off x="2657246" y="4632960"/>
+            <a:ext cx="2200046" cy="365760"/>
+          </a:xfrm>
+          <a:prstGeom prst="roundRect">
+            <a:avLst/>
+          </a:prstGeom>
+          <a:solidFill>
+            <a:srgbClr val="E8EEF7"/>
+          </a:solidFill>
+          <a:ln>
+            <a:solidFill>
+              <a:srgbClr val="1F3A5F"/>
+            </a:solidFill>
+          </a:ln>
+        </p:spPr>
+        <p:style>
+          <a:lnRef idx="1">
+            <a:schemeClr val="accent1"/>
+          </a:lnRef>
+          <a:fillRef idx="3">
+            <a:schemeClr val="accent1"/>
+          </a:fillRef>
+          <a:effectRef idx="2">
+            <a:schemeClr val="accent1"/>
+          </a:effectRef>
+          <a:fontRef idx="minor">
+            <a:schemeClr val="lt1"/>
+          </a:fontRef>
+        </p:style>
+        <p:txBody>
+          <a:bodyPr rtlCol="0" anchor="ctr" lIns="45720" rIns="45720"/>
+          <a:lstStyle/>
+          <a:p>
+            <a:pPr algn="ctr"/>
+            <a:r>
+              <a:rPr sz="900">
+                <a:solidFill>
+                  <a:srgbClr val="1F3A5F"/>
+                </a:solidFill>
+              </a:rPr>
+              <a:t>Gram 33: FR Voyager, Category 4, Hoth</a:t>
+            </a:r>
+          </a:p>
+        </p:txBody>
+      </p:sp>
+      <p:sp>
+        <p:nvSpPr>
+          <p:cNvPr id="26" name="TextBox 25"/>
+          <p:cNvSpPr txBox="1"/>
+          <p:nvPr/>
+        </p:nvSpPr>
+        <p:spPr>
+          <a:xfrm>
+            <a:off x="2657246" y="5017008"/>
+            <a:ext cx="2200046" cy="1447800"/>
+          </a:xfrm>
+          <a:prstGeom prst="rect">
+            <a:avLst/>
+          </a:prstGeom>
+          <a:noFill/>
+        </p:spPr>
+        <p:txBody>
+          <a:bodyPr wrap="square">
+            <a:spAutoFit/>
+          </a:bodyPr>
+          <a:lstStyle/>
+          <a:p>
+            <a:r>
+              <a:rPr sz="800">
+                <a:hlinkClick r:id="rId42"/>
+              </a:rPr>
+              <a:t>Lofar 1</a:t>
+            </a:r>
+          </a:p>
+        </p:txBody>
+      </p:sp>
+      <p:sp>
+        <p:nvSpPr>
+          <p:cNvPr id="27" name="Rounded Rectangle 26">
+            <a:hlinkClick r:id="rId43"/>
+          </p:cNvPr>
+          <p:cNvSpPr/>
+          <p:nvPr/>
+        </p:nvSpPr>
+        <p:spPr>
+          <a:xfrm>
+            <a:off x="4948732" y="4632960"/>
+            <a:ext cx="2200046" cy="365760"/>
+          </a:xfrm>
+          <a:prstGeom prst="roundRect">
+            <a:avLst/>
+          </a:prstGeom>
+          <a:solidFill>
+            <a:srgbClr val="E8EEF7"/>
+          </a:solidFill>
+          <a:ln>
+            <a:solidFill>
+              <a:srgbClr val="1F3A5F"/>
+            </a:solidFill>
+          </a:ln>
+        </p:spPr>
+        <p:style>
+          <a:lnRef idx="1">
+            <a:schemeClr val="accent1"/>
+          </a:lnRef>
+          <a:fillRef idx="3">
+            <a:schemeClr val="accent1"/>
+          </a:fillRef>
+          <a:effectRef idx="2">
+            <a:schemeClr val="accent1"/>
+          </a:effectRef>
+          <a:fontRef idx="minor">
+            <a:schemeClr val="lt1"/>
+          </a:fontRef>
+        </p:style>
+        <p:txBody>
+          <a:bodyPr rtlCol="0" anchor="ctr" lIns="45720" rIns="45720"/>
+          <a:lstStyle/>
+          <a:p>
+            <a:pPr algn="ctr"/>
+            <a:r>
+              <a:rPr sz="900">
+                <a:solidFill>
+                  <a:srgbClr val="1F3A5F"/>
+                </a:solidFill>
+              </a:rPr>
+              <a:t>Gram 34: FR Rebel One, Category 4, Bajor</a:t>
+            </a:r>
+          </a:p>
+        </p:txBody>
+      </p:sp>
+      <p:sp>
+        <p:nvSpPr>
+          <p:cNvPr id="28" name="TextBox 27"/>
+          <p:cNvSpPr txBox="1"/>
+          <p:nvPr/>
+        </p:nvSpPr>
+        <p:spPr>
+          <a:xfrm>
+            <a:off x="4948732" y="5017008"/>
+            <a:ext cx="2200046" cy="1447800"/>
+          </a:xfrm>
+          <a:prstGeom prst="rect">
+            <a:avLst/>
+          </a:prstGeom>
+          <a:noFill/>
+        </p:spPr>
+        <p:txBody>
+          <a:bodyPr wrap="square">
+            <a:spAutoFit/>
+          </a:bodyPr>
+          <a:lstStyle/>
+          <a:p>
+            <a:r>
+              <a:rPr sz="800">
+                <a:hlinkClick r:id="rId44"/>
+              </a:rPr>
+              <a:t>Lofar 1</a:t>
+            </a:r>
+          </a:p>
+        </p:txBody>
+      </p:sp>
+      <p:sp>
+        <p:nvSpPr>
+          <p:cNvPr id="29" name="Rounded Rectangle 28">
+            <a:hlinkClick r:id="rId45"/>
+          </p:cNvPr>
+          <p:cNvSpPr/>
+          <p:nvPr/>
+        </p:nvSpPr>
+        <p:spPr>
+          <a:xfrm>
+            <a:off x="7240219" y="4632960"/>
+            <a:ext cx="2200046" cy="365760"/>
+          </a:xfrm>
+          <a:prstGeom prst="roundRect">
+            <a:avLst/>
+          </a:prstGeom>
+          <a:solidFill>
+            <a:srgbClr val="E8EEF7"/>
+          </a:solidFill>
+          <a:ln>
+            <a:solidFill>
+              <a:srgbClr val="1F3A5F"/>
+            </a:solidFill>
+          </a:ln>
+        </p:spPr>
+        <p:style>
+          <a:lnRef idx="1">
+            <a:schemeClr val="accent1"/>
+          </a:lnRef>
+          <a:fillRef idx="3">
+            <a:schemeClr val="accent1"/>
+          </a:fillRef>
+          <a:effectRef idx="2">
+            <a:schemeClr val="accent1"/>
+          </a:effectRef>
+          <a:fontRef idx="minor">
+            <a:schemeClr val="lt1"/>
+          </a:fontRef>
+        </p:style>
+        <p:txBody>
+          <a:bodyPr rtlCol="0" anchor="ctr" lIns="45720" rIns="45720"/>
+          <a:lstStyle/>
+          <a:p>
+            <a:pPr algn="ctr"/>
+            <a:r>
+              <a:rPr sz="900">
+                <a:solidFill>
+                  <a:srgbClr val="1F3A5F"/>
+                </a:solidFill>
+              </a:rPr>
+              <a:t>Gram 35: FR Tantive IV, Category 4, Romulus</a:t>
+            </a:r>
+          </a:p>
+        </p:txBody>
+      </p:sp>
+      <p:sp>
+        <p:nvSpPr>
+          <p:cNvPr id="30" name="TextBox 29"/>
+          <p:cNvSpPr txBox="1"/>
+          <p:nvPr/>
+        </p:nvSpPr>
+        <p:spPr>
+          <a:xfrm>
+            <a:off x="7240219" y="5017008"/>
+            <a:ext cx="2200046" cy="1447800"/>
+          </a:xfrm>
+          <a:prstGeom prst="rect">
+            <a:avLst/>
+          </a:prstGeom>
+          <a:noFill/>
+        </p:spPr>
+        <p:txBody>
+          <a:bodyPr wrap="square">
+            <a:spAutoFit/>
+          </a:bodyPr>
+          <a:lstStyle/>
+          <a:p>
+            <a:r>
+              <a:rPr sz="800">
+                <a:hlinkClick r:id="rId46"/>
+              </a:rPr>
+              <a:t>Lofar 1</a:t>
+            </a:r>
+          </a:p>
+          <a:p>
+            <a:r>
+              <a:rPr sz="800">
+                <a:hlinkClick r:id="rId47"/>
+              </a:rPr>
+              <a:t>Lofar 2</a:t>
+            </a:r>
+          </a:p>
+          <a:p>
+            <a:r>
+              <a:rPr sz="800">
+                <a:hlinkClick r:id="rId48"/>
+              </a:rPr>
+              <a:t>Lofar 3</a:t>
+            </a:r>
+          </a:p>
+          <a:p>
+            <a:r>
+              <a:rPr sz="800">
+                <a:hlinkClick r:id="rId49"/>
+              </a:rPr>
+              <a:t>Lofar 4</a:t>
+            </a:r>
+          </a:p>
+        </p:txBody>
+      </p:sp>
+      <p:sp>
+        <p:nvSpPr>
+          <p:cNvPr id="31" name="Rounded Rectangle 30">
+            <a:hlinkClick r:id="rId50"/>
+          </p:cNvPr>
+          <p:cNvSpPr/>
+          <p:nvPr/>
+        </p:nvSpPr>
+        <p:spPr>
+          <a:xfrm>
+            <a:off x="9531705" y="4632960"/>
+            <a:ext cx="2200046" cy="365760"/>
+          </a:xfrm>
+          <a:prstGeom prst="roundRect">
+            <a:avLst/>
+          </a:prstGeom>
+          <a:solidFill>
+            <a:srgbClr val="E8EEF7"/>
+          </a:solidFill>
+          <a:ln>
+            <a:solidFill>
+              <a:srgbClr val="1F3A5F"/>
+            </a:solidFill>
+          </a:ln>
+        </p:spPr>
+        <p:style>
+          <a:lnRef idx="1">
+            <a:schemeClr val="accent1"/>
+          </a:lnRef>
+          <a:fillRef idx="3">
+            <a:schemeClr val="accent1"/>
+          </a:fillRef>
+          <a:effectRef idx="2">
+            <a:schemeClr val="accent1"/>
+          </a:effectRef>
+          <a:fontRef idx="minor">
+            <a:schemeClr val="lt1"/>
+          </a:fontRef>
+        </p:style>
+        <p:txBody>
+          <a:bodyPr rtlCol="0" anchor="ctr" lIns="45720" rIns="45720"/>
+          <a:lstStyle/>
+          <a:p>
+            <a:pPr algn="ctr"/>
+            <a:r>
+              <a:rPr sz="900">
+                <a:solidFill>
+                  <a:srgbClr val="1F3A5F"/>
+                </a:solidFill>
+              </a:rPr>
+              <a:t>Gram 36: Equinox contact bearing 209, codename Kobol</a:t>
+            </a:r>
+          </a:p>
+        </p:txBody>
+      </p:sp>
+      <p:sp>
+        <p:nvSpPr>
+          <p:cNvPr id="32" name="TextBox 31"/>
+          <p:cNvSpPr txBox="1"/>
+          <p:nvPr/>
+        </p:nvSpPr>
+        <p:spPr>
+          <a:xfrm>
+            <a:off x="9531705" y="5017008"/>
+            <a:ext cx="2200046" cy="1447800"/>
+          </a:xfrm>
+          <a:prstGeom prst="rect">
+            <a:avLst/>
+          </a:prstGeom>
+          <a:noFill/>
+        </p:spPr>
+        <p:txBody>
+          <a:bodyPr wrap="square">
+            <a:spAutoFit/>
+          </a:bodyPr>
+          <a:lstStyle/>
+          <a:p>
+            <a:r>
+              <a:rPr sz="800">
                 <a:hlinkClick r:id="rId51"/>
               </a:rPr>
               <a:t>Lofar 1</a:t>
@@ -6145,6 +6233,92 @@
                 <a:hlinkClick r:id="rId53"/>
               </a:rPr>
               <a:t>Lofar 3</a:t>
+            </a:r>
+          </a:p>
+        </p:txBody>
+      </p:sp>
+    </p:spTree>
+  </p:cSld>
+  <p:clrMapOvr>
+    <a:masterClrMapping/>
+  </p:clrMapOvr>
+</p:sld>
+</file>
+
+<file path=ppt/slides/slide4.xml><?xml version="1.0" encoding="utf-8"?>
+<p:sld xmlns:a="http://schemas.openxmlformats.org/drawingml/2006/main" xmlns:p="http://schemas.openxmlformats.org/presentationml/2006/main" xmlns:r="http://schemas.openxmlformats.org/officeDocument/2006/relationships">
+  <p:cSld>
+    <p:spTree>
+      <p:nvGrpSpPr>
+        <p:cNvPr id="1" name=""/>
+        <p:cNvGrpSpPr/>
+        <p:nvPr/>
+      </p:nvGrpSpPr>
+      <p:grpSpPr/>
+      <p:sp>
+        <p:nvSpPr>
+          <p:cNvPr id="2" name="TextBox 1"/>
+          <p:cNvSpPr txBox="1"/>
+          <p:nvPr/>
+        </p:nvSpPr>
+        <p:spPr>
+          <a:xfrm>
+            <a:off x="914400" y="2377440"/>
+            <a:ext cx="10360152" cy="1280160"/>
+          </a:xfrm>
+          <a:prstGeom prst="rect">
+            <a:avLst/>
+          </a:prstGeom>
+          <a:noFill/>
+        </p:spPr>
+        <p:txBody>
+          <a:bodyPr wrap="square">
+            <a:spAutoFit/>
+          </a:bodyPr>
+          <a:lstStyle/>
+          <a:p>
+            <a:pPr algn="ctr"/>
+            <a:r>
+              <a:rPr sz="4000" b="1">
+                <a:solidFill>
+                  <a:srgbClr val="1F3A5F"/>
+                </a:solidFill>
+              </a:rPr>
+              <a:t>End of Instructor Progress Test 3 Grams</a:t>
+            </a:r>
+          </a:p>
+        </p:txBody>
+      </p:sp>
+      <p:sp>
+        <p:nvSpPr>
+          <p:cNvPr id="3" name="TextBox 2"/>
+          <p:cNvSpPr txBox="1"/>
+          <p:nvPr/>
+        </p:nvSpPr>
+        <p:spPr>
+          <a:xfrm>
+            <a:off x="914400" y="3840480"/>
+            <a:ext cx="10360152" cy="731520"/>
+          </a:xfrm>
+          <a:prstGeom prst="rect">
+            <a:avLst/>
+          </a:prstGeom>
+          <a:noFill/>
+        </p:spPr>
+        <p:txBody>
+          <a:bodyPr wrap="none">
+            <a:spAutoFit/>
+          </a:bodyPr>
+          <a:lstStyle/>
+          <a:p>
+            <a:pPr algn="ctr"/>
+            <a:r>
+              <a:rPr sz="2400">
+                <a:solidFill>
+                  <a:srgbClr val="1F3A5F"/>
+                </a:solidFill>
+              </a:rPr>
+              <a:t>Instructor Version</a:t>
             </a:r>
           </a:p>
         </p:txBody>

--- a/source/Instructor Progress Test 3 Grams/Instructor Progress Test 3 Grams.pptx
+++ b/source/Instructor Progress Test 3 Grams/Instructor Progress Test 3 Grams.pptx
@@ -5,12 +5,12 @@
     <p:sldMasterId id="2147483648" r:id="rId1"/>
   </p:sldMasterIdLst>
   <p:sldIdLst>
-    <p:sldId id="256" r:id="rId7"/>
-    <p:sldId id="257" r:id="rId8"/>
-    <p:sldId id="258" r:id="rId9"/>
-    <p:sldId id="259" r:id="rId10"/>
+    <p:sldId id="256" r:id="rId2"/>
+    <p:sldId id="257" r:id="rId3"/>
+    <p:sldId id="258" r:id="rId4"/>
+    <p:sldId id="259" r:id="rId5"/>
   </p:sldIdLst>
-  <p:sldSz cx="12188952" cy="6858000" type="screen4x3"/>
+  <p:sldSz cx="12188825" cy="6858000"/>
   <p:notesSz cx="6858000" cy="9144000"/>
   <p:defaultTextStyle>
     <a:defPPr>
@@ -107,6 +107,22 @@
       </a:defRPr>
     </a:lvl9pPr>
   </p:defaultTextStyle>
+  <p:extLst>
+    <p:ext uri="{EFAFB233-063F-42B5-8137-9DF3F51BA10A}">
+      <p15:sldGuideLst xmlns:p15="http://schemas.microsoft.com/office/powerpoint/2012/main">
+        <p15:guide id="1" orient="horz" pos="2160">
+          <p15:clr>
+            <a:srgbClr val="A4A3A4"/>
+          </p15:clr>
+        </p15:guide>
+        <p15:guide id="2" pos="2880">
+          <p15:clr>
+            <a:srgbClr val="A4A3A4"/>
+          </p15:clr>
+        </p15:guide>
+      </p15:sldGuideLst>
+    </p:ext>
+  </p:extLst>
 </p:presentation>
 </file>
 
@@ -148,10 +164,9 @@
           <a:lstStyle/>
           <a:p>
             <a:r>
-              <a:rPr lang="en-US" smtClean="0"/>
+              <a:rPr lang="en-US"/>
               <a:t>Click to edit Master title style</a:t>
             </a:r>
-            <a:endParaRPr lang="en-US"/>
           </a:p>
         </p:txBody>
       </p:sp>
@@ -267,10 +282,9 @@
           </a:lstStyle>
           <a:p>
             <a:r>
-              <a:rPr lang="en-US" smtClean="0"/>
+              <a:rPr lang="en-US"/>
               <a:t>Click to edit Master subtitle style</a:t>
             </a:r>
-            <a:endParaRPr lang="en-US"/>
           </a:p>
         </p:txBody>
       </p:sp>
@@ -291,7 +305,7 @@
           <a:p>
             <a:fld id="{5BCAD085-E8A6-8845-BD4E-CB4CCA059FC4}" type="datetimeFigureOut">
               <a:rPr lang="en-US" smtClean="0"/>
-              <a:t>1/27/13</a:t>
+              <a:t>5/22/2026</a:t>
             </a:fld>
             <a:endParaRPr lang="en-US"/>
           </a:p>
@@ -385,10 +399,9 @@
           <a:lstStyle/>
           <a:p>
             <a:r>
-              <a:rPr lang="en-US" smtClean="0"/>
+              <a:rPr lang="en-US"/>
               <a:t>Click to edit Master title style</a:t>
             </a:r>
-            <a:endParaRPr lang="en-US"/>
           </a:p>
         </p:txBody>
       </p:sp>
@@ -409,38 +422,37 @@
           <a:p>
             <a:pPr lvl="0"/>
             <a:r>
-              <a:rPr lang="en-US" smtClean="0"/>
+              <a:rPr lang="en-US"/>
               <a:t>Click to edit Master text styles</a:t>
             </a:r>
           </a:p>
           <a:p>
             <a:pPr lvl="1"/>
             <a:r>
-              <a:rPr lang="en-US" smtClean="0"/>
+              <a:rPr lang="en-US"/>
               <a:t>Second level</a:t>
             </a:r>
           </a:p>
           <a:p>
             <a:pPr lvl="2"/>
             <a:r>
-              <a:rPr lang="en-US" smtClean="0"/>
+              <a:rPr lang="en-US"/>
               <a:t>Third level</a:t>
             </a:r>
           </a:p>
           <a:p>
             <a:pPr lvl="3"/>
             <a:r>
-              <a:rPr lang="en-US" smtClean="0"/>
+              <a:rPr lang="en-US"/>
               <a:t>Fourth level</a:t>
             </a:r>
           </a:p>
           <a:p>
             <a:pPr lvl="4"/>
             <a:r>
-              <a:rPr lang="en-US" smtClean="0"/>
+              <a:rPr lang="en-US"/>
               <a:t>Fifth level</a:t>
             </a:r>
-            <a:endParaRPr lang="en-US"/>
           </a:p>
         </p:txBody>
       </p:sp>
@@ -461,7 +473,7 @@
           <a:p>
             <a:fld id="{5BCAD085-E8A6-8845-BD4E-CB4CCA059FC4}" type="datetimeFigureOut">
               <a:rPr lang="en-US" smtClean="0"/>
-              <a:t>1/27/13</a:t>
+              <a:t>5/22/2026</a:t>
             </a:fld>
             <a:endParaRPr lang="en-US"/>
           </a:p>
@@ -560,10 +572,9 @@
           <a:lstStyle/>
           <a:p>
             <a:r>
-              <a:rPr lang="en-US" smtClean="0"/>
+              <a:rPr lang="en-US"/>
               <a:t>Click to edit Master title style</a:t>
             </a:r>
-            <a:endParaRPr lang="en-US"/>
           </a:p>
         </p:txBody>
       </p:sp>
@@ -589,38 +600,37 @@
           <a:p>
             <a:pPr lvl="0"/>
             <a:r>
-              <a:rPr lang="en-US" smtClean="0"/>
+              <a:rPr lang="en-US"/>
               <a:t>Click to edit Master text styles</a:t>
             </a:r>
           </a:p>
           <a:p>
             <a:pPr lvl="1"/>
             <a:r>
-              <a:rPr lang="en-US" smtClean="0"/>
+              <a:rPr lang="en-US"/>
               <a:t>Second level</a:t>
             </a:r>
           </a:p>
           <a:p>
             <a:pPr lvl="2"/>
             <a:r>
-              <a:rPr lang="en-US" smtClean="0"/>
+              <a:rPr lang="en-US"/>
               <a:t>Third level</a:t>
             </a:r>
           </a:p>
           <a:p>
             <a:pPr lvl="3"/>
             <a:r>
-              <a:rPr lang="en-US" smtClean="0"/>
+              <a:rPr lang="en-US"/>
               <a:t>Fourth level</a:t>
             </a:r>
           </a:p>
           <a:p>
             <a:pPr lvl="4"/>
             <a:r>
-              <a:rPr lang="en-US" smtClean="0"/>
+              <a:rPr lang="en-US"/>
               <a:t>Fifth level</a:t>
             </a:r>
-            <a:endParaRPr lang="en-US"/>
           </a:p>
         </p:txBody>
       </p:sp>
@@ -641,7 +651,7 @@
           <a:p>
             <a:fld id="{5BCAD085-E8A6-8845-BD4E-CB4CCA059FC4}" type="datetimeFigureOut">
               <a:rPr lang="en-US" smtClean="0"/>
-              <a:t>1/27/13</a:t>
+              <a:t>5/22/2026</a:t>
             </a:fld>
             <a:endParaRPr lang="en-US"/>
           </a:p>
@@ -735,10 +745,9 @@
           <a:lstStyle/>
           <a:p>
             <a:r>
-              <a:rPr lang="en-US" smtClean="0"/>
+              <a:rPr lang="en-US"/>
               <a:t>Click to edit Master title style</a:t>
             </a:r>
-            <a:endParaRPr lang="en-US"/>
           </a:p>
         </p:txBody>
       </p:sp>
@@ -759,38 +768,37 @@
           <a:p>
             <a:pPr lvl="0"/>
             <a:r>
-              <a:rPr lang="en-US" smtClean="0"/>
+              <a:rPr lang="en-US"/>
               <a:t>Click to edit Master text styles</a:t>
             </a:r>
           </a:p>
           <a:p>
             <a:pPr lvl="1"/>
             <a:r>
-              <a:rPr lang="en-US" smtClean="0"/>
+              <a:rPr lang="en-US"/>
               <a:t>Second level</a:t>
             </a:r>
           </a:p>
           <a:p>
             <a:pPr lvl="2"/>
             <a:r>
-              <a:rPr lang="en-US" smtClean="0"/>
+              <a:rPr lang="en-US"/>
               <a:t>Third level</a:t>
             </a:r>
           </a:p>
           <a:p>
             <a:pPr lvl="3"/>
             <a:r>
-              <a:rPr lang="en-US" smtClean="0"/>
+              <a:rPr lang="en-US"/>
               <a:t>Fourth level</a:t>
             </a:r>
           </a:p>
           <a:p>
             <a:pPr lvl="4"/>
             <a:r>
-              <a:rPr lang="en-US" smtClean="0"/>
+              <a:rPr lang="en-US"/>
               <a:t>Fifth level</a:t>
             </a:r>
-            <a:endParaRPr lang="en-US"/>
           </a:p>
         </p:txBody>
       </p:sp>
@@ -811,7 +819,7 @@
           <a:p>
             <a:fld id="{5BCAD085-E8A6-8845-BD4E-CB4CCA059FC4}" type="datetimeFigureOut">
               <a:rPr lang="en-US" smtClean="0"/>
-              <a:t>1/27/13</a:t>
+              <a:t>5/22/2026</a:t>
             </a:fld>
             <a:endParaRPr lang="en-US"/>
           </a:p>
@@ -914,10 +922,9 @@
           </a:lstStyle>
           <a:p>
             <a:r>
-              <a:rPr lang="en-US" smtClean="0"/>
+              <a:rPr lang="en-US"/>
               <a:t>Click to edit Master title style</a:t>
             </a:r>
-            <a:endParaRPr lang="en-US"/>
           </a:p>
         </p:txBody>
       </p:sp>
@@ -1034,7 +1041,7 @@
           <a:p>
             <a:pPr lvl="0"/>
             <a:r>
-              <a:rPr lang="en-US" smtClean="0"/>
+              <a:rPr lang="en-US"/>
               <a:t>Click to edit Master text styles</a:t>
             </a:r>
           </a:p>
@@ -1057,7 +1064,7 @@
           <a:p>
             <a:fld id="{5BCAD085-E8A6-8845-BD4E-CB4CCA059FC4}" type="datetimeFigureOut">
               <a:rPr lang="en-US" smtClean="0"/>
-              <a:t>1/27/13</a:t>
+              <a:t>5/22/2026</a:t>
             </a:fld>
             <a:endParaRPr lang="en-US"/>
           </a:p>
@@ -1151,10 +1158,9 @@
           <a:lstStyle/>
           <a:p>
             <a:r>
-              <a:rPr lang="en-US" smtClean="0"/>
+              <a:rPr lang="en-US"/>
               <a:t>Click to edit Master title style</a:t>
             </a:r>
-            <a:endParaRPr lang="en-US"/>
           </a:p>
         </p:txBody>
       </p:sp>
@@ -1208,38 +1214,37 @@
           <a:p>
             <a:pPr lvl="0"/>
             <a:r>
-              <a:rPr lang="en-US" smtClean="0"/>
+              <a:rPr lang="en-US"/>
               <a:t>Click to edit Master text styles</a:t>
             </a:r>
           </a:p>
           <a:p>
             <a:pPr lvl="1"/>
             <a:r>
-              <a:rPr lang="en-US" smtClean="0"/>
+              <a:rPr lang="en-US"/>
               <a:t>Second level</a:t>
             </a:r>
           </a:p>
           <a:p>
             <a:pPr lvl="2"/>
             <a:r>
-              <a:rPr lang="en-US" smtClean="0"/>
+              <a:rPr lang="en-US"/>
               <a:t>Third level</a:t>
             </a:r>
           </a:p>
           <a:p>
             <a:pPr lvl="3"/>
             <a:r>
-              <a:rPr lang="en-US" smtClean="0"/>
+              <a:rPr lang="en-US"/>
               <a:t>Fourth level</a:t>
             </a:r>
           </a:p>
           <a:p>
             <a:pPr lvl="4"/>
             <a:r>
-              <a:rPr lang="en-US" smtClean="0"/>
+              <a:rPr lang="en-US"/>
               <a:t>Fifth level</a:t>
             </a:r>
-            <a:endParaRPr lang="en-US"/>
           </a:p>
         </p:txBody>
       </p:sp>
@@ -1293,38 +1298,37 @@
           <a:p>
             <a:pPr lvl="0"/>
             <a:r>
-              <a:rPr lang="en-US" smtClean="0"/>
+              <a:rPr lang="en-US"/>
               <a:t>Click to edit Master text styles</a:t>
             </a:r>
           </a:p>
           <a:p>
             <a:pPr lvl="1"/>
             <a:r>
-              <a:rPr lang="en-US" smtClean="0"/>
+              <a:rPr lang="en-US"/>
               <a:t>Second level</a:t>
             </a:r>
           </a:p>
           <a:p>
             <a:pPr lvl="2"/>
             <a:r>
-              <a:rPr lang="en-US" smtClean="0"/>
+              <a:rPr lang="en-US"/>
               <a:t>Third level</a:t>
             </a:r>
           </a:p>
           <a:p>
             <a:pPr lvl="3"/>
             <a:r>
-              <a:rPr lang="en-US" smtClean="0"/>
+              <a:rPr lang="en-US"/>
               <a:t>Fourth level</a:t>
             </a:r>
           </a:p>
           <a:p>
             <a:pPr lvl="4"/>
             <a:r>
-              <a:rPr lang="en-US" smtClean="0"/>
+              <a:rPr lang="en-US"/>
               <a:t>Fifth level</a:t>
             </a:r>
-            <a:endParaRPr lang="en-US"/>
           </a:p>
         </p:txBody>
       </p:sp>
@@ -1345,7 +1349,7 @@
           <a:p>
             <a:fld id="{5BCAD085-E8A6-8845-BD4E-CB4CCA059FC4}" type="datetimeFigureOut">
               <a:rPr lang="en-US" smtClean="0"/>
-              <a:t>1/27/13</a:t>
+              <a:t>5/22/2026</a:t>
             </a:fld>
             <a:endParaRPr lang="en-US"/>
           </a:p>
@@ -1443,10 +1447,9 @@
           </a:lstStyle>
           <a:p>
             <a:r>
-              <a:rPr lang="en-US" smtClean="0"/>
+              <a:rPr lang="en-US"/>
               <a:t>Click to edit Master title style</a:t>
             </a:r>
-            <a:endParaRPr lang="en-US"/>
           </a:p>
         </p:txBody>
       </p:sp>
@@ -1509,7 +1512,7 @@
           <a:p>
             <a:pPr lvl="0"/>
             <a:r>
-              <a:rPr lang="en-US" smtClean="0"/>
+              <a:rPr lang="en-US"/>
               <a:t>Click to edit Master text styles</a:t>
             </a:r>
           </a:p>
@@ -1565,38 +1568,37 @@
           <a:p>
             <a:pPr lvl="0"/>
             <a:r>
-              <a:rPr lang="en-US" smtClean="0"/>
+              <a:rPr lang="en-US"/>
               <a:t>Click to edit Master text styles</a:t>
             </a:r>
           </a:p>
           <a:p>
             <a:pPr lvl="1"/>
             <a:r>
-              <a:rPr lang="en-US" smtClean="0"/>
+              <a:rPr lang="en-US"/>
               <a:t>Second level</a:t>
             </a:r>
           </a:p>
           <a:p>
             <a:pPr lvl="2"/>
             <a:r>
-              <a:rPr lang="en-US" smtClean="0"/>
+              <a:rPr lang="en-US"/>
               <a:t>Third level</a:t>
             </a:r>
           </a:p>
           <a:p>
             <a:pPr lvl="3"/>
             <a:r>
-              <a:rPr lang="en-US" smtClean="0"/>
+              <a:rPr lang="en-US"/>
               <a:t>Fourth level</a:t>
             </a:r>
           </a:p>
           <a:p>
             <a:pPr lvl="4"/>
             <a:r>
-              <a:rPr lang="en-US" smtClean="0"/>
+              <a:rPr lang="en-US"/>
               <a:t>Fifth level</a:t>
             </a:r>
-            <a:endParaRPr lang="en-US"/>
           </a:p>
         </p:txBody>
       </p:sp>
@@ -1659,7 +1661,7 @@
           <a:p>
             <a:pPr lvl="0"/>
             <a:r>
-              <a:rPr lang="en-US" smtClean="0"/>
+              <a:rPr lang="en-US"/>
               <a:t>Click to edit Master text styles</a:t>
             </a:r>
           </a:p>
@@ -1715,38 +1717,37 @@
           <a:p>
             <a:pPr lvl="0"/>
             <a:r>
-              <a:rPr lang="en-US" smtClean="0"/>
+              <a:rPr lang="en-US"/>
               <a:t>Click to edit Master text styles</a:t>
             </a:r>
           </a:p>
           <a:p>
             <a:pPr lvl="1"/>
             <a:r>
-              <a:rPr lang="en-US" smtClean="0"/>
+              <a:rPr lang="en-US"/>
               <a:t>Second level</a:t>
             </a:r>
           </a:p>
           <a:p>
             <a:pPr lvl="2"/>
             <a:r>
-              <a:rPr lang="en-US" smtClean="0"/>
+              <a:rPr lang="en-US"/>
               <a:t>Third level</a:t>
             </a:r>
           </a:p>
           <a:p>
             <a:pPr lvl="3"/>
             <a:r>
-              <a:rPr lang="en-US" smtClean="0"/>
+              <a:rPr lang="en-US"/>
               <a:t>Fourth level</a:t>
             </a:r>
           </a:p>
           <a:p>
             <a:pPr lvl="4"/>
             <a:r>
-              <a:rPr lang="en-US" smtClean="0"/>
+              <a:rPr lang="en-US"/>
               <a:t>Fifth level</a:t>
             </a:r>
-            <a:endParaRPr lang="en-US"/>
           </a:p>
         </p:txBody>
       </p:sp>
@@ -1767,7 +1768,7 @@
           <a:p>
             <a:fld id="{5BCAD085-E8A6-8845-BD4E-CB4CCA059FC4}" type="datetimeFigureOut">
               <a:rPr lang="en-US" smtClean="0"/>
-              <a:t>1/27/13</a:t>
+              <a:t>5/22/2026</a:t>
             </a:fld>
             <a:endParaRPr lang="en-US"/>
           </a:p>
@@ -1861,10 +1862,9 @@
           <a:lstStyle/>
           <a:p>
             <a:r>
-              <a:rPr lang="en-US" smtClean="0"/>
+              <a:rPr lang="en-US"/>
               <a:t>Click to edit Master title style</a:t>
             </a:r>
-            <a:endParaRPr lang="en-US"/>
           </a:p>
         </p:txBody>
       </p:sp>
@@ -1885,7 +1885,7 @@
           <a:p>
             <a:fld id="{5BCAD085-E8A6-8845-BD4E-CB4CCA059FC4}" type="datetimeFigureOut">
               <a:rPr lang="en-US" smtClean="0"/>
-              <a:t>1/27/13</a:t>
+              <a:t>5/22/2026</a:t>
             </a:fld>
             <a:endParaRPr lang="en-US"/>
           </a:p>
@@ -1980,7 +1980,7 @@
           <a:p>
             <a:fld id="{5BCAD085-E8A6-8845-BD4E-CB4CCA059FC4}" type="datetimeFigureOut">
               <a:rPr lang="en-US" smtClean="0"/>
-              <a:t>1/27/13</a:t>
+              <a:t>5/22/2026</a:t>
             </a:fld>
             <a:endParaRPr lang="en-US"/>
           </a:p>
@@ -2083,10 +2083,9 @@
           </a:lstStyle>
           <a:p>
             <a:r>
-              <a:rPr lang="en-US" smtClean="0"/>
+              <a:rPr lang="en-US"/>
               <a:t>Click to edit Master title style</a:t>
             </a:r>
-            <a:endParaRPr lang="en-US"/>
           </a:p>
         </p:txBody>
       </p:sp>
@@ -2140,38 +2139,37 @@
           <a:p>
             <a:pPr lvl="0"/>
             <a:r>
-              <a:rPr lang="en-US" smtClean="0"/>
+              <a:rPr lang="en-US"/>
               <a:t>Click to edit Master text styles</a:t>
             </a:r>
           </a:p>
           <a:p>
             <a:pPr lvl="1"/>
             <a:r>
-              <a:rPr lang="en-US" smtClean="0"/>
+              <a:rPr lang="en-US"/>
               <a:t>Second level</a:t>
             </a:r>
           </a:p>
           <a:p>
             <a:pPr lvl="2"/>
             <a:r>
-              <a:rPr lang="en-US" smtClean="0"/>
+              <a:rPr lang="en-US"/>
               <a:t>Third level</a:t>
             </a:r>
           </a:p>
           <a:p>
             <a:pPr lvl="3"/>
             <a:r>
-              <a:rPr lang="en-US" smtClean="0"/>
+              <a:rPr lang="en-US"/>
               <a:t>Fourth level</a:t>
             </a:r>
           </a:p>
           <a:p>
             <a:pPr lvl="4"/>
             <a:r>
-              <a:rPr lang="en-US" smtClean="0"/>
+              <a:rPr lang="en-US"/>
               <a:t>Fifth level</a:t>
             </a:r>
-            <a:endParaRPr lang="en-US"/>
           </a:p>
         </p:txBody>
       </p:sp>
@@ -2234,7 +2232,7 @@
           <a:p>
             <a:pPr lvl="0"/>
             <a:r>
-              <a:rPr lang="en-US" smtClean="0"/>
+              <a:rPr lang="en-US"/>
               <a:t>Click to edit Master text styles</a:t>
             </a:r>
           </a:p>
@@ -2257,7 +2255,7 @@
           <a:p>
             <a:fld id="{5BCAD085-E8A6-8845-BD4E-CB4CCA059FC4}" type="datetimeFigureOut">
               <a:rPr lang="en-US" smtClean="0"/>
-              <a:t>1/27/13</a:t>
+              <a:t>5/22/2026</a:t>
             </a:fld>
             <a:endParaRPr lang="en-US"/>
           </a:p>
@@ -2360,10 +2358,9 @@
           </a:lstStyle>
           <a:p>
             <a:r>
-              <a:rPr lang="en-US" smtClean="0"/>
+              <a:rPr lang="en-US"/>
               <a:t>Click to edit Master title style</a:t>
             </a:r>
-            <a:endParaRPr lang="en-US"/>
           </a:p>
         </p:txBody>
       </p:sp>
@@ -2487,7 +2484,7 @@
           <a:p>
             <a:pPr lvl="0"/>
             <a:r>
-              <a:rPr lang="en-US" smtClean="0"/>
+              <a:rPr lang="en-US"/>
               <a:t>Click to edit Master text styles</a:t>
             </a:r>
           </a:p>
@@ -2510,7 +2507,7 @@
           <a:p>
             <a:fld id="{5BCAD085-E8A6-8845-BD4E-CB4CCA059FC4}" type="datetimeFigureOut">
               <a:rPr lang="en-US" smtClean="0"/>
-              <a:t>1/27/13</a:t>
+              <a:t>5/22/2026</a:t>
             </a:fld>
             <a:endParaRPr lang="en-US"/>
           </a:p>
@@ -2619,10 +2616,9 @@
           <a:lstStyle/>
           <a:p>
             <a:r>
-              <a:rPr lang="en-US" smtClean="0"/>
+              <a:rPr lang="en-US"/>
               <a:t>Click to edit Master title style</a:t>
             </a:r>
-            <a:endParaRPr lang="en-US"/>
           </a:p>
         </p:txBody>
       </p:sp>
@@ -2653,38 +2649,37 @@
           <a:p>
             <a:pPr lvl="0"/>
             <a:r>
-              <a:rPr lang="en-US" smtClean="0"/>
+              <a:rPr lang="en-US"/>
               <a:t>Click to edit Master text styles</a:t>
             </a:r>
           </a:p>
           <a:p>
             <a:pPr lvl="1"/>
             <a:r>
-              <a:rPr lang="en-US" smtClean="0"/>
+              <a:rPr lang="en-US"/>
               <a:t>Second level</a:t>
             </a:r>
           </a:p>
           <a:p>
             <a:pPr lvl="2"/>
             <a:r>
-              <a:rPr lang="en-US" smtClean="0"/>
+              <a:rPr lang="en-US"/>
               <a:t>Third level</a:t>
             </a:r>
           </a:p>
           <a:p>
             <a:pPr lvl="3"/>
             <a:r>
-              <a:rPr lang="en-US" smtClean="0"/>
+              <a:rPr lang="en-US"/>
               <a:t>Fourth level</a:t>
             </a:r>
           </a:p>
           <a:p>
             <a:pPr lvl="4"/>
             <a:r>
-              <a:rPr lang="en-US" smtClean="0"/>
+              <a:rPr lang="en-US"/>
               <a:t>Fifth level</a:t>
             </a:r>
-            <a:endParaRPr lang="en-US"/>
           </a:p>
         </p:txBody>
       </p:sp>
@@ -2723,7 +2718,7 @@
           <a:p>
             <a:fld id="{5BCAD085-E8A6-8845-BD4E-CB4CCA059FC4}" type="datetimeFigureOut">
               <a:rPr lang="en-US" smtClean="0"/>
-              <a:t>1/27/13</a:t>
+              <a:t>5/22/2026</a:t>
             </a:fld>
             <a:endParaRPr lang="en-US"/>
           </a:p>
@@ -3082,7 +3077,7 @@
 </file>
 
 <file path=ppt/slides/slide1.xml><?xml version="1.0" encoding="utf-8"?>
-<p:sld xmlns:a="http://schemas.openxmlformats.org/drawingml/2006/main" xmlns:p="http://schemas.openxmlformats.org/presentationml/2006/main" xmlns:r="http://schemas.openxmlformats.org/officeDocument/2006/relationships">
+<p:sld xmlns:a="http://schemas.openxmlformats.org/drawingml/2006/main" xmlns:r="http://schemas.openxmlformats.org/officeDocument/2006/relationships" xmlns:p="http://schemas.openxmlformats.org/presentationml/2006/main">
   <p:cSld>
     <p:spTree>
       <p:nvGrpSpPr>
@@ -3090,7 +3085,14 @@
         <p:cNvGrpSpPr/>
         <p:nvPr/>
       </p:nvGrpSpPr>
-      <p:grpSpPr/>
+      <p:grpSpPr>
+        <a:xfrm>
+          <a:off x="0" y="0"/>
+          <a:ext cx="0" cy="0"/>
+          <a:chOff x="0" y="0"/>
+          <a:chExt cx="0" cy="0"/>
+        </a:xfrm>
+      </p:grpSpPr>
       <p:sp>
         <p:nvSpPr>
           <p:cNvPr id="2" name="TextBox 1"/>
@@ -3168,7 +3170,7 @@
 </file>
 
 <file path=ppt/slides/slide2.xml><?xml version="1.0" encoding="utf-8"?>
-<p:sld xmlns:a="http://schemas.openxmlformats.org/drawingml/2006/main" xmlns:p="http://schemas.openxmlformats.org/presentationml/2006/main" xmlns:r="http://schemas.openxmlformats.org/officeDocument/2006/relationships">
+<p:sld xmlns:a="http://schemas.openxmlformats.org/drawingml/2006/main" xmlns:r="http://schemas.openxmlformats.org/officeDocument/2006/relationships" xmlns:p="http://schemas.openxmlformats.org/presentationml/2006/main">
   <p:cSld>
     <p:spTree>
       <p:nvGrpSpPr>
@@ -3176,7 +3178,14 @@
         <p:cNvGrpSpPr/>
         <p:nvPr/>
       </p:nvGrpSpPr>
-      <p:grpSpPr/>
+      <p:grpSpPr>
+        <a:xfrm>
+          <a:off x="0" y="0"/>
+          <a:ext cx="0" cy="0"/>
+          <a:chOff x="0" y="0"/>
+          <a:chExt cx="0" cy="0"/>
+        </a:xfrm>
+      </p:grpSpPr>
       <p:sp>
         <p:nvSpPr>
           <p:cNvPr id="2" name="Rectangle 1"/>
@@ -3213,7 +3222,7 @@
           </a:fontRef>
         </p:style>
         <p:txBody>
-          <a:bodyPr rtlCol="0" anchor="ctr" lIns="182880" rIns="182880"/>
+          <a:bodyPr lIns="182880" rIns="182880" rtlCol="0" anchor="ctr"/>
           <a:lstStyle/>
           <a:p>
             <a:pPr algn="ctr"/>
@@ -3268,7 +3277,7 @@
           </a:fontRef>
         </p:style>
         <p:txBody>
-          <a:bodyPr rtlCol="0" anchor="ctr" lIns="45720" rIns="45720"/>
+          <a:bodyPr lIns="45720" rIns="45720" rtlCol="0" anchor="ctr"/>
           <a:lstStyle/>
           <a:p>
             <a:pPr algn="ctr"/>
@@ -3354,7 +3363,7 @@
           </a:fontRef>
         </p:style>
         <p:txBody>
-          <a:bodyPr rtlCol="0" anchor="ctr" lIns="45720" rIns="45720"/>
+          <a:bodyPr lIns="45720" rIns="45720" rtlCol="0" anchor="ctr"/>
           <a:lstStyle/>
           <a:p>
             <a:pPr algn="ctr"/>
@@ -3440,7 +3449,7 @@
           </a:fontRef>
         </p:style>
         <p:txBody>
-          <a:bodyPr rtlCol="0" anchor="ctr" lIns="45720" rIns="45720"/>
+          <a:bodyPr lIns="45720" rIns="45720" rtlCol="0" anchor="ctr"/>
           <a:lstStyle/>
           <a:p>
             <a:pPr algn="ctr"/>
@@ -3542,7 +3551,7 @@
           </a:fontRef>
         </p:style>
         <p:txBody>
-          <a:bodyPr rtlCol="0" anchor="ctr" lIns="45720" rIns="45720"/>
+          <a:bodyPr lIns="45720" rIns="45720" rtlCol="0" anchor="ctr"/>
           <a:lstStyle/>
           <a:p>
             <a:pPr algn="ctr"/>
@@ -3636,7 +3645,7 @@
           </a:fontRef>
         </p:style>
         <p:txBody>
-          <a:bodyPr rtlCol="0" anchor="ctr" lIns="45720" rIns="45720"/>
+          <a:bodyPr lIns="45720" rIns="45720" rtlCol="0" anchor="ctr"/>
           <a:lstStyle/>
           <a:p>
             <a:pPr algn="ctr"/>
@@ -3730,7 +3739,7 @@
           </a:fontRef>
         </p:style>
         <p:txBody>
-          <a:bodyPr rtlCol="0" anchor="ctr" lIns="45720" rIns="45720"/>
+          <a:bodyPr lIns="45720" rIns="45720" rtlCol="0" anchor="ctr"/>
           <a:lstStyle/>
           <a:p>
             <a:pPr algn="ctr"/>
@@ -3840,7 +3849,7 @@
           </a:fontRef>
         </p:style>
         <p:txBody>
-          <a:bodyPr rtlCol="0" anchor="ctr" lIns="45720" rIns="45720"/>
+          <a:bodyPr lIns="45720" rIns="45720" rtlCol="0" anchor="ctr"/>
           <a:lstStyle/>
           <a:p>
             <a:pPr algn="ctr"/>
@@ -3942,7 +3951,7 @@
           </a:fontRef>
         </p:style>
         <p:txBody>
-          <a:bodyPr rtlCol="0" anchor="ctr" lIns="45720" rIns="45720"/>
+          <a:bodyPr lIns="45720" rIns="45720" rtlCol="0" anchor="ctr"/>
           <a:lstStyle/>
           <a:p>
             <a:pPr algn="ctr"/>
@@ -4036,7 +4045,7 @@
           </a:fontRef>
         </p:style>
         <p:txBody>
-          <a:bodyPr rtlCol="0" anchor="ctr" lIns="45720" rIns="45720"/>
+          <a:bodyPr lIns="45720" rIns="45720" rtlCol="0" anchor="ctr"/>
           <a:lstStyle/>
           <a:p>
             <a:pPr algn="ctr"/>
@@ -4122,7 +4131,7 @@
           </a:fontRef>
         </p:style>
         <p:txBody>
-          <a:bodyPr rtlCol="0" anchor="ctr" lIns="45720" rIns="45720"/>
+          <a:bodyPr lIns="45720" rIns="45720" rtlCol="0" anchor="ctr"/>
           <a:lstStyle/>
           <a:p>
             <a:pPr algn="ctr"/>
@@ -4232,7 +4241,7 @@
           </a:fontRef>
         </p:style>
         <p:txBody>
-          <a:bodyPr rtlCol="0" anchor="ctr" lIns="45720" rIns="45720"/>
+          <a:bodyPr lIns="45720" rIns="45720" rtlCol="0" anchor="ctr"/>
           <a:lstStyle/>
           <a:p>
             <a:pPr algn="ctr"/>
@@ -4318,7 +4327,7 @@
           </a:fontRef>
         </p:style>
         <p:txBody>
-          <a:bodyPr rtlCol="0" anchor="ctr" lIns="45720" rIns="45720"/>
+          <a:bodyPr lIns="45720" rIns="45720" rtlCol="0" anchor="ctr"/>
           <a:lstStyle/>
           <a:p>
             <a:pPr algn="ctr"/>
@@ -4428,7 +4437,7 @@
           </a:fontRef>
         </p:style>
         <p:txBody>
-          <a:bodyPr rtlCol="0" anchor="ctr" lIns="45720" rIns="45720"/>
+          <a:bodyPr lIns="45720" rIns="45720" rtlCol="0" anchor="ctr"/>
           <a:lstStyle/>
           <a:p>
             <a:pPr algn="ctr"/>
@@ -4538,7 +4547,7 @@
           </a:fontRef>
         </p:style>
         <p:txBody>
-          <a:bodyPr rtlCol="0" anchor="ctr" lIns="45720" rIns="45720"/>
+          <a:bodyPr lIns="45720" rIns="45720" rtlCol="0" anchor="ctr"/>
           <a:lstStyle/>
           <a:p>
             <a:pPr algn="ctr"/>
@@ -4648,7 +4657,7 @@
           </a:fontRef>
         </p:style>
         <p:txBody>
-          <a:bodyPr rtlCol="0" anchor="ctr" lIns="45720" rIns="45720"/>
+          <a:bodyPr lIns="45720" rIns="45720" rtlCol="0" anchor="ctr"/>
           <a:lstStyle/>
           <a:p>
             <a:pPr algn="ctr"/>
@@ -4711,7 +4720,7 @@
 </file>
 
 <file path=ppt/slides/slide3.xml><?xml version="1.0" encoding="utf-8"?>
-<p:sld xmlns:a="http://schemas.openxmlformats.org/drawingml/2006/main" xmlns:p="http://schemas.openxmlformats.org/presentationml/2006/main" xmlns:r="http://schemas.openxmlformats.org/officeDocument/2006/relationships">
+<p:sld xmlns:a="http://schemas.openxmlformats.org/drawingml/2006/main" xmlns:r="http://schemas.openxmlformats.org/officeDocument/2006/relationships" xmlns:p="http://schemas.openxmlformats.org/presentationml/2006/main">
   <p:cSld>
     <p:spTree>
       <p:nvGrpSpPr>
@@ -4719,7 +4728,14 @@
         <p:cNvGrpSpPr/>
         <p:nvPr/>
       </p:nvGrpSpPr>
-      <p:grpSpPr/>
+      <p:grpSpPr>
+        <a:xfrm>
+          <a:off x="0" y="0"/>
+          <a:ext cx="0" cy="0"/>
+          <a:chOff x="0" y="0"/>
+          <a:chExt cx="0" cy="0"/>
+        </a:xfrm>
+      </p:grpSpPr>
       <p:sp>
         <p:nvSpPr>
           <p:cNvPr id="2" name="Rectangle 1"/>
@@ -4756,7 +4772,7 @@
           </a:fontRef>
         </p:style>
         <p:txBody>
-          <a:bodyPr rtlCol="0" anchor="ctr" lIns="182880" rIns="182880"/>
+          <a:bodyPr lIns="182880" rIns="182880" rtlCol="0" anchor="ctr"/>
           <a:lstStyle/>
           <a:p>
             <a:pPr algn="ctr"/>
@@ -4811,7 +4827,7 @@
           </a:fontRef>
         </p:style>
         <p:txBody>
-          <a:bodyPr rtlCol="0" anchor="ctr" lIns="45720" rIns="45720"/>
+          <a:bodyPr lIns="45720" rIns="45720" rtlCol="0" anchor="ctr"/>
           <a:lstStyle/>
           <a:p>
             <a:pPr algn="ctr"/>
@@ -4921,7 +4937,7 @@
           </a:fontRef>
         </p:style>
         <p:txBody>
-          <a:bodyPr rtlCol="0" anchor="ctr" lIns="45720" rIns="45720"/>
+          <a:bodyPr lIns="45720" rIns="45720" rtlCol="0" anchor="ctr"/>
           <a:lstStyle/>
           <a:p>
             <a:pPr algn="ctr"/>
@@ -5015,7 +5031,7 @@
           </a:fontRef>
         </p:style>
         <p:txBody>
-          <a:bodyPr rtlCol="0" anchor="ctr" lIns="45720" rIns="45720"/>
+          <a:bodyPr lIns="45720" rIns="45720" rtlCol="0" anchor="ctr"/>
           <a:lstStyle/>
           <a:p>
             <a:pPr algn="ctr"/>
@@ -5125,7 +5141,7 @@
           </a:fontRef>
         </p:style>
         <p:txBody>
-          <a:bodyPr rtlCol="0" anchor="ctr" lIns="45720" rIns="45720"/>
+          <a:bodyPr lIns="45720" rIns="45720" rtlCol="0" anchor="ctr"/>
           <a:lstStyle/>
           <a:p>
             <a:pPr algn="ctr"/>
@@ -5211,7 +5227,7 @@
           </a:fontRef>
         </p:style>
         <p:txBody>
-          <a:bodyPr rtlCol="0" anchor="ctr" lIns="45720" rIns="45720"/>
+          <a:bodyPr lIns="45720" rIns="45720" rtlCol="0" anchor="ctr"/>
           <a:lstStyle/>
           <a:p>
             <a:pPr algn="ctr"/>
@@ -5297,7 +5313,7 @@
           </a:fontRef>
         </p:style>
         <p:txBody>
-          <a:bodyPr rtlCol="0" anchor="ctr" lIns="45720" rIns="45720"/>
+          <a:bodyPr lIns="45720" rIns="45720" rtlCol="0" anchor="ctr"/>
           <a:lstStyle/>
           <a:p>
             <a:pPr algn="ctr"/>
@@ -5407,7 +5423,7 @@
           </a:fontRef>
         </p:style>
         <p:txBody>
-          <a:bodyPr rtlCol="0" anchor="ctr" lIns="45720" rIns="45720"/>
+          <a:bodyPr lIns="45720" rIns="45720" rtlCol="0" anchor="ctr"/>
           <a:lstStyle/>
           <a:p>
             <a:pPr algn="ctr"/>
@@ -5501,7 +5517,7 @@
           </a:fontRef>
         </p:style>
         <p:txBody>
-          <a:bodyPr rtlCol="0" anchor="ctr" lIns="45720" rIns="45720"/>
+          <a:bodyPr lIns="45720" rIns="45720" rtlCol="0" anchor="ctr"/>
           <a:lstStyle/>
           <a:p>
             <a:pPr algn="ctr"/>
@@ -5595,7 +5611,7 @@
           </a:fontRef>
         </p:style>
         <p:txBody>
-          <a:bodyPr rtlCol="0" anchor="ctr" lIns="45720" rIns="45720"/>
+          <a:bodyPr lIns="45720" rIns="45720" rtlCol="0" anchor="ctr"/>
           <a:lstStyle/>
           <a:p>
             <a:pPr algn="ctr"/>
@@ -5697,7 +5713,7 @@
           </a:fontRef>
         </p:style>
         <p:txBody>
-          <a:bodyPr rtlCol="0" anchor="ctr" lIns="45720" rIns="45720"/>
+          <a:bodyPr lIns="45720" rIns="45720" rtlCol="0" anchor="ctr"/>
           <a:lstStyle/>
           <a:p>
             <a:pPr algn="ctr"/>
@@ -5807,7 +5823,7 @@
           </a:fontRef>
         </p:style>
         <p:txBody>
-          <a:bodyPr rtlCol="0" anchor="ctr" lIns="45720" rIns="45720"/>
+          <a:bodyPr lIns="45720" rIns="45720" rtlCol="0" anchor="ctr"/>
           <a:lstStyle/>
           <a:p>
             <a:pPr algn="ctr"/>
@@ -5893,7 +5909,7 @@
           </a:fontRef>
         </p:style>
         <p:txBody>
-          <a:bodyPr rtlCol="0" anchor="ctr" lIns="45720" rIns="45720"/>
+          <a:bodyPr lIns="45720" rIns="45720" rtlCol="0" anchor="ctr"/>
           <a:lstStyle/>
           <a:p>
             <a:pPr algn="ctr"/>
@@ -5979,7 +5995,7 @@
           </a:fontRef>
         </p:style>
         <p:txBody>
-          <a:bodyPr rtlCol="0" anchor="ctr" lIns="45720" rIns="45720"/>
+          <a:bodyPr lIns="45720" rIns="45720" rtlCol="0" anchor="ctr"/>
           <a:lstStyle/>
           <a:p>
             <a:pPr algn="ctr"/>
@@ -6065,18 +6081,47 @@
           </a:fontRef>
         </p:style>
         <p:txBody>
-          <a:bodyPr rtlCol="0" anchor="ctr" lIns="45720" rIns="45720"/>
+          <a:bodyPr lIns="45720" rIns="45720" rtlCol="0" anchor="ctr"/>
           <a:lstStyle/>
           <a:p>
             <a:pPr algn="ctr"/>
             <a:r>
-              <a:rPr sz="900">
+              <a:rPr sz="900" dirty="0">
                 <a:solidFill>
                   <a:srgbClr val="1F3A5F"/>
                 </a:solidFill>
               </a:rPr>
-              <a:t>Gram 35: FR Tantive IV, Category 4, Romulus</a:t>
-            </a:r>
+              <a:t>Gram 35: FR </a:t>
+            </a:r>
+            <a:r>
+              <a:rPr sz="900" dirty="0" err="1">
+                <a:solidFill>
+                  <a:srgbClr val="1F3A5F"/>
+                </a:solidFill>
+              </a:rPr>
+              <a:t>Tantive</a:t>
+            </a:r>
+            <a:r>
+              <a:rPr sz="900" dirty="0">
+                <a:solidFill>
+                  <a:srgbClr val="1F3A5F"/>
+                </a:solidFill>
+              </a:rPr>
+              <a:t> IV, Category 4, Romulus</a:t>
+            </a:r>
+            <a:r>
+              <a:rPr lang="en-GB" sz="900" dirty="0">
+                <a:solidFill>
+                  <a:srgbClr val="1F3A5F"/>
+                </a:solidFill>
+              </a:rPr>
+              <a:t> [-own]</a:t>
+            </a:r>
+            <a:endParaRPr sz="900" dirty="0">
+              <a:solidFill>
+                <a:srgbClr val="1F3A5F"/>
+              </a:solidFill>
+            </a:endParaRPr>
           </a:p>
         </p:txBody>
       </p:sp>
@@ -6175,18 +6220,39 @@
           </a:fontRef>
         </p:style>
         <p:txBody>
-          <a:bodyPr rtlCol="0" anchor="ctr" lIns="45720" rIns="45720"/>
+          <a:bodyPr lIns="45720" rIns="45720" rtlCol="0" anchor="ctr"/>
           <a:lstStyle/>
           <a:p>
             <a:pPr algn="ctr"/>
             <a:r>
-              <a:rPr sz="900">
+              <a:rPr sz="900" dirty="0">
                 <a:solidFill>
                   <a:srgbClr val="1F3A5F"/>
                 </a:solidFill>
               </a:rPr>
-              <a:t>Gram 36: Equinox contact bearing 209, codename Kobol</a:t>
-            </a:r>
+              <a:t>Gram 36: Equinox contact bearing 209, codename </a:t>
+            </a:r>
+            <a:r>
+              <a:rPr sz="900" dirty="0" err="1">
+                <a:solidFill>
+                  <a:srgbClr val="1F3A5F"/>
+                </a:solidFill>
+              </a:rPr>
+              <a:t>Kobol</a:t>
+            </a:r>
+            <a:r>
+              <a:rPr lang="en-GB" sz="900" dirty="0">
+                <a:solidFill>
+                  <a:srgbClr val="1F3A5F"/>
+                </a:solidFill>
+              </a:rPr>
+              <a:t> [-other]</a:t>
+            </a:r>
+            <a:endParaRPr sz="900" dirty="0">
+              <a:solidFill>
+                <a:srgbClr val="1F3A5F"/>
+              </a:solidFill>
+            </a:endParaRPr>
           </a:p>
         </p:txBody>
       </p:sp>
@@ -6246,7 +6312,7 @@
 </file>
 
 <file path=ppt/slides/slide4.xml><?xml version="1.0" encoding="utf-8"?>
-<p:sld xmlns:a="http://schemas.openxmlformats.org/drawingml/2006/main" xmlns:p="http://schemas.openxmlformats.org/presentationml/2006/main" xmlns:r="http://schemas.openxmlformats.org/officeDocument/2006/relationships">
+<p:sld xmlns:a="http://schemas.openxmlformats.org/drawingml/2006/main" xmlns:r="http://schemas.openxmlformats.org/officeDocument/2006/relationships" xmlns:p="http://schemas.openxmlformats.org/presentationml/2006/main">
   <p:cSld>
     <p:spTree>
       <p:nvGrpSpPr>
@@ -6254,7 +6320,14 @@
         <p:cNvGrpSpPr/>
         <p:nvPr/>
       </p:nvGrpSpPr>
-      <p:grpSpPr/>
+      <p:grpSpPr>
+        <a:xfrm>
+          <a:off x="0" y="0"/>
+          <a:ext cx="0" cy="0"/>
+          <a:chOff x="0" y="0"/>
+          <a:chExt cx="0" cy="0"/>
+        </a:xfrm>
+      </p:grpSpPr>
       <p:sp>
         <p:nvSpPr>
           <p:cNvPr id="2" name="TextBox 1"/>

--- a/source/Instructor Progress Test 3 Grams/Instructor Progress Test 3 Grams.pptx
+++ b/source/Instructor Progress Test 3 Grams/Instructor Progress Test 3 Grams.pptx
@@ -5,12 +5,12 @@
     <p:sldMasterId id="2147483648" r:id="rId1"/>
   </p:sldMasterIdLst>
   <p:sldIdLst>
-    <p:sldId id="256" r:id="rId2"/>
-    <p:sldId id="257" r:id="rId3"/>
-    <p:sldId id="258" r:id="rId4"/>
-    <p:sldId id="259" r:id="rId5"/>
+    <p:sldId id="256" r:id="rId7"/>
+    <p:sldId id="257" r:id="rId8"/>
+    <p:sldId id="258" r:id="rId9"/>
+    <p:sldId id="259" r:id="rId10"/>
   </p:sldIdLst>
-  <p:sldSz cx="12188825" cy="6858000"/>
+  <p:sldSz cx="12188952" cy="6858000" type="screen4x3"/>
   <p:notesSz cx="6858000" cy="9144000"/>
   <p:defaultTextStyle>
     <a:defPPr>
@@ -107,22 +107,6 @@
       </a:defRPr>
     </a:lvl9pPr>
   </p:defaultTextStyle>
-  <p:extLst>
-    <p:ext uri="{EFAFB233-063F-42B5-8137-9DF3F51BA10A}">
-      <p15:sldGuideLst xmlns:p15="http://schemas.microsoft.com/office/powerpoint/2012/main">
-        <p15:guide id="1" orient="horz" pos="2160">
-          <p15:clr>
-            <a:srgbClr val="A4A3A4"/>
-          </p15:clr>
-        </p15:guide>
-        <p15:guide id="2" pos="2880">
-          <p15:clr>
-            <a:srgbClr val="A4A3A4"/>
-          </p15:clr>
-        </p15:guide>
-      </p15:sldGuideLst>
-    </p:ext>
-  </p:extLst>
 </p:presentation>
 </file>
 
@@ -164,9 +148,10 @@
           <a:lstStyle/>
           <a:p>
             <a:r>
-              <a:rPr lang="en-US"/>
+              <a:rPr lang="en-US" smtClean="0"/>
               <a:t>Click to edit Master title style</a:t>
             </a:r>
+            <a:endParaRPr lang="en-US"/>
           </a:p>
         </p:txBody>
       </p:sp>
@@ -282,9 +267,10 @@
           </a:lstStyle>
           <a:p>
             <a:r>
-              <a:rPr lang="en-US"/>
+              <a:rPr lang="en-US" smtClean="0"/>
               <a:t>Click to edit Master subtitle style</a:t>
             </a:r>
+            <a:endParaRPr lang="en-US"/>
           </a:p>
         </p:txBody>
       </p:sp>
@@ -305,7 +291,7 @@
           <a:p>
             <a:fld id="{5BCAD085-E8A6-8845-BD4E-CB4CCA059FC4}" type="datetimeFigureOut">
               <a:rPr lang="en-US" smtClean="0"/>
-              <a:t>5/22/2026</a:t>
+              <a:t>1/27/13</a:t>
             </a:fld>
             <a:endParaRPr lang="en-US"/>
           </a:p>
@@ -399,9 +385,10 @@
           <a:lstStyle/>
           <a:p>
             <a:r>
-              <a:rPr lang="en-US"/>
+              <a:rPr lang="en-US" smtClean="0"/>
               <a:t>Click to edit Master title style</a:t>
             </a:r>
+            <a:endParaRPr lang="en-US"/>
           </a:p>
         </p:txBody>
       </p:sp>
@@ -422,37 +409,38 @@
           <a:p>
             <a:pPr lvl="0"/>
             <a:r>
-              <a:rPr lang="en-US"/>
+              <a:rPr lang="en-US" smtClean="0"/>
               <a:t>Click to edit Master text styles</a:t>
             </a:r>
           </a:p>
           <a:p>
             <a:pPr lvl="1"/>
             <a:r>
-              <a:rPr lang="en-US"/>
+              <a:rPr lang="en-US" smtClean="0"/>
               <a:t>Second level</a:t>
             </a:r>
           </a:p>
           <a:p>
             <a:pPr lvl="2"/>
             <a:r>
-              <a:rPr lang="en-US"/>
+              <a:rPr lang="en-US" smtClean="0"/>
               <a:t>Third level</a:t>
             </a:r>
           </a:p>
           <a:p>
             <a:pPr lvl="3"/>
             <a:r>
-              <a:rPr lang="en-US"/>
+              <a:rPr lang="en-US" smtClean="0"/>
               <a:t>Fourth level</a:t>
             </a:r>
           </a:p>
           <a:p>
             <a:pPr lvl="4"/>
             <a:r>
-              <a:rPr lang="en-US"/>
+              <a:rPr lang="en-US" smtClean="0"/>
               <a:t>Fifth level</a:t>
             </a:r>
+            <a:endParaRPr lang="en-US"/>
           </a:p>
         </p:txBody>
       </p:sp>
@@ -473,7 +461,7 @@
           <a:p>
             <a:fld id="{5BCAD085-E8A6-8845-BD4E-CB4CCA059FC4}" type="datetimeFigureOut">
               <a:rPr lang="en-US" smtClean="0"/>
-              <a:t>5/22/2026</a:t>
+              <a:t>1/27/13</a:t>
             </a:fld>
             <a:endParaRPr lang="en-US"/>
           </a:p>
@@ -572,9 +560,10 @@
           <a:lstStyle/>
           <a:p>
             <a:r>
-              <a:rPr lang="en-US"/>
+              <a:rPr lang="en-US" smtClean="0"/>
               <a:t>Click to edit Master title style</a:t>
             </a:r>
+            <a:endParaRPr lang="en-US"/>
           </a:p>
         </p:txBody>
       </p:sp>
@@ -600,37 +589,38 @@
           <a:p>
             <a:pPr lvl="0"/>
             <a:r>
-              <a:rPr lang="en-US"/>
+              <a:rPr lang="en-US" smtClean="0"/>
               <a:t>Click to edit Master text styles</a:t>
             </a:r>
           </a:p>
           <a:p>
             <a:pPr lvl="1"/>
             <a:r>
-              <a:rPr lang="en-US"/>
+              <a:rPr lang="en-US" smtClean="0"/>
               <a:t>Second level</a:t>
             </a:r>
           </a:p>
           <a:p>
             <a:pPr lvl="2"/>
             <a:r>
-              <a:rPr lang="en-US"/>
+              <a:rPr lang="en-US" smtClean="0"/>
               <a:t>Third level</a:t>
             </a:r>
           </a:p>
           <a:p>
             <a:pPr lvl="3"/>
             <a:r>
-              <a:rPr lang="en-US"/>
+              <a:rPr lang="en-US" smtClean="0"/>
               <a:t>Fourth level</a:t>
             </a:r>
           </a:p>
           <a:p>
             <a:pPr lvl="4"/>
             <a:r>
-              <a:rPr lang="en-US"/>
+              <a:rPr lang="en-US" smtClean="0"/>
               <a:t>Fifth level</a:t>
             </a:r>
+            <a:endParaRPr lang="en-US"/>
           </a:p>
         </p:txBody>
       </p:sp>
@@ -651,7 +641,7 @@
           <a:p>
             <a:fld id="{5BCAD085-E8A6-8845-BD4E-CB4CCA059FC4}" type="datetimeFigureOut">
               <a:rPr lang="en-US" smtClean="0"/>
-              <a:t>5/22/2026</a:t>
+              <a:t>1/27/13</a:t>
             </a:fld>
             <a:endParaRPr lang="en-US"/>
           </a:p>
@@ -745,9 +735,10 @@
           <a:lstStyle/>
           <a:p>
             <a:r>
-              <a:rPr lang="en-US"/>
+              <a:rPr lang="en-US" smtClean="0"/>
               <a:t>Click to edit Master title style</a:t>
             </a:r>
+            <a:endParaRPr lang="en-US"/>
           </a:p>
         </p:txBody>
       </p:sp>
@@ -768,37 +759,38 @@
           <a:p>
             <a:pPr lvl="0"/>
             <a:r>
-              <a:rPr lang="en-US"/>
+              <a:rPr lang="en-US" smtClean="0"/>
               <a:t>Click to edit Master text styles</a:t>
             </a:r>
           </a:p>
           <a:p>
             <a:pPr lvl="1"/>
             <a:r>
-              <a:rPr lang="en-US"/>
+              <a:rPr lang="en-US" smtClean="0"/>
               <a:t>Second level</a:t>
             </a:r>
           </a:p>
           <a:p>
             <a:pPr lvl="2"/>
             <a:r>
-              <a:rPr lang="en-US"/>
+              <a:rPr lang="en-US" smtClean="0"/>
               <a:t>Third level</a:t>
             </a:r>
           </a:p>
           <a:p>
             <a:pPr lvl="3"/>
             <a:r>
-              <a:rPr lang="en-US"/>
+              <a:rPr lang="en-US" smtClean="0"/>
               <a:t>Fourth level</a:t>
             </a:r>
           </a:p>
           <a:p>
             <a:pPr lvl="4"/>
             <a:r>
-              <a:rPr lang="en-US"/>
+              <a:rPr lang="en-US" smtClean="0"/>
               <a:t>Fifth level</a:t>
             </a:r>
+            <a:endParaRPr lang="en-US"/>
           </a:p>
         </p:txBody>
       </p:sp>
@@ -819,7 +811,7 @@
           <a:p>
             <a:fld id="{5BCAD085-E8A6-8845-BD4E-CB4CCA059FC4}" type="datetimeFigureOut">
               <a:rPr lang="en-US" smtClean="0"/>
-              <a:t>5/22/2026</a:t>
+              <a:t>1/27/13</a:t>
             </a:fld>
             <a:endParaRPr lang="en-US"/>
           </a:p>
@@ -922,9 +914,10 @@
           </a:lstStyle>
           <a:p>
             <a:r>
-              <a:rPr lang="en-US"/>
+              <a:rPr lang="en-US" smtClean="0"/>
               <a:t>Click to edit Master title style</a:t>
             </a:r>
+            <a:endParaRPr lang="en-US"/>
           </a:p>
         </p:txBody>
       </p:sp>
@@ -1041,7 +1034,7 @@
           <a:p>
             <a:pPr lvl="0"/>
             <a:r>
-              <a:rPr lang="en-US"/>
+              <a:rPr lang="en-US" smtClean="0"/>
               <a:t>Click to edit Master text styles</a:t>
             </a:r>
           </a:p>
@@ -1064,7 +1057,7 @@
           <a:p>
             <a:fld id="{5BCAD085-E8A6-8845-BD4E-CB4CCA059FC4}" type="datetimeFigureOut">
               <a:rPr lang="en-US" smtClean="0"/>
-              <a:t>5/22/2026</a:t>
+              <a:t>1/27/13</a:t>
             </a:fld>
             <a:endParaRPr lang="en-US"/>
           </a:p>
@@ -1158,9 +1151,10 @@
           <a:lstStyle/>
           <a:p>
             <a:r>
-              <a:rPr lang="en-US"/>
+              <a:rPr lang="en-US" smtClean="0"/>
               <a:t>Click to edit Master title style</a:t>
             </a:r>
+            <a:endParaRPr lang="en-US"/>
           </a:p>
         </p:txBody>
       </p:sp>
@@ -1214,37 +1208,38 @@
           <a:p>
             <a:pPr lvl="0"/>
             <a:r>
-              <a:rPr lang="en-US"/>
+              <a:rPr lang="en-US" smtClean="0"/>
               <a:t>Click to edit Master text styles</a:t>
             </a:r>
           </a:p>
           <a:p>
             <a:pPr lvl="1"/>
             <a:r>
-              <a:rPr lang="en-US"/>
+              <a:rPr lang="en-US" smtClean="0"/>
               <a:t>Second level</a:t>
             </a:r>
           </a:p>
           <a:p>
             <a:pPr lvl="2"/>
             <a:r>
-              <a:rPr lang="en-US"/>
+              <a:rPr lang="en-US" smtClean="0"/>
               <a:t>Third level</a:t>
             </a:r>
           </a:p>
           <a:p>
             <a:pPr lvl="3"/>
             <a:r>
-              <a:rPr lang="en-US"/>
+              <a:rPr lang="en-US" smtClean="0"/>
               <a:t>Fourth level</a:t>
             </a:r>
           </a:p>
           <a:p>
             <a:pPr lvl="4"/>
             <a:r>
-              <a:rPr lang="en-US"/>
+              <a:rPr lang="en-US" smtClean="0"/>
               <a:t>Fifth level</a:t>
             </a:r>
+            <a:endParaRPr lang="en-US"/>
           </a:p>
         </p:txBody>
       </p:sp>
@@ -1298,37 +1293,38 @@
           <a:p>
             <a:pPr lvl="0"/>
             <a:r>
-              <a:rPr lang="en-US"/>
+              <a:rPr lang="en-US" smtClean="0"/>
               <a:t>Click to edit Master text styles</a:t>
             </a:r>
           </a:p>
           <a:p>
             <a:pPr lvl="1"/>
             <a:r>
-              <a:rPr lang="en-US"/>
+              <a:rPr lang="en-US" smtClean="0"/>
               <a:t>Second level</a:t>
             </a:r>
           </a:p>
           <a:p>
             <a:pPr lvl="2"/>
             <a:r>
-              <a:rPr lang="en-US"/>
+              <a:rPr lang="en-US" smtClean="0"/>
               <a:t>Third level</a:t>
             </a:r>
           </a:p>
           <a:p>
             <a:pPr lvl="3"/>
             <a:r>
-              <a:rPr lang="en-US"/>
+              <a:rPr lang="en-US" smtClean="0"/>
               <a:t>Fourth level</a:t>
             </a:r>
           </a:p>
           <a:p>
             <a:pPr lvl="4"/>
             <a:r>
-              <a:rPr lang="en-US"/>
+              <a:rPr lang="en-US" smtClean="0"/>
               <a:t>Fifth level</a:t>
             </a:r>
+            <a:endParaRPr lang="en-US"/>
           </a:p>
         </p:txBody>
       </p:sp>
@@ -1349,7 +1345,7 @@
           <a:p>
             <a:fld id="{5BCAD085-E8A6-8845-BD4E-CB4CCA059FC4}" type="datetimeFigureOut">
               <a:rPr lang="en-US" smtClean="0"/>
-              <a:t>5/22/2026</a:t>
+              <a:t>1/27/13</a:t>
             </a:fld>
             <a:endParaRPr lang="en-US"/>
           </a:p>
@@ -1447,9 +1443,10 @@
           </a:lstStyle>
           <a:p>
             <a:r>
-              <a:rPr lang="en-US"/>
+              <a:rPr lang="en-US" smtClean="0"/>
               <a:t>Click to edit Master title style</a:t>
             </a:r>
+            <a:endParaRPr lang="en-US"/>
           </a:p>
         </p:txBody>
       </p:sp>
@@ -1512,7 +1509,7 @@
           <a:p>
             <a:pPr lvl="0"/>
             <a:r>
-              <a:rPr lang="en-US"/>
+              <a:rPr lang="en-US" smtClean="0"/>
               <a:t>Click to edit Master text styles</a:t>
             </a:r>
           </a:p>
@@ -1568,37 +1565,38 @@
           <a:p>
             <a:pPr lvl="0"/>
             <a:r>
-              <a:rPr lang="en-US"/>
+              <a:rPr lang="en-US" smtClean="0"/>
               <a:t>Click to edit Master text styles</a:t>
             </a:r>
           </a:p>
           <a:p>
             <a:pPr lvl="1"/>
             <a:r>
-              <a:rPr lang="en-US"/>
+              <a:rPr lang="en-US" smtClean="0"/>
               <a:t>Second level</a:t>
             </a:r>
           </a:p>
           <a:p>
             <a:pPr lvl="2"/>
             <a:r>
-              <a:rPr lang="en-US"/>
+              <a:rPr lang="en-US" smtClean="0"/>
               <a:t>Third level</a:t>
             </a:r>
           </a:p>
           <a:p>
             <a:pPr lvl="3"/>
             <a:r>
-              <a:rPr lang="en-US"/>
+              <a:rPr lang="en-US" smtClean="0"/>
               <a:t>Fourth level</a:t>
             </a:r>
           </a:p>
           <a:p>
             <a:pPr lvl="4"/>
             <a:r>
-              <a:rPr lang="en-US"/>
+              <a:rPr lang="en-US" smtClean="0"/>
               <a:t>Fifth level</a:t>
             </a:r>
+            <a:endParaRPr lang="en-US"/>
           </a:p>
         </p:txBody>
       </p:sp>
@@ -1661,7 +1659,7 @@
           <a:p>
             <a:pPr lvl="0"/>
             <a:r>
-              <a:rPr lang="en-US"/>
+              <a:rPr lang="en-US" smtClean="0"/>
               <a:t>Click to edit Master text styles</a:t>
             </a:r>
           </a:p>
@@ -1717,37 +1715,38 @@
           <a:p>
             <a:pPr lvl="0"/>
             <a:r>
-              <a:rPr lang="en-US"/>
+              <a:rPr lang="en-US" smtClean="0"/>
               <a:t>Click to edit Master text styles</a:t>
             </a:r>
           </a:p>
           <a:p>
             <a:pPr lvl="1"/>
             <a:r>
-              <a:rPr lang="en-US"/>
+              <a:rPr lang="en-US" smtClean="0"/>
               <a:t>Second level</a:t>
             </a:r>
           </a:p>
           <a:p>
             <a:pPr lvl="2"/>
             <a:r>
-              <a:rPr lang="en-US"/>
+              <a:rPr lang="en-US" smtClean="0"/>
               <a:t>Third level</a:t>
             </a:r>
           </a:p>
           <a:p>
             <a:pPr lvl="3"/>
             <a:r>
-              <a:rPr lang="en-US"/>
+              <a:rPr lang="en-US" smtClean="0"/>
               <a:t>Fourth level</a:t>
             </a:r>
           </a:p>
           <a:p>
             <a:pPr lvl="4"/>
             <a:r>
-              <a:rPr lang="en-US"/>
+              <a:rPr lang="en-US" smtClean="0"/>
               <a:t>Fifth level</a:t>
             </a:r>
+            <a:endParaRPr lang="en-US"/>
           </a:p>
         </p:txBody>
       </p:sp>
@@ -1768,7 +1767,7 @@
           <a:p>
             <a:fld id="{5BCAD085-E8A6-8845-BD4E-CB4CCA059FC4}" type="datetimeFigureOut">
               <a:rPr lang="en-US" smtClean="0"/>
-              <a:t>5/22/2026</a:t>
+              <a:t>1/27/13</a:t>
             </a:fld>
             <a:endParaRPr lang="en-US"/>
           </a:p>
@@ -1862,9 +1861,10 @@
           <a:lstStyle/>
           <a:p>
             <a:r>
-              <a:rPr lang="en-US"/>
+              <a:rPr lang="en-US" smtClean="0"/>
               <a:t>Click to edit Master title style</a:t>
             </a:r>
+            <a:endParaRPr lang="en-US"/>
           </a:p>
         </p:txBody>
       </p:sp>
@@ -1885,7 +1885,7 @@
           <a:p>
             <a:fld id="{5BCAD085-E8A6-8845-BD4E-CB4CCA059FC4}" type="datetimeFigureOut">
               <a:rPr lang="en-US" smtClean="0"/>
-              <a:t>5/22/2026</a:t>
+              <a:t>1/27/13</a:t>
             </a:fld>
             <a:endParaRPr lang="en-US"/>
           </a:p>
@@ -1980,7 +1980,7 @@
           <a:p>
             <a:fld id="{5BCAD085-E8A6-8845-BD4E-CB4CCA059FC4}" type="datetimeFigureOut">
               <a:rPr lang="en-US" smtClean="0"/>
-              <a:t>5/22/2026</a:t>
+              <a:t>1/27/13</a:t>
             </a:fld>
             <a:endParaRPr lang="en-US"/>
           </a:p>
@@ -2083,9 +2083,10 @@
           </a:lstStyle>
           <a:p>
             <a:r>
-              <a:rPr lang="en-US"/>
+              <a:rPr lang="en-US" smtClean="0"/>
               <a:t>Click to edit Master title style</a:t>
             </a:r>
+            <a:endParaRPr lang="en-US"/>
           </a:p>
         </p:txBody>
       </p:sp>
@@ -2139,37 +2140,38 @@
           <a:p>
             <a:pPr lvl="0"/>
             <a:r>
-              <a:rPr lang="en-US"/>
+              <a:rPr lang="en-US" smtClean="0"/>
               <a:t>Click to edit Master text styles</a:t>
             </a:r>
           </a:p>
           <a:p>
             <a:pPr lvl="1"/>
             <a:r>
-              <a:rPr lang="en-US"/>
+              <a:rPr lang="en-US" smtClean="0"/>
               <a:t>Second level</a:t>
             </a:r>
           </a:p>
           <a:p>
             <a:pPr lvl="2"/>
             <a:r>
-              <a:rPr lang="en-US"/>
+              <a:rPr lang="en-US" smtClean="0"/>
               <a:t>Third level</a:t>
             </a:r>
           </a:p>
           <a:p>
             <a:pPr lvl="3"/>
             <a:r>
-              <a:rPr lang="en-US"/>
+              <a:rPr lang="en-US" smtClean="0"/>
               <a:t>Fourth level</a:t>
             </a:r>
           </a:p>
           <a:p>
             <a:pPr lvl="4"/>
             <a:r>
-              <a:rPr lang="en-US"/>
+              <a:rPr lang="en-US" smtClean="0"/>
               <a:t>Fifth level</a:t>
             </a:r>
+            <a:endParaRPr lang="en-US"/>
           </a:p>
         </p:txBody>
       </p:sp>
@@ -2232,7 +2234,7 @@
           <a:p>
             <a:pPr lvl="0"/>
             <a:r>
-              <a:rPr lang="en-US"/>
+              <a:rPr lang="en-US" smtClean="0"/>
               <a:t>Click to edit Master text styles</a:t>
             </a:r>
           </a:p>
@@ -2255,7 +2257,7 @@
           <a:p>
             <a:fld id="{5BCAD085-E8A6-8845-BD4E-CB4CCA059FC4}" type="datetimeFigureOut">
               <a:rPr lang="en-US" smtClean="0"/>
-              <a:t>5/22/2026</a:t>
+              <a:t>1/27/13</a:t>
             </a:fld>
             <a:endParaRPr lang="en-US"/>
           </a:p>
@@ -2358,9 +2360,10 @@
           </a:lstStyle>
           <a:p>
             <a:r>
-              <a:rPr lang="en-US"/>
+              <a:rPr lang="en-US" smtClean="0"/>
               <a:t>Click to edit Master title style</a:t>
             </a:r>
+            <a:endParaRPr lang="en-US"/>
           </a:p>
         </p:txBody>
       </p:sp>
@@ -2484,7 +2487,7 @@
           <a:p>
             <a:pPr lvl="0"/>
             <a:r>
-              <a:rPr lang="en-US"/>
+              <a:rPr lang="en-US" smtClean="0"/>
               <a:t>Click to edit Master text styles</a:t>
             </a:r>
           </a:p>
@@ -2507,7 +2510,7 @@
           <a:p>
             <a:fld id="{5BCAD085-E8A6-8845-BD4E-CB4CCA059FC4}" type="datetimeFigureOut">
               <a:rPr lang="en-US" smtClean="0"/>
-              <a:t>5/22/2026</a:t>
+              <a:t>1/27/13</a:t>
             </a:fld>
             <a:endParaRPr lang="en-US"/>
           </a:p>
@@ -2616,9 +2619,10 @@
           <a:lstStyle/>
           <a:p>
             <a:r>
-              <a:rPr lang="en-US"/>
+              <a:rPr lang="en-US" smtClean="0"/>
               <a:t>Click to edit Master title style</a:t>
             </a:r>
+            <a:endParaRPr lang="en-US"/>
           </a:p>
         </p:txBody>
       </p:sp>
@@ -2649,37 +2653,38 @@
           <a:p>
             <a:pPr lvl="0"/>
             <a:r>
-              <a:rPr lang="en-US"/>
+              <a:rPr lang="en-US" smtClean="0"/>
               <a:t>Click to edit Master text styles</a:t>
             </a:r>
           </a:p>
           <a:p>
             <a:pPr lvl="1"/>
             <a:r>
-              <a:rPr lang="en-US"/>
+              <a:rPr lang="en-US" smtClean="0"/>
               <a:t>Second level</a:t>
             </a:r>
           </a:p>
           <a:p>
             <a:pPr lvl="2"/>
             <a:r>
-              <a:rPr lang="en-US"/>
+              <a:rPr lang="en-US" smtClean="0"/>
               <a:t>Third level</a:t>
             </a:r>
           </a:p>
           <a:p>
             <a:pPr lvl="3"/>
             <a:r>
-              <a:rPr lang="en-US"/>
+              <a:rPr lang="en-US" smtClean="0"/>
               <a:t>Fourth level</a:t>
             </a:r>
           </a:p>
           <a:p>
             <a:pPr lvl="4"/>
             <a:r>
-              <a:rPr lang="en-US"/>
+              <a:rPr lang="en-US" smtClean="0"/>
               <a:t>Fifth level</a:t>
             </a:r>
+            <a:endParaRPr lang="en-US"/>
           </a:p>
         </p:txBody>
       </p:sp>
@@ -2718,7 +2723,7 @@
           <a:p>
             <a:fld id="{5BCAD085-E8A6-8845-BD4E-CB4CCA059FC4}" type="datetimeFigureOut">
               <a:rPr lang="en-US" smtClean="0"/>
-              <a:t>5/22/2026</a:t>
+              <a:t>1/27/13</a:t>
             </a:fld>
             <a:endParaRPr lang="en-US"/>
           </a:p>
@@ -3077,7 +3082,7 @@
 </file>
 
 <file path=ppt/slides/slide1.xml><?xml version="1.0" encoding="utf-8"?>
-<p:sld xmlns:a="http://schemas.openxmlformats.org/drawingml/2006/main" xmlns:r="http://schemas.openxmlformats.org/officeDocument/2006/relationships" xmlns:p="http://schemas.openxmlformats.org/presentationml/2006/main">
+<p:sld xmlns:a="http://schemas.openxmlformats.org/drawingml/2006/main" xmlns:p="http://schemas.openxmlformats.org/presentationml/2006/main" xmlns:r="http://schemas.openxmlformats.org/officeDocument/2006/relationships">
   <p:cSld>
     <p:spTree>
       <p:nvGrpSpPr>
@@ -3085,14 +3090,7 @@
         <p:cNvGrpSpPr/>
         <p:nvPr/>
       </p:nvGrpSpPr>
-      <p:grpSpPr>
-        <a:xfrm>
-          <a:off x="0" y="0"/>
-          <a:ext cx="0" cy="0"/>
-          <a:chOff x="0" y="0"/>
-          <a:chExt cx="0" cy="0"/>
-        </a:xfrm>
-      </p:grpSpPr>
+      <p:grpSpPr/>
       <p:sp>
         <p:nvSpPr>
           <p:cNvPr id="2" name="TextBox 1"/>
@@ -3170,7 +3168,7 @@
 </file>
 
 <file path=ppt/slides/slide2.xml><?xml version="1.0" encoding="utf-8"?>
-<p:sld xmlns:a="http://schemas.openxmlformats.org/drawingml/2006/main" xmlns:r="http://schemas.openxmlformats.org/officeDocument/2006/relationships" xmlns:p="http://schemas.openxmlformats.org/presentationml/2006/main">
+<p:sld xmlns:a="http://schemas.openxmlformats.org/drawingml/2006/main" xmlns:p="http://schemas.openxmlformats.org/presentationml/2006/main" xmlns:r="http://schemas.openxmlformats.org/officeDocument/2006/relationships">
   <p:cSld>
     <p:spTree>
       <p:nvGrpSpPr>
@@ -3178,14 +3176,7 @@
         <p:cNvGrpSpPr/>
         <p:nvPr/>
       </p:nvGrpSpPr>
-      <p:grpSpPr>
-        <a:xfrm>
-          <a:off x="0" y="0"/>
-          <a:ext cx="0" cy="0"/>
-          <a:chOff x="0" y="0"/>
-          <a:chExt cx="0" cy="0"/>
-        </a:xfrm>
-      </p:grpSpPr>
+      <p:grpSpPr/>
       <p:sp>
         <p:nvSpPr>
           <p:cNvPr id="2" name="Rectangle 1"/>
@@ -3222,7 +3213,7 @@
           </a:fontRef>
         </p:style>
         <p:txBody>
-          <a:bodyPr lIns="182880" rIns="182880" rtlCol="0" anchor="ctr"/>
+          <a:bodyPr rtlCol="0" anchor="ctr" lIns="182880" rIns="182880"/>
           <a:lstStyle/>
           <a:p>
             <a:pPr algn="ctr"/>
@@ -3277,7 +3268,7 @@
           </a:fontRef>
         </p:style>
         <p:txBody>
-          <a:bodyPr lIns="45720" rIns="45720" rtlCol="0" anchor="ctr"/>
+          <a:bodyPr rtlCol="0" anchor="ctr" lIns="45720" rIns="45720"/>
           <a:lstStyle/>
           <a:p>
             <a:pPr algn="ctr"/>
@@ -3363,7 +3354,7 @@
           </a:fontRef>
         </p:style>
         <p:txBody>
-          <a:bodyPr lIns="45720" rIns="45720" rtlCol="0" anchor="ctr"/>
+          <a:bodyPr rtlCol="0" anchor="ctr" lIns="45720" rIns="45720"/>
           <a:lstStyle/>
           <a:p>
             <a:pPr algn="ctr"/>
@@ -3449,7 +3440,7 @@
           </a:fontRef>
         </p:style>
         <p:txBody>
-          <a:bodyPr lIns="45720" rIns="45720" rtlCol="0" anchor="ctr"/>
+          <a:bodyPr rtlCol="0" anchor="ctr" lIns="45720" rIns="45720"/>
           <a:lstStyle/>
           <a:p>
             <a:pPr algn="ctr"/>
@@ -3551,7 +3542,7 @@
           </a:fontRef>
         </p:style>
         <p:txBody>
-          <a:bodyPr lIns="45720" rIns="45720" rtlCol="0" anchor="ctr"/>
+          <a:bodyPr rtlCol="0" anchor="ctr" lIns="45720" rIns="45720"/>
           <a:lstStyle/>
           <a:p>
             <a:pPr algn="ctr"/>
@@ -3645,7 +3636,7 @@
           </a:fontRef>
         </p:style>
         <p:txBody>
-          <a:bodyPr lIns="45720" rIns="45720" rtlCol="0" anchor="ctr"/>
+          <a:bodyPr rtlCol="0" anchor="ctr" lIns="45720" rIns="45720"/>
           <a:lstStyle/>
           <a:p>
             <a:pPr algn="ctr"/>
@@ -3739,7 +3730,7 @@
           </a:fontRef>
         </p:style>
         <p:txBody>
-          <a:bodyPr lIns="45720" rIns="45720" rtlCol="0" anchor="ctr"/>
+          <a:bodyPr rtlCol="0" anchor="ctr" lIns="45720" rIns="45720"/>
           <a:lstStyle/>
           <a:p>
             <a:pPr algn="ctr"/>
@@ -3849,7 +3840,7 @@
           </a:fontRef>
         </p:style>
         <p:txBody>
-          <a:bodyPr lIns="45720" rIns="45720" rtlCol="0" anchor="ctr"/>
+          <a:bodyPr rtlCol="0" anchor="ctr" lIns="45720" rIns="45720"/>
           <a:lstStyle/>
           <a:p>
             <a:pPr algn="ctr"/>
@@ -3951,7 +3942,7 @@
           </a:fontRef>
         </p:style>
         <p:txBody>
-          <a:bodyPr lIns="45720" rIns="45720" rtlCol="0" anchor="ctr"/>
+          <a:bodyPr rtlCol="0" anchor="ctr" lIns="45720" rIns="45720"/>
           <a:lstStyle/>
           <a:p>
             <a:pPr algn="ctr"/>
@@ -4045,7 +4036,7 @@
           </a:fontRef>
         </p:style>
         <p:txBody>
-          <a:bodyPr lIns="45720" rIns="45720" rtlCol="0" anchor="ctr"/>
+          <a:bodyPr rtlCol="0" anchor="ctr" lIns="45720" rIns="45720"/>
           <a:lstStyle/>
           <a:p>
             <a:pPr algn="ctr"/>
@@ -4131,7 +4122,7 @@
           </a:fontRef>
         </p:style>
         <p:txBody>
-          <a:bodyPr lIns="45720" rIns="45720" rtlCol="0" anchor="ctr"/>
+          <a:bodyPr rtlCol="0" anchor="ctr" lIns="45720" rIns="45720"/>
           <a:lstStyle/>
           <a:p>
             <a:pPr algn="ctr"/>
@@ -4241,7 +4232,7 @@
           </a:fontRef>
         </p:style>
         <p:txBody>
-          <a:bodyPr lIns="45720" rIns="45720" rtlCol="0" anchor="ctr"/>
+          <a:bodyPr rtlCol="0" anchor="ctr" lIns="45720" rIns="45720"/>
           <a:lstStyle/>
           <a:p>
             <a:pPr algn="ctr"/>
@@ -4327,7 +4318,7 @@
           </a:fontRef>
         </p:style>
         <p:txBody>
-          <a:bodyPr lIns="45720" rIns="45720" rtlCol="0" anchor="ctr"/>
+          <a:bodyPr rtlCol="0" anchor="ctr" lIns="45720" rIns="45720"/>
           <a:lstStyle/>
           <a:p>
             <a:pPr algn="ctr"/>
@@ -4437,7 +4428,7 @@
           </a:fontRef>
         </p:style>
         <p:txBody>
-          <a:bodyPr lIns="45720" rIns="45720" rtlCol="0" anchor="ctr"/>
+          <a:bodyPr rtlCol="0" anchor="ctr" lIns="45720" rIns="45720"/>
           <a:lstStyle/>
           <a:p>
             <a:pPr algn="ctr"/>
@@ -4547,7 +4538,7 @@
           </a:fontRef>
         </p:style>
         <p:txBody>
-          <a:bodyPr lIns="45720" rIns="45720" rtlCol="0" anchor="ctr"/>
+          <a:bodyPr rtlCol="0" anchor="ctr" lIns="45720" rIns="45720"/>
           <a:lstStyle/>
           <a:p>
             <a:pPr algn="ctr"/>
@@ -4657,7 +4648,7 @@
           </a:fontRef>
         </p:style>
         <p:txBody>
-          <a:bodyPr lIns="45720" rIns="45720" rtlCol="0" anchor="ctr"/>
+          <a:bodyPr rtlCol="0" anchor="ctr" lIns="45720" rIns="45720"/>
           <a:lstStyle/>
           <a:p>
             <a:pPr algn="ctr"/>
@@ -4720,7 +4711,7 @@
 </file>
 
 <file path=ppt/slides/slide3.xml><?xml version="1.0" encoding="utf-8"?>
-<p:sld xmlns:a="http://schemas.openxmlformats.org/drawingml/2006/main" xmlns:r="http://schemas.openxmlformats.org/officeDocument/2006/relationships" xmlns:p="http://schemas.openxmlformats.org/presentationml/2006/main">
+<p:sld xmlns:a="http://schemas.openxmlformats.org/drawingml/2006/main" xmlns:p="http://schemas.openxmlformats.org/presentationml/2006/main" xmlns:r="http://schemas.openxmlformats.org/officeDocument/2006/relationships">
   <p:cSld>
     <p:spTree>
       <p:nvGrpSpPr>
@@ -4728,14 +4719,7 @@
         <p:cNvGrpSpPr/>
         <p:nvPr/>
       </p:nvGrpSpPr>
-      <p:grpSpPr>
-        <a:xfrm>
-          <a:off x="0" y="0"/>
-          <a:ext cx="0" cy="0"/>
-          <a:chOff x="0" y="0"/>
-          <a:chExt cx="0" cy="0"/>
-        </a:xfrm>
-      </p:grpSpPr>
+      <p:grpSpPr/>
       <p:sp>
         <p:nvSpPr>
           <p:cNvPr id="2" name="Rectangle 1"/>
@@ -4772,7 +4756,7 @@
           </a:fontRef>
         </p:style>
         <p:txBody>
-          <a:bodyPr lIns="182880" rIns="182880" rtlCol="0" anchor="ctr"/>
+          <a:bodyPr rtlCol="0" anchor="ctr" lIns="182880" rIns="182880"/>
           <a:lstStyle/>
           <a:p>
             <a:pPr algn="ctr"/>
@@ -4827,7 +4811,7 @@
           </a:fontRef>
         </p:style>
         <p:txBody>
-          <a:bodyPr lIns="45720" rIns="45720" rtlCol="0" anchor="ctr"/>
+          <a:bodyPr rtlCol="0" anchor="ctr" lIns="45720" rIns="45720"/>
           <a:lstStyle/>
           <a:p>
             <a:pPr algn="ctr"/>
@@ -4937,7 +4921,7 @@
           </a:fontRef>
         </p:style>
         <p:txBody>
-          <a:bodyPr lIns="45720" rIns="45720" rtlCol="0" anchor="ctr"/>
+          <a:bodyPr rtlCol="0" anchor="ctr" lIns="45720" rIns="45720"/>
           <a:lstStyle/>
           <a:p>
             <a:pPr algn="ctr"/>
@@ -5031,7 +5015,7 @@
           </a:fontRef>
         </p:style>
         <p:txBody>
-          <a:bodyPr lIns="45720" rIns="45720" rtlCol="0" anchor="ctr"/>
+          <a:bodyPr rtlCol="0" anchor="ctr" lIns="45720" rIns="45720"/>
           <a:lstStyle/>
           <a:p>
             <a:pPr algn="ctr"/>
@@ -5141,7 +5125,7 @@
           </a:fontRef>
         </p:style>
         <p:txBody>
-          <a:bodyPr lIns="45720" rIns="45720" rtlCol="0" anchor="ctr"/>
+          <a:bodyPr rtlCol="0" anchor="ctr" lIns="45720" rIns="45720"/>
           <a:lstStyle/>
           <a:p>
             <a:pPr algn="ctr"/>
@@ -5227,7 +5211,7 @@
           </a:fontRef>
         </p:style>
         <p:txBody>
-          <a:bodyPr lIns="45720" rIns="45720" rtlCol="0" anchor="ctr"/>
+          <a:bodyPr rtlCol="0" anchor="ctr" lIns="45720" rIns="45720"/>
           <a:lstStyle/>
           <a:p>
             <a:pPr algn="ctr"/>
@@ -5313,7 +5297,7 @@
           </a:fontRef>
         </p:style>
         <p:txBody>
-          <a:bodyPr lIns="45720" rIns="45720" rtlCol="0" anchor="ctr"/>
+          <a:bodyPr rtlCol="0" anchor="ctr" lIns="45720" rIns="45720"/>
           <a:lstStyle/>
           <a:p>
             <a:pPr algn="ctr"/>
@@ -5423,7 +5407,7 @@
           </a:fontRef>
         </p:style>
         <p:txBody>
-          <a:bodyPr lIns="45720" rIns="45720" rtlCol="0" anchor="ctr"/>
+          <a:bodyPr rtlCol="0" anchor="ctr" lIns="45720" rIns="45720"/>
           <a:lstStyle/>
           <a:p>
             <a:pPr algn="ctr"/>
@@ -5517,7 +5501,7 @@
           </a:fontRef>
         </p:style>
         <p:txBody>
-          <a:bodyPr lIns="45720" rIns="45720" rtlCol="0" anchor="ctr"/>
+          <a:bodyPr rtlCol="0" anchor="ctr" lIns="45720" rIns="45720"/>
           <a:lstStyle/>
           <a:p>
             <a:pPr algn="ctr"/>
@@ -5611,7 +5595,7 @@
           </a:fontRef>
         </p:style>
         <p:txBody>
-          <a:bodyPr lIns="45720" rIns="45720" rtlCol="0" anchor="ctr"/>
+          <a:bodyPr rtlCol="0" anchor="ctr" lIns="45720" rIns="45720"/>
           <a:lstStyle/>
           <a:p>
             <a:pPr algn="ctr"/>
@@ -5713,7 +5697,7 @@
           </a:fontRef>
         </p:style>
         <p:txBody>
-          <a:bodyPr lIns="45720" rIns="45720" rtlCol="0" anchor="ctr"/>
+          <a:bodyPr rtlCol="0" anchor="ctr" lIns="45720" rIns="45720"/>
           <a:lstStyle/>
           <a:p>
             <a:pPr algn="ctr"/>
@@ -5823,7 +5807,7 @@
           </a:fontRef>
         </p:style>
         <p:txBody>
-          <a:bodyPr lIns="45720" rIns="45720" rtlCol="0" anchor="ctr"/>
+          <a:bodyPr rtlCol="0" anchor="ctr" lIns="45720" rIns="45720"/>
           <a:lstStyle/>
           <a:p>
             <a:pPr algn="ctr"/>
@@ -5909,7 +5893,7 @@
           </a:fontRef>
         </p:style>
         <p:txBody>
-          <a:bodyPr lIns="45720" rIns="45720" rtlCol="0" anchor="ctr"/>
+          <a:bodyPr rtlCol="0" anchor="ctr" lIns="45720" rIns="45720"/>
           <a:lstStyle/>
           <a:p>
             <a:pPr algn="ctr"/>
@@ -5995,7 +5979,7 @@
           </a:fontRef>
         </p:style>
         <p:txBody>
-          <a:bodyPr lIns="45720" rIns="45720" rtlCol="0" anchor="ctr"/>
+          <a:bodyPr rtlCol="0" anchor="ctr" lIns="45720" rIns="45720"/>
           <a:lstStyle/>
           <a:p>
             <a:pPr algn="ctr"/>
@@ -6081,47 +6065,18 @@
           </a:fontRef>
         </p:style>
         <p:txBody>
-          <a:bodyPr lIns="45720" rIns="45720" rtlCol="0" anchor="ctr"/>
+          <a:bodyPr rtlCol="0" anchor="ctr" lIns="45720" rIns="45720"/>
           <a:lstStyle/>
           <a:p>
             <a:pPr algn="ctr"/>
             <a:r>
-              <a:rPr sz="900" dirty="0">
+              <a:rPr sz="900">
                 <a:solidFill>
                   <a:srgbClr val="1F3A5F"/>
                 </a:solidFill>
               </a:rPr>
-              <a:t>Gram 35: FR </a:t>
-            </a:r>
-            <a:r>
-              <a:rPr sz="900" dirty="0" err="1">
-                <a:solidFill>
-                  <a:srgbClr val="1F3A5F"/>
-                </a:solidFill>
-              </a:rPr>
-              <a:t>Tantive</a:t>
-            </a:r>
-            <a:r>
-              <a:rPr sz="900" dirty="0">
-                <a:solidFill>
-                  <a:srgbClr val="1F3A5F"/>
-                </a:solidFill>
-              </a:rPr>
-              <a:t> IV, Category 4, Romulus</a:t>
-            </a:r>
-            <a:r>
-              <a:rPr lang="en-GB" sz="900" dirty="0">
-                <a:solidFill>
-                  <a:srgbClr val="1F3A5F"/>
-                </a:solidFill>
-              </a:rPr>
-              <a:t> [-own]</a:t>
-            </a:r>
-            <a:endParaRPr sz="900" dirty="0">
-              <a:solidFill>
-                <a:srgbClr val="1F3A5F"/>
-              </a:solidFill>
-            </a:endParaRPr>
+              <a:t>Gram 35: FR Tantive IV, Category 4, Romulus</a:t>
+            </a:r>
           </a:p>
         </p:txBody>
       </p:sp>
@@ -6220,39 +6175,18 @@
           </a:fontRef>
         </p:style>
         <p:txBody>
-          <a:bodyPr lIns="45720" rIns="45720" rtlCol="0" anchor="ctr"/>
+          <a:bodyPr rtlCol="0" anchor="ctr" lIns="45720" rIns="45720"/>
           <a:lstStyle/>
           <a:p>
             <a:pPr algn="ctr"/>
             <a:r>
-              <a:rPr sz="900" dirty="0">
+              <a:rPr sz="900">
                 <a:solidFill>
                   <a:srgbClr val="1F3A5F"/>
                 </a:solidFill>
               </a:rPr>
-              <a:t>Gram 36: Equinox contact bearing 209, codename </a:t>
-            </a:r>
-            <a:r>
-              <a:rPr sz="900" dirty="0" err="1">
-                <a:solidFill>
-                  <a:srgbClr val="1F3A5F"/>
-                </a:solidFill>
-              </a:rPr>
-              <a:t>Kobol</a:t>
-            </a:r>
-            <a:r>
-              <a:rPr lang="en-GB" sz="900" dirty="0">
-                <a:solidFill>
-                  <a:srgbClr val="1F3A5F"/>
-                </a:solidFill>
-              </a:rPr>
-              <a:t> [-other]</a:t>
-            </a:r>
-            <a:endParaRPr sz="900" dirty="0">
-              <a:solidFill>
-                <a:srgbClr val="1F3A5F"/>
-              </a:solidFill>
-            </a:endParaRPr>
+              <a:t>Gram 36: Equinox contact bearing 209, codename Kobol</a:t>
+            </a:r>
           </a:p>
         </p:txBody>
       </p:sp>
@@ -6312,7 +6246,7 @@
 </file>
 
 <file path=ppt/slides/slide4.xml><?xml version="1.0" encoding="utf-8"?>
-<p:sld xmlns:a="http://schemas.openxmlformats.org/drawingml/2006/main" xmlns:r="http://schemas.openxmlformats.org/officeDocument/2006/relationships" xmlns:p="http://schemas.openxmlformats.org/presentationml/2006/main">
+<p:sld xmlns:a="http://schemas.openxmlformats.org/drawingml/2006/main" xmlns:p="http://schemas.openxmlformats.org/presentationml/2006/main" xmlns:r="http://schemas.openxmlformats.org/officeDocument/2006/relationships">
   <p:cSld>
     <p:spTree>
       <p:nvGrpSpPr>
@@ -6320,14 +6254,7 @@
         <p:cNvGrpSpPr/>
         <p:nvPr/>
       </p:nvGrpSpPr>
-      <p:grpSpPr>
-        <a:xfrm>
-          <a:off x="0" y="0"/>
-          <a:ext cx="0" cy="0"/>
-          <a:chOff x="0" y="0"/>
-          <a:chExt cx="0" cy="0"/>
-        </a:xfrm>
-      </p:grpSpPr>
+      <p:grpSpPr/>
       <p:sp>
         <p:nvSpPr>
           <p:cNvPr id="2" name="TextBox 1"/>
